--- a/overview.pptx
+++ b/overview.pptx
@@ -1,13 +1,13 @@
 
 <file path=ppt/presentation.xml><?xml version="1.0" encoding="utf-8"?>
-<p:presentation xmlns:a="http://schemas.openxmlformats.org/drawingml/2006/main" xmlns:r="http://schemas.openxmlformats.org/officeDocument/2006/relationships" xmlns:p="http://schemas.openxmlformats.org/presentationml/2006/main" saveSubsetFonts="1">
+<p:presentation xmlns:a="http://schemas.openxmlformats.org/drawingml/2006/main" xmlns:r="http://schemas.openxmlformats.org/officeDocument/2006/relationships" xmlns:p="http://schemas.openxmlformats.org/presentationml/2006/main">
   <p:sldMasterIdLst>
     <p:sldMasterId id="2147483648" r:id="rId1"/>
   </p:sldMasterIdLst>
   <p:sldIdLst>
-    <p:sldId id="256" r:id="rId2"/>
-    <p:sldId id="257" r:id="rId3"/>
-    <p:sldId id="258" r:id="rId4"/>
+    <p:sldId id="256" r:id="rId3"/>
+    <p:sldId id="257" r:id="rId4"/>
+    <p:sldId id="258" r:id="rId5"/>
   </p:sldIdLst>
   <p:sldSz cx="12192000" cy="6858000"/>
   <p:notesSz cx="6858000" cy="9144000"/>
@@ -106,11 +106,6 @@
       </a:defRPr>
     </a:lvl9pPr>
   </p:defaultTextStyle>
-  <p:extLst>
-    <p:ext uri="{EFAFB233-063F-42B5-8137-9DF3F51BA10A}">
-      <p15:sldGuideLst xmlns:p15="http://schemas.microsoft.com/office/powerpoint/2012/main"/>
-    </p:ext>
-  </p:extLst>
 </p:presentation>
 </file>
 
@@ -159,6 +154,7 @@
               <a:rPr lang="zh-CN" altLang="en-US"/>
               <a:t>单击此处编辑母版标题样式</a:t>
             </a:r>
+            <a:endParaRPr lang="zh-CN" altLang="en-US"/>
           </a:p>
         </p:txBody>
       </p:sp>
@@ -223,6 +219,7 @@
               <a:rPr lang="zh-CN" altLang="en-US"/>
               <a:t>单击此处编辑母版副标题样式</a:t>
             </a:r>
+            <a:endParaRPr lang="zh-CN" altLang="en-US"/>
           </a:p>
         </p:txBody>
       </p:sp>
@@ -243,7 +240,6 @@
           <a:p>
             <a:fld id="{D997B5FA-0921-464F-AAE1-844C04324D75}" type="datetimeFigureOut">
               <a:rPr lang="zh-CN" altLang="en-US" smtClean="0"/>
-              <a:t>2026/4/6</a:t>
             </a:fld>
             <a:endParaRPr lang="zh-CN" altLang="en-US"/>
           </a:p>
@@ -285,18 +281,12 @@
           <a:p>
             <a:fld id="{565CE74E-AB26-4998-AD42-012C4C1AD076}" type="slidenum">
               <a:rPr lang="zh-CN" altLang="en-US" smtClean="0"/>
-              <a:t>‹#›</a:t>
             </a:fld>
             <a:endParaRPr lang="zh-CN" altLang="en-US"/>
           </a:p>
         </p:txBody>
       </p:sp>
     </p:spTree>
-    <p:extLst>
-      <p:ext uri="{BB962C8B-B14F-4D97-AF65-F5344CB8AC3E}">
-        <p14:creationId xmlns:p14="http://schemas.microsoft.com/office/powerpoint/2010/main" val="3051827620"/>
-      </p:ext>
-    </p:extLst>
   </p:cSld>
   <p:clrMapOvr>
     <a:masterClrMapping/>
@@ -340,6 +330,7 @@
               <a:rPr lang="zh-CN" altLang="en-US"/>
               <a:t>单击此处编辑母版标题样式</a:t>
             </a:r>
+            <a:endParaRPr lang="zh-CN" altLang="en-US"/>
           </a:p>
         </p:txBody>
       </p:sp>
@@ -363,6 +354,7 @@
               <a:rPr lang="zh-CN" altLang="en-US"/>
               <a:t>单击此处编辑母版文本样式</a:t>
             </a:r>
+            <a:endParaRPr lang="zh-CN" altLang="en-US"/>
           </a:p>
           <a:p>
             <a:pPr lvl="1"/>
@@ -370,6 +362,7 @@
               <a:rPr lang="zh-CN" altLang="en-US"/>
               <a:t>第二级</a:t>
             </a:r>
+            <a:endParaRPr lang="zh-CN" altLang="en-US"/>
           </a:p>
           <a:p>
             <a:pPr lvl="2"/>
@@ -377,6 +370,7 @@
               <a:rPr lang="zh-CN" altLang="en-US"/>
               <a:t>第三级</a:t>
             </a:r>
+            <a:endParaRPr lang="zh-CN" altLang="en-US"/>
           </a:p>
           <a:p>
             <a:pPr lvl="3"/>
@@ -384,6 +378,7 @@
               <a:rPr lang="zh-CN" altLang="en-US"/>
               <a:t>第四级</a:t>
             </a:r>
+            <a:endParaRPr lang="zh-CN" altLang="en-US"/>
           </a:p>
           <a:p>
             <a:pPr lvl="4"/>
@@ -391,6 +386,7 @@
               <a:rPr lang="zh-CN" altLang="en-US"/>
               <a:t>第五级</a:t>
             </a:r>
+            <a:endParaRPr lang="zh-CN" altLang="en-US"/>
           </a:p>
         </p:txBody>
       </p:sp>
@@ -411,7 +407,6 @@
           <a:p>
             <a:fld id="{D997B5FA-0921-464F-AAE1-844C04324D75}" type="datetimeFigureOut">
               <a:rPr lang="zh-CN" altLang="en-US" smtClean="0"/>
-              <a:t>2026/4/6</a:t>
             </a:fld>
             <a:endParaRPr lang="zh-CN" altLang="en-US"/>
           </a:p>
@@ -453,18 +448,12 @@
           <a:p>
             <a:fld id="{565CE74E-AB26-4998-AD42-012C4C1AD076}" type="slidenum">
               <a:rPr lang="zh-CN" altLang="en-US" smtClean="0"/>
-              <a:t>‹#›</a:t>
             </a:fld>
             <a:endParaRPr lang="zh-CN" altLang="en-US"/>
           </a:p>
         </p:txBody>
       </p:sp>
     </p:spTree>
-    <p:extLst>
-      <p:ext uri="{BB962C8B-B14F-4D97-AF65-F5344CB8AC3E}">
-        <p14:creationId xmlns:p14="http://schemas.microsoft.com/office/powerpoint/2010/main" val="3188717747"/>
-      </p:ext>
-    </p:extLst>
   </p:cSld>
   <p:clrMapOvr>
     <a:masterClrMapping/>
@@ -513,6 +502,7 @@
               <a:rPr lang="zh-CN" altLang="en-US"/>
               <a:t>单击此处编辑母版标题样式</a:t>
             </a:r>
+            <a:endParaRPr lang="zh-CN" altLang="en-US"/>
           </a:p>
         </p:txBody>
       </p:sp>
@@ -541,6 +531,7 @@
               <a:rPr lang="zh-CN" altLang="en-US"/>
               <a:t>单击此处编辑母版文本样式</a:t>
             </a:r>
+            <a:endParaRPr lang="zh-CN" altLang="en-US"/>
           </a:p>
           <a:p>
             <a:pPr lvl="1"/>
@@ -548,6 +539,7 @@
               <a:rPr lang="zh-CN" altLang="en-US"/>
               <a:t>第二级</a:t>
             </a:r>
+            <a:endParaRPr lang="zh-CN" altLang="en-US"/>
           </a:p>
           <a:p>
             <a:pPr lvl="2"/>
@@ -555,6 +547,7 @@
               <a:rPr lang="zh-CN" altLang="en-US"/>
               <a:t>第三级</a:t>
             </a:r>
+            <a:endParaRPr lang="zh-CN" altLang="en-US"/>
           </a:p>
           <a:p>
             <a:pPr lvl="3"/>
@@ -562,6 +555,7 @@
               <a:rPr lang="zh-CN" altLang="en-US"/>
               <a:t>第四级</a:t>
             </a:r>
+            <a:endParaRPr lang="zh-CN" altLang="en-US"/>
           </a:p>
           <a:p>
             <a:pPr lvl="4"/>
@@ -569,6 +563,7 @@
               <a:rPr lang="zh-CN" altLang="en-US"/>
               <a:t>第五级</a:t>
             </a:r>
+            <a:endParaRPr lang="zh-CN" altLang="en-US"/>
           </a:p>
         </p:txBody>
       </p:sp>
@@ -589,7 +584,6 @@
           <a:p>
             <a:fld id="{D997B5FA-0921-464F-AAE1-844C04324D75}" type="datetimeFigureOut">
               <a:rPr lang="zh-CN" altLang="en-US" smtClean="0"/>
-              <a:t>2026/4/6</a:t>
             </a:fld>
             <a:endParaRPr lang="zh-CN" altLang="en-US"/>
           </a:p>
@@ -631,18 +625,12 @@
           <a:p>
             <a:fld id="{565CE74E-AB26-4998-AD42-012C4C1AD076}" type="slidenum">
               <a:rPr lang="zh-CN" altLang="en-US" smtClean="0"/>
-              <a:t>‹#›</a:t>
             </a:fld>
             <a:endParaRPr lang="zh-CN" altLang="en-US"/>
           </a:p>
         </p:txBody>
       </p:sp>
     </p:spTree>
-    <p:extLst>
-      <p:ext uri="{BB962C8B-B14F-4D97-AF65-F5344CB8AC3E}">
-        <p14:creationId xmlns:p14="http://schemas.microsoft.com/office/powerpoint/2010/main" val="4025501431"/>
-      </p:ext>
-    </p:extLst>
   </p:cSld>
   <p:clrMapOvr>
     <a:masterClrMapping/>
@@ -686,6 +674,7 @@
               <a:rPr lang="zh-CN" altLang="en-US"/>
               <a:t>单击此处编辑母版标题样式</a:t>
             </a:r>
+            <a:endParaRPr lang="zh-CN" altLang="en-US"/>
           </a:p>
         </p:txBody>
       </p:sp>
@@ -709,6 +698,7 @@
               <a:rPr lang="zh-CN" altLang="en-US"/>
               <a:t>单击此处编辑母版文本样式</a:t>
             </a:r>
+            <a:endParaRPr lang="zh-CN" altLang="en-US"/>
           </a:p>
           <a:p>
             <a:pPr lvl="1"/>
@@ -716,6 +706,7 @@
               <a:rPr lang="zh-CN" altLang="en-US"/>
               <a:t>第二级</a:t>
             </a:r>
+            <a:endParaRPr lang="zh-CN" altLang="en-US"/>
           </a:p>
           <a:p>
             <a:pPr lvl="2"/>
@@ -723,6 +714,7 @@
               <a:rPr lang="zh-CN" altLang="en-US"/>
               <a:t>第三级</a:t>
             </a:r>
+            <a:endParaRPr lang="zh-CN" altLang="en-US"/>
           </a:p>
           <a:p>
             <a:pPr lvl="3"/>
@@ -730,6 +722,7 @@
               <a:rPr lang="zh-CN" altLang="en-US"/>
               <a:t>第四级</a:t>
             </a:r>
+            <a:endParaRPr lang="zh-CN" altLang="en-US"/>
           </a:p>
           <a:p>
             <a:pPr lvl="4"/>
@@ -737,6 +730,7 @@
               <a:rPr lang="zh-CN" altLang="en-US"/>
               <a:t>第五级</a:t>
             </a:r>
+            <a:endParaRPr lang="zh-CN" altLang="en-US"/>
           </a:p>
         </p:txBody>
       </p:sp>
@@ -757,7 +751,6 @@
           <a:p>
             <a:fld id="{D997B5FA-0921-464F-AAE1-844C04324D75}" type="datetimeFigureOut">
               <a:rPr lang="zh-CN" altLang="en-US" smtClean="0"/>
-              <a:t>2026/4/6</a:t>
             </a:fld>
             <a:endParaRPr lang="zh-CN" altLang="en-US"/>
           </a:p>
@@ -799,18 +792,12 @@
           <a:p>
             <a:fld id="{565CE74E-AB26-4998-AD42-012C4C1AD076}" type="slidenum">
               <a:rPr lang="zh-CN" altLang="en-US" smtClean="0"/>
-              <a:t>‹#›</a:t>
             </a:fld>
             <a:endParaRPr lang="zh-CN" altLang="en-US"/>
           </a:p>
         </p:txBody>
       </p:sp>
     </p:spTree>
-    <p:extLst>
-      <p:ext uri="{BB962C8B-B14F-4D97-AF65-F5344CB8AC3E}">
-        <p14:creationId xmlns:p14="http://schemas.microsoft.com/office/powerpoint/2010/main" val="598653943"/>
-      </p:ext>
-    </p:extLst>
   </p:cSld>
   <p:clrMapOvr>
     <a:masterClrMapping/>
@@ -863,6 +850,7 @@
               <a:rPr lang="zh-CN" altLang="en-US"/>
               <a:t>单击此处编辑母版标题样式</a:t>
             </a:r>
+            <a:endParaRPr lang="zh-CN" altLang="en-US"/>
           </a:p>
         </p:txBody>
       </p:sp>
@@ -982,6 +970,7 @@
               <a:rPr lang="zh-CN" altLang="en-US"/>
               <a:t>单击此处编辑母版文本样式</a:t>
             </a:r>
+            <a:endParaRPr lang="zh-CN" altLang="en-US"/>
           </a:p>
         </p:txBody>
       </p:sp>
@@ -1002,7 +991,6 @@
           <a:p>
             <a:fld id="{D997B5FA-0921-464F-AAE1-844C04324D75}" type="datetimeFigureOut">
               <a:rPr lang="zh-CN" altLang="en-US" smtClean="0"/>
-              <a:t>2026/4/6</a:t>
             </a:fld>
             <a:endParaRPr lang="zh-CN" altLang="en-US"/>
           </a:p>
@@ -1044,18 +1032,12 @@
           <a:p>
             <a:fld id="{565CE74E-AB26-4998-AD42-012C4C1AD076}" type="slidenum">
               <a:rPr lang="zh-CN" altLang="en-US" smtClean="0"/>
-              <a:t>‹#›</a:t>
             </a:fld>
             <a:endParaRPr lang="zh-CN" altLang="en-US"/>
           </a:p>
         </p:txBody>
       </p:sp>
     </p:spTree>
-    <p:extLst>
-      <p:ext uri="{BB962C8B-B14F-4D97-AF65-F5344CB8AC3E}">
-        <p14:creationId xmlns:p14="http://schemas.microsoft.com/office/powerpoint/2010/main" val="1612184157"/>
-      </p:ext>
-    </p:extLst>
   </p:cSld>
   <p:clrMapOvr>
     <a:masterClrMapping/>
@@ -1099,6 +1081,7 @@
               <a:rPr lang="zh-CN" altLang="en-US"/>
               <a:t>单击此处编辑母版标题样式</a:t>
             </a:r>
+            <a:endParaRPr lang="zh-CN" altLang="en-US"/>
           </a:p>
         </p:txBody>
       </p:sp>
@@ -1127,6 +1110,7 @@
               <a:rPr lang="zh-CN" altLang="en-US"/>
               <a:t>单击此处编辑母版文本样式</a:t>
             </a:r>
+            <a:endParaRPr lang="zh-CN" altLang="en-US"/>
           </a:p>
           <a:p>
             <a:pPr lvl="1"/>
@@ -1134,6 +1118,7 @@
               <a:rPr lang="zh-CN" altLang="en-US"/>
               <a:t>第二级</a:t>
             </a:r>
+            <a:endParaRPr lang="zh-CN" altLang="en-US"/>
           </a:p>
           <a:p>
             <a:pPr lvl="2"/>
@@ -1141,6 +1126,7 @@
               <a:rPr lang="zh-CN" altLang="en-US"/>
               <a:t>第三级</a:t>
             </a:r>
+            <a:endParaRPr lang="zh-CN" altLang="en-US"/>
           </a:p>
           <a:p>
             <a:pPr lvl="3"/>
@@ -1148,6 +1134,7 @@
               <a:rPr lang="zh-CN" altLang="en-US"/>
               <a:t>第四级</a:t>
             </a:r>
+            <a:endParaRPr lang="zh-CN" altLang="en-US"/>
           </a:p>
           <a:p>
             <a:pPr lvl="4"/>
@@ -1155,6 +1142,7 @@
               <a:rPr lang="zh-CN" altLang="en-US"/>
               <a:t>第五级</a:t>
             </a:r>
+            <a:endParaRPr lang="zh-CN" altLang="en-US"/>
           </a:p>
         </p:txBody>
       </p:sp>
@@ -1183,6 +1171,7 @@
               <a:rPr lang="zh-CN" altLang="en-US"/>
               <a:t>单击此处编辑母版文本样式</a:t>
             </a:r>
+            <a:endParaRPr lang="zh-CN" altLang="en-US"/>
           </a:p>
           <a:p>
             <a:pPr lvl="1"/>
@@ -1190,6 +1179,7 @@
               <a:rPr lang="zh-CN" altLang="en-US"/>
               <a:t>第二级</a:t>
             </a:r>
+            <a:endParaRPr lang="zh-CN" altLang="en-US"/>
           </a:p>
           <a:p>
             <a:pPr lvl="2"/>
@@ -1197,6 +1187,7 @@
               <a:rPr lang="zh-CN" altLang="en-US"/>
               <a:t>第三级</a:t>
             </a:r>
+            <a:endParaRPr lang="zh-CN" altLang="en-US"/>
           </a:p>
           <a:p>
             <a:pPr lvl="3"/>
@@ -1204,6 +1195,7 @@
               <a:rPr lang="zh-CN" altLang="en-US"/>
               <a:t>第四级</a:t>
             </a:r>
+            <a:endParaRPr lang="zh-CN" altLang="en-US"/>
           </a:p>
           <a:p>
             <a:pPr lvl="4"/>
@@ -1211,6 +1203,7 @@
               <a:rPr lang="zh-CN" altLang="en-US"/>
               <a:t>第五级</a:t>
             </a:r>
+            <a:endParaRPr lang="zh-CN" altLang="en-US"/>
           </a:p>
         </p:txBody>
       </p:sp>
@@ -1231,7 +1224,6 @@
           <a:p>
             <a:fld id="{D997B5FA-0921-464F-AAE1-844C04324D75}" type="datetimeFigureOut">
               <a:rPr lang="zh-CN" altLang="en-US" smtClean="0"/>
-              <a:t>2026/4/6</a:t>
             </a:fld>
             <a:endParaRPr lang="zh-CN" altLang="en-US"/>
           </a:p>
@@ -1273,18 +1265,12 @@
           <a:p>
             <a:fld id="{565CE74E-AB26-4998-AD42-012C4C1AD076}" type="slidenum">
               <a:rPr lang="zh-CN" altLang="en-US" smtClean="0"/>
-              <a:t>‹#›</a:t>
             </a:fld>
             <a:endParaRPr lang="zh-CN" altLang="en-US"/>
           </a:p>
         </p:txBody>
       </p:sp>
     </p:spTree>
-    <p:extLst>
-      <p:ext uri="{BB962C8B-B14F-4D97-AF65-F5344CB8AC3E}">
-        <p14:creationId xmlns:p14="http://schemas.microsoft.com/office/powerpoint/2010/main" val="2905825717"/>
-      </p:ext>
-    </p:extLst>
   </p:cSld>
   <p:clrMapOvr>
     <a:masterClrMapping/>
@@ -1333,6 +1319,7 @@
               <a:rPr lang="zh-CN" altLang="en-US"/>
               <a:t>单击此处编辑母版标题样式</a:t>
             </a:r>
+            <a:endParaRPr lang="zh-CN" altLang="en-US"/>
           </a:p>
         </p:txBody>
       </p:sp>
@@ -1398,6 +1385,7 @@
               <a:rPr lang="zh-CN" altLang="en-US"/>
               <a:t>单击此处编辑母版文本样式</a:t>
             </a:r>
+            <a:endParaRPr lang="zh-CN" altLang="en-US"/>
           </a:p>
         </p:txBody>
       </p:sp>
@@ -1426,6 +1414,7 @@
               <a:rPr lang="zh-CN" altLang="en-US"/>
               <a:t>单击此处编辑母版文本样式</a:t>
             </a:r>
+            <a:endParaRPr lang="zh-CN" altLang="en-US"/>
           </a:p>
           <a:p>
             <a:pPr lvl="1"/>
@@ -1433,6 +1422,7 @@
               <a:rPr lang="zh-CN" altLang="en-US"/>
               <a:t>第二级</a:t>
             </a:r>
+            <a:endParaRPr lang="zh-CN" altLang="en-US"/>
           </a:p>
           <a:p>
             <a:pPr lvl="2"/>
@@ -1440,6 +1430,7 @@
               <a:rPr lang="zh-CN" altLang="en-US"/>
               <a:t>第三级</a:t>
             </a:r>
+            <a:endParaRPr lang="zh-CN" altLang="en-US"/>
           </a:p>
           <a:p>
             <a:pPr lvl="3"/>
@@ -1447,6 +1438,7 @@
               <a:rPr lang="zh-CN" altLang="en-US"/>
               <a:t>第四级</a:t>
             </a:r>
+            <a:endParaRPr lang="zh-CN" altLang="en-US"/>
           </a:p>
           <a:p>
             <a:pPr lvl="4"/>
@@ -1454,6 +1446,7 @@
               <a:rPr lang="zh-CN" altLang="en-US"/>
               <a:t>第五级</a:t>
             </a:r>
+            <a:endParaRPr lang="zh-CN" altLang="en-US"/>
           </a:p>
         </p:txBody>
       </p:sp>
@@ -1519,6 +1512,7 @@
               <a:rPr lang="zh-CN" altLang="en-US"/>
               <a:t>单击此处编辑母版文本样式</a:t>
             </a:r>
+            <a:endParaRPr lang="zh-CN" altLang="en-US"/>
           </a:p>
         </p:txBody>
       </p:sp>
@@ -1547,6 +1541,7 @@
               <a:rPr lang="zh-CN" altLang="en-US"/>
               <a:t>单击此处编辑母版文本样式</a:t>
             </a:r>
+            <a:endParaRPr lang="zh-CN" altLang="en-US"/>
           </a:p>
           <a:p>
             <a:pPr lvl="1"/>
@@ -1554,6 +1549,7 @@
               <a:rPr lang="zh-CN" altLang="en-US"/>
               <a:t>第二级</a:t>
             </a:r>
+            <a:endParaRPr lang="zh-CN" altLang="en-US"/>
           </a:p>
           <a:p>
             <a:pPr lvl="2"/>
@@ -1561,6 +1557,7 @@
               <a:rPr lang="zh-CN" altLang="en-US"/>
               <a:t>第三级</a:t>
             </a:r>
+            <a:endParaRPr lang="zh-CN" altLang="en-US"/>
           </a:p>
           <a:p>
             <a:pPr lvl="3"/>
@@ -1568,6 +1565,7 @@
               <a:rPr lang="zh-CN" altLang="en-US"/>
               <a:t>第四级</a:t>
             </a:r>
+            <a:endParaRPr lang="zh-CN" altLang="en-US"/>
           </a:p>
           <a:p>
             <a:pPr lvl="4"/>
@@ -1575,6 +1573,7 @@
               <a:rPr lang="zh-CN" altLang="en-US"/>
               <a:t>第五级</a:t>
             </a:r>
+            <a:endParaRPr lang="zh-CN" altLang="en-US"/>
           </a:p>
         </p:txBody>
       </p:sp>
@@ -1595,7 +1594,6 @@
           <a:p>
             <a:fld id="{D997B5FA-0921-464F-AAE1-844C04324D75}" type="datetimeFigureOut">
               <a:rPr lang="zh-CN" altLang="en-US" smtClean="0"/>
-              <a:t>2026/4/6</a:t>
             </a:fld>
             <a:endParaRPr lang="zh-CN" altLang="en-US"/>
           </a:p>
@@ -1637,18 +1635,12 @@
           <a:p>
             <a:fld id="{565CE74E-AB26-4998-AD42-012C4C1AD076}" type="slidenum">
               <a:rPr lang="zh-CN" altLang="en-US" smtClean="0"/>
-              <a:t>‹#›</a:t>
             </a:fld>
             <a:endParaRPr lang="zh-CN" altLang="en-US"/>
           </a:p>
         </p:txBody>
       </p:sp>
     </p:spTree>
-    <p:extLst>
-      <p:ext uri="{BB962C8B-B14F-4D97-AF65-F5344CB8AC3E}">
-        <p14:creationId xmlns:p14="http://schemas.microsoft.com/office/powerpoint/2010/main" val="168117047"/>
-      </p:ext>
-    </p:extLst>
   </p:cSld>
   <p:clrMapOvr>
     <a:masterClrMapping/>
@@ -1692,6 +1684,7 @@
               <a:rPr lang="zh-CN" altLang="en-US"/>
               <a:t>单击此处编辑母版标题样式</a:t>
             </a:r>
+            <a:endParaRPr lang="zh-CN" altLang="en-US"/>
           </a:p>
         </p:txBody>
       </p:sp>
@@ -1712,7 +1705,6 @@
           <a:p>
             <a:fld id="{D997B5FA-0921-464F-AAE1-844C04324D75}" type="datetimeFigureOut">
               <a:rPr lang="zh-CN" altLang="en-US" smtClean="0"/>
-              <a:t>2026/4/6</a:t>
             </a:fld>
             <a:endParaRPr lang="zh-CN" altLang="en-US"/>
           </a:p>
@@ -1754,18 +1746,12 @@
           <a:p>
             <a:fld id="{565CE74E-AB26-4998-AD42-012C4C1AD076}" type="slidenum">
               <a:rPr lang="zh-CN" altLang="en-US" smtClean="0"/>
-              <a:t>‹#›</a:t>
             </a:fld>
             <a:endParaRPr lang="zh-CN" altLang="en-US"/>
           </a:p>
         </p:txBody>
       </p:sp>
     </p:spTree>
-    <p:extLst>
-      <p:ext uri="{BB962C8B-B14F-4D97-AF65-F5344CB8AC3E}">
-        <p14:creationId xmlns:p14="http://schemas.microsoft.com/office/powerpoint/2010/main" val="2764406021"/>
-      </p:ext>
-    </p:extLst>
   </p:cSld>
   <p:clrMapOvr>
     <a:masterClrMapping/>
@@ -1807,7 +1793,6 @@
           <a:p>
             <a:fld id="{D997B5FA-0921-464F-AAE1-844C04324D75}" type="datetimeFigureOut">
               <a:rPr lang="zh-CN" altLang="en-US" smtClean="0"/>
-              <a:t>2026/4/6</a:t>
             </a:fld>
             <a:endParaRPr lang="zh-CN" altLang="en-US"/>
           </a:p>
@@ -1849,18 +1834,12 @@
           <a:p>
             <a:fld id="{565CE74E-AB26-4998-AD42-012C4C1AD076}" type="slidenum">
               <a:rPr lang="zh-CN" altLang="en-US" smtClean="0"/>
-              <a:t>‹#›</a:t>
             </a:fld>
             <a:endParaRPr lang="zh-CN" altLang="en-US"/>
           </a:p>
         </p:txBody>
       </p:sp>
     </p:spTree>
-    <p:extLst>
-      <p:ext uri="{BB962C8B-B14F-4D97-AF65-F5344CB8AC3E}">
-        <p14:creationId xmlns:p14="http://schemas.microsoft.com/office/powerpoint/2010/main" val="276523006"/>
-      </p:ext>
-    </p:extLst>
   </p:cSld>
   <p:clrMapOvr>
     <a:masterClrMapping/>
@@ -1913,6 +1892,7 @@
               <a:rPr lang="zh-CN" altLang="en-US"/>
               <a:t>单击此处编辑母版标题样式</a:t>
             </a:r>
+            <a:endParaRPr lang="zh-CN" altLang="en-US"/>
           </a:p>
         </p:txBody>
       </p:sp>
@@ -1969,6 +1949,7 @@
               <a:rPr lang="zh-CN" altLang="en-US"/>
               <a:t>单击此处编辑母版文本样式</a:t>
             </a:r>
+            <a:endParaRPr lang="zh-CN" altLang="en-US"/>
           </a:p>
           <a:p>
             <a:pPr lvl="1"/>
@@ -1976,6 +1957,7 @@
               <a:rPr lang="zh-CN" altLang="en-US"/>
               <a:t>第二级</a:t>
             </a:r>
+            <a:endParaRPr lang="zh-CN" altLang="en-US"/>
           </a:p>
           <a:p>
             <a:pPr lvl="2"/>
@@ -1983,6 +1965,7 @@
               <a:rPr lang="zh-CN" altLang="en-US"/>
               <a:t>第三级</a:t>
             </a:r>
+            <a:endParaRPr lang="zh-CN" altLang="en-US"/>
           </a:p>
           <a:p>
             <a:pPr lvl="3"/>
@@ -1990,6 +1973,7 @@
               <a:rPr lang="zh-CN" altLang="en-US"/>
               <a:t>第四级</a:t>
             </a:r>
+            <a:endParaRPr lang="zh-CN" altLang="en-US"/>
           </a:p>
           <a:p>
             <a:pPr lvl="4"/>
@@ -1997,6 +1981,7 @@
               <a:rPr lang="zh-CN" altLang="en-US"/>
               <a:t>第五级</a:t>
             </a:r>
+            <a:endParaRPr lang="zh-CN" altLang="en-US"/>
           </a:p>
         </p:txBody>
       </p:sp>
@@ -2062,6 +2047,7 @@
               <a:rPr lang="zh-CN" altLang="en-US"/>
               <a:t>单击此处编辑母版文本样式</a:t>
             </a:r>
+            <a:endParaRPr lang="zh-CN" altLang="en-US"/>
           </a:p>
         </p:txBody>
       </p:sp>
@@ -2082,7 +2068,6 @@
           <a:p>
             <a:fld id="{D997B5FA-0921-464F-AAE1-844C04324D75}" type="datetimeFigureOut">
               <a:rPr lang="zh-CN" altLang="en-US" smtClean="0"/>
-              <a:t>2026/4/6</a:t>
             </a:fld>
             <a:endParaRPr lang="zh-CN" altLang="en-US"/>
           </a:p>
@@ -2124,18 +2109,12 @@
           <a:p>
             <a:fld id="{565CE74E-AB26-4998-AD42-012C4C1AD076}" type="slidenum">
               <a:rPr lang="zh-CN" altLang="en-US" smtClean="0"/>
-              <a:t>‹#›</a:t>
             </a:fld>
             <a:endParaRPr lang="zh-CN" altLang="en-US"/>
           </a:p>
         </p:txBody>
       </p:sp>
     </p:spTree>
-    <p:extLst>
-      <p:ext uri="{BB962C8B-B14F-4D97-AF65-F5344CB8AC3E}">
-        <p14:creationId xmlns:p14="http://schemas.microsoft.com/office/powerpoint/2010/main" val="694758376"/>
-      </p:ext>
-    </p:extLst>
   </p:cSld>
   <p:clrMapOvr>
     <a:masterClrMapping/>
@@ -2188,6 +2167,7 @@
               <a:rPr lang="zh-CN" altLang="en-US"/>
               <a:t>单击此处编辑母版标题样式</a:t>
             </a:r>
+            <a:endParaRPr lang="zh-CN" altLang="en-US"/>
           </a:p>
         </p:txBody>
       </p:sp>
@@ -2314,6 +2294,7 @@
               <a:rPr lang="zh-CN" altLang="en-US"/>
               <a:t>单击此处编辑母版文本样式</a:t>
             </a:r>
+            <a:endParaRPr lang="zh-CN" altLang="en-US"/>
           </a:p>
         </p:txBody>
       </p:sp>
@@ -2334,7 +2315,6 @@
           <a:p>
             <a:fld id="{D997B5FA-0921-464F-AAE1-844C04324D75}" type="datetimeFigureOut">
               <a:rPr lang="zh-CN" altLang="en-US" smtClean="0"/>
-              <a:t>2026/4/6</a:t>
             </a:fld>
             <a:endParaRPr lang="zh-CN" altLang="en-US"/>
           </a:p>
@@ -2376,18 +2356,12 @@
           <a:p>
             <a:fld id="{565CE74E-AB26-4998-AD42-012C4C1AD076}" type="slidenum">
               <a:rPr lang="zh-CN" altLang="en-US" smtClean="0"/>
-              <a:t>‹#›</a:t>
             </a:fld>
             <a:endParaRPr lang="zh-CN" altLang="en-US"/>
           </a:p>
         </p:txBody>
       </p:sp>
     </p:spTree>
-    <p:extLst>
-      <p:ext uri="{BB962C8B-B14F-4D97-AF65-F5344CB8AC3E}">
-        <p14:creationId xmlns:p14="http://schemas.microsoft.com/office/powerpoint/2010/main" val="477805659"/>
-      </p:ext>
-    </p:extLst>
   </p:cSld>
   <p:clrMapOvr>
     <a:masterClrMapping/>
@@ -2446,6 +2420,7 @@
               <a:rPr lang="zh-CN" altLang="en-US"/>
               <a:t>单击此处编辑母版标题样式</a:t>
             </a:r>
+            <a:endParaRPr lang="zh-CN" altLang="en-US"/>
           </a:p>
         </p:txBody>
       </p:sp>
@@ -2479,6 +2454,7 @@
               <a:rPr lang="zh-CN" altLang="en-US"/>
               <a:t>单击此处编辑母版文本样式</a:t>
             </a:r>
+            <a:endParaRPr lang="zh-CN" altLang="en-US"/>
           </a:p>
           <a:p>
             <a:pPr lvl="1"/>
@@ -2486,6 +2462,7 @@
               <a:rPr lang="zh-CN" altLang="en-US"/>
               <a:t>第二级</a:t>
             </a:r>
+            <a:endParaRPr lang="zh-CN" altLang="en-US"/>
           </a:p>
           <a:p>
             <a:pPr lvl="2"/>
@@ -2493,6 +2470,7 @@
               <a:rPr lang="zh-CN" altLang="en-US"/>
               <a:t>第三级</a:t>
             </a:r>
+            <a:endParaRPr lang="zh-CN" altLang="en-US"/>
           </a:p>
           <a:p>
             <a:pPr lvl="3"/>
@@ -2500,6 +2478,7 @@
               <a:rPr lang="zh-CN" altLang="en-US"/>
               <a:t>第四级</a:t>
             </a:r>
+            <a:endParaRPr lang="zh-CN" altLang="en-US"/>
           </a:p>
           <a:p>
             <a:pPr lvl="4"/>
@@ -2507,6 +2486,7 @@
               <a:rPr lang="zh-CN" altLang="en-US"/>
               <a:t>第五级</a:t>
             </a:r>
+            <a:endParaRPr lang="zh-CN" altLang="en-US"/>
           </a:p>
         </p:txBody>
       </p:sp>
@@ -2545,7 +2525,6 @@
           <a:p>
             <a:fld id="{D997B5FA-0921-464F-AAE1-844C04324D75}" type="datetimeFigureOut">
               <a:rPr lang="zh-CN" altLang="en-US" smtClean="0"/>
-              <a:t>2026/4/6</a:t>
             </a:fld>
             <a:endParaRPr lang="zh-CN" altLang="en-US"/>
           </a:p>
@@ -2623,18 +2602,12 @@
           <a:p>
             <a:fld id="{565CE74E-AB26-4998-AD42-012C4C1AD076}" type="slidenum">
               <a:rPr lang="zh-CN" altLang="en-US" smtClean="0"/>
-              <a:t>‹#›</a:t>
             </a:fld>
             <a:endParaRPr lang="zh-CN" altLang="en-US"/>
           </a:p>
         </p:txBody>
       </p:sp>
     </p:spTree>
-    <p:extLst>
-      <p:ext uri="{BB962C8B-B14F-4D97-AF65-F5344CB8AC3E}">
-        <p14:creationId xmlns:p14="http://schemas.microsoft.com/office/powerpoint/2010/main" val="2003094035"/>
-      </p:ext>
-    </p:extLst>
   </p:cSld>
   <p:clrMap bg1="lt1" tx1="dk1" bg2="lt2" tx2="dk2" accent1="accent1" accent2="accent2" accent3="accent3" accent4="accent4" accent5="accent5" accent6="accent6" hlink="hlink" folHlink="folHlink"/>
   <p:sldLayoutIdLst>
@@ -2952,13 +2925,7 @@
       </p:grpSpPr>
       <p:sp>
         <p:nvSpPr>
-          <p:cNvPr id="48" name="矩形 47">
-            <a:extLst>
-              <a:ext uri="{FF2B5EF4-FFF2-40B4-BE49-F238E27FC236}">
-                <a16:creationId xmlns:a16="http://schemas.microsoft.com/office/drawing/2014/main" id="{C0D93E2F-2437-C1A9-FE1B-666C2BE227C1}"/>
-              </a:ext>
-            </a:extLst>
-          </p:cNvPr>
+          <p:cNvPr id="48" name="矩形 47"/>
           <p:cNvSpPr/>
           <p:nvPr/>
         </p:nvSpPr>
@@ -3013,13 +2980,7 @@
       </p:sp>
       <p:sp>
         <p:nvSpPr>
-          <p:cNvPr id="42" name="矩形 41">
-            <a:extLst>
-              <a:ext uri="{FF2B5EF4-FFF2-40B4-BE49-F238E27FC236}">
-                <a16:creationId xmlns:a16="http://schemas.microsoft.com/office/drawing/2014/main" id="{7B967BFF-340F-614D-E3CF-7B32A2698136}"/>
-              </a:ext>
-            </a:extLst>
-          </p:cNvPr>
+          <p:cNvPr id="42" name="矩形 41"/>
           <p:cNvSpPr/>
           <p:nvPr/>
         </p:nvSpPr>
@@ -3066,13 +3027,7 @@
       </p:sp>
       <p:sp>
         <p:nvSpPr>
-          <p:cNvPr id="47" name="矩形 46">
-            <a:extLst>
-              <a:ext uri="{FF2B5EF4-FFF2-40B4-BE49-F238E27FC236}">
-                <a16:creationId xmlns:a16="http://schemas.microsoft.com/office/drawing/2014/main" id="{7940492B-935B-1E75-BA26-4106166EAB45}"/>
-              </a:ext>
-            </a:extLst>
-          </p:cNvPr>
+          <p:cNvPr id="47" name="矩形 46"/>
           <p:cNvSpPr/>
           <p:nvPr/>
         </p:nvSpPr>
@@ -3119,16 +3074,8 @@
       </p:sp>
       <p:cxnSp>
         <p:nvCxnSpPr>
-          <p:cNvPr id="105" name="直接连接符 104">
-            <a:extLst>
-              <a:ext uri="{FF2B5EF4-FFF2-40B4-BE49-F238E27FC236}">
-                <a16:creationId xmlns:a16="http://schemas.microsoft.com/office/drawing/2014/main" id="{E44E67B1-FFB5-E59C-8378-46A07B02D2BD}"/>
-              </a:ext>
-            </a:extLst>
-          </p:cNvPr>
-          <p:cNvCxnSpPr>
-            <a:cxnSpLocks/>
-          </p:cNvCxnSpPr>
+          <p:cNvPr id="105" name="直接连接符 104"/>
+          <p:cNvCxnSpPr/>
           <p:nvPr/>
         </p:nvCxnSpPr>
         <p:spPr>
@@ -3162,16 +3109,8 @@
       </p:cxnSp>
       <p:cxnSp>
         <p:nvCxnSpPr>
-          <p:cNvPr id="68" name="直接连接符 67">
-            <a:extLst>
-              <a:ext uri="{FF2B5EF4-FFF2-40B4-BE49-F238E27FC236}">
-                <a16:creationId xmlns:a16="http://schemas.microsoft.com/office/drawing/2014/main" id="{7327186D-53EC-4CEB-413E-628E5B3BE007}"/>
-              </a:ext>
-            </a:extLst>
-          </p:cNvPr>
-          <p:cNvCxnSpPr>
-            <a:cxnSpLocks/>
-          </p:cNvCxnSpPr>
+          <p:cNvPr id="68" name="直接连接符 67"/>
+          <p:cNvCxnSpPr/>
           <p:nvPr/>
         </p:nvCxnSpPr>
         <p:spPr>
@@ -3205,13 +3144,72 @@
       </p:cxnSp>
       <p:pic>
         <p:nvPicPr>
-          <p:cNvPr id="11" name="图片 10">
+          <p:cNvPr id="11" name="图片 10"/>
+          <p:cNvPicPr>
+            <a:picLocks noChangeAspect="1"/>
+          </p:cNvPicPr>
+          <p:nvPr/>
+        </p:nvPicPr>
+        <p:blipFill>
+          <a:blip r:embed="rId1" cstate="print">
             <a:extLst>
-              <a:ext uri="{FF2B5EF4-FFF2-40B4-BE49-F238E27FC236}">
-                <a16:creationId xmlns:a16="http://schemas.microsoft.com/office/drawing/2014/main" id="{C3694594-3B50-4A9F-FDCA-271EE9C2A32A}"/>
+              <a:ext uri="{28A0092B-C50C-407E-A947-70E740481C1C}">
+                <a14:useLocalDpi xmlns:a14="http://schemas.microsoft.com/office/drawing/2010/main" val="0"/>
               </a:ext>
             </a:extLst>
-          </p:cNvPr>
+          </a:blip>
+          <a:stretch>
+            <a:fillRect/>
+          </a:stretch>
+        </p:blipFill>
+        <p:spPr>
+          <a:xfrm>
+            <a:off x="117036" y="991513"/>
+            <a:ext cx="442495" cy="442495"/>
+          </a:xfrm>
+          <a:prstGeom prst="rect">
+            <a:avLst/>
+          </a:prstGeom>
+        </p:spPr>
+      </p:pic>
+      <p:cxnSp>
+        <p:nvCxnSpPr>
+          <p:cNvPr id="13" name="直接连接符 12"/>
+          <p:cNvCxnSpPr/>
+          <p:nvPr/>
+        </p:nvCxnSpPr>
+        <p:spPr>
+          <a:xfrm flipV="1">
+            <a:off x="4080342" y="510922"/>
+            <a:ext cx="32165" cy="6347078"/>
+          </a:xfrm>
+          <a:prstGeom prst="line">
+            <a:avLst/>
+          </a:prstGeom>
+          <a:ln>
+            <a:prstDash val="dash"/>
+            <a:headEnd type="none" w="med" len="med"/>
+            <a:tailEnd type="none" w="med" len="med"/>
+          </a:ln>
+        </p:spPr>
+        <p:style>
+          <a:lnRef idx="3">
+            <a:schemeClr val="dk1"/>
+          </a:lnRef>
+          <a:fillRef idx="0">
+            <a:schemeClr val="dk1"/>
+          </a:fillRef>
+          <a:effectRef idx="2">
+            <a:schemeClr val="dk1"/>
+          </a:effectRef>
+          <a:fontRef idx="minor">
+            <a:schemeClr val="tx1"/>
+          </a:fontRef>
+        </p:style>
+      </p:cxnSp>
+      <p:pic>
+        <p:nvPicPr>
+          <p:cNvPr id="22" name="图片 21"/>
           <p:cNvPicPr>
             <a:picLocks noChangeAspect="1"/>
           </p:cNvPicPr>
@@ -3231,66 +3229,17 @@
         </p:blipFill>
         <p:spPr>
           <a:xfrm>
-            <a:off x="117036" y="991513"/>
-            <a:ext cx="442495" cy="442495"/>
+            <a:off x="829606" y="1398882"/>
+            <a:ext cx="658712" cy="658712"/>
           </a:xfrm>
           <a:prstGeom prst="rect">
             <a:avLst/>
           </a:prstGeom>
         </p:spPr>
       </p:pic>
-      <p:cxnSp>
-        <p:nvCxnSpPr>
-          <p:cNvPr id="13" name="直接连接符 12">
-            <a:extLst>
-              <a:ext uri="{FF2B5EF4-FFF2-40B4-BE49-F238E27FC236}">
-                <a16:creationId xmlns:a16="http://schemas.microsoft.com/office/drawing/2014/main" id="{B997537F-2FEA-EF95-30D6-ADE424D4C37F}"/>
-              </a:ext>
-            </a:extLst>
-          </p:cNvPr>
-          <p:cNvCxnSpPr>
-            <a:cxnSpLocks/>
-          </p:cNvCxnSpPr>
-          <p:nvPr/>
-        </p:nvCxnSpPr>
-        <p:spPr>
-          <a:xfrm flipV="1">
-            <a:off x="4080342" y="510922"/>
-            <a:ext cx="32165" cy="6347078"/>
-          </a:xfrm>
-          <a:prstGeom prst="line">
-            <a:avLst/>
-          </a:prstGeom>
-          <a:ln>
-            <a:prstDash val="dash"/>
-            <a:headEnd type="none" w="med" len="med"/>
-            <a:tailEnd type="none" w="med" len="med"/>
-          </a:ln>
-        </p:spPr>
-        <p:style>
-          <a:lnRef idx="3">
-            <a:schemeClr val="dk1"/>
-          </a:lnRef>
-          <a:fillRef idx="0">
-            <a:schemeClr val="dk1"/>
-          </a:fillRef>
-          <a:effectRef idx="2">
-            <a:schemeClr val="dk1"/>
-          </a:effectRef>
-          <a:fontRef idx="minor">
-            <a:schemeClr val="tx1"/>
-          </a:fontRef>
-        </p:style>
-      </p:cxnSp>
       <p:pic>
         <p:nvPicPr>
-          <p:cNvPr id="22" name="图片 21">
-            <a:extLst>
-              <a:ext uri="{FF2B5EF4-FFF2-40B4-BE49-F238E27FC236}">
-                <a16:creationId xmlns:a16="http://schemas.microsoft.com/office/drawing/2014/main" id="{737BA42D-C786-8F73-FD4A-75BF27C01A65}"/>
-              </a:ext>
-            </a:extLst>
-          </p:cNvPr>
+          <p:cNvPr id="29" name="图片 28"/>
           <p:cNvPicPr>
             <a:picLocks noChangeAspect="1"/>
           </p:cNvPicPr>
@@ -3309,9 +3258,9 @@
           </a:stretch>
         </p:blipFill>
         <p:spPr>
-          <a:xfrm>
-            <a:off x="829606" y="1398882"/>
-            <a:ext cx="658712" cy="658712"/>
+          <a:xfrm rot="7044394">
+            <a:off x="435871" y="1199724"/>
+            <a:ext cx="468565" cy="468565"/>
           </a:xfrm>
           <a:prstGeom prst="rect">
             <a:avLst/>
@@ -3320,13 +3269,37 @@
       </p:pic>
       <p:pic>
         <p:nvPicPr>
-          <p:cNvPr id="29" name="图片 28">
+          <p:cNvPr id="30" name="图片 29"/>
+          <p:cNvPicPr>
+            <a:picLocks noChangeAspect="1"/>
+          </p:cNvPicPr>
+          <p:nvPr/>
+        </p:nvPicPr>
+        <p:blipFill>
+          <a:blip r:embed="rId1" cstate="print">
             <a:extLst>
-              <a:ext uri="{FF2B5EF4-FFF2-40B4-BE49-F238E27FC236}">
-                <a16:creationId xmlns:a16="http://schemas.microsoft.com/office/drawing/2014/main" id="{2E32B3CA-2385-3A26-E3C4-949369EB882A}"/>
+              <a:ext uri="{28A0092B-C50C-407E-A947-70E740481C1C}">
+                <a14:useLocalDpi xmlns:a14="http://schemas.microsoft.com/office/drawing/2010/main" val="0"/>
               </a:ext>
             </a:extLst>
-          </p:cNvPr>
+          </a:blip>
+          <a:stretch>
+            <a:fillRect/>
+          </a:stretch>
+        </p:blipFill>
+        <p:spPr>
+          <a:xfrm>
+            <a:off x="133077" y="2168546"/>
+            <a:ext cx="442495" cy="442495"/>
+          </a:xfrm>
+          <a:prstGeom prst="rect">
+            <a:avLst/>
+          </a:prstGeom>
+        </p:spPr>
+      </p:pic>
+      <p:pic>
+        <p:nvPicPr>
+          <p:cNvPr id="32" name="图片 31"/>
           <p:cNvPicPr>
             <a:picLocks noChangeAspect="1"/>
           </p:cNvPicPr>
@@ -3345,9 +3318,9 @@
           </a:stretch>
         </p:blipFill>
         <p:spPr>
-          <a:xfrm rot="7044394">
-            <a:off x="435871" y="1199724"/>
-            <a:ext cx="468565" cy="468565"/>
+          <a:xfrm rot="3892081">
+            <a:off x="451919" y="1824410"/>
+            <a:ext cx="485300" cy="485300"/>
           </a:xfrm>
           <a:prstGeom prst="rect">
             <a:avLst/>
@@ -3356,20 +3329,14 @@
       </p:pic>
       <p:pic>
         <p:nvPicPr>
-          <p:cNvPr id="30" name="图片 29">
-            <a:extLst>
-              <a:ext uri="{FF2B5EF4-FFF2-40B4-BE49-F238E27FC236}">
-                <a16:creationId xmlns:a16="http://schemas.microsoft.com/office/drawing/2014/main" id="{F328A323-2651-4050-612A-AD25BA0122AC}"/>
-              </a:ext>
-            </a:extLst>
-          </p:cNvPr>
+          <p:cNvPr id="33" name="图片 32"/>
           <p:cNvPicPr>
             <a:picLocks noChangeAspect="1"/>
           </p:cNvPicPr>
           <p:nvPr/>
         </p:nvPicPr>
         <p:blipFill>
-          <a:blip r:embed="rId2" cstate="print">
+          <a:blip r:embed="rId3" cstate="print">
             <a:extLst>
               <a:ext uri="{28A0092B-C50C-407E-A947-70E740481C1C}">
                 <a14:useLocalDpi xmlns:a14="http://schemas.microsoft.com/office/drawing/2010/main" val="0"/>
@@ -3381,9 +3348,9 @@
           </a:stretch>
         </p:blipFill>
         <p:spPr>
-          <a:xfrm>
-            <a:off x="133077" y="2168546"/>
-            <a:ext cx="442495" cy="442495"/>
+          <a:xfrm rot="13500129">
+            <a:off x="1433770" y="1221847"/>
+            <a:ext cx="468565" cy="468565"/>
           </a:xfrm>
           <a:prstGeom prst="rect">
             <a:avLst/>
@@ -3392,13 +3359,67 @@
       </p:pic>
       <p:pic>
         <p:nvPicPr>
-          <p:cNvPr id="32" name="图片 31">
+          <p:cNvPr id="34" name="图片 33"/>
+          <p:cNvPicPr>
+            <a:picLocks noChangeAspect="1"/>
+          </p:cNvPicPr>
+          <p:nvPr/>
+        </p:nvPicPr>
+        <p:blipFill>
+          <a:blip r:embed="rId3" cstate="print">
             <a:extLst>
-              <a:ext uri="{FF2B5EF4-FFF2-40B4-BE49-F238E27FC236}">
-                <a16:creationId xmlns:a16="http://schemas.microsoft.com/office/drawing/2014/main" id="{20F6228F-C521-0EED-BFE5-FADC9716FD8B}"/>
+              <a:ext uri="{28A0092B-C50C-407E-A947-70E740481C1C}">
+                <a14:useLocalDpi xmlns:a14="http://schemas.microsoft.com/office/drawing/2010/main" val="0"/>
               </a:ext>
             </a:extLst>
-          </p:cNvPr>
+          </a:blip>
+          <a:stretch>
+            <a:fillRect/>
+          </a:stretch>
+        </p:blipFill>
+        <p:spPr>
+          <a:xfrm rot="7000502">
+            <a:off x="1389087" y="1808479"/>
+            <a:ext cx="468565" cy="468565"/>
+          </a:xfrm>
+          <a:prstGeom prst="rect">
+            <a:avLst/>
+          </a:prstGeom>
+        </p:spPr>
+      </p:pic>
+      <p:pic>
+        <p:nvPicPr>
+          <p:cNvPr id="35" name="图片 34"/>
+          <p:cNvPicPr>
+            <a:picLocks noChangeAspect="1"/>
+          </p:cNvPicPr>
+          <p:nvPr/>
+        </p:nvPicPr>
+        <p:blipFill>
+          <a:blip r:embed="rId1" cstate="print">
+            <a:extLst>
+              <a:ext uri="{28A0092B-C50C-407E-A947-70E740481C1C}">
+                <a14:useLocalDpi xmlns:a14="http://schemas.microsoft.com/office/drawing/2010/main" val="0"/>
+              </a:ext>
+            </a:extLst>
+          </a:blip>
+          <a:stretch>
+            <a:fillRect/>
+          </a:stretch>
+        </p:blipFill>
+        <p:spPr>
+          <a:xfrm>
+            <a:off x="1700057" y="946924"/>
+            <a:ext cx="442495" cy="442495"/>
+          </a:xfrm>
+          <a:prstGeom prst="rect">
+            <a:avLst/>
+          </a:prstGeom>
+        </p:spPr>
+      </p:pic>
+      <p:pic>
+        <p:nvPicPr>
+          <p:cNvPr id="37" name="图片 36"/>
           <p:cNvPicPr>
             <a:picLocks noChangeAspect="1"/>
           </p:cNvPicPr>
@@ -3417,132 +3438,196 @@
           </a:stretch>
         </p:blipFill>
         <p:spPr>
-          <a:xfrm rot="3892081">
-            <a:off x="451919" y="1824410"/>
-            <a:ext cx="485300" cy="485300"/>
+          <a:xfrm>
+            <a:off x="1748991" y="2217417"/>
+            <a:ext cx="344626" cy="344626"/>
           </a:xfrm>
           <a:prstGeom prst="rect">
             <a:avLst/>
           </a:prstGeom>
         </p:spPr>
       </p:pic>
+      <p:sp>
+        <p:nvSpPr>
+          <p:cNvPr id="43" name="文本框 42"/>
+          <p:cNvSpPr txBox="1"/>
+          <p:nvPr/>
+        </p:nvSpPr>
+        <p:spPr>
+          <a:xfrm>
+            <a:off x="1290646" y="156287"/>
+            <a:ext cx="1668565" cy="369332"/>
+          </a:xfrm>
+          <a:prstGeom prst="rect">
+            <a:avLst/>
+          </a:prstGeom>
+          <a:noFill/>
+        </p:spPr>
+        <p:txBody>
+          <a:bodyPr wrap="square" rtlCol="0">
+            <a:spAutoFit/>
+          </a:bodyPr>
+          <a:lstStyle/>
+          <a:p>
+            <a:r>
+              <a:rPr lang="en-US" altLang="zh-CN" b="1" dirty="0">
+                <a:latin typeface="Arial" panose="020B0604020202020204" pitchFamily="34" charset="0"/>
+                <a:cs typeface="Arial" panose="020B0604020202020204" pitchFamily="34" charset="0"/>
+              </a:rPr>
+              <a:t>UAV Network </a:t>
+            </a:r>
+            <a:endParaRPr lang="zh-CN" altLang="en-US" b="1" dirty="0">
+              <a:latin typeface="Arial" panose="020B0604020202020204" pitchFamily="34" charset="0"/>
+              <a:cs typeface="Arial" panose="020B0604020202020204" pitchFamily="34" charset="0"/>
+            </a:endParaRPr>
+          </a:p>
+        </p:txBody>
+      </p:sp>
+      <p:sp>
+        <p:nvSpPr>
+          <p:cNvPr id="46" name="文本框 45"/>
+          <p:cNvSpPr txBox="1"/>
+          <p:nvPr/>
+        </p:nvSpPr>
+        <p:spPr>
+          <a:xfrm>
+            <a:off x="1488318" y="2512573"/>
+            <a:ext cx="941972" cy="276999"/>
+          </a:xfrm>
+          <a:prstGeom prst="rect">
+            <a:avLst/>
+          </a:prstGeom>
+          <a:noFill/>
+        </p:spPr>
+        <p:txBody>
+          <a:bodyPr wrap="square" rtlCol="0">
+            <a:spAutoFit/>
+          </a:bodyPr>
+          <a:lstStyle/>
+          <a:p>
+            <a:r>
+              <a:rPr lang="en-US" altLang="zh-CN" sz="1200" dirty="0">
+                <a:latin typeface="Arial" panose="020B0604020202020204" pitchFamily="34" charset="0"/>
+                <a:cs typeface="Arial" panose="020B0604020202020204" pitchFamily="34" charset="0"/>
+              </a:rPr>
+              <a:t>Anomalies</a:t>
+            </a:r>
+            <a:endParaRPr lang="zh-CN" altLang="en-US" sz="1200" dirty="0">
+              <a:latin typeface="Arial" panose="020B0604020202020204" pitchFamily="34" charset="0"/>
+              <a:cs typeface="Arial" panose="020B0604020202020204" pitchFamily="34" charset="0"/>
+            </a:endParaRPr>
+          </a:p>
+        </p:txBody>
+      </p:sp>
+      <p:cxnSp>
+        <p:nvCxnSpPr>
+          <p:cNvPr id="49" name="直接连接符 48"/>
+          <p:cNvCxnSpPr/>
+          <p:nvPr/>
+        </p:nvCxnSpPr>
+        <p:spPr>
+          <a:xfrm>
+            <a:off x="45593" y="537612"/>
+            <a:ext cx="11992884" cy="0"/>
+          </a:xfrm>
+          <a:prstGeom prst="line">
+            <a:avLst/>
+          </a:prstGeom>
+        </p:spPr>
+        <p:style>
+          <a:lnRef idx="3">
+            <a:schemeClr val="dk1"/>
+          </a:lnRef>
+          <a:fillRef idx="0">
+            <a:schemeClr val="dk1"/>
+          </a:fillRef>
+          <a:effectRef idx="2">
+            <a:schemeClr val="dk1"/>
+          </a:effectRef>
+          <a:fontRef idx="minor">
+            <a:schemeClr val="tx1"/>
+          </a:fontRef>
+        </p:style>
+      </p:cxnSp>
+      <p:sp>
+        <p:nvSpPr>
+          <p:cNvPr id="50" name="文本框 49"/>
+          <p:cNvSpPr txBox="1"/>
+          <p:nvPr/>
+        </p:nvSpPr>
+        <p:spPr>
+          <a:xfrm>
+            <a:off x="315059" y="676816"/>
+            <a:ext cx="1622834" cy="276999"/>
+          </a:xfrm>
+          <a:prstGeom prst="rect">
+            <a:avLst/>
+          </a:prstGeom>
+          <a:noFill/>
+        </p:spPr>
+        <p:txBody>
+          <a:bodyPr wrap="square" rtlCol="0">
+            <a:spAutoFit/>
+          </a:bodyPr>
+          <a:lstStyle/>
+          <a:p>
+            <a:r>
+              <a:rPr lang="en-US" altLang="zh-CN" sz="1200" b="1" dirty="0">
+                <a:latin typeface="Arial" panose="020B0604020202020204" pitchFamily="34" charset="0"/>
+                <a:cs typeface="Arial" panose="020B0604020202020204" pitchFamily="34" charset="0"/>
+              </a:rPr>
+              <a:t>UAV Swarm Access</a:t>
+            </a:r>
+            <a:endParaRPr lang="zh-CN" altLang="en-US" sz="1200" b="1" dirty="0">
+              <a:latin typeface="Arial" panose="020B0604020202020204" pitchFamily="34" charset="0"/>
+              <a:cs typeface="Arial" panose="020B0604020202020204" pitchFamily="34" charset="0"/>
+            </a:endParaRPr>
+          </a:p>
+        </p:txBody>
+      </p:sp>
+      <p:sp>
+        <p:nvSpPr>
+          <p:cNvPr id="52" name="等腰三角形 51"/>
+          <p:cNvSpPr/>
+          <p:nvPr/>
+        </p:nvSpPr>
+        <p:spPr>
+          <a:xfrm rot="5400000">
+            <a:off x="2164469" y="1529441"/>
+            <a:ext cx="505104" cy="358480"/>
+          </a:xfrm>
+          <a:prstGeom prst="triangle">
+            <a:avLst/>
+          </a:prstGeom>
+        </p:spPr>
+        <p:style>
+          <a:lnRef idx="2">
+            <a:schemeClr val="accent2">
+              <a:shade val="15000"/>
+            </a:schemeClr>
+          </a:lnRef>
+          <a:fillRef idx="1">
+            <a:schemeClr val="accent2"/>
+          </a:fillRef>
+          <a:effectRef idx="0">
+            <a:schemeClr val="accent2"/>
+          </a:effectRef>
+          <a:fontRef idx="minor">
+            <a:schemeClr val="lt1"/>
+          </a:fontRef>
+        </p:style>
+        <p:txBody>
+          <a:bodyPr rtlCol="0" anchor="ctr"/>
+          <a:lstStyle/>
+          <a:p>
+            <a:pPr algn="ctr"/>
+            <a:endParaRPr lang="zh-CN" altLang="en-US"/>
+          </a:p>
+        </p:txBody>
+      </p:sp>
       <p:pic>
         <p:nvPicPr>
-          <p:cNvPr id="33" name="图片 32">
-            <a:extLst>
-              <a:ext uri="{FF2B5EF4-FFF2-40B4-BE49-F238E27FC236}">
-                <a16:creationId xmlns:a16="http://schemas.microsoft.com/office/drawing/2014/main" id="{8A461BF1-BCC2-4028-8296-65F0F19C0E81}"/>
-              </a:ext>
-            </a:extLst>
-          </p:cNvPr>
-          <p:cNvPicPr>
-            <a:picLocks noChangeAspect="1"/>
-          </p:cNvPicPr>
-          <p:nvPr/>
-        </p:nvPicPr>
-        <p:blipFill>
-          <a:blip r:embed="rId4" cstate="print">
-            <a:extLst>
-              <a:ext uri="{28A0092B-C50C-407E-A947-70E740481C1C}">
-                <a14:useLocalDpi xmlns:a14="http://schemas.microsoft.com/office/drawing/2010/main" val="0"/>
-              </a:ext>
-            </a:extLst>
-          </a:blip>
-          <a:stretch>
-            <a:fillRect/>
-          </a:stretch>
-        </p:blipFill>
-        <p:spPr>
-          <a:xfrm rot="13500129">
-            <a:off x="1433770" y="1221847"/>
-            <a:ext cx="468565" cy="468565"/>
-          </a:xfrm>
-          <a:prstGeom prst="rect">
-            <a:avLst/>
-          </a:prstGeom>
-        </p:spPr>
-      </p:pic>
-      <p:pic>
-        <p:nvPicPr>
-          <p:cNvPr id="34" name="图片 33">
-            <a:extLst>
-              <a:ext uri="{FF2B5EF4-FFF2-40B4-BE49-F238E27FC236}">
-                <a16:creationId xmlns:a16="http://schemas.microsoft.com/office/drawing/2014/main" id="{4F673B66-817D-A5AA-A615-57FF823676C2}"/>
-              </a:ext>
-            </a:extLst>
-          </p:cNvPr>
-          <p:cNvPicPr>
-            <a:picLocks noChangeAspect="1"/>
-          </p:cNvPicPr>
-          <p:nvPr/>
-        </p:nvPicPr>
-        <p:blipFill>
-          <a:blip r:embed="rId4" cstate="print">
-            <a:extLst>
-              <a:ext uri="{28A0092B-C50C-407E-A947-70E740481C1C}">
-                <a14:useLocalDpi xmlns:a14="http://schemas.microsoft.com/office/drawing/2010/main" val="0"/>
-              </a:ext>
-            </a:extLst>
-          </a:blip>
-          <a:stretch>
-            <a:fillRect/>
-          </a:stretch>
-        </p:blipFill>
-        <p:spPr>
-          <a:xfrm rot="7000502">
-            <a:off x="1389087" y="1808479"/>
-            <a:ext cx="468565" cy="468565"/>
-          </a:xfrm>
-          <a:prstGeom prst="rect">
-            <a:avLst/>
-          </a:prstGeom>
-        </p:spPr>
-      </p:pic>
-      <p:pic>
-        <p:nvPicPr>
-          <p:cNvPr id="35" name="图片 34">
-            <a:extLst>
-              <a:ext uri="{FF2B5EF4-FFF2-40B4-BE49-F238E27FC236}">
-                <a16:creationId xmlns:a16="http://schemas.microsoft.com/office/drawing/2014/main" id="{F960198F-D291-E8B4-026F-C409CC05AB52}"/>
-              </a:ext>
-            </a:extLst>
-          </p:cNvPr>
-          <p:cNvPicPr>
-            <a:picLocks noChangeAspect="1"/>
-          </p:cNvPicPr>
-          <p:nvPr/>
-        </p:nvPicPr>
-        <p:blipFill>
-          <a:blip r:embed="rId2" cstate="print">
-            <a:extLst>
-              <a:ext uri="{28A0092B-C50C-407E-A947-70E740481C1C}">
-                <a14:useLocalDpi xmlns:a14="http://schemas.microsoft.com/office/drawing/2010/main" val="0"/>
-              </a:ext>
-            </a:extLst>
-          </a:blip>
-          <a:stretch>
-            <a:fillRect/>
-          </a:stretch>
-        </p:blipFill>
-        <p:spPr>
-          <a:xfrm>
-            <a:off x="1700057" y="946924"/>
-            <a:ext cx="442495" cy="442495"/>
-          </a:xfrm>
-          <a:prstGeom prst="rect">
-            <a:avLst/>
-          </a:prstGeom>
-        </p:spPr>
-      </p:pic>
-      <p:pic>
-        <p:nvPicPr>
-          <p:cNvPr id="37" name="图片 36">
-            <a:extLst>
-              <a:ext uri="{FF2B5EF4-FFF2-40B4-BE49-F238E27FC236}">
-                <a16:creationId xmlns:a16="http://schemas.microsoft.com/office/drawing/2014/main" id="{ACD42962-CCE8-3714-D27C-28B8A51DF053}"/>
-              </a:ext>
-            </a:extLst>
-          </p:cNvPr>
+          <p:cNvPr id="55" name="图片 54"/>
           <p:cNvPicPr>
             <a:picLocks noChangeAspect="1"/>
           </p:cNvPicPr>
@@ -3562,30 +3647,27 @@
         </p:blipFill>
         <p:spPr>
           <a:xfrm>
-            <a:off x="1748991" y="2217417"/>
-            <a:ext cx="344626" cy="344626"/>
-          </a:xfrm>
-          <a:prstGeom prst="rect">
-            <a:avLst/>
-          </a:prstGeom>
+            <a:off x="2795041" y="1424497"/>
+            <a:ext cx="583878" cy="583878"/>
+          </a:xfrm>
+          <a:prstGeom prst="rect">
+            <a:avLst/>
+          </a:prstGeom>
+          <a:solidFill>
+            <a:schemeClr val="accent1"/>
+          </a:solidFill>
         </p:spPr>
       </p:pic>
       <p:sp>
         <p:nvSpPr>
-          <p:cNvPr id="43" name="文本框 42">
-            <a:extLst>
-              <a:ext uri="{FF2B5EF4-FFF2-40B4-BE49-F238E27FC236}">
-                <a16:creationId xmlns:a16="http://schemas.microsoft.com/office/drawing/2014/main" id="{6681351F-3744-A84D-77D0-9AA2FFD74FBE}"/>
-              </a:ext>
-            </a:extLst>
-          </p:cNvPr>
+          <p:cNvPr id="56" name="文本框 55"/>
           <p:cNvSpPr txBox="1"/>
           <p:nvPr/>
         </p:nvSpPr>
         <p:spPr>
           <a:xfrm>
-            <a:off x="1290646" y="156287"/>
-            <a:ext cx="1668565" cy="369332"/>
+            <a:off x="2348011" y="2104396"/>
+            <a:ext cx="1834001" cy="276999"/>
           </a:xfrm>
           <a:prstGeom prst="rect">
             <a:avLst/>
@@ -3598,12 +3680,266 @@
           </a:bodyPr>
           <a:lstStyle/>
           <a:p>
+            <a:r>
+              <a:rPr lang="en-US" altLang="zh-CN" sz="1200" b="1" dirty="0">
+                <a:latin typeface="Arial" panose="020B0604020202020204" pitchFamily="34" charset="0"/>
+                <a:cs typeface="Arial" panose="020B0604020202020204" pitchFamily="34" charset="0"/>
+              </a:rPr>
+              <a:t>Summarization Agent</a:t>
+            </a:r>
+            <a:endParaRPr lang="zh-CN" altLang="en-US" sz="1200" b="1" dirty="0">
+              <a:latin typeface="Arial" panose="020B0604020202020204" pitchFamily="34" charset="0"/>
+              <a:cs typeface="Arial" panose="020B0604020202020204" pitchFamily="34" charset="0"/>
+            </a:endParaRPr>
+          </a:p>
+        </p:txBody>
+      </p:sp>
+      <p:cxnSp>
+        <p:nvCxnSpPr>
+          <p:cNvPr id="70" name="直接箭头连接符 69"/>
+          <p:cNvCxnSpPr/>
+          <p:nvPr/>
+        </p:nvCxnSpPr>
+        <p:spPr>
+          <a:xfrm flipV="1">
+            <a:off x="4096601" y="1441505"/>
+            <a:ext cx="437627" cy="274931"/>
+          </a:xfrm>
+          <a:prstGeom prst="straightConnector1">
+            <a:avLst/>
+          </a:prstGeom>
+          <a:ln>
+            <a:tailEnd type="triangle"/>
+          </a:ln>
+        </p:spPr>
+        <p:style>
+          <a:lnRef idx="3">
+            <a:schemeClr val="dk1"/>
+          </a:lnRef>
+          <a:fillRef idx="0">
+            <a:schemeClr val="dk1"/>
+          </a:fillRef>
+          <a:effectRef idx="2">
+            <a:schemeClr val="dk1"/>
+          </a:effectRef>
+          <a:fontRef idx="minor">
+            <a:schemeClr val="tx1"/>
+          </a:fontRef>
+        </p:style>
+      </p:cxnSp>
+      <p:cxnSp>
+        <p:nvCxnSpPr>
+          <p:cNvPr id="71" name="直接箭头连接符 70"/>
+          <p:cNvCxnSpPr/>
+          <p:nvPr/>
+        </p:nvCxnSpPr>
+        <p:spPr>
+          <a:xfrm>
+            <a:off x="4096424" y="1716436"/>
+            <a:ext cx="437982" cy="252552"/>
+          </a:xfrm>
+          <a:prstGeom prst="straightConnector1">
+            <a:avLst/>
+          </a:prstGeom>
+          <a:ln>
+            <a:tailEnd type="triangle"/>
+          </a:ln>
+        </p:spPr>
+        <p:style>
+          <a:lnRef idx="3">
+            <a:schemeClr val="dk1"/>
+          </a:lnRef>
+          <a:fillRef idx="0">
+            <a:schemeClr val="dk1"/>
+          </a:fillRef>
+          <a:effectRef idx="2">
+            <a:schemeClr val="dk1"/>
+          </a:effectRef>
+          <a:fontRef idx="minor">
+            <a:schemeClr val="tx1"/>
+          </a:fontRef>
+        </p:style>
+      </p:cxnSp>
+      <p:sp>
+        <p:nvSpPr>
+          <p:cNvPr id="77" name="流程图: 接点 76"/>
+          <p:cNvSpPr/>
+          <p:nvPr/>
+        </p:nvSpPr>
+        <p:spPr>
+          <a:xfrm>
+            <a:off x="4604086" y="1030937"/>
+            <a:ext cx="491479" cy="425192"/>
+          </a:xfrm>
+          <a:prstGeom prst="flowChartConnector">
+            <a:avLst/>
+          </a:prstGeom>
+          <a:solidFill>
+            <a:schemeClr val="bg1">
+              <a:lumMod val="95000"/>
+            </a:schemeClr>
+          </a:solidFill>
+        </p:spPr>
+        <p:style>
+          <a:lnRef idx="2">
+            <a:schemeClr val="dk1"/>
+          </a:lnRef>
+          <a:fillRef idx="1">
+            <a:schemeClr val="lt1"/>
+          </a:fillRef>
+          <a:effectRef idx="0">
+            <a:schemeClr val="dk1"/>
+          </a:effectRef>
+          <a:fontRef idx="minor">
+            <a:schemeClr val="dk1"/>
+          </a:fontRef>
+        </p:style>
+        <p:txBody>
+          <a:bodyPr rtlCol="0" anchor="ctr"/>
+          <a:lstStyle/>
+          <a:p>
+            <a:pPr algn="ctr"/>
+            <a:r>
+              <a:rPr lang="en-US" altLang="zh-CN" sz="1100" dirty="0">
+                <a:latin typeface="Arial" panose="020B0604020202020204" pitchFamily="34" charset="0"/>
+                <a:cs typeface="Arial" panose="020B0604020202020204" pitchFamily="34" charset="0"/>
+              </a:rPr>
+              <a:t>T1</a:t>
+            </a:r>
+            <a:endParaRPr lang="zh-CN" altLang="en-US" sz="1100" dirty="0">
+              <a:latin typeface="Arial" panose="020B0604020202020204" pitchFamily="34" charset="0"/>
+              <a:cs typeface="Arial" panose="020B0604020202020204" pitchFamily="34" charset="0"/>
+            </a:endParaRPr>
+          </a:p>
+        </p:txBody>
+      </p:sp>
+      <p:cxnSp>
+        <p:nvCxnSpPr>
+          <p:cNvPr id="81" name="直接连接符 80"/>
+          <p:cNvCxnSpPr>
+            <a:stCxn id="55" idx="3"/>
+          </p:cNvCxnSpPr>
+          <p:nvPr/>
+        </p:nvCxnSpPr>
+        <p:spPr>
+          <a:xfrm>
+            <a:off x="3378919" y="1716436"/>
+            <a:ext cx="746474" cy="0"/>
+          </a:xfrm>
+          <a:prstGeom prst="line">
+            <a:avLst/>
+          </a:prstGeom>
+        </p:spPr>
+        <p:style>
+          <a:lnRef idx="3">
+            <a:schemeClr val="dk1"/>
+          </a:lnRef>
+          <a:fillRef idx="0">
+            <a:schemeClr val="dk1"/>
+          </a:fillRef>
+          <a:effectRef idx="2">
+            <a:schemeClr val="dk1"/>
+          </a:effectRef>
+          <a:fontRef idx="minor">
+            <a:schemeClr val="tx1"/>
+          </a:fontRef>
+        </p:style>
+      </p:cxnSp>
+      <p:cxnSp>
+        <p:nvCxnSpPr>
+          <p:cNvPr id="84" name="直接箭头连接符 83"/>
+          <p:cNvCxnSpPr/>
+          <p:nvPr/>
+        </p:nvCxnSpPr>
+        <p:spPr>
+          <a:xfrm flipV="1">
+            <a:off x="5180994" y="1205984"/>
+            <a:ext cx="580695" cy="5172"/>
+          </a:xfrm>
+          <a:prstGeom prst="straightConnector1">
+            <a:avLst/>
+          </a:prstGeom>
+          <a:ln>
+            <a:tailEnd type="triangle"/>
+          </a:ln>
+        </p:spPr>
+        <p:style>
+          <a:lnRef idx="3">
+            <a:schemeClr val="dk1"/>
+          </a:lnRef>
+          <a:fillRef idx="0">
+            <a:schemeClr val="dk1"/>
+          </a:fillRef>
+          <a:effectRef idx="2">
+            <a:schemeClr val="dk1"/>
+          </a:effectRef>
+          <a:fontRef idx="minor">
+            <a:schemeClr val="tx1"/>
+          </a:fontRef>
+        </p:style>
+      </p:cxnSp>
+      <p:cxnSp>
+        <p:nvCxnSpPr>
+          <p:cNvPr id="86" name="直接箭头连接符 85"/>
+          <p:cNvCxnSpPr/>
+          <p:nvPr/>
+        </p:nvCxnSpPr>
+        <p:spPr>
+          <a:xfrm flipV="1">
+            <a:off x="5180995" y="2214877"/>
+            <a:ext cx="580695" cy="5172"/>
+          </a:xfrm>
+          <a:prstGeom prst="straightConnector1">
+            <a:avLst/>
+          </a:prstGeom>
+          <a:ln>
+            <a:tailEnd type="triangle"/>
+          </a:ln>
+        </p:spPr>
+        <p:style>
+          <a:lnRef idx="3">
+            <a:schemeClr val="dk1"/>
+          </a:lnRef>
+          <a:fillRef idx="0">
+            <a:schemeClr val="dk1"/>
+          </a:fillRef>
+          <a:effectRef idx="2">
+            <a:schemeClr val="dk1"/>
+          </a:effectRef>
+          <a:fontRef idx="minor">
+            <a:schemeClr val="tx1"/>
+          </a:fontRef>
+        </p:style>
+      </p:cxnSp>
+      <p:sp>
+        <p:nvSpPr>
+          <p:cNvPr id="87" name="文本框 86"/>
+          <p:cNvSpPr txBox="1"/>
+          <p:nvPr/>
+        </p:nvSpPr>
+        <p:spPr>
+          <a:xfrm>
+            <a:off x="4388582" y="-47336"/>
+            <a:ext cx="3191958" cy="646331"/>
+          </a:xfrm>
+          <a:prstGeom prst="rect">
+            <a:avLst/>
+          </a:prstGeom>
+          <a:noFill/>
+        </p:spPr>
+        <p:txBody>
+          <a:bodyPr wrap="square" rtlCol="0">
+            <a:spAutoFit/>
+          </a:bodyPr>
+          <a:lstStyle/>
+          <a:p>
+            <a:pPr algn="ctr"/>
             <a:r>
               <a:rPr lang="en-US" altLang="zh-CN" b="1" dirty="0">
                 <a:latin typeface="Arial" panose="020B0604020202020204" pitchFamily="34" charset="0"/>
                 <a:cs typeface="Arial" panose="020B0604020202020204" pitchFamily="34" charset="0"/>
               </a:rPr>
-              <a:t>UAV Network </a:t>
+              <a:t>Multi-factor Trust Evaluation Mechanism</a:t>
             </a:r>
             <a:endParaRPr lang="zh-CN" altLang="en-US" b="1" dirty="0">
               <a:latin typeface="Arial" panose="020B0604020202020204" pitchFamily="34" charset="0"/>
@@ -3614,98 +3950,67 @@
       </p:sp>
       <p:sp>
         <p:nvSpPr>
-          <p:cNvPr id="46" name="文本框 45">
-            <a:extLst>
-              <a:ext uri="{FF2B5EF4-FFF2-40B4-BE49-F238E27FC236}">
-                <a16:creationId xmlns:a16="http://schemas.microsoft.com/office/drawing/2014/main" id="{4C611CC1-9B47-3EF7-41C2-DC718FA5DAE4}"/>
-              </a:ext>
-            </a:extLst>
-          </p:cNvPr>
-          <p:cNvSpPr txBox="1"/>
-          <p:nvPr/>
-        </p:nvSpPr>
-        <p:spPr>
-          <a:xfrm>
-            <a:off x="1488318" y="2512573"/>
-            <a:ext cx="941972" cy="276999"/>
-          </a:xfrm>
-          <a:prstGeom prst="rect">
-            <a:avLst/>
-          </a:prstGeom>
-          <a:noFill/>
-        </p:spPr>
-        <p:txBody>
-          <a:bodyPr wrap="square" rtlCol="0">
-            <a:spAutoFit/>
-          </a:bodyPr>
-          <a:lstStyle/>
-          <a:p>
-            <a:r>
-              <a:rPr lang="en-US" altLang="zh-CN" sz="1200" dirty="0">
+          <p:cNvPr id="88" name="流程图: 接点 87"/>
+          <p:cNvSpPr/>
+          <p:nvPr/>
+        </p:nvSpPr>
+        <p:spPr>
+          <a:xfrm>
+            <a:off x="4588091" y="1999317"/>
+            <a:ext cx="491479" cy="425192"/>
+          </a:xfrm>
+          <a:prstGeom prst="flowChartConnector">
+            <a:avLst/>
+          </a:prstGeom>
+          <a:solidFill>
+            <a:schemeClr val="bg1">
+              <a:lumMod val="95000"/>
+            </a:schemeClr>
+          </a:solidFill>
+        </p:spPr>
+        <p:style>
+          <a:lnRef idx="2">
+            <a:schemeClr val="dk1"/>
+          </a:lnRef>
+          <a:fillRef idx="1">
+            <a:schemeClr val="lt1"/>
+          </a:fillRef>
+          <a:effectRef idx="0">
+            <a:schemeClr val="dk1"/>
+          </a:effectRef>
+          <a:fontRef idx="minor">
+            <a:schemeClr val="dk1"/>
+          </a:fontRef>
+        </p:style>
+        <p:txBody>
+          <a:bodyPr rtlCol="0" anchor="ctr"/>
+          <a:lstStyle/>
+          <a:p>
+            <a:pPr algn="ctr"/>
+            <a:r>
+              <a:rPr lang="en-US" altLang="zh-CN" sz="1100" dirty="0">
                 <a:latin typeface="Arial" panose="020B0604020202020204" pitchFamily="34" charset="0"/>
                 <a:cs typeface="Arial" panose="020B0604020202020204" pitchFamily="34" charset="0"/>
               </a:rPr>
-              <a:t>Anomalies</a:t>
-            </a:r>
-            <a:endParaRPr lang="zh-CN" altLang="en-US" sz="1200" dirty="0">
+              <a:t>T2</a:t>
+            </a:r>
+            <a:endParaRPr lang="zh-CN" altLang="en-US" sz="1100" dirty="0">
               <a:latin typeface="Arial" panose="020B0604020202020204" pitchFamily="34" charset="0"/>
               <a:cs typeface="Arial" panose="020B0604020202020204" pitchFamily="34" charset="0"/>
             </a:endParaRPr>
           </a:p>
         </p:txBody>
       </p:sp>
-      <p:cxnSp>
-        <p:nvCxnSpPr>
-          <p:cNvPr id="49" name="直接连接符 48">
-            <a:extLst>
-              <a:ext uri="{FF2B5EF4-FFF2-40B4-BE49-F238E27FC236}">
-                <a16:creationId xmlns:a16="http://schemas.microsoft.com/office/drawing/2014/main" id="{CDF67738-B480-8E3F-7247-87A99D107836}"/>
-              </a:ext>
-            </a:extLst>
-          </p:cNvPr>
-          <p:cNvCxnSpPr/>
-          <p:nvPr/>
-        </p:nvCxnSpPr>
-        <p:spPr>
-          <a:xfrm>
-            <a:off x="45593" y="537612"/>
-            <a:ext cx="11992884" cy="0"/>
-          </a:xfrm>
-          <a:prstGeom prst="line">
-            <a:avLst/>
-          </a:prstGeom>
-        </p:spPr>
-        <p:style>
-          <a:lnRef idx="3">
-            <a:schemeClr val="dk1"/>
-          </a:lnRef>
-          <a:fillRef idx="0">
-            <a:schemeClr val="dk1"/>
-          </a:fillRef>
-          <a:effectRef idx="2">
-            <a:schemeClr val="dk1"/>
-          </a:effectRef>
-          <a:fontRef idx="minor">
-            <a:schemeClr val="tx1"/>
-          </a:fontRef>
-        </p:style>
-      </p:cxnSp>
-      <p:sp>
-        <p:nvSpPr>
-          <p:cNvPr id="50" name="文本框 49">
-            <a:extLst>
-              <a:ext uri="{FF2B5EF4-FFF2-40B4-BE49-F238E27FC236}">
-                <a16:creationId xmlns:a16="http://schemas.microsoft.com/office/drawing/2014/main" id="{F411FF66-6574-33F8-86BF-759D49BFF539}"/>
-              </a:ext>
-            </a:extLst>
-          </p:cNvPr>
+      <p:sp>
+        <p:nvSpPr>
+          <p:cNvPr id="89" name="文本框 88"/>
           <p:cNvSpPr txBox="1"/>
           <p:nvPr/>
         </p:nvSpPr>
         <p:spPr>
           <a:xfrm>
-            <a:off x="315059" y="676816"/>
-            <a:ext cx="1622834" cy="276999"/>
+            <a:off x="4269979" y="709277"/>
+            <a:ext cx="1359585" cy="276999"/>
           </a:xfrm>
           <a:prstGeom prst="rect">
             <a:avLst/>
@@ -3723,7 +4028,7 @@
                 <a:latin typeface="Arial" panose="020B0604020202020204" pitchFamily="34" charset="0"/>
                 <a:cs typeface="Arial" panose="020B0604020202020204" pitchFamily="34" charset="0"/>
               </a:rPr>
-              <a:t>UAV Swarm Access</a:t>
+              <a:t>Trust Branches</a:t>
             </a:r>
             <a:endParaRPr lang="zh-CN" altLang="en-US" sz="1200" b="1" dirty="0">
               <a:latin typeface="Arial" panose="020B0604020202020204" pitchFamily="34" charset="0"/>
@@ -3732,68 +4037,76 @@
           </a:p>
         </p:txBody>
       </p:sp>
-      <p:sp>
-        <p:nvSpPr>
-          <p:cNvPr id="52" name="等腰三角形 51">
-            <a:extLst>
-              <a:ext uri="{FF2B5EF4-FFF2-40B4-BE49-F238E27FC236}">
-                <a16:creationId xmlns:a16="http://schemas.microsoft.com/office/drawing/2014/main" id="{0A26FEF8-A27A-0DF8-2A95-3C06856991A9}"/>
-              </a:ext>
-            </a:extLst>
-          </p:cNvPr>
-          <p:cNvSpPr/>
-          <p:nvPr/>
-        </p:nvSpPr>
-        <p:spPr>
-          <a:xfrm rot="5400000">
-            <a:off x="2164469" y="1529441"/>
-            <a:ext cx="505104" cy="358480"/>
-          </a:xfrm>
-          <a:prstGeom prst="triangle">
-            <a:avLst/>
-          </a:prstGeom>
-        </p:spPr>
-        <p:style>
-          <a:lnRef idx="2">
-            <a:schemeClr val="accent2">
-              <a:shade val="15000"/>
-            </a:schemeClr>
-          </a:lnRef>
-          <a:fillRef idx="1">
-            <a:schemeClr val="accent2"/>
-          </a:fillRef>
-          <a:effectRef idx="0">
-            <a:schemeClr val="accent2"/>
-          </a:effectRef>
-          <a:fontRef idx="minor">
-            <a:schemeClr val="lt1"/>
-          </a:fontRef>
-        </p:style>
-        <p:txBody>
-          <a:bodyPr rtlCol="0" anchor="ctr"/>
-          <a:lstStyle/>
-          <a:p>
-            <a:pPr algn="ctr"/>
-            <a:endParaRPr lang="zh-CN" altLang="en-US"/>
-          </a:p>
-        </p:txBody>
-      </p:sp>
       <p:pic>
         <p:nvPicPr>
-          <p:cNvPr id="55" name="图片 54">
-            <a:extLst>
-              <a:ext uri="{FF2B5EF4-FFF2-40B4-BE49-F238E27FC236}">
-                <a16:creationId xmlns:a16="http://schemas.microsoft.com/office/drawing/2014/main" id="{24D0C681-D262-38F2-941B-90E58A950A6E}"/>
-              </a:ext>
-            </a:extLst>
-          </p:cNvPr>
+          <p:cNvPr id="91" name="图形 90" descr="计算机"/>
           <p:cNvPicPr>
             <a:picLocks noChangeAspect="1"/>
           </p:cNvPicPr>
           <p:nvPr/>
         </p:nvPicPr>
         <p:blipFill>
-          <a:blip r:embed="rId7" cstate="print">
+          <a:blip r:embed="rId7">
+            <a:extLst>
+              <a:ext uri="{96DAC541-7B7A-43D3-8B79-37D633B846F1}">
+                <asvg:svgBlip xmlns:asvg="http://schemas.microsoft.com/office/drawing/2016/SVG/main" r:embed="rId8"/>
+              </a:ext>
+            </a:extLst>
+          </a:blip>
+          <a:stretch>
+            <a:fillRect/>
+          </a:stretch>
+        </p:blipFill>
+        <p:spPr>
+          <a:xfrm>
+            <a:off x="753950" y="3561217"/>
+            <a:ext cx="914400" cy="914400"/>
+          </a:xfrm>
+          <a:prstGeom prst="rect">
+            <a:avLst/>
+          </a:prstGeom>
+        </p:spPr>
+      </p:pic>
+      <p:pic>
+        <p:nvPicPr>
+          <p:cNvPr id="93" name="图形 92" descr="数据库"/>
+          <p:cNvPicPr>
+            <a:picLocks noChangeAspect="1"/>
+          </p:cNvPicPr>
+          <p:nvPr/>
+        </p:nvPicPr>
+        <p:blipFill>
+          <a:blip r:embed="rId9">
+            <a:extLst>
+              <a:ext uri="{96DAC541-7B7A-43D3-8B79-37D633B846F1}">
+                <asvg:svgBlip xmlns:asvg="http://schemas.microsoft.com/office/drawing/2016/SVG/main" r:embed="rId10"/>
+              </a:ext>
+            </a:extLst>
+          </a:blip>
+          <a:stretch>
+            <a:fillRect/>
+          </a:stretch>
+        </p:blipFill>
+        <p:spPr>
+          <a:xfrm>
+            <a:off x="130137" y="4497686"/>
+            <a:ext cx="914400" cy="914400"/>
+          </a:xfrm>
+          <a:prstGeom prst="rect">
+            <a:avLst/>
+          </a:prstGeom>
+        </p:spPr>
+      </p:pic>
+      <p:pic>
+        <p:nvPicPr>
+          <p:cNvPr id="95" name="图片 94"/>
+          <p:cNvPicPr>
+            <a:picLocks noChangeAspect="1"/>
+          </p:cNvPicPr>
+          <p:nvPr/>
+        </p:nvPicPr>
+        <p:blipFill>
+          <a:blip r:embed="rId11" cstate="print">
             <a:extLst>
               <a:ext uri="{28A0092B-C50C-407E-A947-70E740481C1C}">
                 <a14:useLocalDpi xmlns:a14="http://schemas.microsoft.com/office/drawing/2010/main" val="0"/>
@@ -3806,553 +4119,24 @@
         </p:blipFill>
         <p:spPr>
           <a:xfrm>
-            <a:off x="2795041" y="1424497"/>
-            <a:ext cx="583878" cy="583878"/>
-          </a:xfrm>
-          <a:prstGeom prst="rect">
-            <a:avLst/>
-          </a:prstGeom>
-          <a:solidFill>
-            <a:schemeClr val="accent1"/>
-          </a:solidFill>
+            <a:off x="5259981" y="1252239"/>
+            <a:ext cx="313054" cy="313054"/>
+          </a:xfrm>
+          <a:prstGeom prst="rect">
+            <a:avLst/>
+          </a:prstGeom>
         </p:spPr>
       </p:pic>
-      <p:sp>
-        <p:nvSpPr>
-          <p:cNvPr id="56" name="文本框 55">
-            <a:extLst>
-              <a:ext uri="{FF2B5EF4-FFF2-40B4-BE49-F238E27FC236}">
-                <a16:creationId xmlns:a16="http://schemas.microsoft.com/office/drawing/2014/main" id="{B449F9B5-2C1C-5FD8-E662-BBE2ED97DB07}"/>
-              </a:ext>
-            </a:extLst>
-          </p:cNvPr>
-          <p:cNvSpPr txBox="1"/>
-          <p:nvPr/>
-        </p:nvSpPr>
-        <p:spPr>
-          <a:xfrm>
-            <a:off x="2348011" y="2104396"/>
-            <a:ext cx="1834001" cy="276999"/>
-          </a:xfrm>
-          <a:prstGeom prst="rect">
-            <a:avLst/>
-          </a:prstGeom>
-          <a:noFill/>
-        </p:spPr>
-        <p:txBody>
-          <a:bodyPr wrap="square" rtlCol="0">
-            <a:spAutoFit/>
-          </a:bodyPr>
-          <a:lstStyle/>
-          <a:p>
-            <a:r>
-              <a:rPr lang="en-US" altLang="zh-CN" sz="1200" b="1" dirty="0">
-                <a:latin typeface="Arial" panose="020B0604020202020204" pitchFamily="34" charset="0"/>
-                <a:cs typeface="Arial" panose="020B0604020202020204" pitchFamily="34" charset="0"/>
-              </a:rPr>
-              <a:t>Summarization Agent</a:t>
-            </a:r>
-            <a:endParaRPr lang="zh-CN" altLang="en-US" sz="1200" b="1" dirty="0">
-              <a:latin typeface="Arial" panose="020B0604020202020204" pitchFamily="34" charset="0"/>
-              <a:cs typeface="Arial" panose="020B0604020202020204" pitchFamily="34" charset="0"/>
-            </a:endParaRPr>
-          </a:p>
-        </p:txBody>
-      </p:sp>
-      <p:cxnSp>
-        <p:nvCxnSpPr>
-          <p:cNvPr id="70" name="直接箭头连接符 69">
-            <a:extLst>
-              <a:ext uri="{FF2B5EF4-FFF2-40B4-BE49-F238E27FC236}">
-                <a16:creationId xmlns:a16="http://schemas.microsoft.com/office/drawing/2014/main" id="{473B2EE4-3FA7-223B-53D2-D560040774A7}"/>
-              </a:ext>
-            </a:extLst>
-          </p:cNvPr>
-          <p:cNvCxnSpPr>
-            <a:cxnSpLocks/>
-          </p:cNvCxnSpPr>
-          <p:nvPr/>
-        </p:nvCxnSpPr>
-        <p:spPr>
-          <a:xfrm flipV="1">
-            <a:off x="4096601" y="1441505"/>
-            <a:ext cx="437627" cy="274931"/>
-          </a:xfrm>
-          <a:prstGeom prst="straightConnector1">
-            <a:avLst/>
-          </a:prstGeom>
-          <a:ln>
-            <a:tailEnd type="triangle"/>
-          </a:ln>
-        </p:spPr>
-        <p:style>
-          <a:lnRef idx="3">
-            <a:schemeClr val="dk1"/>
-          </a:lnRef>
-          <a:fillRef idx="0">
-            <a:schemeClr val="dk1"/>
-          </a:fillRef>
-          <a:effectRef idx="2">
-            <a:schemeClr val="dk1"/>
-          </a:effectRef>
-          <a:fontRef idx="minor">
-            <a:schemeClr val="tx1"/>
-          </a:fontRef>
-        </p:style>
-      </p:cxnSp>
-      <p:cxnSp>
-        <p:nvCxnSpPr>
-          <p:cNvPr id="71" name="直接箭头连接符 70">
-            <a:extLst>
-              <a:ext uri="{FF2B5EF4-FFF2-40B4-BE49-F238E27FC236}">
-                <a16:creationId xmlns:a16="http://schemas.microsoft.com/office/drawing/2014/main" id="{7900032B-8A67-BACE-DF39-45AEC47030BC}"/>
-              </a:ext>
-            </a:extLst>
-          </p:cNvPr>
-          <p:cNvCxnSpPr>
-            <a:cxnSpLocks/>
-          </p:cNvCxnSpPr>
-          <p:nvPr/>
-        </p:nvCxnSpPr>
-        <p:spPr>
-          <a:xfrm>
-            <a:off x="4096424" y="1716436"/>
-            <a:ext cx="437982" cy="252552"/>
-          </a:xfrm>
-          <a:prstGeom prst="straightConnector1">
-            <a:avLst/>
-          </a:prstGeom>
-          <a:ln>
-            <a:tailEnd type="triangle"/>
-          </a:ln>
-        </p:spPr>
-        <p:style>
-          <a:lnRef idx="3">
-            <a:schemeClr val="dk1"/>
-          </a:lnRef>
-          <a:fillRef idx="0">
-            <a:schemeClr val="dk1"/>
-          </a:fillRef>
-          <a:effectRef idx="2">
-            <a:schemeClr val="dk1"/>
-          </a:effectRef>
-          <a:fontRef idx="minor">
-            <a:schemeClr val="tx1"/>
-          </a:fontRef>
-        </p:style>
-      </p:cxnSp>
-      <p:sp>
-        <p:nvSpPr>
-          <p:cNvPr id="77" name="流程图: 接点 76">
-            <a:extLst>
-              <a:ext uri="{FF2B5EF4-FFF2-40B4-BE49-F238E27FC236}">
-                <a16:creationId xmlns:a16="http://schemas.microsoft.com/office/drawing/2014/main" id="{676FCAD1-9934-6875-C054-D818E3E72302}"/>
-              </a:ext>
-            </a:extLst>
-          </p:cNvPr>
-          <p:cNvSpPr/>
-          <p:nvPr/>
-        </p:nvSpPr>
-        <p:spPr>
-          <a:xfrm>
-            <a:off x="4604086" y="1030937"/>
-            <a:ext cx="491479" cy="425192"/>
-          </a:xfrm>
-          <a:prstGeom prst="flowChartConnector">
-            <a:avLst/>
-          </a:prstGeom>
-          <a:solidFill>
-            <a:schemeClr val="bg1">
-              <a:lumMod val="95000"/>
-            </a:schemeClr>
-          </a:solidFill>
-        </p:spPr>
-        <p:style>
-          <a:lnRef idx="2">
-            <a:schemeClr val="dk1"/>
-          </a:lnRef>
-          <a:fillRef idx="1">
-            <a:schemeClr val="lt1"/>
-          </a:fillRef>
-          <a:effectRef idx="0">
-            <a:schemeClr val="dk1"/>
-          </a:effectRef>
-          <a:fontRef idx="minor">
-            <a:schemeClr val="dk1"/>
-          </a:fontRef>
-        </p:style>
-        <p:txBody>
-          <a:bodyPr rtlCol="0" anchor="ctr"/>
-          <a:lstStyle/>
-          <a:p>
-            <a:pPr algn="ctr"/>
-            <a:r>
-              <a:rPr lang="en-US" altLang="zh-CN" sz="1100" dirty="0">
-                <a:latin typeface="Arial" panose="020B0604020202020204" pitchFamily="34" charset="0"/>
-                <a:cs typeface="Arial" panose="020B0604020202020204" pitchFamily="34" charset="0"/>
-              </a:rPr>
-              <a:t>T1</a:t>
-            </a:r>
-            <a:endParaRPr lang="zh-CN" altLang="en-US" sz="1100" dirty="0">
-              <a:latin typeface="Arial" panose="020B0604020202020204" pitchFamily="34" charset="0"/>
-              <a:cs typeface="Arial" panose="020B0604020202020204" pitchFamily="34" charset="0"/>
-            </a:endParaRPr>
-          </a:p>
-        </p:txBody>
-      </p:sp>
-      <p:cxnSp>
-        <p:nvCxnSpPr>
-          <p:cNvPr id="81" name="直接连接符 80">
-            <a:extLst>
-              <a:ext uri="{FF2B5EF4-FFF2-40B4-BE49-F238E27FC236}">
-                <a16:creationId xmlns:a16="http://schemas.microsoft.com/office/drawing/2014/main" id="{B0821C48-2641-C575-9CCA-F6EFA648FBD3}"/>
-              </a:ext>
-            </a:extLst>
-          </p:cNvPr>
-          <p:cNvCxnSpPr>
-            <a:cxnSpLocks/>
-            <a:stCxn id="55" idx="3"/>
-          </p:cNvCxnSpPr>
-          <p:nvPr/>
-        </p:nvCxnSpPr>
-        <p:spPr>
-          <a:xfrm>
-            <a:off x="3378919" y="1716436"/>
-            <a:ext cx="746474" cy="0"/>
-          </a:xfrm>
-          <a:prstGeom prst="line">
-            <a:avLst/>
-          </a:prstGeom>
-        </p:spPr>
-        <p:style>
-          <a:lnRef idx="3">
-            <a:schemeClr val="dk1"/>
-          </a:lnRef>
-          <a:fillRef idx="0">
-            <a:schemeClr val="dk1"/>
-          </a:fillRef>
-          <a:effectRef idx="2">
-            <a:schemeClr val="dk1"/>
-          </a:effectRef>
-          <a:fontRef idx="minor">
-            <a:schemeClr val="tx1"/>
-          </a:fontRef>
-        </p:style>
-      </p:cxnSp>
-      <p:cxnSp>
-        <p:nvCxnSpPr>
-          <p:cNvPr id="84" name="直接箭头连接符 83">
-            <a:extLst>
-              <a:ext uri="{FF2B5EF4-FFF2-40B4-BE49-F238E27FC236}">
-                <a16:creationId xmlns:a16="http://schemas.microsoft.com/office/drawing/2014/main" id="{00074B18-9294-B8DA-B6C7-A5248F0DC2F2}"/>
-              </a:ext>
-            </a:extLst>
-          </p:cNvPr>
-          <p:cNvCxnSpPr>
-            <a:cxnSpLocks/>
-          </p:cNvCxnSpPr>
-          <p:nvPr/>
-        </p:nvCxnSpPr>
-        <p:spPr>
-          <a:xfrm flipV="1">
-            <a:off x="5180994" y="1205984"/>
-            <a:ext cx="580695" cy="5172"/>
-          </a:xfrm>
-          <a:prstGeom prst="straightConnector1">
-            <a:avLst/>
-          </a:prstGeom>
-          <a:ln>
-            <a:tailEnd type="triangle"/>
-          </a:ln>
-        </p:spPr>
-        <p:style>
-          <a:lnRef idx="3">
-            <a:schemeClr val="dk1"/>
-          </a:lnRef>
-          <a:fillRef idx="0">
-            <a:schemeClr val="dk1"/>
-          </a:fillRef>
-          <a:effectRef idx="2">
-            <a:schemeClr val="dk1"/>
-          </a:effectRef>
-          <a:fontRef idx="minor">
-            <a:schemeClr val="tx1"/>
-          </a:fontRef>
-        </p:style>
-      </p:cxnSp>
-      <p:cxnSp>
-        <p:nvCxnSpPr>
-          <p:cNvPr id="86" name="直接箭头连接符 85">
-            <a:extLst>
-              <a:ext uri="{FF2B5EF4-FFF2-40B4-BE49-F238E27FC236}">
-                <a16:creationId xmlns:a16="http://schemas.microsoft.com/office/drawing/2014/main" id="{76CFBDCB-DD4F-FD47-65E0-ED92EFDB606A}"/>
-              </a:ext>
-            </a:extLst>
-          </p:cNvPr>
-          <p:cNvCxnSpPr>
-            <a:cxnSpLocks/>
-          </p:cNvCxnSpPr>
-          <p:nvPr/>
-        </p:nvCxnSpPr>
-        <p:spPr>
-          <a:xfrm flipV="1">
-            <a:off x="5180995" y="2214877"/>
-            <a:ext cx="580695" cy="5172"/>
-          </a:xfrm>
-          <a:prstGeom prst="straightConnector1">
-            <a:avLst/>
-          </a:prstGeom>
-          <a:ln>
-            <a:tailEnd type="triangle"/>
-          </a:ln>
-        </p:spPr>
-        <p:style>
-          <a:lnRef idx="3">
-            <a:schemeClr val="dk1"/>
-          </a:lnRef>
-          <a:fillRef idx="0">
-            <a:schemeClr val="dk1"/>
-          </a:fillRef>
-          <a:effectRef idx="2">
-            <a:schemeClr val="dk1"/>
-          </a:effectRef>
-          <a:fontRef idx="minor">
-            <a:schemeClr val="tx1"/>
-          </a:fontRef>
-        </p:style>
-      </p:cxnSp>
-      <p:sp>
-        <p:nvSpPr>
-          <p:cNvPr id="87" name="文本框 86">
-            <a:extLst>
-              <a:ext uri="{FF2B5EF4-FFF2-40B4-BE49-F238E27FC236}">
-                <a16:creationId xmlns:a16="http://schemas.microsoft.com/office/drawing/2014/main" id="{6DD7EF4D-3295-644A-3F4B-6AE19451D35B}"/>
-              </a:ext>
-            </a:extLst>
-          </p:cNvPr>
-          <p:cNvSpPr txBox="1"/>
-          <p:nvPr/>
-        </p:nvSpPr>
-        <p:spPr>
-          <a:xfrm>
-            <a:off x="4388582" y="-47336"/>
-            <a:ext cx="3191958" cy="646331"/>
-          </a:xfrm>
-          <a:prstGeom prst="rect">
-            <a:avLst/>
-          </a:prstGeom>
-          <a:noFill/>
-        </p:spPr>
-        <p:txBody>
-          <a:bodyPr wrap="square" rtlCol="0">
-            <a:spAutoFit/>
-          </a:bodyPr>
-          <a:lstStyle/>
-          <a:p>
-            <a:pPr algn="ctr"/>
-            <a:r>
-              <a:rPr lang="en-US" altLang="zh-CN" b="1" dirty="0">
-                <a:latin typeface="Arial" panose="020B0604020202020204" pitchFamily="34" charset="0"/>
-                <a:cs typeface="Arial" panose="020B0604020202020204" pitchFamily="34" charset="0"/>
-              </a:rPr>
-              <a:t>Multi-factor Trust Evaluation Mechanism</a:t>
-            </a:r>
-            <a:endParaRPr lang="zh-CN" altLang="en-US" b="1" dirty="0">
-              <a:latin typeface="Arial" panose="020B0604020202020204" pitchFamily="34" charset="0"/>
-              <a:cs typeface="Arial" panose="020B0604020202020204" pitchFamily="34" charset="0"/>
-            </a:endParaRPr>
-          </a:p>
-        </p:txBody>
-      </p:sp>
-      <p:sp>
-        <p:nvSpPr>
-          <p:cNvPr id="88" name="流程图: 接点 87">
-            <a:extLst>
-              <a:ext uri="{FF2B5EF4-FFF2-40B4-BE49-F238E27FC236}">
-                <a16:creationId xmlns:a16="http://schemas.microsoft.com/office/drawing/2014/main" id="{29475661-28F3-E8E0-B29E-4AFF313C2556}"/>
-              </a:ext>
-            </a:extLst>
-          </p:cNvPr>
-          <p:cNvSpPr/>
-          <p:nvPr/>
-        </p:nvSpPr>
-        <p:spPr>
-          <a:xfrm>
-            <a:off x="4588091" y="1999317"/>
-            <a:ext cx="491479" cy="425192"/>
-          </a:xfrm>
-          <a:prstGeom prst="flowChartConnector">
-            <a:avLst/>
-          </a:prstGeom>
-          <a:solidFill>
-            <a:schemeClr val="bg1">
-              <a:lumMod val="95000"/>
-            </a:schemeClr>
-          </a:solidFill>
-        </p:spPr>
-        <p:style>
-          <a:lnRef idx="2">
-            <a:schemeClr val="dk1"/>
-          </a:lnRef>
-          <a:fillRef idx="1">
-            <a:schemeClr val="lt1"/>
-          </a:fillRef>
-          <a:effectRef idx="0">
-            <a:schemeClr val="dk1"/>
-          </a:effectRef>
-          <a:fontRef idx="minor">
-            <a:schemeClr val="dk1"/>
-          </a:fontRef>
-        </p:style>
-        <p:txBody>
-          <a:bodyPr rtlCol="0" anchor="ctr"/>
-          <a:lstStyle/>
-          <a:p>
-            <a:pPr algn="ctr"/>
-            <a:r>
-              <a:rPr lang="en-US" altLang="zh-CN" sz="1100" dirty="0">
-                <a:latin typeface="Arial" panose="020B0604020202020204" pitchFamily="34" charset="0"/>
-                <a:cs typeface="Arial" panose="020B0604020202020204" pitchFamily="34" charset="0"/>
-              </a:rPr>
-              <a:t>T2</a:t>
-            </a:r>
-            <a:endParaRPr lang="zh-CN" altLang="en-US" sz="1100" dirty="0">
-              <a:latin typeface="Arial" panose="020B0604020202020204" pitchFamily="34" charset="0"/>
-              <a:cs typeface="Arial" panose="020B0604020202020204" pitchFamily="34" charset="0"/>
-            </a:endParaRPr>
-          </a:p>
-        </p:txBody>
-      </p:sp>
-      <p:sp>
-        <p:nvSpPr>
-          <p:cNvPr id="89" name="文本框 88">
-            <a:extLst>
-              <a:ext uri="{FF2B5EF4-FFF2-40B4-BE49-F238E27FC236}">
-                <a16:creationId xmlns:a16="http://schemas.microsoft.com/office/drawing/2014/main" id="{4AF9929D-4429-839E-E127-B4AFF322B387}"/>
-              </a:ext>
-            </a:extLst>
-          </p:cNvPr>
-          <p:cNvSpPr txBox="1"/>
-          <p:nvPr/>
-        </p:nvSpPr>
-        <p:spPr>
-          <a:xfrm>
-            <a:off x="4269979" y="709277"/>
-            <a:ext cx="1359585" cy="276999"/>
-          </a:xfrm>
-          <a:prstGeom prst="rect">
-            <a:avLst/>
-          </a:prstGeom>
-          <a:noFill/>
-        </p:spPr>
-        <p:txBody>
-          <a:bodyPr wrap="square" rtlCol="0">
-            <a:spAutoFit/>
-          </a:bodyPr>
-          <a:lstStyle/>
-          <a:p>
-            <a:r>
-              <a:rPr lang="en-US" altLang="zh-CN" sz="1200" b="1" dirty="0">
-                <a:latin typeface="Arial" panose="020B0604020202020204" pitchFamily="34" charset="0"/>
-                <a:cs typeface="Arial" panose="020B0604020202020204" pitchFamily="34" charset="0"/>
-              </a:rPr>
-              <a:t>Trust Branches</a:t>
-            </a:r>
-            <a:endParaRPr lang="zh-CN" altLang="en-US" sz="1200" b="1" dirty="0">
-              <a:latin typeface="Arial" panose="020B0604020202020204" pitchFamily="34" charset="0"/>
-              <a:cs typeface="Arial" panose="020B0604020202020204" pitchFamily="34" charset="0"/>
-            </a:endParaRPr>
-          </a:p>
-        </p:txBody>
-      </p:sp>
       <p:pic>
         <p:nvPicPr>
-          <p:cNvPr id="91" name="图形 90" descr="计算机">
-            <a:extLst>
-              <a:ext uri="{FF2B5EF4-FFF2-40B4-BE49-F238E27FC236}">
-                <a16:creationId xmlns:a16="http://schemas.microsoft.com/office/drawing/2014/main" id="{174EF41F-BA37-3797-F4D1-8844A4508E2B}"/>
-              </a:ext>
-            </a:extLst>
-          </p:cNvPr>
+          <p:cNvPr id="96" name="图片 95"/>
           <p:cNvPicPr>
             <a:picLocks noChangeAspect="1"/>
           </p:cNvPicPr>
           <p:nvPr/>
         </p:nvPicPr>
         <p:blipFill>
-          <a:blip>
-            <a:extLst>
-              <a:ext uri="{96DAC541-7B7A-43D3-8B79-37D633B846F1}">
-                <asvg:svgBlip xmlns:asvg="http://schemas.microsoft.com/office/drawing/2016/SVG/main" r:embed="rId8"/>
-              </a:ext>
-            </a:extLst>
-          </a:blip>
-          <a:stretch>
-            <a:fillRect/>
-          </a:stretch>
-        </p:blipFill>
-        <p:spPr>
-          <a:xfrm>
-            <a:off x="753950" y="3561217"/>
-            <a:ext cx="914400" cy="914400"/>
-          </a:xfrm>
-          <a:prstGeom prst="rect">
-            <a:avLst/>
-          </a:prstGeom>
-        </p:spPr>
-      </p:pic>
-      <p:pic>
-        <p:nvPicPr>
-          <p:cNvPr id="93" name="图形 92" descr="数据库">
-            <a:extLst>
-              <a:ext uri="{FF2B5EF4-FFF2-40B4-BE49-F238E27FC236}">
-                <a16:creationId xmlns:a16="http://schemas.microsoft.com/office/drawing/2014/main" id="{DE0C4434-9F61-1565-E51C-2F1E9F475B93}"/>
-              </a:ext>
-            </a:extLst>
-          </p:cNvPr>
-          <p:cNvPicPr>
-            <a:picLocks noChangeAspect="1"/>
-          </p:cNvPicPr>
-          <p:nvPr/>
-        </p:nvPicPr>
-        <p:blipFill>
-          <a:blip>
-            <a:extLst>
-              <a:ext uri="{96DAC541-7B7A-43D3-8B79-37D633B846F1}">
-                <asvg:svgBlip xmlns:asvg="http://schemas.microsoft.com/office/drawing/2016/SVG/main" r:embed="rId9"/>
-              </a:ext>
-            </a:extLst>
-          </a:blip>
-          <a:stretch>
-            <a:fillRect/>
-          </a:stretch>
-        </p:blipFill>
-        <p:spPr>
-          <a:xfrm>
-            <a:off x="130137" y="4497686"/>
-            <a:ext cx="914400" cy="914400"/>
-          </a:xfrm>
-          <a:prstGeom prst="rect">
-            <a:avLst/>
-          </a:prstGeom>
-        </p:spPr>
-      </p:pic>
-      <p:pic>
-        <p:nvPicPr>
-          <p:cNvPr id="95" name="图片 94">
-            <a:extLst>
-              <a:ext uri="{FF2B5EF4-FFF2-40B4-BE49-F238E27FC236}">
-                <a16:creationId xmlns:a16="http://schemas.microsoft.com/office/drawing/2014/main" id="{D936140F-4260-5A52-E019-CD75F9ACAA60}"/>
-              </a:ext>
-            </a:extLst>
-          </p:cNvPr>
-          <p:cNvPicPr>
-            <a:picLocks noChangeAspect="1"/>
-          </p:cNvPicPr>
-          <p:nvPr/>
-        </p:nvPicPr>
-        <p:blipFill>
-          <a:blip r:embed="rId10" cstate="print">
+          <a:blip r:embed="rId11" cstate="print">
             <a:extLst>
               <a:ext uri="{28A0092B-C50C-407E-A947-70E740481C1C}">
                 <a14:useLocalDpi xmlns:a14="http://schemas.microsoft.com/office/drawing/2010/main" val="0"/>
@@ -4365,42 +4149,6 @@
         </p:blipFill>
         <p:spPr>
           <a:xfrm>
-            <a:off x="5259981" y="1252239"/>
-            <a:ext cx="313054" cy="313054"/>
-          </a:xfrm>
-          <a:prstGeom prst="rect">
-            <a:avLst/>
-          </a:prstGeom>
-        </p:spPr>
-      </p:pic>
-      <p:pic>
-        <p:nvPicPr>
-          <p:cNvPr id="96" name="图片 95">
-            <a:extLst>
-              <a:ext uri="{FF2B5EF4-FFF2-40B4-BE49-F238E27FC236}">
-                <a16:creationId xmlns:a16="http://schemas.microsoft.com/office/drawing/2014/main" id="{BEFD28AB-1C0D-A9BF-C95A-4279CC44D612}"/>
-              </a:ext>
-            </a:extLst>
-          </p:cNvPr>
-          <p:cNvPicPr>
-            <a:picLocks noChangeAspect="1"/>
-          </p:cNvPicPr>
-          <p:nvPr/>
-        </p:nvPicPr>
-        <p:blipFill>
-          <a:blip r:embed="rId10" cstate="print">
-            <a:extLst>
-              <a:ext uri="{28A0092B-C50C-407E-A947-70E740481C1C}">
-                <a14:useLocalDpi xmlns:a14="http://schemas.microsoft.com/office/drawing/2010/main" val="0"/>
-              </a:ext>
-            </a:extLst>
-          </a:blip>
-          <a:stretch>
-            <a:fillRect/>
-          </a:stretch>
-        </p:blipFill>
-        <p:spPr>
-          <a:xfrm>
             <a:off x="5267521" y="2262834"/>
             <a:ext cx="313054" cy="313054"/>
           </a:xfrm>
@@ -4411,13 +4159,7 @@
       </p:pic>
       <p:sp>
         <p:nvSpPr>
-          <p:cNvPr id="97" name="文本框 96">
-            <a:extLst>
-              <a:ext uri="{FF2B5EF4-FFF2-40B4-BE49-F238E27FC236}">
-                <a16:creationId xmlns:a16="http://schemas.microsoft.com/office/drawing/2014/main" id="{8C56BC93-271E-8840-70B8-2E5B891B97F3}"/>
-              </a:ext>
-            </a:extLst>
-          </p:cNvPr>
+          <p:cNvPr id="97" name="文本框 96"/>
           <p:cNvSpPr txBox="1"/>
           <p:nvPr/>
         </p:nvSpPr>
@@ -4453,13 +4195,7 @@
       </p:sp>
       <p:sp>
         <p:nvSpPr>
-          <p:cNvPr id="98" name="文本框 97">
-            <a:extLst>
-              <a:ext uri="{FF2B5EF4-FFF2-40B4-BE49-F238E27FC236}">
-                <a16:creationId xmlns:a16="http://schemas.microsoft.com/office/drawing/2014/main" id="{BD191A83-A1CB-9105-D176-8F1E72BF9519}"/>
-              </a:ext>
-            </a:extLst>
-          </p:cNvPr>
+          <p:cNvPr id="98" name="文本框 97"/>
           <p:cNvSpPr txBox="1"/>
           <p:nvPr/>
         </p:nvSpPr>
@@ -4495,13 +4231,7 @@
       </p:sp>
       <p:sp>
         <p:nvSpPr>
-          <p:cNvPr id="99" name="流程图: 资料带 98">
-            <a:extLst>
-              <a:ext uri="{FF2B5EF4-FFF2-40B4-BE49-F238E27FC236}">
-                <a16:creationId xmlns:a16="http://schemas.microsoft.com/office/drawing/2014/main" id="{9D209E32-1476-476C-1DC6-1A0A434C8B11}"/>
-              </a:ext>
-            </a:extLst>
-          </p:cNvPr>
+          <p:cNvPr id="99" name="流程图: 资料带 98"/>
           <p:cNvSpPr/>
           <p:nvPr/>
         </p:nvSpPr>
@@ -4544,13 +4274,7 @@
       </p:sp>
       <p:sp>
         <p:nvSpPr>
-          <p:cNvPr id="102" name="流程图: 资料带 101">
-            <a:extLst>
-              <a:ext uri="{FF2B5EF4-FFF2-40B4-BE49-F238E27FC236}">
-                <a16:creationId xmlns:a16="http://schemas.microsoft.com/office/drawing/2014/main" id="{E88432EF-FA65-EE07-1174-F62B34AD9E96}"/>
-              </a:ext>
-            </a:extLst>
-          </p:cNvPr>
+          <p:cNvPr id="102" name="流程图: 资料带 101"/>
           <p:cNvSpPr/>
           <p:nvPr/>
         </p:nvSpPr>
@@ -4593,13 +4317,7 @@
       </p:sp>
       <p:sp>
         <p:nvSpPr>
-          <p:cNvPr id="103" name="流程图: 资料带 102">
-            <a:extLst>
-              <a:ext uri="{FF2B5EF4-FFF2-40B4-BE49-F238E27FC236}">
-                <a16:creationId xmlns:a16="http://schemas.microsoft.com/office/drawing/2014/main" id="{B5497CE8-74E4-B074-D118-D16120E1C6CC}"/>
-              </a:ext>
-            </a:extLst>
-          </p:cNvPr>
+          <p:cNvPr id="103" name="流程图: 资料带 102"/>
           <p:cNvSpPr/>
           <p:nvPr/>
         </p:nvSpPr>
@@ -4658,20 +4376,14 @@
       </p:sp>
       <p:pic>
         <p:nvPicPr>
-          <p:cNvPr id="104" name="图片 103">
-            <a:extLst>
-              <a:ext uri="{FF2B5EF4-FFF2-40B4-BE49-F238E27FC236}">
-                <a16:creationId xmlns:a16="http://schemas.microsoft.com/office/drawing/2014/main" id="{DA993FE2-C0B5-784C-C72E-E069FC053DE3}"/>
-              </a:ext>
-            </a:extLst>
-          </p:cNvPr>
+          <p:cNvPr id="104" name="图片 103"/>
           <p:cNvPicPr>
             <a:picLocks noChangeAspect="1"/>
           </p:cNvPicPr>
           <p:nvPr/>
         </p:nvPicPr>
         <p:blipFill>
-          <a:blip r:embed="rId11"/>
+          <a:blip r:embed="rId12"/>
           <a:stretch>
             <a:fillRect/>
           </a:stretch>
@@ -4691,13 +4403,7 @@
       </p:pic>
       <p:sp>
         <p:nvSpPr>
-          <p:cNvPr id="114" name="流程图: 资料带 113">
-            <a:extLst>
-              <a:ext uri="{FF2B5EF4-FFF2-40B4-BE49-F238E27FC236}">
-                <a16:creationId xmlns:a16="http://schemas.microsoft.com/office/drawing/2014/main" id="{BE01831F-AEEB-7E03-64BA-D0827BD0AFE6}"/>
-              </a:ext>
-            </a:extLst>
-          </p:cNvPr>
+          <p:cNvPr id="114" name="流程图: 资料带 113"/>
           <p:cNvSpPr/>
           <p:nvPr/>
         </p:nvSpPr>
@@ -4740,13 +4446,7 @@
       </p:sp>
       <p:sp>
         <p:nvSpPr>
-          <p:cNvPr id="115" name="流程图: 资料带 114">
-            <a:extLst>
-              <a:ext uri="{FF2B5EF4-FFF2-40B4-BE49-F238E27FC236}">
-                <a16:creationId xmlns:a16="http://schemas.microsoft.com/office/drawing/2014/main" id="{930717C8-EE51-1E9D-BD1D-36547853FD65}"/>
-              </a:ext>
-            </a:extLst>
-          </p:cNvPr>
+          <p:cNvPr id="115" name="流程图: 资料带 114"/>
           <p:cNvSpPr/>
           <p:nvPr/>
         </p:nvSpPr>
@@ -4789,13 +4489,7 @@
       </p:sp>
       <p:sp>
         <p:nvSpPr>
-          <p:cNvPr id="116" name="流程图: 资料带 115">
-            <a:extLst>
-              <a:ext uri="{FF2B5EF4-FFF2-40B4-BE49-F238E27FC236}">
-                <a16:creationId xmlns:a16="http://schemas.microsoft.com/office/drawing/2014/main" id="{A523FFD8-0672-9785-CC0B-BA304B608AF8}"/>
-              </a:ext>
-            </a:extLst>
-          </p:cNvPr>
+          <p:cNvPr id="116" name="流程图: 资料带 115"/>
           <p:cNvSpPr/>
           <p:nvPr/>
         </p:nvSpPr>
@@ -4845,7 +4539,6 @@
               <a:buSzTx/>
               <a:buFontTx/>
               <a:buNone/>
-              <a:tabLst/>
               <a:defRPr/>
             </a:pPr>
             <a:endParaRPr kumimoji="0" lang="en-US" altLang="zh-CN" sz="1200" b="1" i="0" u="none" strike="noStrike" kern="1200" cap="none" spc="0" normalizeH="0" baseline="0" noProof="0" dirty="0">
@@ -4917,23 +4610,17 @@
       </p:sp>
       <p:pic>
         <p:nvPicPr>
-          <p:cNvPr id="118" name="图形 117" descr="研究">
-            <a:extLst>
-              <a:ext uri="{FF2B5EF4-FFF2-40B4-BE49-F238E27FC236}">
-                <a16:creationId xmlns:a16="http://schemas.microsoft.com/office/drawing/2014/main" id="{838C1388-FB0E-28D2-FA82-748350C058C9}"/>
-              </a:ext>
-            </a:extLst>
-          </p:cNvPr>
+          <p:cNvPr id="118" name="图形 117" descr="研究"/>
           <p:cNvPicPr>
             <a:picLocks noChangeAspect="1"/>
           </p:cNvPicPr>
           <p:nvPr/>
         </p:nvPicPr>
         <p:blipFill>
-          <a:blip>
+          <a:blip r:embed="rId13">
             <a:extLst>
               <a:ext uri="{96DAC541-7B7A-43D3-8B79-37D633B846F1}">
-                <asvg:svgBlip xmlns:asvg="http://schemas.microsoft.com/office/drawing/2016/SVG/main" r:embed="rId12"/>
+                <asvg:svgBlip xmlns:asvg="http://schemas.microsoft.com/office/drawing/2016/SVG/main" r:embed="rId14"/>
               </a:ext>
             </a:extLst>
           </a:blip>
@@ -4953,13 +4640,7 @@
       </p:pic>
       <p:sp>
         <p:nvSpPr>
-          <p:cNvPr id="119" name="文本框 118">
-            <a:extLst>
-              <a:ext uri="{FF2B5EF4-FFF2-40B4-BE49-F238E27FC236}">
-                <a16:creationId xmlns:a16="http://schemas.microsoft.com/office/drawing/2014/main" id="{B825C5CE-E3FA-2FAC-B526-183A950ED672}"/>
-              </a:ext>
-            </a:extLst>
-          </p:cNvPr>
+          <p:cNvPr id="119" name="文本框 118"/>
           <p:cNvSpPr txBox="1"/>
           <p:nvPr/>
         </p:nvSpPr>
@@ -4995,13 +4676,7 @@
       </p:sp>
       <p:sp>
         <p:nvSpPr>
-          <p:cNvPr id="120" name="等腰三角形 119">
-            <a:extLst>
-              <a:ext uri="{FF2B5EF4-FFF2-40B4-BE49-F238E27FC236}">
-                <a16:creationId xmlns:a16="http://schemas.microsoft.com/office/drawing/2014/main" id="{78CE20C6-CA38-8E91-AE38-D4F208FD7719}"/>
-              </a:ext>
-            </a:extLst>
-          </p:cNvPr>
+          <p:cNvPr id="120" name="等腰三角形 119"/>
           <p:cNvSpPr/>
           <p:nvPr/>
         </p:nvSpPr>
@@ -5041,20 +4716,14 @@
       </p:sp>
       <p:pic>
         <p:nvPicPr>
-          <p:cNvPr id="121" name="图片 120">
-            <a:extLst>
-              <a:ext uri="{FF2B5EF4-FFF2-40B4-BE49-F238E27FC236}">
-                <a16:creationId xmlns:a16="http://schemas.microsoft.com/office/drawing/2014/main" id="{13FFDAF1-3843-590D-4D38-F3A033C3D00B}"/>
-              </a:ext>
-            </a:extLst>
-          </p:cNvPr>
+          <p:cNvPr id="121" name="图片 120"/>
           <p:cNvPicPr>
             <a:picLocks noChangeAspect="1"/>
           </p:cNvPicPr>
           <p:nvPr/>
         </p:nvPicPr>
         <p:blipFill>
-          <a:blip r:embed="rId7" cstate="print">
+          <a:blip r:embed="rId6" cstate="print">
             <a:extLst>
               <a:ext uri="{28A0092B-C50C-407E-A947-70E740481C1C}">
                 <a14:useLocalDpi xmlns:a14="http://schemas.microsoft.com/office/drawing/2010/main" val="0"/>
@@ -5080,13 +4749,7 @@
       </p:pic>
       <p:sp>
         <p:nvSpPr>
-          <p:cNvPr id="122" name="文本框 121">
-            <a:extLst>
-              <a:ext uri="{FF2B5EF4-FFF2-40B4-BE49-F238E27FC236}">
-                <a16:creationId xmlns:a16="http://schemas.microsoft.com/office/drawing/2014/main" id="{F81BD2FD-C9FE-4555-049F-934E020FE543}"/>
-              </a:ext>
-            </a:extLst>
-          </p:cNvPr>
+          <p:cNvPr id="122" name="文本框 121"/>
           <p:cNvSpPr txBox="1"/>
           <p:nvPr/>
         </p:nvSpPr>
@@ -5122,13 +4785,7 @@
       </p:sp>
       <p:sp>
         <p:nvSpPr>
-          <p:cNvPr id="123" name="文本框 122">
-            <a:extLst>
-              <a:ext uri="{FF2B5EF4-FFF2-40B4-BE49-F238E27FC236}">
-                <a16:creationId xmlns:a16="http://schemas.microsoft.com/office/drawing/2014/main" id="{C13160B4-A10A-D016-7A35-49C0A538EEAE}"/>
-              </a:ext>
-            </a:extLst>
-          </p:cNvPr>
+          <p:cNvPr id="123" name="文本框 122"/>
           <p:cNvSpPr txBox="1"/>
           <p:nvPr/>
         </p:nvSpPr>
@@ -5164,13 +4821,7 @@
       </p:sp>
       <p:sp>
         <p:nvSpPr>
-          <p:cNvPr id="124" name="文本框 123">
-            <a:extLst>
-              <a:ext uri="{FF2B5EF4-FFF2-40B4-BE49-F238E27FC236}">
-                <a16:creationId xmlns:a16="http://schemas.microsoft.com/office/drawing/2014/main" id="{8A1CB6C6-39B3-8BDF-6286-16C38A3EEEED}"/>
-              </a:ext>
-            </a:extLst>
-          </p:cNvPr>
+          <p:cNvPr id="124" name="文本框 123"/>
           <p:cNvSpPr txBox="1"/>
           <p:nvPr/>
         </p:nvSpPr>
@@ -5206,16 +4857,8 @@
       </p:sp>
       <p:cxnSp>
         <p:nvCxnSpPr>
-          <p:cNvPr id="125" name="直接箭头连接符 124">
-            <a:extLst>
-              <a:ext uri="{FF2B5EF4-FFF2-40B4-BE49-F238E27FC236}">
-                <a16:creationId xmlns:a16="http://schemas.microsoft.com/office/drawing/2014/main" id="{44BBE5EE-A3C3-6880-9EB4-111D36631DB4}"/>
-              </a:ext>
-            </a:extLst>
-          </p:cNvPr>
-          <p:cNvCxnSpPr>
-            <a:cxnSpLocks/>
-          </p:cNvCxnSpPr>
+          <p:cNvPr id="125" name="直接箭头连接符 124"/>
+          <p:cNvCxnSpPr/>
           <p:nvPr/>
         </p:nvCxnSpPr>
         <p:spPr>
@@ -5247,16 +4890,8 @@
       </p:cxnSp>
       <p:cxnSp>
         <p:nvCxnSpPr>
-          <p:cNvPr id="127" name="直接箭头连接符 126">
-            <a:extLst>
-              <a:ext uri="{FF2B5EF4-FFF2-40B4-BE49-F238E27FC236}">
-                <a16:creationId xmlns:a16="http://schemas.microsoft.com/office/drawing/2014/main" id="{C876F705-8FB0-7B00-8E33-6DA866944361}"/>
-              </a:ext>
-            </a:extLst>
-          </p:cNvPr>
-          <p:cNvCxnSpPr>
-            <a:cxnSpLocks/>
-          </p:cNvCxnSpPr>
+          <p:cNvPr id="127" name="直接箭头连接符 126"/>
+          <p:cNvCxnSpPr/>
           <p:nvPr/>
         </p:nvCxnSpPr>
         <p:spPr>
@@ -5288,16 +4923,8 @@
       </p:cxnSp>
       <p:cxnSp>
         <p:nvCxnSpPr>
-          <p:cNvPr id="131" name="直接箭头连接符 130">
-            <a:extLst>
-              <a:ext uri="{FF2B5EF4-FFF2-40B4-BE49-F238E27FC236}">
-                <a16:creationId xmlns:a16="http://schemas.microsoft.com/office/drawing/2014/main" id="{49340E6F-2E7F-1122-8C90-12B9065A48BE}"/>
-              </a:ext>
-            </a:extLst>
-          </p:cNvPr>
-          <p:cNvCxnSpPr>
-            <a:cxnSpLocks/>
-          </p:cNvCxnSpPr>
+          <p:cNvPr id="131" name="直接箭头连接符 130"/>
+          <p:cNvCxnSpPr/>
           <p:nvPr/>
         </p:nvCxnSpPr>
         <p:spPr>
@@ -5329,13 +4956,7 @@
       </p:cxnSp>
       <p:sp>
         <p:nvSpPr>
-          <p:cNvPr id="135" name="流程图: 接点 134">
-            <a:extLst>
-              <a:ext uri="{FF2B5EF4-FFF2-40B4-BE49-F238E27FC236}">
-                <a16:creationId xmlns:a16="http://schemas.microsoft.com/office/drawing/2014/main" id="{B9C23D95-37B2-82E7-4DF4-4C727CFF626E}"/>
-              </a:ext>
-            </a:extLst>
-          </p:cNvPr>
+          <p:cNvPr id="135" name="流程图: 接点 134"/>
           <p:cNvSpPr/>
           <p:nvPr/>
         </p:nvSpPr>
@@ -5388,13 +5009,7 @@
       </p:sp>
       <p:sp>
         <p:nvSpPr>
-          <p:cNvPr id="136" name="流程图: 接点 135">
-            <a:extLst>
-              <a:ext uri="{FF2B5EF4-FFF2-40B4-BE49-F238E27FC236}">
-                <a16:creationId xmlns:a16="http://schemas.microsoft.com/office/drawing/2014/main" id="{531790EE-3B47-3675-3D1F-5D8796F8FF7F}"/>
-              </a:ext>
-            </a:extLst>
-          </p:cNvPr>
+          <p:cNvPr id="136" name="流程图: 接点 135"/>
           <p:cNvSpPr/>
           <p:nvPr/>
         </p:nvSpPr>
@@ -5447,13 +5062,7 @@
       </p:sp>
       <p:sp>
         <p:nvSpPr>
-          <p:cNvPr id="137" name="流程图: 接点 136">
-            <a:extLst>
-              <a:ext uri="{FF2B5EF4-FFF2-40B4-BE49-F238E27FC236}">
-                <a16:creationId xmlns:a16="http://schemas.microsoft.com/office/drawing/2014/main" id="{9F0AF477-B2DA-28BC-37EB-97545065AC9C}"/>
-              </a:ext>
-            </a:extLst>
-          </p:cNvPr>
+          <p:cNvPr id="137" name="流程图: 接点 136"/>
           <p:cNvSpPr/>
           <p:nvPr/>
         </p:nvSpPr>
@@ -5506,16 +5115,8 @@
       </p:sp>
       <p:cxnSp>
         <p:nvCxnSpPr>
-          <p:cNvPr id="140" name="直接箭头连接符 139">
-            <a:extLst>
-              <a:ext uri="{FF2B5EF4-FFF2-40B4-BE49-F238E27FC236}">
-                <a16:creationId xmlns:a16="http://schemas.microsoft.com/office/drawing/2014/main" id="{7C39D19C-ECA3-7262-CA62-781391687B37}"/>
-              </a:ext>
-            </a:extLst>
-          </p:cNvPr>
-          <p:cNvCxnSpPr>
-            <a:cxnSpLocks/>
-          </p:cNvCxnSpPr>
+          <p:cNvPr id="140" name="直接箭头连接符 139"/>
+          <p:cNvCxnSpPr/>
           <p:nvPr/>
         </p:nvCxnSpPr>
         <p:spPr>
@@ -5547,16 +5148,8 @@
       </p:cxnSp>
       <p:cxnSp>
         <p:nvCxnSpPr>
-          <p:cNvPr id="141" name="直接箭头连接符 140">
-            <a:extLst>
-              <a:ext uri="{FF2B5EF4-FFF2-40B4-BE49-F238E27FC236}">
-                <a16:creationId xmlns:a16="http://schemas.microsoft.com/office/drawing/2014/main" id="{192197EF-D460-55C7-3F99-52D19C42F3B3}"/>
-              </a:ext>
-            </a:extLst>
-          </p:cNvPr>
-          <p:cNvCxnSpPr>
-            <a:cxnSpLocks/>
-          </p:cNvCxnSpPr>
+          <p:cNvPr id="141" name="直接箭头连接符 140"/>
+          <p:cNvCxnSpPr/>
           <p:nvPr/>
         </p:nvCxnSpPr>
         <p:spPr>
@@ -5588,16 +5181,8 @@
       </p:cxnSp>
       <p:cxnSp>
         <p:nvCxnSpPr>
-          <p:cNvPr id="142" name="直接箭头连接符 141">
-            <a:extLst>
-              <a:ext uri="{FF2B5EF4-FFF2-40B4-BE49-F238E27FC236}">
-                <a16:creationId xmlns:a16="http://schemas.microsoft.com/office/drawing/2014/main" id="{995D200E-B2FB-4105-1A24-17AEFF666B59}"/>
-              </a:ext>
-            </a:extLst>
-          </p:cNvPr>
-          <p:cNvCxnSpPr>
-            <a:cxnSpLocks/>
-          </p:cNvCxnSpPr>
+          <p:cNvPr id="142" name="直接箭头连接符 141"/>
+          <p:cNvCxnSpPr/>
           <p:nvPr/>
         </p:nvCxnSpPr>
         <p:spPr>
@@ -5629,13 +5214,7 @@
       </p:cxnSp>
       <p:sp>
         <p:nvSpPr>
-          <p:cNvPr id="143" name="流程图: 资料带 142">
-            <a:extLst>
-              <a:ext uri="{FF2B5EF4-FFF2-40B4-BE49-F238E27FC236}">
-                <a16:creationId xmlns:a16="http://schemas.microsoft.com/office/drawing/2014/main" id="{461673D4-9E9C-3878-B745-43EB92357031}"/>
-              </a:ext>
-            </a:extLst>
-          </p:cNvPr>
+          <p:cNvPr id="143" name="流程图: 资料带 142"/>
           <p:cNvSpPr/>
           <p:nvPr/>
         </p:nvSpPr>
@@ -5678,13 +5257,7 @@
       </p:sp>
       <p:sp>
         <p:nvSpPr>
-          <p:cNvPr id="144" name="流程图: 资料带 143">
-            <a:extLst>
-              <a:ext uri="{FF2B5EF4-FFF2-40B4-BE49-F238E27FC236}">
-                <a16:creationId xmlns:a16="http://schemas.microsoft.com/office/drawing/2014/main" id="{DF8FAA59-165C-783E-8A2A-811B772A527D}"/>
-              </a:ext>
-            </a:extLst>
-          </p:cNvPr>
+          <p:cNvPr id="144" name="流程图: 资料带 143"/>
           <p:cNvSpPr/>
           <p:nvPr/>
         </p:nvSpPr>
@@ -5727,13 +5300,7 @@
       </p:sp>
       <p:sp>
         <p:nvSpPr>
-          <p:cNvPr id="145" name="流程图: 资料带 144">
-            <a:extLst>
-              <a:ext uri="{FF2B5EF4-FFF2-40B4-BE49-F238E27FC236}">
-                <a16:creationId xmlns:a16="http://schemas.microsoft.com/office/drawing/2014/main" id="{909DC346-7DFD-DCCB-FC0E-18E3CBA3A887}"/>
-              </a:ext>
-            </a:extLst>
-          </p:cNvPr>
+          <p:cNvPr id="145" name="流程图: 资料带 144"/>
           <p:cNvSpPr/>
           <p:nvPr/>
         </p:nvSpPr>
@@ -5780,18 +5347,19 @@
               </a:rPr>
               <a:t>Factor From T3</a:t>
             </a:r>
-          </a:p>
-        </p:txBody>
-      </p:sp>
-      <p:sp>
-        <p:nvSpPr>
-          <p:cNvPr id="146" name="流程图: 资料带 145">
-            <a:extLst>
-              <a:ext uri="{FF2B5EF4-FFF2-40B4-BE49-F238E27FC236}">
-                <a16:creationId xmlns:a16="http://schemas.microsoft.com/office/drawing/2014/main" id="{87789B86-EA3C-3B3B-39FC-DC304E2F95A3}"/>
-              </a:ext>
-            </a:extLst>
-          </p:cNvPr>
+            <a:endParaRPr lang="en-US" altLang="zh-CN" sz="1200" b="1" dirty="0">
+              <a:solidFill>
+                <a:schemeClr val="tx1"/>
+              </a:solidFill>
+              <a:latin typeface="Arial" panose="020B0604020202020204" pitchFamily="34" charset="0"/>
+              <a:cs typeface="Arial" panose="020B0604020202020204" pitchFamily="34" charset="0"/>
+            </a:endParaRPr>
+          </a:p>
+        </p:txBody>
+      </p:sp>
+      <p:sp>
+        <p:nvSpPr>
+          <p:cNvPr id="146" name="流程图: 资料带 145"/>
           <p:cNvSpPr/>
           <p:nvPr/>
         </p:nvSpPr>
@@ -5834,13 +5402,7 @@
       </p:sp>
       <p:sp>
         <p:nvSpPr>
-          <p:cNvPr id="147" name="流程图: 资料带 146">
-            <a:extLst>
-              <a:ext uri="{FF2B5EF4-FFF2-40B4-BE49-F238E27FC236}">
-                <a16:creationId xmlns:a16="http://schemas.microsoft.com/office/drawing/2014/main" id="{583F987D-5F0F-9060-8A69-AFB259AEE688}"/>
-              </a:ext>
-            </a:extLst>
-          </p:cNvPr>
+          <p:cNvPr id="147" name="流程图: 资料带 146"/>
           <p:cNvSpPr/>
           <p:nvPr/>
         </p:nvSpPr>
@@ -5883,13 +5445,7 @@
       </p:sp>
       <p:sp>
         <p:nvSpPr>
-          <p:cNvPr id="148" name="流程图: 资料带 147">
-            <a:extLst>
-              <a:ext uri="{FF2B5EF4-FFF2-40B4-BE49-F238E27FC236}">
-                <a16:creationId xmlns:a16="http://schemas.microsoft.com/office/drawing/2014/main" id="{9BE46F40-07DB-939A-C772-5F764C9BFABA}"/>
-              </a:ext>
-            </a:extLst>
-          </p:cNvPr>
+          <p:cNvPr id="148" name="流程图: 资料带 147"/>
           <p:cNvSpPr/>
           <p:nvPr/>
         </p:nvSpPr>
@@ -5939,7 +5495,6 @@
               <a:buSzTx/>
               <a:buFontTx/>
               <a:buNone/>
-              <a:tabLst/>
               <a:defRPr/>
             </a:pPr>
             <a:r>
@@ -5970,18 +5525,26 @@
               </a:rPr>
               <a:t>actor From T4</a:t>
             </a:r>
-          </a:p>
-        </p:txBody>
-      </p:sp>
-      <p:sp>
-        <p:nvSpPr>
-          <p:cNvPr id="149" name="文本框 148">
-            <a:extLst>
-              <a:ext uri="{FF2B5EF4-FFF2-40B4-BE49-F238E27FC236}">
-                <a16:creationId xmlns:a16="http://schemas.microsoft.com/office/drawing/2014/main" id="{6207328B-173E-FB09-F070-883685EADA9C}"/>
-              </a:ext>
-            </a:extLst>
-          </p:cNvPr>
+            <a:endParaRPr kumimoji="0" lang="en-US" altLang="zh-CN" sz="1200" b="1" i="0" u="none" strike="noStrike" kern="1200" cap="none" spc="0" normalizeH="0" baseline="0" noProof="0" dirty="0">
+              <a:ln>
+                <a:noFill/>
+              </a:ln>
+              <a:solidFill>
+                <a:prstClr val="black"/>
+              </a:solidFill>
+              <a:effectLst/>
+              <a:uLnTx/>
+              <a:uFillTx/>
+              <a:latin typeface="Arial" panose="020B0604020202020204" pitchFamily="34" charset="0"/>
+              <a:ea typeface="微软雅黑" panose="020B0503020204020204" pitchFamily="34" charset="-122"/>
+              <a:cs typeface="Arial" panose="020B0604020202020204" pitchFamily="34" charset="0"/>
+            </a:endParaRPr>
+          </a:p>
+        </p:txBody>
+      </p:sp>
+      <p:sp>
+        <p:nvSpPr>
+          <p:cNvPr id="149" name="文本框 148"/>
           <p:cNvSpPr txBox="1"/>
           <p:nvPr/>
         </p:nvSpPr>
@@ -6017,13 +5580,7 @@
       </p:sp>
       <p:sp>
         <p:nvSpPr>
-          <p:cNvPr id="154" name="流程图: 资料带 153">
-            <a:extLst>
-              <a:ext uri="{FF2B5EF4-FFF2-40B4-BE49-F238E27FC236}">
-                <a16:creationId xmlns:a16="http://schemas.microsoft.com/office/drawing/2014/main" id="{1C9FC213-C4BF-DA9B-9A40-CC82D9C99C7A}"/>
-              </a:ext>
-            </a:extLst>
-          </p:cNvPr>
+          <p:cNvPr id="154" name="流程图: 资料带 153"/>
           <p:cNvSpPr/>
           <p:nvPr/>
         </p:nvSpPr>
@@ -6066,13 +5623,7 @@
       </p:sp>
       <p:sp>
         <p:nvSpPr>
-          <p:cNvPr id="155" name="流程图: 资料带 154">
-            <a:extLst>
-              <a:ext uri="{FF2B5EF4-FFF2-40B4-BE49-F238E27FC236}">
-                <a16:creationId xmlns:a16="http://schemas.microsoft.com/office/drawing/2014/main" id="{6582A3F9-9F2C-42EC-6C27-B4BF4590B9DE}"/>
-              </a:ext>
-            </a:extLst>
-          </p:cNvPr>
+          <p:cNvPr id="155" name="流程图: 资料带 154"/>
           <p:cNvSpPr/>
           <p:nvPr/>
         </p:nvSpPr>
@@ -6115,13 +5666,7 @@
       </p:sp>
       <p:sp>
         <p:nvSpPr>
-          <p:cNvPr id="156" name="流程图: 资料带 155">
-            <a:extLst>
-              <a:ext uri="{FF2B5EF4-FFF2-40B4-BE49-F238E27FC236}">
-                <a16:creationId xmlns:a16="http://schemas.microsoft.com/office/drawing/2014/main" id="{462DCE33-4E1A-00AB-1488-CB4886CF4A88}"/>
-              </a:ext>
-            </a:extLst>
-          </p:cNvPr>
+          <p:cNvPr id="156" name="流程图: 资料带 155"/>
           <p:cNvSpPr/>
           <p:nvPr/>
         </p:nvSpPr>
@@ -6171,7 +5716,6 @@
               <a:buSzTx/>
               <a:buFontTx/>
               <a:buNone/>
-              <a:tabLst/>
               <a:defRPr/>
             </a:pPr>
             <a:r>
@@ -6202,25 +5746,33 @@
               </a:rPr>
               <a:t>actor From T5</a:t>
             </a:r>
+            <a:endParaRPr kumimoji="0" lang="en-US" altLang="zh-CN" sz="1200" b="1" i="0" u="none" strike="noStrike" kern="1200" cap="none" spc="0" normalizeH="0" baseline="0" noProof="0" dirty="0">
+              <a:ln>
+                <a:noFill/>
+              </a:ln>
+              <a:solidFill>
+                <a:prstClr val="black"/>
+              </a:solidFill>
+              <a:effectLst/>
+              <a:uLnTx/>
+              <a:uFillTx/>
+              <a:latin typeface="Arial" panose="020B0604020202020204" pitchFamily="34" charset="0"/>
+              <a:ea typeface="微软雅黑" panose="020B0503020204020204" pitchFamily="34" charset="-122"/>
+              <a:cs typeface="Arial" panose="020B0604020202020204" pitchFamily="34" charset="0"/>
+            </a:endParaRPr>
           </a:p>
         </p:txBody>
       </p:sp>
       <p:pic>
         <p:nvPicPr>
-          <p:cNvPr id="157" name="图片 156">
-            <a:extLst>
-              <a:ext uri="{FF2B5EF4-FFF2-40B4-BE49-F238E27FC236}">
-                <a16:creationId xmlns:a16="http://schemas.microsoft.com/office/drawing/2014/main" id="{02737894-7F38-1746-4201-BDAC8EB84C10}"/>
-              </a:ext>
-            </a:extLst>
-          </p:cNvPr>
+          <p:cNvPr id="157" name="图片 156"/>
           <p:cNvPicPr>
             <a:picLocks noChangeAspect="1"/>
           </p:cNvPicPr>
           <p:nvPr/>
         </p:nvPicPr>
         <p:blipFill>
-          <a:blip r:embed="rId10" cstate="print">
+          <a:blip r:embed="rId11" cstate="print">
             <a:extLst>
               <a:ext uri="{28A0092B-C50C-407E-A947-70E740481C1C}">
                 <a14:useLocalDpi xmlns:a14="http://schemas.microsoft.com/office/drawing/2010/main" val="0"/>
@@ -6243,13 +5795,7 @@
       </p:pic>
       <p:sp>
         <p:nvSpPr>
-          <p:cNvPr id="158" name="文本框 157">
-            <a:extLst>
-              <a:ext uri="{FF2B5EF4-FFF2-40B4-BE49-F238E27FC236}">
-                <a16:creationId xmlns:a16="http://schemas.microsoft.com/office/drawing/2014/main" id="{C8AC4F0E-10D0-5D1B-5DAC-786D23F2DD29}"/>
-              </a:ext>
-            </a:extLst>
-          </p:cNvPr>
+          <p:cNvPr id="158" name="文本框 157"/>
           <p:cNvSpPr txBox="1"/>
           <p:nvPr/>
         </p:nvSpPr>
@@ -6285,20 +5831,14 @@
       </p:sp>
       <p:pic>
         <p:nvPicPr>
-          <p:cNvPr id="159" name="图片 158">
-            <a:extLst>
-              <a:ext uri="{FF2B5EF4-FFF2-40B4-BE49-F238E27FC236}">
-                <a16:creationId xmlns:a16="http://schemas.microsoft.com/office/drawing/2014/main" id="{F56D3D8B-16AB-E4B4-5A01-974D14DEA813}"/>
-              </a:ext>
-            </a:extLst>
-          </p:cNvPr>
+          <p:cNvPr id="159" name="图片 158"/>
           <p:cNvPicPr>
             <a:picLocks noChangeAspect="1"/>
           </p:cNvPicPr>
           <p:nvPr/>
         </p:nvPicPr>
         <p:blipFill>
-          <a:blip r:embed="rId10" cstate="print">
+          <a:blip r:embed="rId11" cstate="print">
             <a:extLst>
               <a:ext uri="{28A0092B-C50C-407E-A947-70E740481C1C}">
                 <a14:useLocalDpi xmlns:a14="http://schemas.microsoft.com/office/drawing/2010/main" val="0"/>
@@ -6321,13 +5861,7 @@
       </p:pic>
       <p:sp>
         <p:nvSpPr>
-          <p:cNvPr id="160" name="文本框 159">
-            <a:extLst>
-              <a:ext uri="{FF2B5EF4-FFF2-40B4-BE49-F238E27FC236}">
-                <a16:creationId xmlns:a16="http://schemas.microsoft.com/office/drawing/2014/main" id="{14658067-BA19-01E9-0C69-408EB20B7B68}"/>
-              </a:ext>
-            </a:extLst>
-          </p:cNvPr>
+          <p:cNvPr id="160" name="文本框 159"/>
           <p:cNvSpPr txBox="1"/>
           <p:nvPr/>
         </p:nvSpPr>
@@ -6363,20 +5897,14 @@
       </p:sp>
       <p:pic>
         <p:nvPicPr>
-          <p:cNvPr id="161" name="图片 160">
-            <a:extLst>
-              <a:ext uri="{FF2B5EF4-FFF2-40B4-BE49-F238E27FC236}">
-                <a16:creationId xmlns:a16="http://schemas.microsoft.com/office/drawing/2014/main" id="{DB7C5596-6FEE-0764-C592-04D8B623E694}"/>
-              </a:ext>
-            </a:extLst>
-          </p:cNvPr>
+          <p:cNvPr id="161" name="图片 160"/>
           <p:cNvPicPr>
             <a:picLocks noChangeAspect="1"/>
           </p:cNvPicPr>
           <p:nvPr/>
         </p:nvPicPr>
         <p:blipFill>
-          <a:blip r:embed="rId10" cstate="print">
+          <a:blip r:embed="rId11" cstate="print">
             <a:extLst>
               <a:ext uri="{28A0092B-C50C-407E-A947-70E740481C1C}">
                 <a14:useLocalDpi xmlns:a14="http://schemas.microsoft.com/office/drawing/2010/main" val="0"/>
@@ -6399,13 +5927,7 @@
       </p:pic>
       <p:sp>
         <p:nvSpPr>
-          <p:cNvPr id="162" name="文本框 161">
-            <a:extLst>
-              <a:ext uri="{FF2B5EF4-FFF2-40B4-BE49-F238E27FC236}">
-                <a16:creationId xmlns:a16="http://schemas.microsoft.com/office/drawing/2014/main" id="{D5B5F571-50CB-A944-3054-3AAD1A65C4D4}"/>
-              </a:ext>
-            </a:extLst>
-          </p:cNvPr>
+          <p:cNvPr id="162" name="文本框 161"/>
           <p:cNvSpPr txBox="1"/>
           <p:nvPr/>
         </p:nvSpPr>
@@ -6441,13 +5963,7 @@
       </p:sp>
       <p:sp>
         <p:nvSpPr>
-          <p:cNvPr id="163" name="文本框 162">
-            <a:extLst>
-              <a:ext uri="{FF2B5EF4-FFF2-40B4-BE49-F238E27FC236}">
-                <a16:creationId xmlns:a16="http://schemas.microsoft.com/office/drawing/2014/main" id="{A107D68C-63B2-88F6-B62E-9D46B4D39AA6}"/>
-              </a:ext>
-            </a:extLst>
-          </p:cNvPr>
+          <p:cNvPr id="163" name="文本框 162"/>
           <p:cNvSpPr txBox="1"/>
           <p:nvPr/>
         </p:nvSpPr>
@@ -6484,15 +6000,8 @@
       </p:sp>
       <p:cxnSp>
         <p:nvCxnSpPr>
-          <p:cNvPr id="164" name="直接箭头连接符 163">
-            <a:extLst>
-              <a:ext uri="{FF2B5EF4-FFF2-40B4-BE49-F238E27FC236}">
-                <a16:creationId xmlns:a16="http://schemas.microsoft.com/office/drawing/2014/main" id="{8949D4C5-0C81-2A1F-CE22-D33549DDA73D}"/>
-              </a:ext>
-            </a:extLst>
-          </p:cNvPr>
+          <p:cNvPr id="164" name="直接箭头连接符 163"/>
           <p:cNvCxnSpPr>
-            <a:cxnSpLocks/>
             <a:stCxn id="103" idx="3"/>
           </p:cNvCxnSpPr>
           <p:nvPr/>
@@ -6526,15 +6035,8 @@
       </p:cxnSp>
       <p:cxnSp>
         <p:nvCxnSpPr>
-          <p:cNvPr id="167" name="直接箭头连接符 166">
-            <a:extLst>
-              <a:ext uri="{FF2B5EF4-FFF2-40B4-BE49-F238E27FC236}">
-                <a16:creationId xmlns:a16="http://schemas.microsoft.com/office/drawing/2014/main" id="{ABFEFAE3-CF75-A0E6-D074-2DD271A50A4C}"/>
-              </a:ext>
-            </a:extLst>
-          </p:cNvPr>
+          <p:cNvPr id="167" name="直接箭头连接符 166"/>
           <p:cNvCxnSpPr>
-            <a:cxnSpLocks/>
             <a:stCxn id="116" idx="3"/>
           </p:cNvCxnSpPr>
           <p:nvPr/>
@@ -6568,16 +6070,8 @@
       </p:cxnSp>
       <p:cxnSp>
         <p:nvCxnSpPr>
-          <p:cNvPr id="171" name="直接箭头连接符 170">
-            <a:extLst>
-              <a:ext uri="{FF2B5EF4-FFF2-40B4-BE49-F238E27FC236}">
-                <a16:creationId xmlns:a16="http://schemas.microsoft.com/office/drawing/2014/main" id="{7EFD4D0F-6D99-87B6-E5C5-9B9D11A3EFFE}"/>
-              </a:ext>
-            </a:extLst>
-          </p:cNvPr>
-          <p:cNvCxnSpPr>
-            <a:cxnSpLocks/>
-          </p:cNvCxnSpPr>
+          <p:cNvPr id="171" name="直接箭头连接符 170"/>
+          <p:cNvCxnSpPr/>
           <p:nvPr/>
         </p:nvCxnSpPr>
         <p:spPr>
@@ -6609,15 +6103,8 @@
       </p:cxnSp>
       <p:cxnSp>
         <p:nvCxnSpPr>
-          <p:cNvPr id="173" name="直接箭头连接符 172">
-            <a:extLst>
-              <a:ext uri="{FF2B5EF4-FFF2-40B4-BE49-F238E27FC236}">
-                <a16:creationId xmlns:a16="http://schemas.microsoft.com/office/drawing/2014/main" id="{AD539881-0FCD-A461-1757-836E6DB11EE5}"/>
-              </a:ext>
-            </a:extLst>
-          </p:cNvPr>
+          <p:cNvPr id="173" name="直接箭头连接符 172"/>
           <p:cNvCxnSpPr>
-            <a:cxnSpLocks/>
             <a:stCxn id="148" idx="3"/>
           </p:cNvCxnSpPr>
           <p:nvPr/>
@@ -6651,15 +6138,8 @@
       </p:cxnSp>
       <p:cxnSp>
         <p:nvCxnSpPr>
-          <p:cNvPr id="181" name="直接箭头连接符 180">
-            <a:extLst>
-              <a:ext uri="{FF2B5EF4-FFF2-40B4-BE49-F238E27FC236}">
-                <a16:creationId xmlns:a16="http://schemas.microsoft.com/office/drawing/2014/main" id="{5A80337C-C16F-EC9F-60BF-0ABFE3563726}"/>
-              </a:ext>
-            </a:extLst>
-          </p:cNvPr>
+          <p:cNvPr id="181" name="直接箭头连接符 180"/>
           <p:cNvCxnSpPr>
-            <a:cxnSpLocks/>
             <a:stCxn id="156" idx="3"/>
           </p:cNvCxnSpPr>
           <p:nvPr/>
@@ -6693,13 +6173,7 @@
       </p:cxnSp>
       <p:sp>
         <p:nvSpPr>
-          <p:cNvPr id="189" name="矩形 188">
-            <a:extLst>
-              <a:ext uri="{FF2B5EF4-FFF2-40B4-BE49-F238E27FC236}">
-                <a16:creationId xmlns:a16="http://schemas.microsoft.com/office/drawing/2014/main" id="{D683706B-EA5C-F9E8-FEB8-D1E5923203C5}"/>
-              </a:ext>
-            </a:extLst>
-          </p:cNvPr>
+          <p:cNvPr id="189" name="矩形 188"/>
           <p:cNvSpPr/>
           <p:nvPr/>
         </p:nvSpPr>
@@ -6764,16 +6238,8 @@
       </p:sp>
       <p:cxnSp>
         <p:nvCxnSpPr>
-          <p:cNvPr id="195" name="直接连接符 194">
-            <a:extLst>
-              <a:ext uri="{FF2B5EF4-FFF2-40B4-BE49-F238E27FC236}">
-                <a16:creationId xmlns:a16="http://schemas.microsoft.com/office/drawing/2014/main" id="{ACEA88AE-1AAE-1DE5-D930-937785B8314C}"/>
-              </a:ext>
-            </a:extLst>
-          </p:cNvPr>
-          <p:cNvCxnSpPr>
-            <a:cxnSpLocks/>
-          </p:cNvCxnSpPr>
+          <p:cNvPr id="195" name="直接连接符 194"/>
+          <p:cNvCxnSpPr/>
           <p:nvPr/>
         </p:nvCxnSpPr>
         <p:spPr>
@@ -6802,16 +6268,8 @@
       </p:cxnSp>
       <p:cxnSp>
         <p:nvCxnSpPr>
-          <p:cNvPr id="209" name="直接箭头连接符 208">
-            <a:extLst>
-              <a:ext uri="{FF2B5EF4-FFF2-40B4-BE49-F238E27FC236}">
-                <a16:creationId xmlns:a16="http://schemas.microsoft.com/office/drawing/2014/main" id="{C0CA529B-5C43-000E-912D-F013672AC9C1}"/>
-              </a:ext>
-            </a:extLst>
-          </p:cNvPr>
-          <p:cNvCxnSpPr>
-            <a:cxnSpLocks/>
-          </p:cNvCxnSpPr>
+          <p:cNvPr id="209" name="直接箭头连接符 208"/>
+          <p:cNvCxnSpPr/>
           <p:nvPr/>
         </p:nvCxnSpPr>
         <p:spPr>
@@ -6843,20 +6301,14 @@
       </p:cxnSp>
       <p:pic>
         <p:nvPicPr>
-          <p:cNvPr id="221" name="图片 220">
-            <a:extLst>
-              <a:ext uri="{FF2B5EF4-FFF2-40B4-BE49-F238E27FC236}">
-                <a16:creationId xmlns:a16="http://schemas.microsoft.com/office/drawing/2014/main" id="{2CED2C41-3C9B-B9BE-7679-2E5958B8202B}"/>
-              </a:ext>
-            </a:extLst>
-          </p:cNvPr>
+          <p:cNvPr id="221" name="图片 220"/>
           <p:cNvPicPr>
             <a:picLocks noChangeAspect="1"/>
           </p:cNvPicPr>
           <p:nvPr/>
         </p:nvPicPr>
         <p:blipFill>
-          <a:blip r:embed="rId11"/>
+          <a:blip r:embed="rId12"/>
           <a:stretch>
             <a:fillRect/>
           </a:stretch>
@@ -6876,13 +6328,7 @@
       </p:pic>
       <p:sp>
         <p:nvSpPr>
-          <p:cNvPr id="222" name="矩形 221">
-            <a:extLst>
-              <a:ext uri="{FF2B5EF4-FFF2-40B4-BE49-F238E27FC236}">
-                <a16:creationId xmlns:a16="http://schemas.microsoft.com/office/drawing/2014/main" id="{98CB7238-6236-A392-D9E3-F7B13C61BF51}"/>
-              </a:ext>
-            </a:extLst>
-          </p:cNvPr>
+          <p:cNvPr id="222" name="矩形 221"/>
           <p:cNvSpPr/>
           <p:nvPr/>
         </p:nvSpPr>
@@ -6947,13 +6393,7 @@
       </p:sp>
       <p:sp>
         <p:nvSpPr>
-          <p:cNvPr id="223" name="矩形 222">
-            <a:extLst>
-              <a:ext uri="{FF2B5EF4-FFF2-40B4-BE49-F238E27FC236}">
-                <a16:creationId xmlns:a16="http://schemas.microsoft.com/office/drawing/2014/main" id="{439257D7-0FA2-79B7-B9A2-A651E4B0FA1F}"/>
-              </a:ext>
-            </a:extLst>
-          </p:cNvPr>
+          <p:cNvPr id="223" name="矩形 222"/>
           <p:cNvSpPr/>
           <p:nvPr/>
         </p:nvSpPr>
@@ -7018,20 +6458,14 @@
       </p:sp>
       <p:pic>
         <p:nvPicPr>
-          <p:cNvPr id="224" name="图片 223">
-            <a:extLst>
-              <a:ext uri="{FF2B5EF4-FFF2-40B4-BE49-F238E27FC236}">
-                <a16:creationId xmlns:a16="http://schemas.microsoft.com/office/drawing/2014/main" id="{A7442AB3-7659-04C4-B5B7-512D9009F377}"/>
-              </a:ext>
-            </a:extLst>
-          </p:cNvPr>
+          <p:cNvPr id="224" name="图片 223"/>
           <p:cNvPicPr>
             <a:picLocks noChangeAspect="1"/>
           </p:cNvPicPr>
           <p:nvPr/>
         </p:nvPicPr>
         <p:blipFill>
-          <a:blip r:embed="rId11"/>
+          <a:blip r:embed="rId12"/>
           <a:stretch>
             <a:fillRect/>
           </a:stretch>
@@ -7051,20 +6485,14 @@
       </p:pic>
       <p:pic>
         <p:nvPicPr>
-          <p:cNvPr id="225" name="图片 224">
-            <a:extLst>
-              <a:ext uri="{FF2B5EF4-FFF2-40B4-BE49-F238E27FC236}">
-                <a16:creationId xmlns:a16="http://schemas.microsoft.com/office/drawing/2014/main" id="{EDAC4A5C-4CBB-192E-D7BD-E052644FB696}"/>
-              </a:ext>
-            </a:extLst>
-          </p:cNvPr>
+          <p:cNvPr id="225" name="图片 224"/>
           <p:cNvPicPr>
             <a:picLocks noChangeAspect="1"/>
           </p:cNvPicPr>
           <p:nvPr/>
         </p:nvPicPr>
         <p:blipFill>
-          <a:blip r:embed="rId11"/>
+          <a:blip r:embed="rId12"/>
           <a:stretch>
             <a:fillRect/>
           </a:stretch>
@@ -7084,13 +6512,7 @@
       </p:pic>
       <p:sp>
         <p:nvSpPr>
-          <p:cNvPr id="226" name="矩形 225">
-            <a:extLst>
-              <a:ext uri="{FF2B5EF4-FFF2-40B4-BE49-F238E27FC236}">
-                <a16:creationId xmlns:a16="http://schemas.microsoft.com/office/drawing/2014/main" id="{BA3B3A7A-7917-C8E8-56B8-B6D1D20829FA}"/>
-              </a:ext>
-            </a:extLst>
-          </p:cNvPr>
+          <p:cNvPr id="226" name="矩形 225"/>
           <p:cNvSpPr/>
           <p:nvPr/>
         </p:nvSpPr>
@@ -7155,20 +6577,14 @@
       </p:sp>
       <p:pic>
         <p:nvPicPr>
-          <p:cNvPr id="227" name="图片 226">
-            <a:extLst>
-              <a:ext uri="{FF2B5EF4-FFF2-40B4-BE49-F238E27FC236}">
-                <a16:creationId xmlns:a16="http://schemas.microsoft.com/office/drawing/2014/main" id="{51DA5885-268F-1A2D-6F72-19A20490C59C}"/>
-              </a:ext>
-            </a:extLst>
-          </p:cNvPr>
+          <p:cNvPr id="227" name="图片 226"/>
           <p:cNvPicPr>
             <a:picLocks noChangeAspect="1"/>
           </p:cNvPicPr>
           <p:nvPr/>
         </p:nvPicPr>
         <p:blipFill>
-          <a:blip r:embed="rId11"/>
+          <a:blip r:embed="rId12"/>
           <a:stretch>
             <a:fillRect/>
           </a:stretch>
@@ -7188,13 +6604,7 @@
       </p:pic>
       <p:sp>
         <p:nvSpPr>
-          <p:cNvPr id="230" name="矩形 229">
-            <a:extLst>
-              <a:ext uri="{FF2B5EF4-FFF2-40B4-BE49-F238E27FC236}">
-                <a16:creationId xmlns:a16="http://schemas.microsoft.com/office/drawing/2014/main" id="{5EC54199-D90D-CE4A-A703-922E2D48429E}"/>
-              </a:ext>
-            </a:extLst>
-          </p:cNvPr>
+          <p:cNvPr id="230" name="矩形 229"/>
           <p:cNvSpPr/>
           <p:nvPr/>
         </p:nvSpPr>
@@ -7259,20 +6669,14 @@
       </p:sp>
       <p:pic>
         <p:nvPicPr>
-          <p:cNvPr id="231" name="图片 230">
-            <a:extLst>
-              <a:ext uri="{FF2B5EF4-FFF2-40B4-BE49-F238E27FC236}">
-                <a16:creationId xmlns:a16="http://schemas.microsoft.com/office/drawing/2014/main" id="{1DA0824C-8E27-1EC9-33E3-A530BD21DB2F}"/>
-              </a:ext>
-            </a:extLst>
-          </p:cNvPr>
+          <p:cNvPr id="231" name="图片 230"/>
           <p:cNvPicPr>
             <a:picLocks noChangeAspect="1"/>
           </p:cNvPicPr>
           <p:nvPr/>
         </p:nvPicPr>
         <p:blipFill>
-          <a:blip r:embed="rId11"/>
+          <a:blip r:embed="rId12"/>
           <a:stretch>
             <a:fillRect/>
           </a:stretch>
@@ -7292,13 +6696,7 @@
       </p:pic>
       <p:sp>
         <p:nvSpPr>
-          <p:cNvPr id="232" name="矩形 231">
-            <a:extLst>
-              <a:ext uri="{FF2B5EF4-FFF2-40B4-BE49-F238E27FC236}">
-                <a16:creationId xmlns:a16="http://schemas.microsoft.com/office/drawing/2014/main" id="{30F893D4-82BD-99E0-95A9-A89AF2A4E0FD}"/>
-              </a:ext>
-            </a:extLst>
-          </p:cNvPr>
+          <p:cNvPr id="232" name="矩形 231"/>
           <p:cNvSpPr/>
           <p:nvPr/>
         </p:nvSpPr>
@@ -7363,16 +6761,8 @@
       </p:sp>
       <p:cxnSp>
         <p:nvCxnSpPr>
-          <p:cNvPr id="237" name="直接箭头连接符 236">
-            <a:extLst>
-              <a:ext uri="{FF2B5EF4-FFF2-40B4-BE49-F238E27FC236}">
-                <a16:creationId xmlns:a16="http://schemas.microsoft.com/office/drawing/2014/main" id="{9A9C88B1-F1E3-6D00-E89D-29AC42BBA8B4}"/>
-              </a:ext>
-            </a:extLst>
-          </p:cNvPr>
-          <p:cNvCxnSpPr>
-            <a:cxnSpLocks/>
-          </p:cNvCxnSpPr>
+          <p:cNvPr id="237" name="直接箭头连接符 236"/>
+          <p:cNvCxnSpPr/>
           <p:nvPr/>
         </p:nvCxnSpPr>
         <p:spPr>
@@ -7404,23 +6794,17 @@
       </p:cxnSp>
       <p:pic>
         <p:nvPicPr>
-          <p:cNvPr id="4" name="图形 3" descr="条形图">
-            <a:extLst>
-              <a:ext uri="{FF2B5EF4-FFF2-40B4-BE49-F238E27FC236}">
-                <a16:creationId xmlns:a16="http://schemas.microsoft.com/office/drawing/2014/main" id="{8C760E62-C5EA-13C4-0007-A4A29360A0D9}"/>
-              </a:ext>
-            </a:extLst>
-          </p:cNvPr>
+          <p:cNvPr id="4" name="图形 3" descr="条形图"/>
           <p:cNvPicPr>
             <a:picLocks noChangeAspect="1"/>
           </p:cNvPicPr>
           <p:nvPr/>
         </p:nvPicPr>
         <p:blipFill>
-          <a:blip>
+          <a:blip r:embed="rId15">
             <a:extLst>
               <a:ext uri="{96DAC541-7B7A-43D3-8B79-37D633B846F1}">
-                <asvg:svgBlip xmlns:asvg="http://schemas.microsoft.com/office/drawing/2016/SVG/main" r:embed="rId13"/>
+                <asvg:svgBlip xmlns:asvg="http://schemas.microsoft.com/office/drawing/2016/SVG/main" r:embed="rId16"/>
               </a:ext>
             </a:extLst>
           </a:blip>
@@ -7440,13 +6824,7 @@
       </p:pic>
       <p:sp>
         <p:nvSpPr>
-          <p:cNvPr id="5" name="矩形 4">
-            <a:extLst>
-              <a:ext uri="{FF2B5EF4-FFF2-40B4-BE49-F238E27FC236}">
-                <a16:creationId xmlns:a16="http://schemas.microsoft.com/office/drawing/2014/main" id="{31F86DF0-B95D-A95D-8FDF-0A81CBE5BA74}"/>
-              </a:ext>
-            </a:extLst>
-          </p:cNvPr>
+          <p:cNvPr id="5" name="矩形 4"/>
           <p:cNvSpPr/>
           <p:nvPr/>
         </p:nvSpPr>
@@ -7549,23 +6927,17 @@
       </p:sp>
       <p:pic>
         <p:nvPicPr>
-          <p:cNvPr id="6" name="图形 5" descr="条形图">
-            <a:extLst>
-              <a:ext uri="{FF2B5EF4-FFF2-40B4-BE49-F238E27FC236}">
-                <a16:creationId xmlns:a16="http://schemas.microsoft.com/office/drawing/2014/main" id="{EAFDF1FA-F3EA-D9F3-5E4B-F5C15A731D71}"/>
-              </a:ext>
-            </a:extLst>
-          </p:cNvPr>
+          <p:cNvPr id="6" name="图形 5" descr="条形图"/>
           <p:cNvPicPr>
             <a:picLocks noChangeAspect="1"/>
           </p:cNvPicPr>
           <p:nvPr/>
         </p:nvPicPr>
         <p:blipFill>
-          <a:blip>
+          <a:blip r:embed="rId15">
             <a:extLst>
               <a:ext uri="{96DAC541-7B7A-43D3-8B79-37D633B846F1}">
-                <asvg:svgBlip xmlns:asvg="http://schemas.microsoft.com/office/drawing/2016/SVG/main" r:embed="rId13"/>
+                <asvg:svgBlip xmlns:asvg="http://schemas.microsoft.com/office/drawing/2016/SVG/main" r:embed="rId16"/>
               </a:ext>
             </a:extLst>
           </a:blip>
@@ -7585,16 +6957,8 @@
       </p:pic>
       <p:cxnSp>
         <p:nvCxnSpPr>
-          <p:cNvPr id="7" name="直接箭头连接符 6">
-            <a:extLst>
-              <a:ext uri="{FF2B5EF4-FFF2-40B4-BE49-F238E27FC236}">
-                <a16:creationId xmlns:a16="http://schemas.microsoft.com/office/drawing/2014/main" id="{73C37FBE-283B-EBF3-F22B-7019EA0B118A}"/>
-              </a:ext>
-            </a:extLst>
-          </p:cNvPr>
-          <p:cNvCxnSpPr>
-            <a:cxnSpLocks/>
-          </p:cNvCxnSpPr>
+          <p:cNvPr id="7" name="直接箭头连接符 6"/>
+          <p:cNvCxnSpPr/>
           <p:nvPr/>
         </p:nvCxnSpPr>
         <p:spPr>
@@ -7626,16 +6990,8 @@
       </p:cxnSp>
       <p:cxnSp>
         <p:nvCxnSpPr>
-          <p:cNvPr id="10" name="直接箭头连接符 9">
-            <a:extLst>
-              <a:ext uri="{FF2B5EF4-FFF2-40B4-BE49-F238E27FC236}">
-                <a16:creationId xmlns:a16="http://schemas.microsoft.com/office/drawing/2014/main" id="{01FBC8F5-959D-6742-921A-9297CDA48971}"/>
-              </a:ext>
-            </a:extLst>
-          </p:cNvPr>
-          <p:cNvCxnSpPr>
-            <a:cxnSpLocks/>
-          </p:cNvCxnSpPr>
+          <p:cNvPr id="10" name="直接箭头连接符 9"/>
+          <p:cNvCxnSpPr/>
           <p:nvPr/>
         </p:nvCxnSpPr>
         <p:spPr>
@@ -7667,23 +7023,17 @@
       </p:cxnSp>
       <p:pic>
         <p:nvPicPr>
-          <p:cNvPr id="12" name="图形 11" descr="条形图">
-            <a:extLst>
-              <a:ext uri="{FF2B5EF4-FFF2-40B4-BE49-F238E27FC236}">
-                <a16:creationId xmlns:a16="http://schemas.microsoft.com/office/drawing/2014/main" id="{6DA44790-F37C-EDF8-DB59-E18D00CFE6B4}"/>
-              </a:ext>
-            </a:extLst>
-          </p:cNvPr>
+          <p:cNvPr id="12" name="图形 11" descr="条形图"/>
           <p:cNvPicPr>
             <a:picLocks noChangeAspect="1"/>
           </p:cNvPicPr>
           <p:nvPr/>
         </p:nvPicPr>
         <p:blipFill>
-          <a:blip>
+          <a:blip r:embed="rId15">
             <a:extLst>
               <a:ext uri="{96DAC541-7B7A-43D3-8B79-37D633B846F1}">
-                <asvg:svgBlip xmlns:asvg="http://schemas.microsoft.com/office/drawing/2016/SVG/main" r:embed="rId13"/>
+                <asvg:svgBlip xmlns:asvg="http://schemas.microsoft.com/office/drawing/2016/SVG/main" r:embed="rId16"/>
               </a:ext>
             </a:extLst>
           </a:blip>
@@ -7703,16 +7053,8 @@
       </p:pic>
       <p:cxnSp>
         <p:nvCxnSpPr>
-          <p:cNvPr id="15" name="直接箭头连接符 14">
-            <a:extLst>
-              <a:ext uri="{FF2B5EF4-FFF2-40B4-BE49-F238E27FC236}">
-                <a16:creationId xmlns:a16="http://schemas.microsoft.com/office/drawing/2014/main" id="{000BDE75-5931-4AD8-0108-FDC06900CBAD}"/>
-              </a:ext>
-            </a:extLst>
-          </p:cNvPr>
-          <p:cNvCxnSpPr>
-            <a:cxnSpLocks/>
-          </p:cNvCxnSpPr>
+          <p:cNvPr id="15" name="直接箭头连接符 14"/>
+          <p:cNvCxnSpPr/>
           <p:nvPr/>
         </p:nvCxnSpPr>
         <p:spPr>
@@ -7744,23 +7086,17 @@
       </p:cxnSp>
       <p:pic>
         <p:nvPicPr>
-          <p:cNvPr id="16" name="图形 15" descr="条形图">
-            <a:extLst>
-              <a:ext uri="{FF2B5EF4-FFF2-40B4-BE49-F238E27FC236}">
-                <a16:creationId xmlns:a16="http://schemas.microsoft.com/office/drawing/2014/main" id="{7941128B-4EDD-2333-D904-2024A2065AAF}"/>
-              </a:ext>
-            </a:extLst>
-          </p:cNvPr>
+          <p:cNvPr id="16" name="图形 15" descr="条形图"/>
           <p:cNvPicPr>
             <a:picLocks noChangeAspect="1"/>
           </p:cNvPicPr>
           <p:nvPr/>
         </p:nvPicPr>
         <p:blipFill>
-          <a:blip>
+          <a:blip r:embed="rId15">
             <a:extLst>
               <a:ext uri="{96DAC541-7B7A-43D3-8B79-37D633B846F1}">
-                <asvg:svgBlip xmlns:asvg="http://schemas.microsoft.com/office/drawing/2016/SVG/main" r:embed="rId13"/>
+                <asvg:svgBlip xmlns:asvg="http://schemas.microsoft.com/office/drawing/2016/SVG/main" r:embed="rId16"/>
               </a:ext>
             </a:extLst>
           </a:blip>
@@ -7780,23 +7116,17 @@
       </p:pic>
       <p:pic>
         <p:nvPicPr>
-          <p:cNvPr id="18" name="图形 17" descr="条形图">
-            <a:extLst>
-              <a:ext uri="{FF2B5EF4-FFF2-40B4-BE49-F238E27FC236}">
-                <a16:creationId xmlns:a16="http://schemas.microsoft.com/office/drawing/2014/main" id="{04479D71-5B5A-DD0F-0FEB-C3C165B46E1A}"/>
-              </a:ext>
-            </a:extLst>
-          </p:cNvPr>
+          <p:cNvPr id="18" name="图形 17" descr="条形图"/>
           <p:cNvPicPr>
             <a:picLocks noChangeAspect="1"/>
           </p:cNvPicPr>
           <p:nvPr/>
         </p:nvPicPr>
         <p:blipFill>
-          <a:blip>
+          <a:blip r:embed="rId15">
             <a:extLst>
               <a:ext uri="{96DAC541-7B7A-43D3-8B79-37D633B846F1}">
-                <asvg:svgBlip xmlns:asvg="http://schemas.microsoft.com/office/drawing/2016/SVG/main" r:embed="rId13"/>
+                <asvg:svgBlip xmlns:asvg="http://schemas.microsoft.com/office/drawing/2016/SVG/main" r:embed="rId16"/>
               </a:ext>
             </a:extLst>
           </a:blip>
@@ -7816,16 +7146,8 @@
       </p:pic>
       <p:cxnSp>
         <p:nvCxnSpPr>
-          <p:cNvPr id="19" name="直接箭头连接符 18">
-            <a:extLst>
-              <a:ext uri="{FF2B5EF4-FFF2-40B4-BE49-F238E27FC236}">
-                <a16:creationId xmlns:a16="http://schemas.microsoft.com/office/drawing/2014/main" id="{A03B767B-2BC8-1D15-0FDB-CB6481825B58}"/>
-              </a:ext>
-            </a:extLst>
-          </p:cNvPr>
-          <p:cNvCxnSpPr>
-            <a:cxnSpLocks/>
-          </p:cNvCxnSpPr>
+          <p:cNvPr id="19" name="直接箭头连接符 18"/>
+          <p:cNvCxnSpPr/>
           <p:nvPr/>
         </p:nvCxnSpPr>
         <p:spPr>
@@ -7857,13 +7179,7 @@
       </p:cxnSp>
       <p:sp>
         <p:nvSpPr>
-          <p:cNvPr id="21" name="右大括号 20">
-            <a:extLst>
-              <a:ext uri="{FF2B5EF4-FFF2-40B4-BE49-F238E27FC236}">
-                <a16:creationId xmlns:a16="http://schemas.microsoft.com/office/drawing/2014/main" id="{23B19CF9-72A1-ACE0-F05B-4CDE818D037A}"/>
-              </a:ext>
-            </a:extLst>
-          </p:cNvPr>
+          <p:cNvPr id="21" name="右大括号 20"/>
           <p:cNvSpPr/>
           <p:nvPr/>
         </p:nvSpPr>
@@ -7901,13 +7217,7 @@
       </p:sp>
       <p:sp>
         <p:nvSpPr>
-          <p:cNvPr id="27" name="箭头: 下 26">
-            <a:extLst>
-              <a:ext uri="{FF2B5EF4-FFF2-40B4-BE49-F238E27FC236}">
-                <a16:creationId xmlns:a16="http://schemas.microsoft.com/office/drawing/2014/main" id="{234A194F-228F-CD00-AA83-68118F538504}"/>
-              </a:ext>
-            </a:extLst>
-          </p:cNvPr>
+          <p:cNvPr id="27" name="箭头: 下 26"/>
           <p:cNvSpPr/>
           <p:nvPr/>
         </p:nvSpPr>
@@ -7947,23 +7257,17 @@
       </p:sp>
       <p:pic>
         <p:nvPicPr>
-          <p:cNvPr id="28" name="图形 27" descr="条形图">
-            <a:extLst>
-              <a:ext uri="{FF2B5EF4-FFF2-40B4-BE49-F238E27FC236}">
-                <a16:creationId xmlns:a16="http://schemas.microsoft.com/office/drawing/2014/main" id="{C0E637FC-5B51-300E-2048-B2438B81347B}"/>
-              </a:ext>
-            </a:extLst>
-          </p:cNvPr>
+          <p:cNvPr id="28" name="图形 27" descr="条形图"/>
           <p:cNvPicPr>
             <a:picLocks noChangeAspect="1"/>
           </p:cNvPicPr>
           <p:nvPr/>
         </p:nvPicPr>
         <p:blipFill>
-          <a:blip>
+          <a:blip r:embed="rId17">
             <a:extLst>
               <a:ext uri="{96DAC541-7B7A-43D3-8B79-37D633B846F1}">
-                <asvg:svgBlip xmlns:asvg="http://schemas.microsoft.com/office/drawing/2016/SVG/main" r:embed="rId14"/>
+                <asvg:svgBlip xmlns:asvg="http://schemas.microsoft.com/office/drawing/2016/SVG/main" r:embed="rId18"/>
               </a:ext>
             </a:extLst>
           </a:blip>
@@ -7983,13 +7287,7 @@
       </p:pic>
       <p:sp>
         <p:nvSpPr>
-          <p:cNvPr id="31" name="矩形 30">
-            <a:extLst>
-              <a:ext uri="{FF2B5EF4-FFF2-40B4-BE49-F238E27FC236}">
-                <a16:creationId xmlns:a16="http://schemas.microsoft.com/office/drawing/2014/main" id="{ED281CF5-6BA8-0320-FCF2-DCC38243225F}"/>
-              </a:ext>
-            </a:extLst>
-          </p:cNvPr>
+          <p:cNvPr id="31" name="矩形 30"/>
           <p:cNvSpPr/>
           <p:nvPr/>
         </p:nvSpPr>
@@ -8042,6 +7340,13 @@
               </a:rPr>
               <a:t>Total Trust Score</a:t>
             </a:r>
+            <a:endParaRPr lang="en-US" altLang="zh-CN" sz="1200" b="1" dirty="0">
+              <a:solidFill>
+                <a:schemeClr val="tx1"/>
+              </a:solidFill>
+              <a:latin typeface="Arial" panose="020B0604020202020204" pitchFamily="34" charset="0"/>
+              <a:cs typeface="Arial" panose="020B0604020202020204" pitchFamily="34" charset="0"/>
+            </a:endParaRPr>
           </a:p>
           <a:p>
             <a:pPr algn="ctr"/>
@@ -8086,13 +7391,7 @@
       </p:sp>
       <p:sp>
         <p:nvSpPr>
-          <p:cNvPr id="36" name="矩形 35">
-            <a:extLst>
-              <a:ext uri="{FF2B5EF4-FFF2-40B4-BE49-F238E27FC236}">
-                <a16:creationId xmlns:a16="http://schemas.microsoft.com/office/drawing/2014/main" id="{349F721C-9982-42FB-22B6-D7032A6AEE2E}"/>
-              </a:ext>
-            </a:extLst>
-          </p:cNvPr>
+          <p:cNvPr id="36" name="矩形 35"/>
           <p:cNvSpPr/>
           <p:nvPr/>
         </p:nvSpPr>
@@ -8195,13 +7494,7 @@
       </p:sp>
       <p:sp>
         <p:nvSpPr>
-          <p:cNvPr id="38" name="矩形 37">
-            <a:extLst>
-              <a:ext uri="{FF2B5EF4-FFF2-40B4-BE49-F238E27FC236}">
-                <a16:creationId xmlns:a16="http://schemas.microsoft.com/office/drawing/2014/main" id="{DD4320AE-F8A3-F098-C705-42066047985C}"/>
-              </a:ext>
-            </a:extLst>
-          </p:cNvPr>
+          <p:cNvPr id="38" name="矩形 37"/>
           <p:cNvSpPr/>
           <p:nvPr/>
         </p:nvSpPr>
@@ -8304,13 +7597,7 @@
       </p:sp>
       <p:sp>
         <p:nvSpPr>
-          <p:cNvPr id="39" name="矩形 38">
-            <a:extLst>
-              <a:ext uri="{FF2B5EF4-FFF2-40B4-BE49-F238E27FC236}">
-                <a16:creationId xmlns:a16="http://schemas.microsoft.com/office/drawing/2014/main" id="{A8F6889D-8031-B94A-D43E-1E903C69C8A2}"/>
-              </a:ext>
-            </a:extLst>
-          </p:cNvPr>
+          <p:cNvPr id="39" name="矩形 38"/>
           <p:cNvSpPr/>
           <p:nvPr/>
         </p:nvSpPr>
@@ -8413,13 +7700,7 @@
       </p:sp>
       <p:sp>
         <p:nvSpPr>
-          <p:cNvPr id="40" name="矩形 39">
-            <a:extLst>
-              <a:ext uri="{FF2B5EF4-FFF2-40B4-BE49-F238E27FC236}">
-                <a16:creationId xmlns:a16="http://schemas.microsoft.com/office/drawing/2014/main" id="{D0F366D7-F5CA-F68A-D216-17E632EEBB5A}"/>
-              </a:ext>
-            </a:extLst>
-          </p:cNvPr>
+          <p:cNvPr id="40" name="矩形 39"/>
           <p:cNvSpPr/>
           <p:nvPr/>
         </p:nvSpPr>
@@ -8522,13 +7803,7 @@
       </p:sp>
       <p:sp>
         <p:nvSpPr>
-          <p:cNvPr id="58" name="箭头: 上弧形 57">
-            <a:extLst>
-              <a:ext uri="{FF2B5EF4-FFF2-40B4-BE49-F238E27FC236}">
-                <a16:creationId xmlns:a16="http://schemas.microsoft.com/office/drawing/2014/main" id="{7E2F0133-B2DB-0BBB-1127-6457F8469E43}"/>
-              </a:ext>
-            </a:extLst>
-          </p:cNvPr>
+          <p:cNvPr id="58" name="箭头: 上弧形 57"/>
           <p:cNvSpPr/>
           <p:nvPr/>
         </p:nvSpPr>
@@ -8579,13 +7854,7 @@
       </p:sp>
       <p:sp>
         <p:nvSpPr>
-          <p:cNvPr id="61" name="文本框 60">
-            <a:extLst>
-              <a:ext uri="{FF2B5EF4-FFF2-40B4-BE49-F238E27FC236}">
-                <a16:creationId xmlns:a16="http://schemas.microsoft.com/office/drawing/2014/main" id="{249A9E23-9CB8-B6AF-929A-B04FCB3AE65D}"/>
-              </a:ext>
-            </a:extLst>
-          </p:cNvPr>
+          <p:cNvPr id="61" name="文本框 60"/>
           <p:cNvSpPr txBox="1"/>
           <p:nvPr/>
         </p:nvSpPr>
@@ -8621,16 +7890,8 @@
       </p:sp>
       <p:cxnSp>
         <p:nvCxnSpPr>
-          <p:cNvPr id="9" name="直接箭头连接符 8">
-            <a:extLst>
-              <a:ext uri="{FF2B5EF4-FFF2-40B4-BE49-F238E27FC236}">
-                <a16:creationId xmlns:a16="http://schemas.microsoft.com/office/drawing/2014/main" id="{B53E7D02-E6D7-1A74-35FA-7541621886F9}"/>
-              </a:ext>
-            </a:extLst>
-          </p:cNvPr>
-          <p:cNvCxnSpPr>
-            <a:cxnSpLocks/>
-          </p:cNvCxnSpPr>
+          <p:cNvPr id="9" name="直接箭头连接符 8"/>
+          <p:cNvCxnSpPr/>
           <p:nvPr/>
         </p:nvCxnSpPr>
         <p:spPr>
@@ -8661,11 +7922,6 @@
         </p:style>
       </p:cxnSp>
     </p:spTree>
-    <p:extLst>
-      <p:ext uri="{BB962C8B-B14F-4D97-AF65-F5344CB8AC3E}">
-        <p14:creationId xmlns:p14="http://schemas.microsoft.com/office/powerpoint/2010/main" val="388359596"/>
-      </p:ext>
-    </p:extLst>
   </p:cSld>
   <p:clrMapOvr>
     <a:masterClrMapping/>
@@ -8678,13 +7934,7 @@
   <p:cSld>
     <p:spTree>
       <p:nvGrpSpPr>
-        <p:cNvPr id="1" name="">
-          <a:extLst>
-            <a:ext uri="{FF2B5EF4-FFF2-40B4-BE49-F238E27FC236}">
-              <a16:creationId xmlns:a16="http://schemas.microsoft.com/office/drawing/2014/main" id="{3EA2CC49-5EF0-7A7A-68CF-4C88AE05592A}"/>
-            </a:ext>
-          </a:extLst>
-        </p:cNvPr>
+        <p:cNvPr id="1" name=""/>
         <p:cNvGrpSpPr/>
         <p:nvPr/>
       </p:nvGrpSpPr>
@@ -8698,13 +7948,7 @@
       </p:grpSpPr>
       <p:sp>
         <p:nvSpPr>
-          <p:cNvPr id="48" name="矩形 47">
-            <a:extLst>
-              <a:ext uri="{FF2B5EF4-FFF2-40B4-BE49-F238E27FC236}">
-                <a16:creationId xmlns:a16="http://schemas.microsoft.com/office/drawing/2014/main" id="{F726B806-07FA-5A64-C4D9-523065A46FF1}"/>
-              </a:ext>
-            </a:extLst>
-          </p:cNvPr>
+          <p:cNvPr id="48" name="矩形 47"/>
           <p:cNvSpPr/>
           <p:nvPr/>
         </p:nvSpPr>
@@ -8759,13 +8003,7 @@
       </p:sp>
       <p:sp>
         <p:nvSpPr>
-          <p:cNvPr id="42" name="矩形 41">
-            <a:extLst>
-              <a:ext uri="{FF2B5EF4-FFF2-40B4-BE49-F238E27FC236}">
-                <a16:creationId xmlns:a16="http://schemas.microsoft.com/office/drawing/2014/main" id="{ED9A6F84-8CB7-93D7-B766-E620FF1D5BC5}"/>
-              </a:ext>
-            </a:extLst>
-          </p:cNvPr>
+          <p:cNvPr id="42" name="矩形 41"/>
           <p:cNvSpPr/>
           <p:nvPr/>
         </p:nvSpPr>
@@ -8812,13 +8050,7 @@
       </p:sp>
       <p:sp>
         <p:nvSpPr>
-          <p:cNvPr id="47" name="矩形 46">
-            <a:extLst>
-              <a:ext uri="{FF2B5EF4-FFF2-40B4-BE49-F238E27FC236}">
-                <a16:creationId xmlns:a16="http://schemas.microsoft.com/office/drawing/2014/main" id="{77D93132-F6E1-839F-98F9-34BA7FAA7D13}"/>
-              </a:ext>
-            </a:extLst>
-          </p:cNvPr>
+          <p:cNvPr id="47" name="矩形 46"/>
           <p:cNvSpPr/>
           <p:nvPr/>
         </p:nvSpPr>
@@ -8865,16 +8097,8 @@
       </p:sp>
       <p:cxnSp>
         <p:nvCxnSpPr>
-          <p:cNvPr id="105" name="直接连接符 104">
-            <a:extLst>
-              <a:ext uri="{FF2B5EF4-FFF2-40B4-BE49-F238E27FC236}">
-                <a16:creationId xmlns:a16="http://schemas.microsoft.com/office/drawing/2014/main" id="{CBF674E9-8BA8-E725-558B-E6368E10FBB1}"/>
-              </a:ext>
-            </a:extLst>
-          </p:cNvPr>
-          <p:cNvCxnSpPr>
-            <a:cxnSpLocks/>
-          </p:cNvCxnSpPr>
+          <p:cNvPr id="105" name="直接连接符 104"/>
+          <p:cNvCxnSpPr/>
           <p:nvPr/>
         </p:nvCxnSpPr>
         <p:spPr>
@@ -8908,16 +8132,8 @@
       </p:cxnSp>
       <p:cxnSp>
         <p:nvCxnSpPr>
-          <p:cNvPr id="68" name="直接连接符 67">
-            <a:extLst>
-              <a:ext uri="{FF2B5EF4-FFF2-40B4-BE49-F238E27FC236}">
-                <a16:creationId xmlns:a16="http://schemas.microsoft.com/office/drawing/2014/main" id="{77ECCB1B-B104-14F9-3F74-AF293A5E6CEF}"/>
-              </a:ext>
-            </a:extLst>
-          </p:cNvPr>
-          <p:cNvCxnSpPr>
-            <a:cxnSpLocks/>
-          </p:cNvCxnSpPr>
+          <p:cNvPr id="68" name="直接连接符 67"/>
+          <p:cNvCxnSpPr/>
           <p:nvPr/>
         </p:nvCxnSpPr>
         <p:spPr>
@@ -8951,13 +8167,72 @@
       </p:cxnSp>
       <p:pic>
         <p:nvPicPr>
-          <p:cNvPr id="11" name="图片 10">
+          <p:cNvPr id="11" name="图片 10"/>
+          <p:cNvPicPr>
+            <a:picLocks noChangeAspect="1"/>
+          </p:cNvPicPr>
+          <p:nvPr/>
+        </p:nvPicPr>
+        <p:blipFill>
+          <a:blip r:embed="rId1" cstate="print">
             <a:extLst>
-              <a:ext uri="{FF2B5EF4-FFF2-40B4-BE49-F238E27FC236}">
-                <a16:creationId xmlns:a16="http://schemas.microsoft.com/office/drawing/2014/main" id="{6E274088-FB6F-1DA5-9AAA-B353AA1F845B}"/>
+              <a:ext uri="{28A0092B-C50C-407E-A947-70E740481C1C}">
+                <a14:useLocalDpi xmlns:a14="http://schemas.microsoft.com/office/drawing/2010/main" val="0"/>
               </a:ext>
             </a:extLst>
-          </p:cNvPr>
+          </a:blip>
+          <a:stretch>
+            <a:fillRect/>
+          </a:stretch>
+        </p:blipFill>
+        <p:spPr>
+          <a:xfrm>
+            <a:off x="117036" y="991513"/>
+            <a:ext cx="442495" cy="442495"/>
+          </a:xfrm>
+          <a:prstGeom prst="rect">
+            <a:avLst/>
+          </a:prstGeom>
+        </p:spPr>
+      </p:pic>
+      <p:cxnSp>
+        <p:nvCxnSpPr>
+          <p:cNvPr id="13" name="直接连接符 12"/>
+          <p:cNvCxnSpPr/>
+          <p:nvPr/>
+        </p:nvCxnSpPr>
+        <p:spPr>
+          <a:xfrm flipV="1">
+            <a:off x="4080342" y="510922"/>
+            <a:ext cx="32165" cy="6347078"/>
+          </a:xfrm>
+          <a:prstGeom prst="line">
+            <a:avLst/>
+          </a:prstGeom>
+          <a:ln>
+            <a:prstDash val="dash"/>
+            <a:headEnd type="none" w="med" len="med"/>
+            <a:tailEnd type="none" w="med" len="med"/>
+          </a:ln>
+        </p:spPr>
+        <p:style>
+          <a:lnRef idx="3">
+            <a:schemeClr val="dk1"/>
+          </a:lnRef>
+          <a:fillRef idx="0">
+            <a:schemeClr val="dk1"/>
+          </a:fillRef>
+          <a:effectRef idx="2">
+            <a:schemeClr val="dk1"/>
+          </a:effectRef>
+          <a:fontRef idx="minor">
+            <a:schemeClr val="tx1"/>
+          </a:fontRef>
+        </p:style>
+      </p:cxnSp>
+      <p:pic>
+        <p:nvPicPr>
+          <p:cNvPr id="22" name="图片 21"/>
           <p:cNvPicPr>
             <a:picLocks noChangeAspect="1"/>
           </p:cNvPicPr>
@@ -8977,66 +8252,17 @@
         </p:blipFill>
         <p:spPr>
           <a:xfrm>
-            <a:off x="117036" y="991513"/>
-            <a:ext cx="442495" cy="442495"/>
+            <a:off x="829606" y="1398882"/>
+            <a:ext cx="658712" cy="658712"/>
           </a:xfrm>
           <a:prstGeom prst="rect">
             <a:avLst/>
           </a:prstGeom>
         </p:spPr>
       </p:pic>
-      <p:cxnSp>
-        <p:nvCxnSpPr>
-          <p:cNvPr id="13" name="直接连接符 12">
-            <a:extLst>
-              <a:ext uri="{FF2B5EF4-FFF2-40B4-BE49-F238E27FC236}">
-                <a16:creationId xmlns:a16="http://schemas.microsoft.com/office/drawing/2014/main" id="{E56187A3-B469-7248-CCE9-AEA37F0BDC0C}"/>
-              </a:ext>
-            </a:extLst>
-          </p:cNvPr>
-          <p:cNvCxnSpPr>
-            <a:cxnSpLocks/>
-          </p:cNvCxnSpPr>
-          <p:nvPr/>
-        </p:nvCxnSpPr>
-        <p:spPr>
-          <a:xfrm flipV="1">
-            <a:off x="4080342" y="510922"/>
-            <a:ext cx="32165" cy="6347078"/>
-          </a:xfrm>
-          <a:prstGeom prst="line">
-            <a:avLst/>
-          </a:prstGeom>
-          <a:ln>
-            <a:prstDash val="dash"/>
-            <a:headEnd type="none" w="med" len="med"/>
-            <a:tailEnd type="none" w="med" len="med"/>
-          </a:ln>
-        </p:spPr>
-        <p:style>
-          <a:lnRef idx="3">
-            <a:schemeClr val="dk1"/>
-          </a:lnRef>
-          <a:fillRef idx="0">
-            <a:schemeClr val="dk1"/>
-          </a:fillRef>
-          <a:effectRef idx="2">
-            <a:schemeClr val="dk1"/>
-          </a:effectRef>
-          <a:fontRef idx="minor">
-            <a:schemeClr val="tx1"/>
-          </a:fontRef>
-        </p:style>
-      </p:cxnSp>
       <p:pic>
         <p:nvPicPr>
-          <p:cNvPr id="22" name="图片 21">
-            <a:extLst>
-              <a:ext uri="{FF2B5EF4-FFF2-40B4-BE49-F238E27FC236}">
-                <a16:creationId xmlns:a16="http://schemas.microsoft.com/office/drawing/2014/main" id="{7F9F2DB4-67B8-6833-F9C8-2D4FD2CC5019}"/>
-              </a:ext>
-            </a:extLst>
-          </p:cNvPr>
+          <p:cNvPr id="29" name="图片 28"/>
           <p:cNvPicPr>
             <a:picLocks noChangeAspect="1"/>
           </p:cNvPicPr>
@@ -9055,9 +8281,9 @@
           </a:stretch>
         </p:blipFill>
         <p:spPr>
-          <a:xfrm>
-            <a:off x="829606" y="1398882"/>
-            <a:ext cx="658712" cy="658712"/>
+          <a:xfrm rot="7044394">
+            <a:off x="435871" y="1199724"/>
+            <a:ext cx="468565" cy="468565"/>
           </a:xfrm>
           <a:prstGeom prst="rect">
             <a:avLst/>
@@ -9066,13 +8292,37 @@
       </p:pic>
       <p:pic>
         <p:nvPicPr>
-          <p:cNvPr id="29" name="图片 28">
+          <p:cNvPr id="30" name="图片 29"/>
+          <p:cNvPicPr>
+            <a:picLocks noChangeAspect="1"/>
+          </p:cNvPicPr>
+          <p:nvPr/>
+        </p:nvPicPr>
+        <p:blipFill>
+          <a:blip r:embed="rId1" cstate="print">
             <a:extLst>
-              <a:ext uri="{FF2B5EF4-FFF2-40B4-BE49-F238E27FC236}">
-                <a16:creationId xmlns:a16="http://schemas.microsoft.com/office/drawing/2014/main" id="{D7B3C9FA-4D98-7054-36BD-B1F17E950068}"/>
+              <a:ext uri="{28A0092B-C50C-407E-A947-70E740481C1C}">
+                <a14:useLocalDpi xmlns:a14="http://schemas.microsoft.com/office/drawing/2010/main" val="0"/>
               </a:ext>
             </a:extLst>
-          </p:cNvPr>
+          </a:blip>
+          <a:stretch>
+            <a:fillRect/>
+          </a:stretch>
+        </p:blipFill>
+        <p:spPr>
+          <a:xfrm>
+            <a:off x="133077" y="2168546"/>
+            <a:ext cx="442495" cy="442495"/>
+          </a:xfrm>
+          <a:prstGeom prst="rect">
+            <a:avLst/>
+          </a:prstGeom>
+        </p:spPr>
+      </p:pic>
+      <p:pic>
+        <p:nvPicPr>
+          <p:cNvPr id="32" name="图片 31"/>
           <p:cNvPicPr>
             <a:picLocks noChangeAspect="1"/>
           </p:cNvPicPr>
@@ -9091,9 +8341,9 @@
           </a:stretch>
         </p:blipFill>
         <p:spPr>
-          <a:xfrm rot="7044394">
-            <a:off x="435871" y="1199724"/>
-            <a:ext cx="468565" cy="468565"/>
+          <a:xfrm rot="3892081">
+            <a:off x="451919" y="1824410"/>
+            <a:ext cx="485300" cy="485300"/>
           </a:xfrm>
           <a:prstGeom prst="rect">
             <a:avLst/>
@@ -9102,20 +8352,14 @@
       </p:pic>
       <p:pic>
         <p:nvPicPr>
-          <p:cNvPr id="30" name="图片 29">
-            <a:extLst>
-              <a:ext uri="{FF2B5EF4-FFF2-40B4-BE49-F238E27FC236}">
-                <a16:creationId xmlns:a16="http://schemas.microsoft.com/office/drawing/2014/main" id="{C1E5385C-F40B-5450-E00F-923E7E720BB7}"/>
-              </a:ext>
-            </a:extLst>
-          </p:cNvPr>
+          <p:cNvPr id="33" name="图片 32"/>
           <p:cNvPicPr>
             <a:picLocks noChangeAspect="1"/>
           </p:cNvPicPr>
           <p:nvPr/>
         </p:nvPicPr>
         <p:blipFill>
-          <a:blip r:embed="rId2" cstate="print">
+          <a:blip r:embed="rId3" cstate="print">
             <a:extLst>
               <a:ext uri="{28A0092B-C50C-407E-A947-70E740481C1C}">
                 <a14:useLocalDpi xmlns:a14="http://schemas.microsoft.com/office/drawing/2010/main" val="0"/>
@@ -9127,9 +8371,9 @@
           </a:stretch>
         </p:blipFill>
         <p:spPr>
-          <a:xfrm>
-            <a:off x="133077" y="2168546"/>
-            <a:ext cx="442495" cy="442495"/>
+          <a:xfrm rot="13500129">
+            <a:off x="1433770" y="1221847"/>
+            <a:ext cx="468565" cy="468565"/>
           </a:xfrm>
           <a:prstGeom prst="rect">
             <a:avLst/>
@@ -9138,13 +8382,67 @@
       </p:pic>
       <p:pic>
         <p:nvPicPr>
-          <p:cNvPr id="32" name="图片 31">
+          <p:cNvPr id="34" name="图片 33"/>
+          <p:cNvPicPr>
+            <a:picLocks noChangeAspect="1"/>
+          </p:cNvPicPr>
+          <p:nvPr/>
+        </p:nvPicPr>
+        <p:blipFill>
+          <a:blip r:embed="rId3" cstate="print">
             <a:extLst>
-              <a:ext uri="{FF2B5EF4-FFF2-40B4-BE49-F238E27FC236}">
-                <a16:creationId xmlns:a16="http://schemas.microsoft.com/office/drawing/2014/main" id="{9B1C673D-23C1-6D14-1D29-646A74D96CB2}"/>
+              <a:ext uri="{28A0092B-C50C-407E-A947-70E740481C1C}">
+                <a14:useLocalDpi xmlns:a14="http://schemas.microsoft.com/office/drawing/2010/main" val="0"/>
               </a:ext>
             </a:extLst>
-          </p:cNvPr>
+          </a:blip>
+          <a:stretch>
+            <a:fillRect/>
+          </a:stretch>
+        </p:blipFill>
+        <p:spPr>
+          <a:xfrm rot="7000502">
+            <a:off x="1389087" y="1808479"/>
+            <a:ext cx="468565" cy="468565"/>
+          </a:xfrm>
+          <a:prstGeom prst="rect">
+            <a:avLst/>
+          </a:prstGeom>
+        </p:spPr>
+      </p:pic>
+      <p:pic>
+        <p:nvPicPr>
+          <p:cNvPr id="35" name="图片 34"/>
+          <p:cNvPicPr>
+            <a:picLocks noChangeAspect="1"/>
+          </p:cNvPicPr>
+          <p:nvPr/>
+        </p:nvPicPr>
+        <p:blipFill>
+          <a:blip r:embed="rId1" cstate="print">
+            <a:extLst>
+              <a:ext uri="{28A0092B-C50C-407E-A947-70E740481C1C}">
+                <a14:useLocalDpi xmlns:a14="http://schemas.microsoft.com/office/drawing/2010/main" val="0"/>
+              </a:ext>
+            </a:extLst>
+          </a:blip>
+          <a:stretch>
+            <a:fillRect/>
+          </a:stretch>
+        </p:blipFill>
+        <p:spPr>
+          <a:xfrm>
+            <a:off x="1700057" y="946924"/>
+            <a:ext cx="442495" cy="442495"/>
+          </a:xfrm>
+          <a:prstGeom prst="rect">
+            <a:avLst/>
+          </a:prstGeom>
+        </p:spPr>
+      </p:pic>
+      <p:pic>
+        <p:nvPicPr>
+          <p:cNvPr id="37" name="图片 36"/>
           <p:cNvPicPr>
             <a:picLocks noChangeAspect="1"/>
           </p:cNvPicPr>
@@ -9163,132 +8461,196 @@
           </a:stretch>
         </p:blipFill>
         <p:spPr>
-          <a:xfrm rot="3892081">
-            <a:off x="451919" y="1824410"/>
-            <a:ext cx="485300" cy="485300"/>
+          <a:xfrm>
+            <a:off x="1748991" y="2217417"/>
+            <a:ext cx="344626" cy="344626"/>
           </a:xfrm>
           <a:prstGeom prst="rect">
             <a:avLst/>
           </a:prstGeom>
         </p:spPr>
       </p:pic>
+      <p:sp>
+        <p:nvSpPr>
+          <p:cNvPr id="43" name="文本框 42"/>
+          <p:cNvSpPr txBox="1"/>
+          <p:nvPr/>
+        </p:nvSpPr>
+        <p:spPr>
+          <a:xfrm>
+            <a:off x="1290646" y="156287"/>
+            <a:ext cx="1668565" cy="369332"/>
+          </a:xfrm>
+          <a:prstGeom prst="rect">
+            <a:avLst/>
+          </a:prstGeom>
+          <a:noFill/>
+        </p:spPr>
+        <p:txBody>
+          <a:bodyPr wrap="square" rtlCol="0">
+            <a:spAutoFit/>
+          </a:bodyPr>
+          <a:lstStyle/>
+          <a:p>
+            <a:r>
+              <a:rPr lang="en-US" altLang="zh-CN" b="1" dirty="0">
+                <a:latin typeface="Arial" panose="020B0604020202020204" pitchFamily="34" charset="0"/>
+                <a:cs typeface="Arial" panose="020B0604020202020204" pitchFamily="34" charset="0"/>
+              </a:rPr>
+              <a:t>UAV Network </a:t>
+            </a:r>
+            <a:endParaRPr lang="zh-CN" altLang="en-US" b="1" dirty="0">
+              <a:latin typeface="Arial" panose="020B0604020202020204" pitchFamily="34" charset="0"/>
+              <a:cs typeface="Arial" panose="020B0604020202020204" pitchFamily="34" charset="0"/>
+            </a:endParaRPr>
+          </a:p>
+        </p:txBody>
+      </p:sp>
+      <p:sp>
+        <p:nvSpPr>
+          <p:cNvPr id="46" name="文本框 45"/>
+          <p:cNvSpPr txBox="1"/>
+          <p:nvPr/>
+        </p:nvSpPr>
+        <p:spPr>
+          <a:xfrm>
+            <a:off x="1488318" y="2512573"/>
+            <a:ext cx="941972" cy="276999"/>
+          </a:xfrm>
+          <a:prstGeom prst="rect">
+            <a:avLst/>
+          </a:prstGeom>
+          <a:noFill/>
+        </p:spPr>
+        <p:txBody>
+          <a:bodyPr wrap="square" rtlCol="0">
+            <a:spAutoFit/>
+          </a:bodyPr>
+          <a:lstStyle/>
+          <a:p>
+            <a:r>
+              <a:rPr lang="en-US" altLang="zh-CN" sz="1200" dirty="0">
+                <a:latin typeface="Arial" panose="020B0604020202020204" pitchFamily="34" charset="0"/>
+                <a:cs typeface="Arial" panose="020B0604020202020204" pitchFamily="34" charset="0"/>
+              </a:rPr>
+              <a:t>Anomalies</a:t>
+            </a:r>
+            <a:endParaRPr lang="zh-CN" altLang="en-US" sz="1200" dirty="0">
+              <a:latin typeface="Arial" panose="020B0604020202020204" pitchFamily="34" charset="0"/>
+              <a:cs typeface="Arial" panose="020B0604020202020204" pitchFamily="34" charset="0"/>
+            </a:endParaRPr>
+          </a:p>
+        </p:txBody>
+      </p:sp>
+      <p:cxnSp>
+        <p:nvCxnSpPr>
+          <p:cNvPr id="49" name="直接连接符 48"/>
+          <p:cNvCxnSpPr/>
+          <p:nvPr/>
+        </p:nvCxnSpPr>
+        <p:spPr>
+          <a:xfrm>
+            <a:off x="45593" y="537612"/>
+            <a:ext cx="11992884" cy="0"/>
+          </a:xfrm>
+          <a:prstGeom prst="line">
+            <a:avLst/>
+          </a:prstGeom>
+        </p:spPr>
+        <p:style>
+          <a:lnRef idx="3">
+            <a:schemeClr val="dk1"/>
+          </a:lnRef>
+          <a:fillRef idx="0">
+            <a:schemeClr val="dk1"/>
+          </a:fillRef>
+          <a:effectRef idx="2">
+            <a:schemeClr val="dk1"/>
+          </a:effectRef>
+          <a:fontRef idx="minor">
+            <a:schemeClr val="tx1"/>
+          </a:fontRef>
+        </p:style>
+      </p:cxnSp>
+      <p:sp>
+        <p:nvSpPr>
+          <p:cNvPr id="50" name="文本框 49"/>
+          <p:cNvSpPr txBox="1"/>
+          <p:nvPr/>
+        </p:nvSpPr>
+        <p:spPr>
+          <a:xfrm>
+            <a:off x="315059" y="676816"/>
+            <a:ext cx="1622834" cy="276999"/>
+          </a:xfrm>
+          <a:prstGeom prst="rect">
+            <a:avLst/>
+          </a:prstGeom>
+          <a:noFill/>
+        </p:spPr>
+        <p:txBody>
+          <a:bodyPr wrap="square" rtlCol="0">
+            <a:spAutoFit/>
+          </a:bodyPr>
+          <a:lstStyle/>
+          <a:p>
+            <a:r>
+              <a:rPr lang="en-US" altLang="zh-CN" sz="1200" b="1" dirty="0">
+                <a:latin typeface="Arial" panose="020B0604020202020204" pitchFamily="34" charset="0"/>
+                <a:cs typeface="Arial" panose="020B0604020202020204" pitchFamily="34" charset="0"/>
+              </a:rPr>
+              <a:t>UAV Swarm Access</a:t>
+            </a:r>
+            <a:endParaRPr lang="zh-CN" altLang="en-US" sz="1200" b="1" dirty="0">
+              <a:latin typeface="Arial" panose="020B0604020202020204" pitchFamily="34" charset="0"/>
+              <a:cs typeface="Arial" panose="020B0604020202020204" pitchFamily="34" charset="0"/>
+            </a:endParaRPr>
+          </a:p>
+        </p:txBody>
+      </p:sp>
+      <p:sp>
+        <p:nvSpPr>
+          <p:cNvPr id="52" name="等腰三角形 51"/>
+          <p:cNvSpPr/>
+          <p:nvPr/>
+        </p:nvSpPr>
+        <p:spPr>
+          <a:xfrm rot="5400000">
+            <a:off x="2164469" y="1529441"/>
+            <a:ext cx="505104" cy="358480"/>
+          </a:xfrm>
+          <a:prstGeom prst="triangle">
+            <a:avLst/>
+          </a:prstGeom>
+        </p:spPr>
+        <p:style>
+          <a:lnRef idx="2">
+            <a:schemeClr val="accent2">
+              <a:shade val="15000"/>
+            </a:schemeClr>
+          </a:lnRef>
+          <a:fillRef idx="1">
+            <a:schemeClr val="accent2"/>
+          </a:fillRef>
+          <a:effectRef idx="0">
+            <a:schemeClr val="accent2"/>
+          </a:effectRef>
+          <a:fontRef idx="minor">
+            <a:schemeClr val="lt1"/>
+          </a:fontRef>
+        </p:style>
+        <p:txBody>
+          <a:bodyPr rtlCol="0" anchor="ctr"/>
+          <a:lstStyle/>
+          <a:p>
+            <a:pPr algn="ctr"/>
+            <a:endParaRPr lang="zh-CN" altLang="en-US"/>
+          </a:p>
+        </p:txBody>
+      </p:sp>
       <p:pic>
         <p:nvPicPr>
-          <p:cNvPr id="33" name="图片 32">
-            <a:extLst>
-              <a:ext uri="{FF2B5EF4-FFF2-40B4-BE49-F238E27FC236}">
-                <a16:creationId xmlns:a16="http://schemas.microsoft.com/office/drawing/2014/main" id="{21D59A1B-2FC0-9614-8AB6-9A8DAFB7B167}"/>
-              </a:ext>
-            </a:extLst>
-          </p:cNvPr>
-          <p:cNvPicPr>
-            <a:picLocks noChangeAspect="1"/>
-          </p:cNvPicPr>
-          <p:nvPr/>
-        </p:nvPicPr>
-        <p:blipFill>
-          <a:blip r:embed="rId4" cstate="print">
-            <a:extLst>
-              <a:ext uri="{28A0092B-C50C-407E-A947-70E740481C1C}">
-                <a14:useLocalDpi xmlns:a14="http://schemas.microsoft.com/office/drawing/2010/main" val="0"/>
-              </a:ext>
-            </a:extLst>
-          </a:blip>
-          <a:stretch>
-            <a:fillRect/>
-          </a:stretch>
-        </p:blipFill>
-        <p:spPr>
-          <a:xfrm rot="13500129">
-            <a:off x="1433770" y="1221847"/>
-            <a:ext cx="468565" cy="468565"/>
-          </a:xfrm>
-          <a:prstGeom prst="rect">
-            <a:avLst/>
-          </a:prstGeom>
-        </p:spPr>
-      </p:pic>
-      <p:pic>
-        <p:nvPicPr>
-          <p:cNvPr id="34" name="图片 33">
-            <a:extLst>
-              <a:ext uri="{FF2B5EF4-FFF2-40B4-BE49-F238E27FC236}">
-                <a16:creationId xmlns:a16="http://schemas.microsoft.com/office/drawing/2014/main" id="{1ABB47CF-B0C1-C2E5-F317-59F77EC082E7}"/>
-              </a:ext>
-            </a:extLst>
-          </p:cNvPr>
-          <p:cNvPicPr>
-            <a:picLocks noChangeAspect="1"/>
-          </p:cNvPicPr>
-          <p:nvPr/>
-        </p:nvPicPr>
-        <p:blipFill>
-          <a:blip r:embed="rId4" cstate="print">
-            <a:extLst>
-              <a:ext uri="{28A0092B-C50C-407E-A947-70E740481C1C}">
-                <a14:useLocalDpi xmlns:a14="http://schemas.microsoft.com/office/drawing/2010/main" val="0"/>
-              </a:ext>
-            </a:extLst>
-          </a:blip>
-          <a:stretch>
-            <a:fillRect/>
-          </a:stretch>
-        </p:blipFill>
-        <p:spPr>
-          <a:xfrm rot="7000502">
-            <a:off x="1389087" y="1808479"/>
-            <a:ext cx="468565" cy="468565"/>
-          </a:xfrm>
-          <a:prstGeom prst="rect">
-            <a:avLst/>
-          </a:prstGeom>
-        </p:spPr>
-      </p:pic>
-      <p:pic>
-        <p:nvPicPr>
-          <p:cNvPr id="35" name="图片 34">
-            <a:extLst>
-              <a:ext uri="{FF2B5EF4-FFF2-40B4-BE49-F238E27FC236}">
-                <a16:creationId xmlns:a16="http://schemas.microsoft.com/office/drawing/2014/main" id="{600E95D5-D9ED-02E3-D141-9C31F691AA8F}"/>
-              </a:ext>
-            </a:extLst>
-          </p:cNvPr>
-          <p:cNvPicPr>
-            <a:picLocks noChangeAspect="1"/>
-          </p:cNvPicPr>
-          <p:nvPr/>
-        </p:nvPicPr>
-        <p:blipFill>
-          <a:blip r:embed="rId2" cstate="print">
-            <a:extLst>
-              <a:ext uri="{28A0092B-C50C-407E-A947-70E740481C1C}">
-                <a14:useLocalDpi xmlns:a14="http://schemas.microsoft.com/office/drawing/2010/main" val="0"/>
-              </a:ext>
-            </a:extLst>
-          </a:blip>
-          <a:stretch>
-            <a:fillRect/>
-          </a:stretch>
-        </p:blipFill>
-        <p:spPr>
-          <a:xfrm>
-            <a:off x="1700057" y="946924"/>
-            <a:ext cx="442495" cy="442495"/>
-          </a:xfrm>
-          <a:prstGeom prst="rect">
-            <a:avLst/>
-          </a:prstGeom>
-        </p:spPr>
-      </p:pic>
-      <p:pic>
-        <p:nvPicPr>
-          <p:cNvPr id="37" name="图片 36">
-            <a:extLst>
-              <a:ext uri="{FF2B5EF4-FFF2-40B4-BE49-F238E27FC236}">
-                <a16:creationId xmlns:a16="http://schemas.microsoft.com/office/drawing/2014/main" id="{8FAA6753-25DD-2DA1-E78A-65F7A16A85C8}"/>
-              </a:ext>
-            </a:extLst>
-          </p:cNvPr>
+          <p:cNvPr id="55" name="图片 54"/>
           <p:cNvPicPr>
             <a:picLocks noChangeAspect="1"/>
           </p:cNvPicPr>
@@ -9308,30 +8670,27 @@
         </p:blipFill>
         <p:spPr>
           <a:xfrm>
-            <a:off x="1748991" y="2217417"/>
-            <a:ext cx="344626" cy="344626"/>
-          </a:xfrm>
-          <a:prstGeom prst="rect">
-            <a:avLst/>
-          </a:prstGeom>
+            <a:off x="2795041" y="1424497"/>
+            <a:ext cx="583878" cy="583878"/>
+          </a:xfrm>
+          <a:prstGeom prst="rect">
+            <a:avLst/>
+          </a:prstGeom>
+          <a:solidFill>
+            <a:schemeClr val="accent1"/>
+          </a:solidFill>
         </p:spPr>
       </p:pic>
       <p:sp>
         <p:nvSpPr>
-          <p:cNvPr id="43" name="文本框 42">
-            <a:extLst>
-              <a:ext uri="{FF2B5EF4-FFF2-40B4-BE49-F238E27FC236}">
-                <a16:creationId xmlns:a16="http://schemas.microsoft.com/office/drawing/2014/main" id="{756FBF4B-DF35-BFFB-29EC-EF353E4F5960}"/>
-              </a:ext>
-            </a:extLst>
-          </p:cNvPr>
+          <p:cNvPr id="56" name="文本框 55"/>
           <p:cNvSpPr txBox="1"/>
           <p:nvPr/>
         </p:nvSpPr>
         <p:spPr>
           <a:xfrm>
-            <a:off x="1290646" y="156287"/>
-            <a:ext cx="1668565" cy="369332"/>
+            <a:off x="2348011" y="2104396"/>
+            <a:ext cx="1834001" cy="276999"/>
           </a:xfrm>
           <a:prstGeom prst="rect">
             <a:avLst/>
@@ -9344,12 +8703,266 @@
           </a:bodyPr>
           <a:lstStyle/>
           <a:p>
+            <a:r>
+              <a:rPr lang="en-US" altLang="zh-CN" sz="1200" b="1" dirty="0">
+                <a:latin typeface="Arial" panose="020B0604020202020204" pitchFamily="34" charset="0"/>
+                <a:cs typeface="Arial" panose="020B0604020202020204" pitchFamily="34" charset="0"/>
+              </a:rPr>
+              <a:t>Summarization Agent</a:t>
+            </a:r>
+            <a:endParaRPr lang="zh-CN" altLang="en-US" sz="1200" b="1" dirty="0">
+              <a:latin typeface="Arial" panose="020B0604020202020204" pitchFamily="34" charset="0"/>
+              <a:cs typeface="Arial" panose="020B0604020202020204" pitchFamily="34" charset="0"/>
+            </a:endParaRPr>
+          </a:p>
+        </p:txBody>
+      </p:sp>
+      <p:cxnSp>
+        <p:nvCxnSpPr>
+          <p:cNvPr id="70" name="直接箭头连接符 69"/>
+          <p:cNvCxnSpPr/>
+          <p:nvPr/>
+        </p:nvCxnSpPr>
+        <p:spPr>
+          <a:xfrm flipV="1">
+            <a:off x="4096601" y="1441505"/>
+            <a:ext cx="437627" cy="274931"/>
+          </a:xfrm>
+          <a:prstGeom prst="straightConnector1">
+            <a:avLst/>
+          </a:prstGeom>
+          <a:ln>
+            <a:tailEnd type="triangle"/>
+          </a:ln>
+        </p:spPr>
+        <p:style>
+          <a:lnRef idx="3">
+            <a:schemeClr val="dk1"/>
+          </a:lnRef>
+          <a:fillRef idx="0">
+            <a:schemeClr val="dk1"/>
+          </a:fillRef>
+          <a:effectRef idx="2">
+            <a:schemeClr val="dk1"/>
+          </a:effectRef>
+          <a:fontRef idx="minor">
+            <a:schemeClr val="tx1"/>
+          </a:fontRef>
+        </p:style>
+      </p:cxnSp>
+      <p:cxnSp>
+        <p:nvCxnSpPr>
+          <p:cNvPr id="71" name="直接箭头连接符 70"/>
+          <p:cNvCxnSpPr/>
+          <p:nvPr/>
+        </p:nvCxnSpPr>
+        <p:spPr>
+          <a:xfrm>
+            <a:off x="4096424" y="1716436"/>
+            <a:ext cx="437982" cy="252552"/>
+          </a:xfrm>
+          <a:prstGeom prst="straightConnector1">
+            <a:avLst/>
+          </a:prstGeom>
+          <a:ln>
+            <a:tailEnd type="triangle"/>
+          </a:ln>
+        </p:spPr>
+        <p:style>
+          <a:lnRef idx="3">
+            <a:schemeClr val="dk1"/>
+          </a:lnRef>
+          <a:fillRef idx="0">
+            <a:schemeClr val="dk1"/>
+          </a:fillRef>
+          <a:effectRef idx="2">
+            <a:schemeClr val="dk1"/>
+          </a:effectRef>
+          <a:fontRef idx="minor">
+            <a:schemeClr val="tx1"/>
+          </a:fontRef>
+        </p:style>
+      </p:cxnSp>
+      <p:sp>
+        <p:nvSpPr>
+          <p:cNvPr id="77" name="流程图: 接点 76"/>
+          <p:cNvSpPr/>
+          <p:nvPr/>
+        </p:nvSpPr>
+        <p:spPr>
+          <a:xfrm>
+            <a:off x="4604086" y="1030937"/>
+            <a:ext cx="491479" cy="425192"/>
+          </a:xfrm>
+          <a:prstGeom prst="flowChartConnector">
+            <a:avLst/>
+          </a:prstGeom>
+          <a:solidFill>
+            <a:schemeClr val="bg1">
+              <a:lumMod val="95000"/>
+            </a:schemeClr>
+          </a:solidFill>
+        </p:spPr>
+        <p:style>
+          <a:lnRef idx="2">
+            <a:schemeClr val="dk1"/>
+          </a:lnRef>
+          <a:fillRef idx="1">
+            <a:schemeClr val="lt1"/>
+          </a:fillRef>
+          <a:effectRef idx="0">
+            <a:schemeClr val="dk1"/>
+          </a:effectRef>
+          <a:fontRef idx="minor">
+            <a:schemeClr val="dk1"/>
+          </a:fontRef>
+        </p:style>
+        <p:txBody>
+          <a:bodyPr rtlCol="0" anchor="ctr"/>
+          <a:lstStyle/>
+          <a:p>
+            <a:pPr algn="ctr"/>
+            <a:r>
+              <a:rPr lang="en-US" altLang="zh-CN" sz="1100" dirty="0">
+                <a:latin typeface="Arial" panose="020B0604020202020204" pitchFamily="34" charset="0"/>
+                <a:cs typeface="Arial" panose="020B0604020202020204" pitchFamily="34" charset="0"/>
+              </a:rPr>
+              <a:t>T1</a:t>
+            </a:r>
+            <a:endParaRPr lang="zh-CN" altLang="en-US" sz="1100" dirty="0">
+              <a:latin typeface="Arial" panose="020B0604020202020204" pitchFamily="34" charset="0"/>
+              <a:cs typeface="Arial" panose="020B0604020202020204" pitchFamily="34" charset="0"/>
+            </a:endParaRPr>
+          </a:p>
+        </p:txBody>
+      </p:sp>
+      <p:cxnSp>
+        <p:nvCxnSpPr>
+          <p:cNvPr id="81" name="直接连接符 80"/>
+          <p:cNvCxnSpPr>
+            <a:stCxn id="55" idx="3"/>
+          </p:cNvCxnSpPr>
+          <p:nvPr/>
+        </p:nvCxnSpPr>
+        <p:spPr>
+          <a:xfrm>
+            <a:off x="3378919" y="1716436"/>
+            <a:ext cx="746474" cy="0"/>
+          </a:xfrm>
+          <a:prstGeom prst="line">
+            <a:avLst/>
+          </a:prstGeom>
+        </p:spPr>
+        <p:style>
+          <a:lnRef idx="3">
+            <a:schemeClr val="dk1"/>
+          </a:lnRef>
+          <a:fillRef idx="0">
+            <a:schemeClr val="dk1"/>
+          </a:fillRef>
+          <a:effectRef idx="2">
+            <a:schemeClr val="dk1"/>
+          </a:effectRef>
+          <a:fontRef idx="minor">
+            <a:schemeClr val="tx1"/>
+          </a:fontRef>
+        </p:style>
+      </p:cxnSp>
+      <p:cxnSp>
+        <p:nvCxnSpPr>
+          <p:cNvPr id="84" name="直接箭头连接符 83"/>
+          <p:cNvCxnSpPr/>
+          <p:nvPr/>
+        </p:nvCxnSpPr>
+        <p:spPr>
+          <a:xfrm flipV="1">
+            <a:off x="5180994" y="1205984"/>
+            <a:ext cx="580695" cy="5172"/>
+          </a:xfrm>
+          <a:prstGeom prst="straightConnector1">
+            <a:avLst/>
+          </a:prstGeom>
+          <a:ln>
+            <a:tailEnd type="triangle"/>
+          </a:ln>
+        </p:spPr>
+        <p:style>
+          <a:lnRef idx="3">
+            <a:schemeClr val="dk1"/>
+          </a:lnRef>
+          <a:fillRef idx="0">
+            <a:schemeClr val="dk1"/>
+          </a:fillRef>
+          <a:effectRef idx="2">
+            <a:schemeClr val="dk1"/>
+          </a:effectRef>
+          <a:fontRef idx="minor">
+            <a:schemeClr val="tx1"/>
+          </a:fontRef>
+        </p:style>
+      </p:cxnSp>
+      <p:cxnSp>
+        <p:nvCxnSpPr>
+          <p:cNvPr id="86" name="直接箭头连接符 85"/>
+          <p:cNvCxnSpPr/>
+          <p:nvPr/>
+        </p:nvCxnSpPr>
+        <p:spPr>
+          <a:xfrm flipV="1">
+            <a:off x="5180995" y="2214877"/>
+            <a:ext cx="580695" cy="5172"/>
+          </a:xfrm>
+          <a:prstGeom prst="straightConnector1">
+            <a:avLst/>
+          </a:prstGeom>
+          <a:ln>
+            <a:tailEnd type="triangle"/>
+          </a:ln>
+        </p:spPr>
+        <p:style>
+          <a:lnRef idx="3">
+            <a:schemeClr val="dk1"/>
+          </a:lnRef>
+          <a:fillRef idx="0">
+            <a:schemeClr val="dk1"/>
+          </a:fillRef>
+          <a:effectRef idx="2">
+            <a:schemeClr val="dk1"/>
+          </a:effectRef>
+          <a:fontRef idx="minor">
+            <a:schemeClr val="tx1"/>
+          </a:fontRef>
+        </p:style>
+      </p:cxnSp>
+      <p:sp>
+        <p:nvSpPr>
+          <p:cNvPr id="87" name="文本框 86"/>
+          <p:cNvSpPr txBox="1"/>
+          <p:nvPr/>
+        </p:nvSpPr>
+        <p:spPr>
+          <a:xfrm>
+            <a:off x="4388582" y="-47336"/>
+            <a:ext cx="3191958" cy="646331"/>
+          </a:xfrm>
+          <a:prstGeom prst="rect">
+            <a:avLst/>
+          </a:prstGeom>
+          <a:noFill/>
+        </p:spPr>
+        <p:txBody>
+          <a:bodyPr wrap="square" rtlCol="0">
+            <a:spAutoFit/>
+          </a:bodyPr>
+          <a:lstStyle/>
+          <a:p>
+            <a:pPr algn="ctr"/>
             <a:r>
               <a:rPr lang="en-US" altLang="zh-CN" b="1" dirty="0">
                 <a:latin typeface="Arial" panose="020B0604020202020204" pitchFamily="34" charset="0"/>
                 <a:cs typeface="Arial" panose="020B0604020202020204" pitchFamily="34" charset="0"/>
               </a:rPr>
-              <a:t>UAV Network </a:t>
+              <a:t>Multi-factor Trust Evaluation Mechanism</a:t>
             </a:r>
             <a:endParaRPr lang="zh-CN" altLang="en-US" b="1" dirty="0">
               <a:latin typeface="Arial" panose="020B0604020202020204" pitchFamily="34" charset="0"/>
@@ -9360,98 +8973,67 @@
       </p:sp>
       <p:sp>
         <p:nvSpPr>
-          <p:cNvPr id="46" name="文本框 45">
-            <a:extLst>
-              <a:ext uri="{FF2B5EF4-FFF2-40B4-BE49-F238E27FC236}">
-                <a16:creationId xmlns:a16="http://schemas.microsoft.com/office/drawing/2014/main" id="{B957ED3B-00F5-891F-A3F1-0E26D54A0F9D}"/>
-              </a:ext>
-            </a:extLst>
-          </p:cNvPr>
-          <p:cNvSpPr txBox="1"/>
-          <p:nvPr/>
-        </p:nvSpPr>
-        <p:spPr>
-          <a:xfrm>
-            <a:off x="1488318" y="2512573"/>
-            <a:ext cx="941972" cy="276999"/>
-          </a:xfrm>
-          <a:prstGeom prst="rect">
-            <a:avLst/>
-          </a:prstGeom>
-          <a:noFill/>
-        </p:spPr>
-        <p:txBody>
-          <a:bodyPr wrap="square" rtlCol="0">
-            <a:spAutoFit/>
-          </a:bodyPr>
-          <a:lstStyle/>
-          <a:p>
-            <a:r>
-              <a:rPr lang="en-US" altLang="zh-CN" sz="1200" dirty="0">
+          <p:cNvPr id="88" name="流程图: 接点 87"/>
+          <p:cNvSpPr/>
+          <p:nvPr/>
+        </p:nvSpPr>
+        <p:spPr>
+          <a:xfrm>
+            <a:off x="4588091" y="1999317"/>
+            <a:ext cx="491479" cy="425192"/>
+          </a:xfrm>
+          <a:prstGeom prst="flowChartConnector">
+            <a:avLst/>
+          </a:prstGeom>
+          <a:solidFill>
+            <a:schemeClr val="bg1">
+              <a:lumMod val="95000"/>
+            </a:schemeClr>
+          </a:solidFill>
+        </p:spPr>
+        <p:style>
+          <a:lnRef idx="2">
+            <a:schemeClr val="dk1"/>
+          </a:lnRef>
+          <a:fillRef idx="1">
+            <a:schemeClr val="lt1"/>
+          </a:fillRef>
+          <a:effectRef idx="0">
+            <a:schemeClr val="dk1"/>
+          </a:effectRef>
+          <a:fontRef idx="minor">
+            <a:schemeClr val="dk1"/>
+          </a:fontRef>
+        </p:style>
+        <p:txBody>
+          <a:bodyPr rtlCol="0" anchor="ctr"/>
+          <a:lstStyle/>
+          <a:p>
+            <a:pPr algn="ctr"/>
+            <a:r>
+              <a:rPr lang="en-US" altLang="zh-CN" sz="1100" dirty="0">
                 <a:latin typeface="Arial" panose="020B0604020202020204" pitchFamily="34" charset="0"/>
                 <a:cs typeface="Arial" panose="020B0604020202020204" pitchFamily="34" charset="0"/>
               </a:rPr>
-              <a:t>Anomalies</a:t>
-            </a:r>
-            <a:endParaRPr lang="zh-CN" altLang="en-US" sz="1200" dirty="0">
+              <a:t>T2</a:t>
+            </a:r>
+            <a:endParaRPr lang="zh-CN" altLang="en-US" sz="1100" dirty="0">
               <a:latin typeface="Arial" panose="020B0604020202020204" pitchFamily="34" charset="0"/>
               <a:cs typeface="Arial" panose="020B0604020202020204" pitchFamily="34" charset="0"/>
             </a:endParaRPr>
           </a:p>
         </p:txBody>
       </p:sp>
-      <p:cxnSp>
-        <p:nvCxnSpPr>
-          <p:cNvPr id="49" name="直接连接符 48">
-            <a:extLst>
-              <a:ext uri="{FF2B5EF4-FFF2-40B4-BE49-F238E27FC236}">
-                <a16:creationId xmlns:a16="http://schemas.microsoft.com/office/drawing/2014/main" id="{7BC0E648-DB48-768A-8F1C-CDA881F7D2DE}"/>
-              </a:ext>
-            </a:extLst>
-          </p:cNvPr>
-          <p:cNvCxnSpPr/>
-          <p:nvPr/>
-        </p:nvCxnSpPr>
-        <p:spPr>
-          <a:xfrm>
-            <a:off x="45593" y="537612"/>
-            <a:ext cx="11992884" cy="0"/>
-          </a:xfrm>
-          <a:prstGeom prst="line">
-            <a:avLst/>
-          </a:prstGeom>
-        </p:spPr>
-        <p:style>
-          <a:lnRef idx="3">
-            <a:schemeClr val="dk1"/>
-          </a:lnRef>
-          <a:fillRef idx="0">
-            <a:schemeClr val="dk1"/>
-          </a:fillRef>
-          <a:effectRef idx="2">
-            <a:schemeClr val="dk1"/>
-          </a:effectRef>
-          <a:fontRef idx="minor">
-            <a:schemeClr val="tx1"/>
-          </a:fontRef>
-        </p:style>
-      </p:cxnSp>
-      <p:sp>
-        <p:nvSpPr>
-          <p:cNvPr id="50" name="文本框 49">
-            <a:extLst>
-              <a:ext uri="{FF2B5EF4-FFF2-40B4-BE49-F238E27FC236}">
-                <a16:creationId xmlns:a16="http://schemas.microsoft.com/office/drawing/2014/main" id="{EC2CA2A9-46FF-C556-CB7C-1B8F7258E226}"/>
-              </a:ext>
-            </a:extLst>
-          </p:cNvPr>
+      <p:sp>
+        <p:nvSpPr>
+          <p:cNvPr id="89" name="文本框 88"/>
           <p:cNvSpPr txBox="1"/>
           <p:nvPr/>
         </p:nvSpPr>
         <p:spPr>
           <a:xfrm>
-            <a:off x="315059" y="676816"/>
-            <a:ext cx="1622834" cy="276999"/>
+            <a:off x="4269979" y="709277"/>
+            <a:ext cx="1359585" cy="276999"/>
           </a:xfrm>
           <a:prstGeom prst="rect">
             <a:avLst/>
@@ -9469,7 +9051,7 @@
                 <a:latin typeface="Arial" panose="020B0604020202020204" pitchFamily="34" charset="0"/>
                 <a:cs typeface="Arial" panose="020B0604020202020204" pitchFamily="34" charset="0"/>
               </a:rPr>
-              <a:t>UAV Swarm Access</a:t>
+              <a:t>Trust Branches</a:t>
             </a:r>
             <a:endParaRPr lang="zh-CN" altLang="en-US" sz="1200" b="1" dirty="0">
               <a:latin typeface="Arial" panose="020B0604020202020204" pitchFamily="34" charset="0"/>
@@ -9478,68 +9060,76 @@
           </a:p>
         </p:txBody>
       </p:sp>
-      <p:sp>
-        <p:nvSpPr>
-          <p:cNvPr id="52" name="等腰三角形 51">
-            <a:extLst>
-              <a:ext uri="{FF2B5EF4-FFF2-40B4-BE49-F238E27FC236}">
-                <a16:creationId xmlns:a16="http://schemas.microsoft.com/office/drawing/2014/main" id="{53E05F82-8257-BEFD-2DB9-E717B167DCA2}"/>
-              </a:ext>
-            </a:extLst>
-          </p:cNvPr>
-          <p:cNvSpPr/>
-          <p:nvPr/>
-        </p:nvSpPr>
-        <p:spPr>
-          <a:xfrm rot="5400000">
-            <a:off x="2164469" y="1529441"/>
-            <a:ext cx="505104" cy="358480"/>
-          </a:xfrm>
-          <a:prstGeom prst="triangle">
-            <a:avLst/>
-          </a:prstGeom>
-        </p:spPr>
-        <p:style>
-          <a:lnRef idx="2">
-            <a:schemeClr val="accent2">
-              <a:shade val="15000"/>
-            </a:schemeClr>
-          </a:lnRef>
-          <a:fillRef idx="1">
-            <a:schemeClr val="accent2"/>
-          </a:fillRef>
-          <a:effectRef idx="0">
-            <a:schemeClr val="accent2"/>
-          </a:effectRef>
-          <a:fontRef idx="minor">
-            <a:schemeClr val="lt1"/>
-          </a:fontRef>
-        </p:style>
-        <p:txBody>
-          <a:bodyPr rtlCol="0" anchor="ctr"/>
-          <a:lstStyle/>
-          <a:p>
-            <a:pPr algn="ctr"/>
-            <a:endParaRPr lang="zh-CN" altLang="en-US"/>
-          </a:p>
-        </p:txBody>
-      </p:sp>
       <p:pic>
         <p:nvPicPr>
-          <p:cNvPr id="55" name="图片 54">
-            <a:extLst>
-              <a:ext uri="{FF2B5EF4-FFF2-40B4-BE49-F238E27FC236}">
-                <a16:creationId xmlns:a16="http://schemas.microsoft.com/office/drawing/2014/main" id="{93EC8578-9025-9300-A658-FBE9C17A1AE0}"/>
-              </a:ext>
-            </a:extLst>
-          </p:cNvPr>
+          <p:cNvPr id="91" name="图形 90" descr="计算机"/>
           <p:cNvPicPr>
             <a:picLocks noChangeAspect="1"/>
           </p:cNvPicPr>
           <p:nvPr/>
         </p:nvPicPr>
         <p:blipFill>
-          <a:blip r:embed="rId7" cstate="print">
+          <a:blip r:embed="rId7">
+            <a:extLst>
+              <a:ext uri="{96DAC541-7B7A-43D3-8B79-37D633B846F1}">
+                <asvg:svgBlip xmlns:asvg="http://schemas.microsoft.com/office/drawing/2016/SVG/main" r:embed="rId8"/>
+              </a:ext>
+            </a:extLst>
+          </a:blip>
+          <a:stretch>
+            <a:fillRect/>
+          </a:stretch>
+        </p:blipFill>
+        <p:spPr>
+          <a:xfrm>
+            <a:off x="753950" y="3561217"/>
+            <a:ext cx="914400" cy="914400"/>
+          </a:xfrm>
+          <a:prstGeom prst="rect">
+            <a:avLst/>
+          </a:prstGeom>
+        </p:spPr>
+      </p:pic>
+      <p:pic>
+        <p:nvPicPr>
+          <p:cNvPr id="93" name="图形 92" descr="数据库"/>
+          <p:cNvPicPr>
+            <a:picLocks noChangeAspect="1"/>
+          </p:cNvPicPr>
+          <p:nvPr/>
+        </p:nvPicPr>
+        <p:blipFill>
+          <a:blip r:embed="rId9">
+            <a:extLst>
+              <a:ext uri="{96DAC541-7B7A-43D3-8B79-37D633B846F1}">
+                <asvg:svgBlip xmlns:asvg="http://schemas.microsoft.com/office/drawing/2016/SVG/main" r:embed="rId10"/>
+              </a:ext>
+            </a:extLst>
+          </a:blip>
+          <a:stretch>
+            <a:fillRect/>
+          </a:stretch>
+        </p:blipFill>
+        <p:spPr>
+          <a:xfrm>
+            <a:off x="130137" y="4497686"/>
+            <a:ext cx="914400" cy="914400"/>
+          </a:xfrm>
+          <a:prstGeom prst="rect">
+            <a:avLst/>
+          </a:prstGeom>
+        </p:spPr>
+      </p:pic>
+      <p:pic>
+        <p:nvPicPr>
+          <p:cNvPr id="95" name="图片 94"/>
+          <p:cNvPicPr>
+            <a:picLocks noChangeAspect="1"/>
+          </p:cNvPicPr>
+          <p:nvPr/>
+        </p:nvPicPr>
+        <p:blipFill>
+          <a:blip r:embed="rId11" cstate="print">
             <a:extLst>
               <a:ext uri="{28A0092B-C50C-407E-A947-70E740481C1C}">
                 <a14:useLocalDpi xmlns:a14="http://schemas.microsoft.com/office/drawing/2010/main" val="0"/>
@@ -9552,553 +9142,24 @@
         </p:blipFill>
         <p:spPr>
           <a:xfrm>
-            <a:off x="2795041" y="1424497"/>
-            <a:ext cx="583878" cy="583878"/>
-          </a:xfrm>
-          <a:prstGeom prst="rect">
-            <a:avLst/>
-          </a:prstGeom>
-          <a:solidFill>
-            <a:schemeClr val="accent1"/>
-          </a:solidFill>
+            <a:off x="5259981" y="1252239"/>
+            <a:ext cx="313054" cy="313054"/>
+          </a:xfrm>
+          <a:prstGeom prst="rect">
+            <a:avLst/>
+          </a:prstGeom>
         </p:spPr>
       </p:pic>
-      <p:sp>
-        <p:nvSpPr>
-          <p:cNvPr id="56" name="文本框 55">
-            <a:extLst>
-              <a:ext uri="{FF2B5EF4-FFF2-40B4-BE49-F238E27FC236}">
-                <a16:creationId xmlns:a16="http://schemas.microsoft.com/office/drawing/2014/main" id="{7E2CAFE7-BF00-BC1E-D04A-FFA4A0420962}"/>
-              </a:ext>
-            </a:extLst>
-          </p:cNvPr>
-          <p:cNvSpPr txBox="1"/>
-          <p:nvPr/>
-        </p:nvSpPr>
-        <p:spPr>
-          <a:xfrm>
-            <a:off x="2348011" y="2104396"/>
-            <a:ext cx="1834001" cy="276999"/>
-          </a:xfrm>
-          <a:prstGeom prst="rect">
-            <a:avLst/>
-          </a:prstGeom>
-          <a:noFill/>
-        </p:spPr>
-        <p:txBody>
-          <a:bodyPr wrap="square" rtlCol="0">
-            <a:spAutoFit/>
-          </a:bodyPr>
-          <a:lstStyle/>
-          <a:p>
-            <a:r>
-              <a:rPr lang="en-US" altLang="zh-CN" sz="1200" b="1" dirty="0">
-                <a:latin typeface="Arial" panose="020B0604020202020204" pitchFamily="34" charset="0"/>
-                <a:cs typeface="Arial" panose="020B0604020202020204" pitchFamily="34" charset="0"/>
-              </a:rPr>
-              <a:t>Summarization Agent</a:t>
-            </a:r>
-            <a:endParaRPr lang="zh-CN" altLang="en-US" sz="1200" b="1" dirty="0">
-              <a:latin typeface="Arial" panose="020B0604020202020204" pitchFamily="34" charset="0"/>
-              <a:cs typeface="Arial" panose="020B0604020202020204" pitchFamily="34" charset="0"/>
-            </a:endParaRPr>
-          </a:p>
-        </p:txBody>
-      </p:sp>
-      <p:cxnSp>
-        <p:nvCxnSpPr>
-          <p:cNvPr id="70" name="直接箭头连接符 69">
-            <a:extLst>
-              <a:ext uri="{FF2B5EF4-FFF2-40B4-BE49-F238E27FC236}">
-                <a16:creationId xmlns:a16="http://schemas.microsoft.com/office/drawing/2014/main" id="{032754DE-9863-E641-224B-613253A28F64}"/>
-              </a:ext>
-            </a:extLst>
-          </p:cNvPr>
-          <p:cNvCxnSpPr>
-            <a:cxnSpLocks/>
-          </p:cNvCxnSpPr>
-          <p:nvPr/>
-        </p:nvCxnSpPr>
-        <p:spPr>
-          <a:xfrm flipV="1">
-            <a:off x="4096601" y="1441505"/>
-            <a:ext cx="437627" cy="274931"/>
-          </a:xfrm>
-          <a:prstGeom prst="straightConnector1">
-            <a:avLst/>
-          </a:prstGeom>
-          <a:ln>
-            <a:tailEnd type="triangle"/>
-          </a:ln>
-        </p:spPr>
-        <p:style>
-          <a:lnRef idx="3">
-            <a:schemeClr val="dk1"/>
-          </a:lnRef>
-          <a:fillRef idx="0">
-            <a:schemeClr val="dk1"/>
-          </a:fillRef>
-          <a:effectRef idx="2">
-            <a:schemeClr val="dk1"/>
-          </a:effectRef>
-          <a:fontRef idx="minor">
-            <a:schemeClr val="tx1"/>
-          </a:fontRef>
-        </p:style>
-      </p:cxnSp>
-      <p:cxnSp>
-        <p:nvCxnSpPr>
-          <p:cNvPr id="71" name="直接箭头连接符 70">
-            <a:extLst>
-              <a:ext uri="{FF2B5EF4-FFF2-40B4-BE49-F238E27FC236}">
-                <a16:creationId xmlns:a16="http://schemas.microsoft.com/office/drawing/2014/main" id="{621F8AF2-7C2C-F891-3BE1-B6956EC44C5F}"/>
-              </a:ext>
-            </a:extLst>
-          </p:cNvPr>
-          <p:cNvCxnSpPr>
-            <a:cxnSpLocks/>
-          </p:cNvCxnSpPr>
-          <p:nvPr/>
-        </p:nvCxnSpPr>
-        <p:spPr>
-          <a:xfrm>
-            <a:off x="4096424" y="1716436"/>
-            <a:ext cx="437982" cy="252552"/>
-          </a:xfrm>
-          <a:prstGeom prst="straightConnector1">
-            <a:avLst/>
-          </a:prstGeom>
-          <a:ln>
-            <a:tailEnd type="triangle"/>
-          </a:ln>
-        </p:spPr>
-        <p:style>
-          <a:lnRef idx="3">
-            <a:schemeClr val="dk1"/>
-          </a:lnRef>
-          <a:fillRef idx="0">
-            <a:schemeClr val="dk1"/>
-          </a:fillRef>
-          <a:effectRef idx="2">
-            <a:schemeClr val="dk1"/>
-          </a:effectRef>
-          <a:fontRef idx="minor">
-            <a:schemeClr val="tx1"/>
-          </a:fontRef>
-        </p:style>
-      </p:cxnSp>
-      <p:sp>
-        <p:nvSpPr>
-          <p:cNvPr id="77" name="流程图: 接点 76">
-            <a:extLst>
-              <a:ext uri="{FF2B5EF4-FFF2-40B4-BE49-F238E27FC236}">
-                <a16:creationId xmlns:a16="http://schemas.microsoft.com/office/drawing/2014/main" id="{A4DA5D99-BE87-5BC7-CCAF-30D988AD52DD}"/>
-              </a:ext>
-            </a:extLst>
-          </p:cNvPr>
-          <p:cNvSpPr/>
-          <p:nvPr/>
-        </p:nvSpPr>
-        <p:spPr>
-          <a:xfrm>
-            <a:off x="4604086" y="1030937"/>
-            <a:ext cx="491479" cy="425192"/>
-          </a:xfrm>
-          <a:prstGeom prst="flowChartConnector">
-            <a:avLst/>
-          </a:prstGeom>
-          <a:solidFill>
-            <a:schemeClr val="bg1">
-              <a:lumMod val="95000"/>
-            </a:schemeClr>
-          </a:solidFill>
-        </p:spPr>
-        <p:style>
-          <a:lnRef idx="2">
-            <a:schemeClr val="dk1"/>
-          </a:lnRef>
-          <a:fillRef idx="1">
-            <a:schemeClr val="lt1"/>
-          </a:fillRef>
-          <a:effectRef idx="0">
-            <a:schemeClr val="dk1"/>
-          </a:effectRef>
-          <a:fontRef idx="minor">
-            <a:schemeClr val="dk1"/>
-          </a:fontRef>
-        </p:style>
-        <p:txBody>
-          <a:bodyPr rtlCol="0" anchor="ctr"/>
-          <a:lstStyle/>
-          <a:p>
-            <a:pPr algn="ctr"/>
-            <a:r>
-              <a:rPr lang="en-US" altLang="zh-CN" sz="1100" dirty="0">
-                <a:latin typeface="Arial" panose="020B0604020202020204" pitchFamily="34" charset="0"/>
-                <a:cs typeface="Arial" panose="020B0604020202020204" pitchFamily="34" charset="0"/>
-              </a:rPr>
-              <a:t>T1</a:t>
-            </a:r>
-            <a:endParaRPr lang="zh-CN" altLang="en-US" sz="1100" dirty="0">
-              <a:latin typeface="Arial" panose="020B0604020202020204" pitchFamily="34" charset="0"/>
-              <a:cs typeface="Arial" panose="020B0604020202020204" pitchFamily="34" charset="0"/>
-            </a:endParaRPr>
-          </a:p>
-        </p:txBody>
-      </p:sp>
-      <p:cxnSp>
-        <p:nvCxnSpPr>
-          <p:cNvPr id="81" name="直接连接符 80">
-            <a:extLst>
-              <a:ext uri="{FF2B5EF4-FFF2-40B4-BE49-F238E27FC236}">
-                <a16:creationId xmlns:a16="http://schemas.microsoft.com/office/drawing/2014/main" id="{0C1E7D20-EE91-1EE1-26D6-75F663B3C962}"/>
-              </a:ext>
-            </a:extLst>
-          </p:cNvPr>
-          <p:cNvCxnSpPr>
-            <a:cxnSpLocks/>
-            <a:stCxn id="55" idx="3"/>
-          </p:cNvCxnSpPr>
-          <p:nvPr/>
-        </p:nvCxnSpPr>
-        <p:spPr>
-          <a:xfrm>
-            <a:off x="3378919" y="1716436"/>
-            <a:ext cx="746474" cy="0"/>
-          </a:xfrm>
-          <a:prstGeom prst="line">
-            <a:avLst/>
-          </a:prstGeom>
-        </p:spPr>
-        <p:style>
-          <a:lnRef idx="3">
-            <a:schemeClr val="dk1"/>
-          </a:lnRef>
-          <a:fillRef idx="0">
-            <a:schemeClr val="dk1"/>
-          </a:fillRef>
-          <a:effectRef idx="2">
-            <a:schemeClr val="dk1"/>
-          </a:effectRef>
-          <a:fontRef idx="minor">
-            <a:schemeClr val="tx1"/>
-          </a:fontRef>
-        </p:style>
-      </p:cxnSp>
-      <p:cxnSp>
-        <p:nvCxnSpPr>
-          <p:cNvPr id="84" name="直接箭头连接符 83">
-            <a:extLst>
-              <a:ext uri="{FF2B5EF4-FFF2-40B4-BE49-F238E27FC236}">
-                <a16:creationId xmlns:a16="http://schemas.microsoft.com/office/drawing/2014/main" id="{B25496AB-F273-664B-3703-77A4495C6C34}"/>
-              </a:ext>
-            </a:extLst>
-          </p:cNvPr>
-          <p:cNvCxnSpPr>
-            <a:cxnSpLocks/>
-          </p:cNvCxnSpPr>
-          <p:nvPr/>
-        </p:nvCxnSpPr>
-        <p:spPr>
-          <a:xfrm flipV="1">
-            <a:off x="5180994" y="1205984"/>
-            <a:ext cx="580695" cy="5172"/>
-          </a:xfrm>
-          <a:prstGeom prst="straightConnector1">
-            <a:avLst/>
-          </a:prstGeom>
-          <a:ln>
-            <a:tailEnd type="triangle"/>
-          </a:ln>
-        </p:spPr>
-        <p:style>
-          <a:lnRef idx="3">
-            <a:schemeClr val="dk1"/>
-          </a:lnRef>
-          <a:fillRef idx="0">
-            <a:schemeClr val="dk1"/>
-          </a:fillRef>
-          <a:effectRef idx="2">
-            <a:schemeClr val="dk1"/>
-          </a:effectRef>
-          <a:fontRef idx="minor">
-            <a:schemeClr val="tx1"/>
-          </a:fontRef>
-        </p:style>
-      </p:cxnSp>
-      <p:cxnSp>
-        <p:nvCxnSpPr>
-          <p:cNvPr id="86" name="直接箭头连接符 85">
-            <a:extLst>
-              <a:ext uri="{FF2B5EF4-FFF2-40B4-BE49-F238E27FC236}">
-                <a16:creationId xmlns:a16="http://schemas.microsoft.com/office/drawing/2014/main" id="{5AABEE27-8E92-129C-E3FF-B6ADEA10C231}"/>
-              </a:ext>
-            </a:extLst>
-          </p:cNvPr>
-          <p:cNvCxnSpPr>
-            <a:cxnSpLocks/>
-          </p:cNvCxnSpPr>
-          <p:nvPr/>
-        </p:nvCxnSpPr>
-        <p:spPr>
-          <a:xfrm flipV="1">
-            <a:off x="5180995" y="2214877"/>
-            <a:ext cx="580695" cy="5172"/>
-          </a:xfrm>
-          <a:prstGeom prst="straightConnector1">
-            <a:avLst/>
-          </a:prstGeom>
-          <a:ln>
-            <a:tailEnd type="triangle"/>
-          </a:ln>
-        </p:spPr>
-        <p:style>
-          <a:lnRef idx="3">
-            <a:schemeClr val="dk1"/>
-          </a:lnRef>
-          <a:fillRef idx="0">
-            <a:schemeClr val="dk1"/>
-          </a:fillRef>
-          <a:effectRef idx="2">
-            <a:schemeClr val="dk1"/>
-          </a:effectRef>
-          <a:fontRef idx="minor">
-            <a:schemeClr val="tx1"/>
-          </a:fontRef>
-        </p:style>
-      </p:cxnSp>
-      <p:sp>
-        <p:nvSpPr>
-          <p:cNvPr id="87" name="文本框 86">
-            <a:extLst>
-              <a:ext uri="{FF2B5EF4-FFF2-40B4-BE49-F238E27FC236}">
-                <a16:creationId xmlns:a16="http://schemas.microsoft.com/office/drawing/2014/main" id="{13B766B1-C7EE-8C42-6263-BC50E87440C2}"/>
-              </a:ext>
-            </a:extLst>
-          </p:cNvPr>
-          <p:cNvSpPr txBox="1"/>
-          <p:nvPr/>
-        </p:nvSpPr>
-        <p:spPr>
-          <a:xfrm>
-            <a:off x="4388582" y="-47336"/>
-            <a:ext cx="3191958" cy="646331"/>
-          </a:xfrm>
-          <a:prstGeom prst="rect">
-            <a:avLst/>
-          </a:prstGeom>
-          <a:noFill/>
-        </p:spPr>
-        <p:txBody>
-          <a:bodyPr wrap="square" rtlCol="0">
-            <a:spAutoFit/>
-          </a:bodyPr>
-          <a:lstStyle/>
-          <a:p>
-            <a:pPr algn="ctr"/>
-            <a:r>
-              <a:rPr lang="en-US" altLang="zh-CN" b="1" dirty="0">
-                <a:latin typeface="Arial" panose="020B0604020202020204" pitchFamily="34" charset="0"/>
-                <a:cs typeface="Arial" panose="020B0604020202020204" pitchFamily="34" charset="0"/>
-              </a:rPr>
-              <a:t>Multi-factor Trust Evaluation Mechanism</a:t>
-            </a:r>
-            <a:endParaRPr lang="zh-CN" altLang="en-US" b="1" dirty="0">
-              <a:latin typeface="Arial" panose="020B0604020202020204" pitchFamily="34" charset="0"/>
-              <a:cs typeface="Arial" panose="020B0604020202020204" pitchFamily="34" charset="0"/>
-            </a:endParaRPr>
-          </a:p>
-        </p:txBody>
-      </p:sp>
-      <p:sp>
-        <p:nvSpPr>
-          <p:cNvPr id="88" name="流程图: 接点 87">
-            <a:extLst>
-              <a:ext uri="{FF2B5EF4-FFF2-40B4-BE49-F238E27FC236}">
-                <a16:creationId xmlns:a16="http://schemas.microsoft.com/office/drawing/2014/main" id="{DA79DF18-5EF2-1013-6311-3FA945F6C05A}"/>
-              </a:ext>
-            </a:extLst>
-          </p:cNvPr>
-          <p:cNvSpPr/>
-          <p:nvPr/>
-        </p:nvSpPr>
-        <p:spPr>
-          <a:xfrm>
-            <a:off x="4588091" y="1999317"/>
-            <a:ext cx="491479" cy="425192"/>
-          </a:xfrm>
-          <a:prstGeom prst="flowChartConnector">
-            <a:avLst/>
-          </a:prstGeom>
-          <a:solidFill>
-            <a:schemeClr val="bg1">
-              <a:lumMod val="95000"/>
-            </a:schemeClr>
-          </a:solidFill>
-        </p:spPr>
-        <p:style>
-          <a:lnRef idx="2">
-            <a:schemeClr val="dk1"/>
-          </a:lnRef>
-          <a:fillRef idx="1">
-            <a:schemeClr val="lt1"/>
-          </a:fillRef>
-          <a:effectRef idx="0">
-            <a:schemeClr val="dk1"/>
-          </a:effectRef>
-          <a:fontRef idx="minor">
-            <a:schemeClr val="dk1"/>
-          </a:fontRef>
-        </p:style>
-        <p:txBody>
-          <a:bodyPr rtlCol="0" anchor="ctr"/>
-          <a:lstStyle/>
-          <a:p>
-            <a:pPr algn="ctr"/>
-            <a:r>
-              <a:rPr lang="en-US" altLang="zh-CN" sz="1100" dirty="0">
-                <a:latin typeface="Arial" panose="020B0604020202020204" pitchFamily="34" charset="0"/>
-                <a:cs typeface="Arial" panose="020B0604020202020204" pitchFamily="34" charset="0"/>
-              </a:rPr>
-              <a:t>T2</a:t>
-            </a:r>
-            <a:endParaRPr lang="zh-CN" altLang="en-US" sz="1100" dirty="0">
-              <a:latin typeface="Arial" panose="020B0604020202020204" pitchFamily="34" charset="0"/>
-              <a:cs typeface="Arial" panose="020B0604020202020204" pitchFamily="34" charset="0"/>
-            </a:endParaRPr>
-          </a:p>
-        </p:txBody>
-      </p:sp>
-      <p:sp>
-        <p:nvSpPr>
-          <p:cNvPr id="89" name="文本框 88">
-            <a:extLst>
-              <a:ext uri="{FF2B5EF4-FFF2-40B4-BE49-F238E27FC236}">
-                <a16:creationId xmlns:a16="http://schemas.microsoft.com/office/drawing/2014/main" id="{659AED69-3352-1022-0527-412A03370086}"/>
-              </a:ext>
-            </a:extLst>
-          </p:cNvPr>
-          <p:cNvSpPr txBox="1"/>
-          <p:nvPr/>
-        </p:nvSpPr>
-        <p:spPr>
-          <a:xfrm>
-            <a:off x="4269979" y="709277"/>
-            <a:ext cx="1359585" cy="276999"/>
-          </a:xfrm>
-          <a:prstGeom prst="rect">
-            <a:avLst/>
-          </a:prstGeom>
-          <a:noFill/>
-        </p:spPr>
-        <p:txBody>
-          <a:bodyPr wrap="square" rtlCol="0">
-            <a:spAutoFit/>
-          </a:bodyPr>
-          <a:lstStyle/>
-          <a:p>
-            <a:r>
-              <a:rPr lang="en-US" altLang="zh-CN" sz="1200" b="1" dirty="0">
-                <a:latin typeface="Arial" panose="020B0604020202020204" pitchFamily="34" charset="0"/>
-                <a:cs typeface="Arial" panose="020B0604020202020204" pitchFamily="34" charset="0"/>
-              </a:rPr>
-              <a:t>Trust Branches</a:t>
-            </a:r>
-            <a:endParaRPr lang="zh-CN" altLang="en-US" sz="1200" b="1" dirty="0">
-              <a:latin typeface="Arial" panose="020B0604020202020204" pitchFamily="34" charset="0"/>
-              <a:cs typeface="Arial" panose="020B0604020202020204" pitchFamily="34" charset="0"/>
-            </a:endParaRPr>
-          </a:p>
-        </p:txBody>
-      </p:sp>
       <p:pic>
         <p:nvPicPr>
-          <p:cNvPr id="91" name="图形 90" descr="计算机">
-            <a:extLst>
-              <a:ext uri="{FF2B5EF4-FFF2-40B4-BE49-F238E27FC236}">
-                <a16:creationId xmlns:a16="http://schemas.microsoft.com/office/drawing/2014/main" id="{67C219B2-E370-691E-82F2-1B9CAEBA46EF}"/>
-              </a:ext>
-            </a:extLst>
-          </p:cNvPr>
+          <p:cNvPr id="96" name="图片 95"/>
           <p:cNvPicPr>
             <a:picLocks noChangeAspect="1"/>
           </p:cNvPicPr>
           <p:nvPr/>
         </p:nvPicPr>
         <p:blipFill>
-          <a:blip>
-            <a:extLst>
-              <a:ext uri="{96DAC541-7B7A-43D3-8B79-37D633B846F1}">
-                <asvg:svgBlip xmlns:asvg="http://schemas.microsoft.com/office/drawing/2016/SVG/main" r:embed="rId8"/>
-              </a:ext>
-            </a:extLst>
-          </a:blip>
-          <a:stretch>
-            <a:fillRect/>
-          </a:stretch>
-        </p:blipFill>
-        <p:spPr>
-          <a:xfrm>
-            <a:off x="753950" y="3561217"/>
-            <a:ext cx="914400" cy="914400"/>
-          </a:xfrm>
-          <a:prstGeom prst="rect">
-            <a:avLst/>
-          </a:prstGeom>
-        </p:spPr>
-      </p:pic>
-      <p:pic>
-        <p:nvPicPr>
-          <p:cNvPr id="93" name="图形 92" descr="数据库">
-            <a:extLst>
-              <a:ext uri="{FF2B5EF4-FFF2-40B4-BE49-F238E27FC236}">
-                <a16:creationId xmlns:a16="http://schemas.microsoft.com/office/drawing/2014/main" id="{9B07752C-18B1-D988-544A-73490F14B77F}"/>
-              </a:ext>
-            </a:extLst>
-          </p:cNvPr>
-          <p:cNvPicPr>
-            <a:picLocks noChangeAspect="1"/>
-          </p:cNvPicPr>
-          <p:nvPr/>
-        </p:nvPicPr>
-        <p:blipFill>
-          <a:blip>
-            <a:extLst>
-              <a:ext uri="{96DAC541-7B7A-43D3-8B79-37D633B846F1}">
-                <asvg:svgBlip xmlns:asvg="http://schemas.microsoft.com/office/drawing/2016/SVG/main" r:embed="rId9"/>
-              </a:ext>
-            </a:extLst>
-          </a:blip>
-          <a:stretch>
-            <a:fillRect/>
-          </a:stretch>
-        </p:blipFill>
-        <p:spPr>
-          <a:xfrm>
-            <a:off x="130137" y="4497686"/>
-            <a:ext cx="914400" cy="914400"/>
-          </a:xfrm>
-          <a:prstGeom prst="rect">
-            <a:avLst/>
-          </a:prstGeom>
-        </p:spPr>
-      </p:pic>
-      <p:pic>
-        <p:nvPicPr>
-          <p:cNvPr id="95" name="图片 94">
-            <a:extLst>
-              <a:ext uri="{FF2B5EF4-FFF2-40B4-BE49-F238E27FC236}">
-                <a16:creationId xmlns:a16="http://schemas.microsoft.com/office/drawing/2014/main" id="{D5B4DF0C-A31F-379E-892B-D15AA784D06C}"/>
-              </a:ext>
-            </a:extLst>
-          </p:cNvPr>
-          <p:cNvPicPr>
-            <a:picLocks noChangeAspect="1"/>
-          </p:cNvPicPr>
-          <p:nvPr/>
-        </p:nvPicPr>
-        <p:blipFill>
-          <a:blip r:embed="rId10" cstate="print">
+          <a:blip r:embed="rId11" cstate="print">
             <a:extLst>
               <a:ext uri="{28A0092B-C50C-407E-A947-70E740481C1C}">
                 <a14:useLocalDpi xmlns:a14="http://schemas.microsoft.com/office/drawing/2010/main" val="0"/>
@@ -10111,7 +9172,7 @@
         </p:blipFill>
         <p:spPr>
           <a:xfrm>
-            <a:off x="5259981" y="1252239"/>
+            <a:off x="5267521" y="2262834"/>
             <a:ext cx="313054" cy="313054"/>
           </a:xfrm>
           <a:prstGeom prst="rect">
@@ -10119,22 +9180,452 @@
           </a:prstGeom>
         </p:spPr>
       </p:pic>
+      <p:sp>
+        <p:nvSpPr>
+          <p:cNvPr id="97" name="文本框 96"/>
+          <p:cNvSpPr txBox="1"/>
+          <p:nvPr/>
+        </p:nvSpPr>
+        <p:spPr>
+          <a:xfrm>
+            <a:off x="5177826" y="1532071"/>
+            <a:ext cx="537974" cy="230832"/>
+          </a:xfrm>
+          <a:prstGeom prst="rect">
+            <a:avLst/>
+          </a:prstGeom>
+          <a:noFill/>
+        </p:spPr>
+        <p:txBody>
+          <a:bodyPr wrap="square" rtlCol="0">
+            <a:spAutoFit/>
+          </a:bodyPr>
+          <a:lstStyle/>
+          <a:p>
+            <a:r>
+              <a:rPr lang="en-US" altLang="zh-CN" sz="900" b="1" dirty="0">
+                <a:latin typeface="Arial" panose="020B0604020202020204" pitchFamily="34" charset="0"/>
+                <a:cs typeface="Arial" panose="020B0604020202020204" pitchFamily="34" charset="0"/>
+              </a:rPr>
+              <a:t>Verify</a:t>
+            </a:r>
+            <a:endParaRPr lang="zh-CN" altLang="en-US" sz="900" b="1" dirty="0">
+              <a:latin typeface="Arial" panose="020B0604020202020204" pitchFamily="34" charset="0"/>
+              <a:cs typeface="Arial" panose="020B0604020202020204" pitchFamily="34" charset="0"/>
+            </a:endParaRPr>
+          </a:p>
+        </p:txBody>
+      </p:sp>
+      <p:sp>
+        <p:nvSpPr>
+          <p:cNvPr id="98" name="文本框 97"/>
+          <p:cNvSpPr txBox="1"/>
+          <p:nvPr/>
+        </p:nvSpPr>
+        <p:spPr>
+          <a:xfrm>
+            <a:off x="5187977" y="2544787"/>
+            <a:ext cx="537974" cy="230832"/>
+          </a:xfrm>
+          <a:prstGeom prst="rect">
+            <a:avLst/>
+          </a:prstGeom>
+          <a:noFill/>
+        </p:spPr>
+        <p:txBody>
+          <a:bodyPr wrap="square" rtlCol="0">
+            <a:spAutoFit/>
+          </a:bodyPr>
+          <a:lstStyle/>
+          <a:p>
+            <a:r>
+              <a:rPr lang="en-US" altLang="zh-CN" sz="900" b="1" dirty="0">
+                <a:latin typeface="Arial" panose="020B0604020202020204" pitchFamily="34" charset="0"/>
+                <a:cs typeface="Arial" panose="020B0604020202020204" pitchFamily="34" charset="0"/>
+              </a:rPr>
+              <a:t>Verify</a:t>
+            </a:r>
+            <a:endParaRPr lang="zh-CN" altLang="en-US" sz="900" b="1" dirty="0">
+              <a:latin typeface="Arial" panose="020B0604020202020204" pitchFamily="34" charset="0"/>
+              <a:cs typeface="Arial" panose="020B0604020202020204" pitchFamily="34" charset="0"/>
+            </a:endParaRPr>
+          </a:p>
+        </p:txBody>
+      </p:sp>
+      <p:sp>
+        <p:nvSpPr>
+          <p:cNvPr id="99" name="流程图: 资料带 98"/>
+          <p:cNvSpPr/>
+          <p:nvPr/>
+        </p:nvSpPr>
+        <p:spPr>
+          <a:xfrm>
+            <a:off x="5909360" y="778047"/>
+            <a:ext cx="1014566" cy="618956"/>
+          </a:xfrm>
+          <a:prstGeom prst="flowChartPunchedTape">
+            <a:avLst/>
+          </a:prstGeom>
+          <a:solidFill>
+            <a:srgbClr val="FFFFE0"/>
+          </a:solidFill>
+        </p:spPr>
+        <p:style>
+          <a:lnRef idx="2">
+            <a:schemeClr val="accent1">
+              <a:shade val="15000"/>
+            </a:schemeClr>
+          </a:lnRef>
+          <a:fillRef idx="1">
+            <a:schemeClr val="accent1"/>
+          </a:fillRef>
+          <a:effectRef idx="0">
+            <a:schemeClr val="accent1"/>
+          </a:effectRef>
+          <a:fontRef idx="minor">
+            <a:schemeClr val="lt1"/>
+          </a:fontRef>
+        </p:style>
+        <p:txBody>
+          <a:bodyPr rtlCol="0" anchor="ctr"/>
+          <a:lstStyle/>
+          <a:p>
+            <a:pPr algn="ctr"/>
+            <a:endParaRPr lang="zh-CN" altLang="en-US"/>
+          </a:p>
+        </p:txBody>
+      </p:sp>
+      <p:sp>
+        <p:nvSpPr>
+          <p:cNvPr id="102" name="流程图: 资料带 101"/>
+          <p:cNvSpPr/>
+          <p:nvPr/>
+        </p:nvSpPr>
+        <p:spPr>
+          <a:xfrm>
+            <a:off x="6044983" y="855843"/>
+            <a:ext cx="1014566" cy="618956"/>
+          </a:xfrm>
+          <a:prstGeom prst="flowChartPunchedTape">
+            <a:avLst/>
+          </a:prstGeom>
+          <a:solidFill>
+            <a:srgbClr val="FFFFE0"/>
+          </a:solidFill>
+        </p:spPr>
+        <p:style>
+          <a:lnRef idx="2">
+            <a:schemeClr val="accent1">
+              <a:shade val="15000"/>
+            </a:schemeClr>
+          </a:lnRef>
+          <a:fillRef idx="1">
+            <a:schemeClr val="accent1"/>
+          </a:fillRef>
+          <a:effectRef idx="0">
+            <a:schemeClr val="accent1"/>
+          </a:effectRef>
+          <a:fontRef idx="minor">
+            <a:schemeClr val="lt1"/>
+          </a:fontRef>
+        </p:style>
+        <p:txBody>
+          <a:bodyPr rtlCol="0" anchor="ctr"/>
+          <a:lstStyle/>
+          <a:p>
+            <a:pPr algn="ctr"/>
+            <a:endParaRPr lang="zh-CN" altLang="en-US"/>
+          </a:p>
+        </p:txBody>
+      </p:sp>
+      <p:sp>
+        <p:nvSpPr>
+          <p:cNvPr id="103" name="流程图: 资料带 102"/>
+          <p:cNvSpPr/>
+          <p:nvPr/>
+        </p:nvSpPr>
+        <p:spPr>
+          <a:xfrm>
+            <a:off x="6208071" y="913115"/>
+            <a:ext cx="1014566" cy="618956"/>
+          </a:xfrm>
+          <a:prstGeom prst="flowChartPunchedTape">
+            <a:avLst/>
+          </a:prstGeom>
+          <a:solidFill>
+            <a:srgbClr val="FFFFE0"/>
+          </a:solidFill>
+        </p:spPr>
+        <p:style>
+          <a:lnRef idx="2">
+            <a:schemeClr val="accent1">
+              <a:shade val="15000"/>
+            </a:schemeClr>
+          </a:lnRef>
+          <a:fillRef idx="1">
+            <a:schemeClr val="accent1"/>
+          </a:fillRef>
+          <a:effectRef idx="0">
+            <a:schemeClr val="accent1"/>
+          </a:effectRef>
+          <a:fontRef idx="minor">
+            <a:schemeClr val="lt1"/>
+          </a:fontRef>
+        </p:style>
+        <p:txBody>
+          <a:bodyPr rtlCol="0" anchor="ctr"/>
+          <a:lstStyle/>
+          <a:p>
+            <a:pPr algn="ctr"/>
+            <a:r>
+              <a:rPr lang="en-US" altLang="zh-CN" sz="1200" b="1" dirty="0">
+                <a:solidFill>
+                  <a:schemeClr val="tx1"/>
+                </a:solidFill>
+                <a:latin typeface="Arial" panose="020B0604020202020204" pitchFamily="34" charset="0"/>
+                <a:cs typeface="Arial" panose="020B0604020202020204" pitchFamily="34" charset="0"/>
+              </a:rPr>
+              <a:t>Multi-factor From T1</a:t>
+            </a:r>
+            <a:endParaRPr lang="zh-CN" altLang="en-US" sz="1200" b="1" dirty="0">
+              <a:solidFill>
+                <a:schemeClr val="tx1"/>
+              </a:solidFill>
+              <a:latin typeface="Arial" panose="020B0604020202020204" pitchFamily="34" charset="0"/>
+              <a:cs typeface="Arial" panose="020B0604020202020204" pitchFamily="34" charset="0"/>
+            </a:endParaRPr>
+          </a:p>
+        </p:txBody>
+      </p:sp>
       <p:pic>
         <p:nvPicPr>
-          <p:cNvPr id="96" name="图片 95">
-            <a:extLst>
-              <a:ext uri="{FF2B5EF4-FFF2-40B4-BE49-F238E27FC236}">
-                <a16:creationId xmlns:a16="http://schemas.microsoft.com/office/drawing/2014/main" id="{1FBDFF9E-4F68-8C97-03F7-94D4991479EF}"/>
-              </a:ext>
-            </a:extLst>
-          </p:cNvPr>
+          <p:cNvPr id="104" name="图片 103"/>
           <p:cNvPicPr>
             <a:picLocks noChangeAspect="1"/>
           </p:cNvPicPr>
           <p:nvPr/>
         </p:nvPicPr>
         <p:blipFill>
-          <a:blip r:embed="rId10" cstate="print">
+          <a:blip r:embed="rId12"/>
+          <a:stretch>
+            <a:fillRect/>
+          </a:stretch>
+        </p:blipFill>
+        <p:spPr>
+          <a:xfrm>
+            <a:off x="7581387" y="2821273"/>
+            <a:ext cx="579170" cy="579170"/>
+          </a:xfrm>
+          <a:prstGeom prst="rect">
+            <a:avLst/>
+          </a:prstGeom>
+          <a:solidFill>
+            <a:schemeClr val="accent1"/>
+          </a:solidFill>
+        </p:spPr>
+      </p:pic>
+      <p:sp>
+        <p:nvSpPr>
+          <p:cNvPr id="114" name="流程图: 资料带 113"/>
+          <p:cNvSpPr/>
+          <p:nvPr/>
+        </p:nvSpPr>
+        <p:spPr>
+          <a:xfrm>
+            <a:off x="5909360" y="1945248"/>
+            <a:ext cx="1014566" cy="618956"/>
+          </a:xfrm>
+          <a:prstGeom prst="flowChartPunchedTape">
+            <a:avLst/>
+          </a:prstGeom>
+          <a:solidFill>
+            <a:srgbClr val="FFFFE0"/>
+          </a:solidFill>
+        </p:spPr>
+        <p:style>
+          <a:lnRef idx="2">
+            <a:schemeClr val="accent1">
+              <a:shade val="15000"/>
+            </a:schemeClr>
+          </a:lnRef>
+          <a:fillRef idx="1">
+            <a:schemeClr val="accent1"/>
+          </a:fillRef>
+          <a:effectRef idx="0">
+            <a:schemeClr val="accent1"/>
+          </a:effectRef>
+          <a:fontRef idx="minor">
+            <a:schemeClr val="lt1"/>
+          </a:fontRef>
+        </p:style>
+        <p:txBody>
+          <a:bodyPr rtlCol="0" anchor="ctr"/>
+          <a:lstStyle/>
+          <a:p>
+            <a:pPr algn="ctr"/>
+            <a:endParaRPr lang="zh-CN" altLang="en-US"/>
+          </a:p>
+        </p:txBody>
+      </p:sp>
+      <p:sp>
+        <p:nvSpPr>
+          <p:cNvPr id="115" name="流程图: 资料带 114"/>
+          <p:cNvSpPr/>
+          <p:nvPr/>
+        </p:nvSpPr>
+        <p:spPr>
+          <a:xfrm>
+            <a:off x="6044983" y="2023044"/>
+            <a:ext cx="1014566" cy="618956"/>
+          </a:xfrm>
+          <a:prstGeom prst="flowChartPunchedTape">
+            <a:avLst/>
+          </a:prstGeom>
+          <a:solidFill>
+            <a:srgbClr val="FFFFE0"/>
+          </a:solidFill>
+        </p:spPr>
+        <p:style>
+          <a:lnRef idx="2">
+            <a:schemeClr val="accent1">
+              <a:shade val="15000"/>
+            </a:schemeClr>
+          </a:lnRef>
+          <a:fillRef idx="1">
+            <a:schemeClr val="accent1"/>
+          </a:fillRef>
+          <a:effectRef idx="0">
+            <a:schemeClr val="accent1"/>
+          </a:effectRef>
+          <a:fontRef idx="minor">
+            <a:schemeClr val="lt1"/>
+          </a:fontRef>
+        </p:style>
+        <p:txBody>
+          <a:bodyPr rtlCol="0" anchor="ctr"/>
+          <a:lstStyle/>
+          <a:p>
+            <a:pPr algn="ctr"/>
+            <a:endParaRPr lang="zh-CN" altLang="en-US"/>
+          </a:p>
+        </p:txBody>
+      </p:sp>
+      <p:pic>
+        <p:nvPicPr>
+          <p:cNvPr id="118" name="图形 117" descr="研究"/>
+          <p:cNvPicPr>
+            <a:picLocks noChangeAspect="1"/>
+          </p:cNvPicPr>
+          <p:nvPr/>
+        </p:nvPicPr>
+        <p:blipFill>
+          <a:blip r:embed="rId13">
+            <a:extLst>
+              <a:ext uri="{96DAC541-7B7A-43D3-8B79-37D633B846F1}">
+                <asvg:svgBlip xmlns:asvg="http://schemas.microsoft.com/office/drawing/2016/SVG/main" r:embed="rId14"/>
+              </a:ext>
+            </a:extLst>
+          </a:blip>
+          <a:stretch>
+            <a:fillRect/>
+          </a:stretch>
+        </p:blipFill>
+        <p:spPr>
+          <a:xfrm>
+            <a:off x="1346131" y="4554837"/>
+            <a:ext cx="796421" cy="796421"/>
+          </a:xfrm>
+          <a:prstGeom prst="rect">
+            <a:avLst/>
+          </a:prstGeom>
+        </p:spPr>
+      </p:pic>
+      <p:sp>
+        <p:nvSpPr>
+          <p:cNvPr id="119" name="文本框 118"/>
+          <p:cNvSpPr txBox="1"/>
+          <p:nvPr/>
+        </p:nvSpPr>
+        <p:spPr>
+          <a:xfrm>
+            <a:off x="100971" y="3316618"/>
+            <a:ext cx="2379351" cy="276999"/>
+          </a:xfrm>
+          <a:prstGeom prst="rect">
+            <a:avLst/>
+          </a:prstGeom>
+          <a:noFill/>
+        </p:spPr>
+        <p:txBody>
+          <a:bodyPr wrap="square" rtlCol="0">
+            <a:spAutoFit/>
+          </a:bodyPr>
+          <a:lstStyle/>
+          <a:p>
+            <a:r>
+              <a:rPr lang="en-US" altLang="zh-CN" sz="1200" b="1" dirty="0">
+                <a:latin typeface="Arial" panose="020B0604020202020204" pitchFamily="34" charset="0"/>
+                <a:cs typeface="Arial" panose="020B0604020202020204" pitchFamily="34" charset="0"/>
+              </a:rPr>
+              <a:t>Inter-ground Control Access</a:t>
+            </a:r>
+            <a:endParaRPr lang="zh-CN" altLang="en-US" sz="1200" b="1" dirty="0">
+              <a:latin typeface="Arial" panose="020B0604020202020204" pitchFamily="34" charset="0"/>
+              <a:cs typeface="Arial" panose="020B0604020202020204" pitchFamily="34" charset="0"/>
+            </a:endParaRPr>
+          </a:p>
+        </p:txBody>
+      </p:sp>
+      <p:sp>
+        <p:nvSpPr>
+          <p:cNvPr id="120" name="等腰三角形 119"/>
+          <p:cNvSpPr/>
+          <p:nvPr/>
+        </p:nvSpPr>
+        <p:spPr>
+          <a:xfrm rot="5400000">
+            <a:off x="2164469" y="4237026"/>
+            <a:ext cx="505104" cy="358480"/>
+          </a:xfrm>
+          <a:prstGeom prst="triangle">
+            <a:avLst/>
+          </a:prstGeom>
+        </p:spPr>
+        <p:style>
+          <a:lnRef idx="2">
+            <a:schemeClr val="accent2">
+              <a:shade val="15000"/>
+            </a:schemeClr>
+          </a:lnRef>
+          <a:fillRef idx="1">
+            <a:schemeClr val="accent2"/>
+          </a:fillRef>
+          <a:effectRef idx="0">
+            <a:schemeClr val="accent2"/>
+          </a:effectRef>
+          <a:fontRef idx="minor">
+            <a:schemeClr val="lt1"/>
+          </a:fontRef>
+        </p:style>
+        <p:txBody>
+          <a:bodyPr rtlCol="0" anchor="ctr"/>
+          <a:lstStyle/>
+          <a:p>
+            <a:pPr algn="ctr"/>
+            <a:endParaRPr lang="zh-CN" altLang="en-US"/>
+          </a:p>
+        </p:txBody>
+      </p:sp>
+      <p:pic>
+        <p:nvPicPr>
+          <p:cNvPr id="121" name="图片 120"/>
+          <p:cNvPicPr>
+            <a:picLocks noChangeAspect="1"/>
+          </p:cNvPicPr>
+          <p:nvPr/>
+        </p:nvPicPr>
+        <p:blipFill>
+          <a:blip r:embed="rId6" cstate="print">
             <a:extLst>
               <a:ext uri="{28A0092B-C50C-407E-A947-70E740481C1C}">
                 <a14:useLocalDpi xmlns:a14="http://schemas.microsoft.com/office/drawing/2010/main" val="0"/>
@@ -10147,30 +9638,27 @@
         </p:blipFill>
         <p:spPr>
           <a:xfrm>
-            <a:off x="5267521" y="2262834"/>
-            <a:ext cx="313054" cy="313054"/>
-          </a:xfrm>
-          <a:prstGeom prst="rect">
-            <a:avLst/>
-          </a:prstGeom>
+            <a:off x="2795041" y="4124327"/>
+            <a:ext cx="583878" cy="583878"/>
+          </a:xfrm>
+          <a:prstGeom prst="rect">
+            <a:avLst/>
+          </a:prstGeom>
+          <a:solidFill>
+            <a:schemeClr val="accent1"/>
+          </a:solidFill>
         </p:spPr>
       </p:pic>
       <p:sp>
         <p:nvSpPr>
-          <p:cNvPr id="97" name="文本框 96">
-            <a:extLst>
-              <a:ext uri="{FF2B5EF4-FFF2-40B4-BE49-F238E27FC236}">
-                <a16:creationId xmlns:a16="http://schemas.microsoft.com/office/drawing/2014/main" id="{2FC7A817-4530-D3E3-1C46-A0CF803FF604}"/>
-              </a:ext>
-            </a:extLst>
-          </p:cNvPr>
+          <p:cNvPr id="122" name="文本框 121"/>
           <p:cNvSpPr txBox="1"/>
           <p:nvPr/>
         </p:nvSpPr>
         <p:spPr>
           <a:xfrm>
-            <a:off x="5177826" y="1532071"/>
-            <a:ext cx="537974" cy="230832"/>
+            <a:off x="2344951" y="4814977"/>
+            <a:ext cx="1834001" cy="276999"/>
           </a:xfrm>
           <a:prstGeom prst="rect">
             <a:avLst/>
@@ -10184,13 +9672,13 @@
           <a:lstStyle/>
           <a:p>
             <a:r>
-              <a:rPr lang="en-US" altLang="zh-CN" sz="900" b="1" dirty="0">
+              <a:rPr lang="en-US" altLang="zh-CN" sz="1200" b="1" dirty="0">
                 <a:latin typeface="Arial" panose="020B0604020202020204" pitchFamily="34" charset="0"/>
                 <a:cs typeface="Arial" panose="020B0604020202020204" pitchFamily="34" charset="0"/>
               </a:rPr>
-              <a:t>Verify</a:t>
-            </a:r>
-            <a:endParaRPr lang="zh-CN" altLang="en-US" sz="900" b="1" dirty="0">
+              <a:t>Summarization Agent</a:t>
+            </a:r>
+            <a:endParaRPr lang="zh-CN" altLang="en-US" sz="1200" b="1" dirty="0">
               <a:latin typeface="Arial" panose="020B0604020202020204" pitchFamily="34" charset="0"/>
               <a:cs typeface="Arial" panose="020B0604020202020204" pitchFamily="34" charset="0"/>
             </a:endParaRPr>
@@ -10199,20 +9687,14 @@
       </p:sp>
       <p:sp>
         <p:nvSpPr>
-          <p:cNvPr id="98" name="文本框 97">
-            <a:extLst>
-              <a:ext uri="{FF2B5EF4-FFF2-40B4-BE49-F238E27FC236}">
-                <a16:creationId xmlns:a16="http://schemas.microsoft.com/office/drawing/2014/main" id="{1AB3A6E1-B773-C985-453A-86F91DCAA7C6}"/>
-              </a:ext>
-            </a:extLst>
-          </p:cNvPr>
+          <p:cNvPr id="123" name="文本框 122"/>
           <p:cNvSpPr txBox="1"/>
           <p:nvPr/>
         </p:nvSpPr>
         <p:spPr>
           <a:xfrm>
-            <a:off x="5187977" y="2544787"/>
-            <a:ext cx="537974" cy="230832"/>
+            <a:off x="162166" y="5341923"/>
+            <a:ext cx="941972" cy="276999"/>
           </a:xfrm>
           <a:prstGeom prst="rect">
             <a:avLst/>
@@ -10226,13 +9708,13 @@
           <a:lstStyle/>
           <a:p>
             <a:r>
-              <a:rPr lang="en-US" altLang="zh-CN" sz="900" b="1" dirty="0">
+              <a:rPr lang="en-US" altLang="zh-CN" sz="1200" dirty="0">
                 <a:latin typeface="Arial" panose="020B0604020202020204" pitchFamily="34" charset="0"/>
                 <a:cs typeface="Arial" panose="020B0604020202020204" pitchFamily="34" charset="0"/>
               </a:rPr>
-              <a:t>Verify</a:t>
-            </a:r>
-            <a:endParaRPr lang="zh-CN" altLang="en-US" sz="900" b="1" dirty="0">
+              <a:t>Database</a:t>
+            </a:r>
+            <a:endParaRPr lang="zh-CN" altLang="en-US" sz="1200" dirty="0">
               <a:latin typeface="Arial" panose="020B0604020202020204" pitchFamily="34" charset="0"/>
               <a:cs typeface="Arial" panose="020B0604020202020204" pitchFamily="34" charset="0"/>
             </a:endParaRPr>
@@ -10241,19 +9723,406 @@
       </p:sp>
       <p:sp>
         <p:nvSpPr>
-          <p:cNvPr id="99" name="流程图: 资料带 98">
-            <a:extLst>
-              <a:ext uri="{FF2B5EF4-FFF2-40B4-BE49-F238E27FC236}">
-                <a16:creationId xmlns:a16="http://schemas.microsoft.com/office/drawing/2014/main" id="{DFD3C77C-8347-87F8-11B6-92CF619C7B80}"/>
-              </a:ext>
-            </a:extLst>
-          </p:cNvPr>
+          <p:cNvPr id="124" name="文本框 123"/>
+          <p:cNvSpPr txBox="1"/>
+          <p:nvPr/>
+        </p:nvSpPr>
+        <p:spPr>
+          <a:xfrm>
+            <a:off x="1405732" y="5341922"/>
+            <a:ext cx="664538" cy="276999"/>
+          </a:xfrm>
+          <a:prstGeom prst="rect">
+            <a:avLst/>
+          </a:prstGeom>
+          <a:noFill/>
+        </p:spPr>
+        <p:txBody>
+          <a:bodyPr wrap="square" rtlCol="0">
+            <a:spAutoFit/>
+          </a:bodyPr>
+          <a:lstStyle/>
+          <a:p>
+            <a:r>
+              <a:rPr lang="en-US" altLang="zh-CN" sz="1200" dirty="0">
+                <a:latin typeface="Arial" panose="020B0604020202020204" pitchFamily="34" charset="0"/>
+                <a:cs typeface="Arial" panose="020B0604020202020204" pitchFamily="34" charset="0"/>
+              </a:rPr>
+              <a:t>Query</a:t>
+            </a:r>
+            <a:endParaRPr lang="zh-CN" altLang="en-US" sz="1200" dirty="0">
+              <a:latin typeface="Arial" panose="020B0604020202020204" pitchFamily="34" charset="0"/>
+              <a:cs typeface="Arial" panose="020B0604020202020204" pitchFamily="34" charset="0"/>
+            </a:endParaRPr>
+          </a:p>
+        </p:txBody>
+      </p:sp>
+      <p:cxnSp>
+        <p:nvCxnSpPr>
+          <p:cNvPr id="125" name="直接箭头连接符 124"/>
+          <p:cNvCxnSpPr/>
+          <p:nvPr/>
+        </p:nvCxnSpPr>
+        <p:spPr>
+          <a:xfrm flipV="1">
+            <a:off x="4072777" y="3714381"/>
+            <a:ext cx="490327" cy="701040"/>
+          </a:xfrm>
+          <a:prstGeom prst="straightConnector1">
+            <a:avLst/>
+          </a:prstGeom>
+          <a:ln>
+            <a:tailEnd type="triangle"/>
+          </a:ln>
+        </p:spPr>
+        <p:style>
+          <a:lnRef idx="3">
+            <a:schemeClr val="dk1"/>
+          </a:lnRef>
+          <a:fillRef idx="0">
+            <a:schemeClr val="dk1"/>
+          </a:fillRef>
+          <a:effectRef idx="2">
+            <a:schemeClr val="dk1"/>
+          </a:effectRef>
+          <a:fontRef idx="minor">
+            <a:schemeClr val="tx1"/>
+          </a:fontRef>
+        </p:style>
+      </p:cxnSp>
+      <p:cxnSp>
+        <p:nvCxnSpPr>
+          <p:cNvPr id="127" name="直接箭头连接符 126"/>
+          <p:cNvCxnSpPr/>
+          <p:nvPr/>
+        </p:nvCxnSpPr>
+        <p:spPr>
+          <a:xfrm>
+            <a:off x="4081526" y="4412429"/>
+            <a:ext cx="493308" cy="754286"/>
+          </a:xfrm>
+          <a:prstGeom prst="straightConnector1">
+            <a:avLst/>
+          </a:prstGeom>
+          <a:ln>
+            <a:tailEnd type="triangle"/>
+          </a:ln>
+        </p:spPr>
+        <p:style>
+          <a:lnRef idx="3">
+            <a:schemeClr val="dk1"/>
+          </a:lnRef>
+          <a:fillRef idx="0">
+            <a:schemeClr val="dk1"/>
+          </a:fillRef>
+          <a:effectRef idx="2">
+            <a:schemeClr val="dk1"/>
+          </a:effectRef>
+          <a:fontRef idx="minor">
+            <a:schemeClr val="tx1"/>
+          </a:fontRef>
+        </p:style>
+      </p:cxnSp>
+      <p:cxnSp>
+        <p:nvCxnSpPr>
+          <p:cNvPr id="131" name="直接箭头连接符 130"/>
+          <p:cNvCxnSpPr/>
+          <p:nvPr/>
+        </p:nvCxnSpPr>
+        <p:spPr>
+          <a:xfrm>
+            <a:off x="4072777" y="4412429"/>
+            <a:ext cx="515314" cy="0"/>
+          </a:xfrm>
+          <a:prstGeom prst="straightConnector1">
+            <a:avLst/>
+          </a:prstGeom>
+          <a:ln>
+            <a:tailEnd type="triangle"/>
+          </a:ln>
+        </p:spPr>
+        <p:style>
+          <a:lnRef idx="3">
+            <a:schemeClr val="dk1"/>
+          </a:lnRef>
+          <a:fillRef idx="0">
+            <a:schemeClr val="dk1"/>
+          </a:fillRef>
+          <a:effectRef idx="2">
+            <a:schemeClr val="dk1"/>
+          </a:effectRef>
+          <a:fontRef idx="minor">
+            <a:schemeClr val="tx1"/>
+          </a:fontRef>
+        </p:style>
+      </p:cxnSp>
+      <p:sp>
+        <p:nvSpPr>
+          <p:cNvPr id="135" name="流程图: 接点 134"/>
           <p:cNvSpPr/>
           <p:nvPr/>
         </p:nvSpPr>
         <p:spPr>
           <a:xfrm>
-            <a:off x="5909360" y="778047"/>
+            <a:off x="4604086" y="3400443"/>
+            <a:ext cx="491479" cy="425192"/>
+          </a:xfrm>
+          <a:prstGeom prst="flowChartConnector">
+            <a:avLst/>
+          </a:prstGeom>
+          <a:solidFill>
+            <a:schemeClr val="bg1">
+              <a:lumMod val="95000"/>
+            </a:schemeClr>
+          </a:solidFill>
+        </p:spPr>
+        <p:style>
+          <a:lnRef idx="2">
+            <a:schemeClr val="dk1"/>
+          </a:lnRef>
+          <a:fillRef idx="1">
+            <a:schemeClr val="lt1"/>
+          </a:fillRef>
+          <a:effectRef idx="0">
+            <a:schemeClr val="dk1"/>
+          </a:effectRef>
+          <a:fontRef idx="minor">
+            <a:schemeClr val="dk1"/>
+          </a:fontRef>
+        </p:style>
+        <p:txBody>
+          <a:bodyPr rtlCol="0" anchor="ctr"/>
+          <a:lstStyle/>
+          <a:p>
+            <a:pPr algn="ctr"/>
+            <a:r>
+              <a:rPr lang="en-US" altLang="zh-CN" sz="1100" dirty="0">
+                <a:latin typeface="Arial" panose="020B0604020202020204" pitchFamily="34" charset="0"/>
+                <a:cs typeface="Arial" panose="020B0604020202020204" pitchFamily="34" charset="0"/>
+              </a:rPr>
+              <a:t>T3</a:t>
+            </a:r>
+            <a:endParaRPr lang="zh-CN" altLang="en-US" sz="1100" dirty="0">
+              <a:latin typeface="Arial" panose="020B0604020202020204" pitchFamily="34" charset="0"/>
+              <a:cs typeface="Arial" panose="020B0604020202020204" pitchFamily="34" charset="0"/>
+            </a:endParaRPr>
+          </a:p>
+        </p:txBody>
+      </p:sp>
+      <p:sp>
+        <p:nvSpPr>
+          <p:cNvPr id="136" name="流程图: 接点 135"/>
+          <p:cNvSpPr/>
+          <p:nvPr/>
+        </p:nvSpPr>
+        <p:spPr>
+          <a:xfrm>
+            <a:off x="4604781" y="4184553"/>
+            <a:ext cx="491479" cy="425192"/>
+          </a:xfrm>
+          <a:prstGeom prst="flowChartConnector">
+            <a:avLst/>
+          </a:prstGeom>
+          <a:solidFill>
+            <a:schemeClr val="bg1">
+              <a:lumMod val="95000"/>
+            </a:schemeClr>
+          </a:solidFill>
+        </p:spPr>
+        <p:style>
+          <a:lnRef idx="2">
+            <a:schemeClr val="dk1"/>
+          </a:lnRef>
+          <a:fillRef idx="1">
+            <a:schemeClr val="lt1"/>
+          </a:fillRef>
+          <a:effectRef idx="0">
+            <a:schemeClr val="dk1"/>
+          </a:effectRef>
+          <a:fontRef idx="minor">
+            <a:schemeClr val="dk1"/>
+          </a:fontRef>
+        </p:style>
+        <p:txBody>
+          <a:bodyPr rtlCol="0" anchor="ctr"/>
+          <a:lstStyle/>
+          <a:p>
+            <a:pPr algn="ctr"/>
+            <a:r>
+              <a:rPr lang="en-US" altLang="zh-CN" sz="1100" dirty="0">
+                <a:latin typeface="Arial" panose="020B0604020202020204" pitchFamily="34" charset="0"/>
+                <a:cs typeface="Arial" panose="020B0604020202020204" pitchFamily="34" charset="0"/>
+              </a:rPr>
+              <a:t>T4</a:t>
+            </a:r>
+            <a:endParaRPr lang="zh-CN" altLang="en-US" sz="1100" dirty="0">
+              <a:latin typeface="Arial" panose="020B0604020202020204" pitchFamily="34" charset="0"/>
+              <a:cs typeface="Arial" panose="020B0604020202020204" pitchFamily="34" charset="0"/>
+            </a:endParaRPr>
+          </a:p>
+        </p:txBody>
+      </p:sp>
+      <p:sp>
+        <p:nvSpPr>
+          <p:cNvPr id="137" name="流程图: 接点 136"/>
+          <p:cNvSpPr/>
+          <p:nvPr/>
+        </p:nvSpPr>
+        <p:spPr>
+          <a:xfrm>
+            <a:off x="4588091" y="5072894"/>
+            <a:ext cx="491479" cy="425192"/>
+          </a:xfrm>
+          <a:prstGeom prst="flowChartConnector">
+            <a:avLst/>
+          </a:prstGeom>
+          <a:solidFill>
+            <a:schemeClr val="bg1">
+              <a:lumMod val="95000"/>
+            </a:schemeClr>
+          </a:solidFill>
+        </p:spPr>
+        <p:style>
+          <a:lnRef idx="2">
+            <a:schemeClr val="dk1"/>
+          </a:lnRef>
+          <a:fillRef idx="1">
+            <a:schemeClr val="lt1"/>
+          </a:fillRef>
+          <a:effectRef idx="0">
+            <a:schemeClr val="dk1"/>
+          </a:effectRef>
+          <a:fontRef idx="minor">
+            <a:schemeClr val="dk1"/>
+          </a:fontRef>
+        </p:style>
+        <p:txBody>
+          <a:bodyPr rtlCol="0" anchor="ctr"/>
+          <a:lstStyle/>
+          <a:p>
+            <a:pPr algn="ctr"/>
+            <a:r>
+              <a:rPr lang="en-US" altLang="zh-CN" sz="1100" dirty="0">
+                <a:latin typeface="Arial" panose="020B0604020202020204" pitchFamily="34" charset="0"/>
+                <a:cs typeface="Arial" panose="020B0604020202020204" pitchFamily="34" charset="0"/>
+              </a:rPr>
+              <a:t>T5</a:t>
+            </a:r>
+            <a:endParaRPr lang="zh-CN" altLang="en-US" sz="1100" dirty="0">
+              <a:latin typeface="Arial" panose="020B0604020202020204" pitchFamily="34" charset="0"/>
+              <a:cs typeface="Arial" panose="020B0604020202020204" pitchFamily="34" charset="0"/>
+            </a:endParaRPr>
+          </a:p>
+        </p:txBody>
+      </p:sp>
+      <p:cxnSp>
+        <p:nvCxnSpPr>
+          <p:cNvPr id="140" name="直接箭头连接符 139"/>
+          <p:cNvCxnSpPr/>
+          <p:nvPr/>
+        </p:nvCxnSpPr>
+        <p:spPr>
+          <a:xfrm flipV="1">
+            <a:off x="5172918" y="3661581"/>
+            <a:ext cx="580695" cy="5172"/>
+          </a:xfrm>
+          <a:prstGeom prst="straightConnector1">
+            <a:avLst/>
+          </a:prstGeom>
+          <a:ln>
+            <a:tailEnd type="triangle"/>
+          </a:ln>
+        </p:spPr>
+        <p:style>
+          <a:lnRef idx="3">
+            <a:schemeClr val="dk1"/>
+          </a:lnRef>
+          <a:fillRef idx="0">
+            <a:schemeClr val="dk1"/>
+          </a:fillRef>
+          <a:effectRef idx="2">
+            <a:schemeClr val="dk1"/>
+          </a:effectRef>
+          <a:fontRef idx="minor">
+            <a:schemeClr val="tx1"/>
+          </a:fontRef>
+        </p:style>
+      </p:cxnSp>
+      <p:cxnSp>
+        <p:nvCxnSpPr>
+          <p:cNvPr id="141" name="直接箭头连接符 140"/>
+          <p:cNvCxnSpPr/>
+          <p:nvPr/>
+        </p:nvCxnSpPr>
+        <p:spPr>
+          <a:xfrm flipV="1">
+            <a:off x="5137937" y="4407257"/>
+            <a:ext cx="580695" cy="5172"/>
+          </a:xfrm>
+          <a:prstGeom prst="straightConnector1">
+            <a:avLst/>
+          </a:prstGeom>
+          <a:ln>
+            <a:tailEnd type="triangle"/>
+          </a:ln>
+        </p:spPr>
+        <p:style>
+          <a:lnRef idx="3">
+            <a:schemeClr val="dk1"/>
+          </a:lnRef>
+          <a:fillRef idx="0">
+            <a:schemeClr val="dk1"/>
+          </a:fillRef>
+          <a:effectRef idx="2">
+            <a:schemeClr val="dk1"/>
+          </a:effectRef>
+          <a:fontRef idx="minor">
+            <a:schemeClr val="tx1"/>
+          </a:fontRef>
+        </p:style>
+      </p:cxnSp>
+      <p:cxnSp>
+        <p:nvCxnSpPr>
+          <p:cNvPr id="142" name="直接箭头连接符 141"/>
+          <p:cNvCxnSpPr/>
+          <p:nvPr/>
+        </p:nvCxnSpPr>
+        <p:spPr>
+          <a:xfrm flipV="1">
+            <a:off x="5139282" y="5258925"/>
+            <a:ext cx="580695" cy="5172"/>
+          </a:xfrm>
+          <a:prstGeom prst="straightConnector1">
+            <a:avLst/>
+          </a:prstGeom>
+          <a:ln>
+            <a:tailEnd type="triangle"/>
+          </a:ln>
+        </p:spPr>
+        <p:style>
+          <a:lnRef idx="3">
+            <a:schemeClr val="dk1"/>
+          </a:lnRef>
+          <a:fillRef idx="0">
+            <a:schemeClr val="dk1"/>
+          </a:fillRef>
+          <a:effectRef idx="2">
+            <a:schemeClr val="dk1"/>
+          </a:effectRef>
+          <a:fontRef idx="minor">
+            <a:schemeClr val="tx1"/>
+          </a:fontRef>
+        </p:style>
+      </p:cxnSp>
+      <p:sp>
+        <p:nvSpPr>
+          <p:cNvPr id="143" name="流程图: 资料带 142"/>
+          <p:cNvSpPr/>
+          <p:nvPr/>
+        </p:nvSpPr>
+        <p:spPr>
+          <a:xfrm>
+            <a:off x="5896846" y="3324355"/>
             <a:ext cx="1014566" cy="618956"/>
           </a:xfrm>
           <a:prstGeom prst="flowChartPunchedTape">
@@ -10290,19 +10159,13 @@
       </p:sp>
       <p:sp>
         <p:nvSpPr>
-          <p:cNvPr id="102" name="流程图: 资料带 101">
-            <a:extLst>
-              <a:ext uri="{FF2B5EF4-FFF2-40B4-BE49-F238E27FC236}">
-                <a16:creationId xmlns:a16="http://schemas.microsoft.com/office/drawing/2014/main" id="{6ED0D411-274E-4A9B-74C7-0DB1EBAF0946}"/>
-              </a:ext>
-            </a:extLst>
-          </p:cNvPr>
+          <p:cNvPr id="144" name="流程图: 资料带 143"/>
           <p:cNvSpPr/>
           <p:nvPr/>
         </p:nvSpPr>
         <p:spPr>
           <a:xfrm>
-            <a:off x="6044983" y="855843"/>
+            <a:off x="6032469" y="3402151"/>
             <a:ext cx="1014566" cy="618956"/>
           </a:xfrm>
           <a:prstGeom prst="flowChartPunchedTape">
@@ -10339,19 +10202,13 @@
       </p:sp>
       <p:sp>
         <p:nvSpPr>
-          <p:cNvPr id="103" name="流程图: 资料带 102">
-            <a:extLst>
-              <a:ext uri="{FF2B5EF4-FFF2-40B4-BE49-F238E27FC236}">
-                <a16:creationId xmlns:a16="http://schemas.microsoft.com/office/drawing/2014/main" id="{41A48090-3C83-D24C-9D42-B482AF84F393}"/>
-              </a:ext>
-            </a:extLst>
-          </p:cNvPr>
+          <p:cNvPr id="145" name="流程图: 资料带 144"/>
           <p:cNvSpPr/>
           <p:nvPr/>
         </p:nvSpPr>
         <p:spPr>
           <a:xfrm>
-            <a:off x="6208071" y="913115"/>
+            <a:off x="6198732" y="2111318"/>
             <a:ext cx="1014566" cy="618956"/>
           </a:xfrm>
           <a:prstGeom prst="flowChartPunchedTape">
@@ -10390,9 +10247,9 @@
                 <a:latin typeface="Arial" panose="020B0604020202020204" pitchFamily="34" charset="0"/>
                 <a:cs typeface="Arial" panose="020B0604020202020204" pitchFamily="34" charset="0"/>
               </a:rPr>
-              <a:t>Multi-factor From T1</a:t>
-            </a:r>
-            <a:endParaRPr lang="zh-CN" altLang="en-US" sz="1200" b="1" dirty="0">
+              <a:t>Multi-factor From T2</a:t>
+            </a:r>
+            <a:endParaRPr lang="en-US" altLang="zh-CN" sz="1200" b="1" dirty="0">
               <a:solidFill>
                 <a:schemeClr val="tx1"/>
               </a:solidFill>
@@ -10402,54 +10259,15 @@
           </a:p>
         </p:txBody>
       </p:sp>
-      <p:pic>
-        <p:nvPicPr>
-          <p:cNvPr id="104" name="图片 103">
-            <a:extLst>
-              <a:ext uri="{FF2B5EF4-FFF2-40B4-BE49-F238E27FC236}">
-                <a16:creationId xmlns:a16="http://schemas.microsoft.com/office/drawing/2014/main" id="{484D0DEA-EDC8-6210-EB63-5C0D7293D6E1}"/>
-              </a:ext>
-            </a:extLst>
-          </p:cNvPr>
-          <p:cNvPicPr>
-            <a:picLocks noChangeAspect="1"/>
-          </p:cNvPicPr>
-          <p:nvPr/>
-        </p:nvPicPr>
-        <p:blipFill>
-          <a:blip r:embed="rId11"/>
-          <a:stretch>
-            <a:fillRect/>
-          </a:stretch>
-        </p:blipFill>
-        <p:spPr>
-          <a:xfrm>
-            <a:off x="7581387" y="2821273"/>
-            <a:ext cx="579170" cy="579170"/>
-          </a:xfrm>
-          <a:prstGeom prst="rect">
-            <a:avLst/>
-          </a:prstGeom>
-          <a:solidFill>
-            <a:schemeClr val="accent1"/>
-          </a:solidFill>
-        </p:spPr>
-      </p:pic>
-      <p:sp>
-        <p:nvSpPr>
-          <p:cNvPr id="114" name="流程图: 资料带 113">
-            <a:extLst>
-              <a:ext uri="{FF2B5EF4-FFF2-40B4-BE49-F238E27FC236}">
-                <a16:creationId xmlns:a16="http://schemas.microsoft.com/office/drawing/2014/main" id="{B11127B7-770F-D0DC-B13F-9FC8F180DB52}"/>
-              </a:ext>
-            </a:extLst>
-          </p:cNvPr>
+      <p:sp>
+        <p:nvSpPr>
+          <p:cNvPr id="146" name="流程图: 资料带 145"/>
           <p:cNvSpPr/>
           <p:nvPr/>
         </p:nvSpPr>
         <p:spPr>
           <a:xfrm>
-            <a:off x="5909360" y="1945248"/>
+            <a:off x="5909360" y="4159891"/>
             <a:ext cx="1014566" cy="618956"/>
           </a:xfrm>
           <a:prstGeom prst="flowChartPunchedTape">
@@ -10486,19 +10304,13 @@
       </p:sp>
       <p:sp>
         <p:nvSpPr>
-          <p:cNvPr id="115" name="流程图: 资料带 114">
-            <a:extLst>
-              <a:ext uri="{FF2B5EF4-FFF2-40B4-BE49-F238E27FC236}">
-                <a16:creationId xmlns:a16="http://schemas.microsoft.com/office/drawing/2014/main" id="{A09860B0-FF63-5C62-9774-05E1ED3AE71F}"/>
-              </a:ext>
-            </a:extLst>
-          </p:cNvPr>
+          <p:cNvPr id="147" name="流程图: 资料带 146"/>
           <p:cNvSpPr/>
           <p:nvPr/>
         </p:nvSpPr>
         <p:spPr>
           <a:xfrm>
-            <a:off x="6044983" y="2023044"/>
+            <a:off x="6044983" y="4237687"/>
             <a:ext cx="1014566" cy="618956"/>
           </a:xfrm>
           <a:prstGeom prst="flowChartPunchedTape">
@@ -10535,19 +10347,13 @@
       </p:sp>
       <p:sp>
         <p:nvSpPr>
-          <p:cNvPr id="116" name="流程图: 资料带 115">
-            <a:extLst>
-              <a:ext uri="{FF2B5EF4-FFF2-40B4-BE49-F238E27FC236}">
-                <a16:creationId xmlns:a16="http://schemas.microsoft.com/office/drawing/2014/main" id="{B08B0365-85A9-D850-FFA0-DDE3EE4002CD}"/>
-              </a:ext>
-            </a:extLst>
-          </p:cNvPr>
+          <p:cNvPr id="148" name="流程图: 资料带 147"/>
           <p:cNvSpPr/>
           <p:nvPr/>
         </p:nvSpPr>
         <p:spPr>
           <a:xfrm>
-            <a:off x="6208071" y="2080316"/>
+            <a:off x="6208071" y="4294959"/>
             <a:ext cx="1014566" cy="618956"/>
           </a:xfrm>
           <a:prstGeom prst="flowChartPunchedTape">
@@ -10591,1101 +10397,6 @@
               <a:buSzTx/>
               <a:buFontTx/>
               <a:buNone/>
-              <a:tabLst/>
-              <a:defRPr/>
-            </a:pPr>
-            <a:endParaRPr kumimoji="0" lang="en-US" altLang="zh-CN" sz="1200" b="1" i="0" u="none" strike="noStrike" kern="1200" cap="none" spc="0" normalizeH="0" baseline="0" noProof="0" dirty="0">
-              <a:ln>
-                <a:noFill/>
-              </a:ln>
-              <a:solidFill>
-                <a:prstClr val="black"/>
-              </a:solidFill>
-              <a:effectLst/>
-              <a:uLnTx/>
-              <a:uFillTx/>
-              <a:latin typeface="Arial" panose="020B0604020202020204" pitchFamily="34" charset="0"/>
-              <a:ea typeface="微软雅黑" panose="020B0503020204020204" pitchFamily="34" charset="-122"/>
-              <a:cs typeface="Arial" panose="020B0604020202020204" pitchFamily="34" charset="0"/>
-            </a:endParaRPr>
-          </a:p>
-          <a:p>
-            <a:pPr lvl="0" algn="ctr">
-              <a:defRPr/>
-            </a:pPr>
-            <a:r>
-              <a:rPr lang="en-US" altLang="zh-CN" sz="1200" b="1" dirty="0">
-                <a:solidFill>
-                  <a:schemeClr val="tx1"/>
-                </a:solidFill>
-                <a:latin typeface="Arial" panose="020B0604020202020204" pitchFamily="34" charset="0"/>
-                <a:cs typeface="Arial" panose="020B0604020202020204" pitchFamily="34" charset="0"/>
-              </a:rPr>
-              <a:t>Multi-factor</a:t>
-            </a:r>
-            <a:r>
-              <a:rPr kumimoji="0" lang="en-US" altLang="zh-CN" sz="1200" b="1" i="0" u="none" strike="noStrike" kern="1200" cap="none" spc="0" normalizeH="0" baseline="0" noProof="0" dirty="0">
-                <a:ln>
-                  <a:noFill/>
-                </a:ln>
-                <a:solidFill>
-                  <a:prstClr val="black"/>
-                </a:solidFill>
-                <a:effectLst/>
-                <a:uLnTx/>
-                <a:uFillTx/>
-                <a:latin typeface="Arial" panose="020B0604020202020204" pitchFamily="34" charset="0"/>
-                <a:ea typeface="微软雅黑" panose="020B0503020204020204" pitchFamily="34" charset="-122"/>
-                <a:cs typeface="Arial" panose="020B0604020202020204" pitchFamily="34" charset="0"/>
-              </a:rPr>
-              <a:t> From T2</a:t>
-            </a:r>
-            <a:endParaRPr kumimoji="0" lang="zh-CN" altLang="en-US" sz="1200" b="1" i="0" u="none" strike="noStrike" kern="1200" cap="none" spc="0" normalizeH="0" baseline="0" noProof="0" dirty="0">
-              <a:ln>
-                <a:noFill/>
-              </a:ln>
-              <a:solidFill>
-                <a:prstClr val="black"/>
-              </a:solidFill>
-              <a:effectLst/>
-              <a:uLnTx/>
-              <a:uFillTx/>
-              <a:latin typeface="Arial" panose="020B0604020202020204" pitchFamily="34" charset="0"/>
-              <a:ea typeface="微软雅黑" panose="020B0503020204020204" pitchFamily="34" charset="-122"/>
-              <a:cs typeface="Arial" panose="020B0604020202020204" pitchFamily="34" charset="0"/>
-            </a:endParaRPr>
-          </a:p>
-          <a:p>
-            <a:pPr algn="ctr"/>
-            <a:endParaRPr lang="zh-CN" altLang="en-US" dirty="0"/>
-          </a:p>
-        </p:txBody>
-      </p:sp>
-      <p:pic>
-        <p:nvPicPr>
-          <p:cNvPr id="118" name="图形 117" descr="研究">
-            <a:extLst>
-              <a:ext uri="{FF2B5EF4-FFF2-40B4-BE49-F238E27FC236}">
-                <a16:creationId xmlns:a16="http://schemas.microsoft.com/office/drawing/2014/main" id="{8CD94D6C-D9AA-0B5A-A251-5DF2927E19C7}"/>
-              </a:ext>
-            </a:extLst>
-          </p:cNvPr>
-          <p:cNvPicPr>
-            <a:picLocks noChangeAspect="1"/>
-          </p:cNvPicPr>
-          <p:nvPr/>
-        </p:nvPicPr>
-        <p:blipFill>
-          <a:blip>
-            <a:extLst>
-              <a:ext uri="{96DAC541-7B7A-43D3-8B79-37D633B846F1}">
-                <asvg:svgBlip xmlns:asvg="http://schemas.microsoft.com/office/drawing/2016/SVG/main" r:embed="rId12"/>
-              </a:ext>
-            </a:extLst>
-          </a:blip>
-          <a:stretch>
-            <a:fillRect/>
-          </a:stretch>
-        </p:blipFill>
-        <p:spPr>
-          <a:xfrm>
-            <a:off x="1346131" y="4554837"/>
-            <a:ext cx="796421" cy="796421"/>
-          </a:xfrm>
-          <a:prstGeom prst="rect">
-            <a:avLst/>
-          </a:prstGeom>
-        </p:spPr>
-      </p:pic>
-      <p:sp>
-        <p:nvSpPr>
-          <p:cNvPr id="119" name="文本框 118">
-            <a:extLst>
-              <a:ext uri="{FF2B5EF4-FFF2-40B4-BE49-F238E27FC236}">
-                <a16:creationId xmlns:a16="http://schemas.microsoft.com/office/drawing/2014/main" id="{1A517173-7741-C77D-3851-E2353617299D}"/>
-              </a:ext>
-            </a:extLst>
-          </p:cNvPr>
-          <p:cNvSpPr txBox="1"/>
-          <p:nvPr/>
-        </p:nvSpPr>
-        <p:spPr>
-          <a:xfrm>
-            <a:off x="100971" y="3316618"/>
-            <a:ext cx="2379351" cy="276999"/>
-          </a:xfrm>
-          <a:prstGeom prst="rect">
-            <a:avLst/>
-          </a:prstGeom>
-          <a:noFill/>
-        </p:spPr>
-        <p:txBody>
-          <a:bodyPr wrap="square" rtlCol="0">
-            <a:spAutoFit/>
-          </a:bodyPr>
-          <a:lstStyle/>
-          <a:p>
-            <a:r>
-              <a:rPr lang="en-US" altLang="zh-CN" sz="1200" b="1" dirty="0">
-                <a:latin typeface="Arial" panose="020B0604020202020204" pitchFamily="34" charset="0"/>
-                <a:cs typeface="Arial" panose="020B0604020202020204" pitchFamily="34" charset="0"/>
-              </a:rPr>
-              <a:t>Inter-ground Control Access</a:t>
-            </a:r>
-            <a:endParaRPr lang="zh-CN" altLang="en-US" sz="1200" b="1" dirty="0">
-              <a:latin typeface="Arial" panose="020B0604020202020204" pitchFamily="34" charset="0"/>
-              <a:cs typeface="Arial" panose="020B0604020202020204" pitchFamily="34" charset="0"/>
-            </a:endParaRPr>
-          </a:p>
-        </p:txBody>
-      </p:sp>
-      <p:sp>
-        <p:nvSpPr>
-          <p:cNvPr id="120" name="等腰三角形 119">
-            <a:extLst>
-              <a:ext uri="{FF2B5EF4-FFF2-40B4-BE49-F238E27FC236}">
-                <a16:creationId xmlns:a16="http://schemas.microsoft.com/office/drawing/2014/main" id="{EA4E27F6-74C7-9DBA-4A05-DD258869CF1D}"/>
-              </a:ext>
-            </a:extLst>
-          </p:cNvPr>
-          <p:cNvSpPr/>
-          <p:nvPr/>
-        </p:nvSpPr>
-        <p:spPr>
-          <a:xfrm rot="5400000">
-            <a:off x="2164469" y="4237026"/>
-            <a:ext cx="505104" cy="358480"/>
-          </a:xfrm>
-          <a:prstGeom prst="triangle">
-            <a:avLst/>
-          </a:prstGeom>
-        </p:spPr>
-        <p:style>
-          <a:lnRef idx="2">
-            <a:schemeClr val="accent2">
-              <a:shade val="15000"/>
-            </a:schemeClr>
-          </a:lnRef>
-          <a:fillRef idx="1">
-            <a:schemeClr val="accent2"/>
-          </a:fillRef>
-          <a:effectRef idx="0">
-            <a:schemeClr val="accent2"/>
-          </a:effectRef>
-          <a:fontRef idx="minor">
-            <a:schemeClr val="lt1"/>
-          </a:fontRef>
-        </p:style>
-        <p:txBody>
-          <a:bodyPr rtlCol="0" anchor="ctr"/>
-          <a:lstStyle/>
-          <a:p>
-            <a:pPr algn="ctr"/>
-            <a:endParaRPr lang="zh-CN" altLang="en-US"/>
-          </a:p>
-        </p:txBody>
-      </p:sp>
-      <p:pic>
-        <p:nvPicPr>
-          <p:cNvPr id="121" name="图片 120">
-            <a:extLst>
-              <a:ext uri="{FF2B5EF4-FFF2-40B4-BE49-F238E27FC236}">
-                <a16:creationId xmlns:a16="http://schemas.microsoft.com/office/drawing/2014/main" id="{A405422B-486E-51CF-2C48-6C16C93BDA1A}"/>
-              </a:ext>
-            </a:extLst>
-          </p:cNvPr>
-          <p:cNvPicPr>
-            <a:picLocks noChangeAspect="1"/>
-          </p:cNvPicPr>
-          <p:nvPr/>
-        </p:nvPicPr>
-        <p:blipFill>
-          <a:blip r:embed="rId7" cstate="print">
-            <a:extLst>
-              <a:ext uri="{28A0092B-C50C-407E-A947-70E740481C1C}">
-                <a14:useLocalDpi xmlns:a14="http://schemas.microsoft.com/office/drawing/2010/main" val="0"/>
-              </a:ext>
-            </a:extLst>
-          </a:blip>
-          <a:stretch>
-            <a:fillRect/>
-          </a:stretch>
-        </p:blipFill>
-        <p:spPr>
-          <a:xfrm>
-            <a:off x="2795041" y="4124327"/>
-            <a:ext cx="583878" cy="583878"/>
-          </a:xfrm>
-          <a:prstGeom prst="rect">
-            <a:avLst/>
-          </a:prstGeom>
-          <a:solidFill>
-            <a:schemeClr val="accent1"/>
-          </a:solidFill>
-        </p:spPr>
-      </p:pic>
-      <p:sp>
-        <p:nvSpPr>
-          <p:cNvPr id="122" name="文本框 121">
-            <a:extLst>
-              <a:ext uri="{FF2B5EF4-FFF2-40B4-BE49-F238E27FC236}">
-                <a16:creationId xmlns:a16="http://schemas.microsoft.com/office/drawing/2014/main" id="{744EEC93-E860-4929-A098-CC7CA10F288D}"/>
-              </a:ext>
-            </a:extLst>
-          </p:cNvPr>
-          <p:cNvSpPr txBox="1"/>
-          <p:nvPr/>
-        </p:nvSpPr>
-        <p:spPr>
-          <a:xfrm>
-            <a:off x="2344951" y="4814977"/>
-            <a:ext cx="1834001" cy="276999"/>
-          </a:xfrm>
-          <a:prstGeom prst="rect">
-            <a:avLst/>
-          </a:prstGeom>
-          <a:noFill/>
-        </p:spPr>
-        <p:txBody>
-          <a:bodyPr wrap="square" rtlCol="0">
-            <a:spAutoFit/>
-          </a:bodyPr>
-          <a:lstStyle/>
-          <a:p>
-            <a:r>
-              <a:rPr lang="en-US" altLang="zh-CN" sz="1200" b="1" dirty="0">
-                <a:latin typeface="Arial" panose="020B0604020202020204" pitchFamily="34" charset="0"/>
-                <a:cs typeface="Arial" panose="020B0604020202020204" pitchFamily="34" charset="0"/>
-              </a:rPr>
-              <a:t>Summarization Agent</a:t>
-            </a:r>
-            <a:endParaRPr lang="zh-CN" altLang="en-US" sz="1200" b="1" dirty="0">
-              <a:latin typeface="Arial" panose="020B0604020202020204" pitchFamily="34" charset="0"/>
-              <a:cs typeface="Arial" panose="020B0604020202020204" pitchFamily="34" charset="0"/>
-            </a:endParaRPr>
-          </a:p>
-        </p:txBody>
-      </p:sp>
-      <p:sp>
-        <p:nvSpPr>
-          <p:cNvPr id="123" name="文本框 122">
-            <a:extLst>
-              <a:ext uri="{FF2B5EF4-FFF2-40B4-BE49-F238E27FC236}">
-                <a16:creationId xmlns:a16="http://schemas.microsoft.com/office/drawing/2014/main" id="{F81D57CB-5200-FE6C-8599-78E0DE9D4BB7}"/>
-              </a:ext>
-            </a:extLst>
-          </p:cNvPr>
-          <p:cNvSpPr txBox="1"/>
-          <p:nvPr/>
-        </p:nvSpPr>
-        <p:spPr>
-          <a:xfrm>
-            <a:off x="162166" y="5341923"/>
-            <a:ext cx="941972" cy="276999"/>
-          </a:xfrm>
-          <a:prstGeom prst="rect">
-            <a:avLst/>
-          </a:prstGeom>
-          <a:noFill/>
-        </p:spPr>
-        <p:txBody>
-          <a:bodyPr wrap="square" rtlCol="0">
-            <a:spAutoFit/>
-          </a:bodyPr>
-          <a:lstStyle/>
-          <a:p>
-            <a:r>
-              <a:rPr lang="en-US" altLang="zh-CN" sz="1200" dirty="0">
-                <a:latin typeface="Arial" panose="020B0604020202020204" pitchFamily="34" charset="0"/>
-                <a:cs typeface="Arial" panose="020B0604020202020204" pitchFamily="34" charset="0"/>
-              </a:rPr>
-              <a:t>Database</a:t>
-            </a:r>
-            <a:endParaRPr lang="zh-CN" altLang="en-US" sz="1200" dirty="0">
-              <a:latin typeface="Arial" panose="020B0604020202020204" pitchFamily="34" charset="0"/>
-              <a:cs typeface="Arial" panose="020B0604020202020204" pitchFamily="34" charset="0"/>
-            </a:endParaRPr>
-          </a:p>
-        </p:txBody>
-      </p:sp>
-      <p:sp>
-        <p:nvSpPr>
-          <p:cNvPr id="124" name="文本框 123">
-            <a:extLst>
-              <a:ext uri="{FF2B5EF4-FFF2-40B4-BE49-F238E27FC236}">
-                <a16:creationId xmlns:a16="http://schemas.microsoft.com/office/drawing/2014/main" id="{72A3A403-6ECF-9694-6370-AC885BD21053}"/>
-              </a:ext>
-            </a:extLst>
-          </p:cNvPr>
-          <p:cNvSpPr txBox="1"/>
-          <p:nvPr/>
-        </p:nvSpPr>
-        <p:spPr>
-          <a:xfrm>
-            <a:off x="1405732" y="5341922"/>
-            <a:ext cx="664538" cy="276999"/>
-          </a:xfrm>
-          <a:prstGeom prst="rect">
-            <a:avLst/>
-          </a:prstGeom>
-          <a:noFill/>
-        </p:spPr>
-        <p:txBody>
-          <a:bodyPr wrap="square" rtlCol="0">
-            <a:spAutoFit/>
-          </a:bodyPr>
-          <a:lstStyle/>
-          <a:p>
-            <a:r>
-              <a:rPr lang="en-US" altLang="zh-CN" sz="1200" dirty="0">
-                <a:latin typeface="Arial" panose="020B0604020202020204" pitchFamily="34" charset="0"/>
-                <a:cs typeface="Arial" panose="020B0604020202020204" pitchFamily="34" charset="0"/>
-              </a:rPr>
-              <a:t>Query</a:t>
-            </a:r>
-            <a:endParaRPr lang="zh-CN" altLang="en-US" sz="1200" dirty="0">
-              <a:latin typeface="Arial" panose="020B0604020202020204" pitchFamily="34" charset="0"/>
-              <a:cs typeface="Arial" panose="020B0604020202020204" pitchFamily="34" charset="0"/>
-            </a:endParaRPr>
-          </a:p>
-        </p:txBody>
-      </p:sp>
-      <p:cxnSp>
-        <p:nvCxnSpPr>
-          <p:cNvPr id="125" name="直接箭头连接符 124">
-            <a:extLst>
-              <a:ext uri="{FF2B5EF4-FFF2-40B4-BE49-F238E27FC236}">
-                <a16:creationId xmlns:a16="http://schemas.microsoft.com/office/drawing/2014/main" id="{748B1BB1-2DF6-A061-221C-0944C8E5A90B}"/>
-              </a:ext>
-            </a:extLst>
-          </p:cNvPr>
-          <p:cNvCxnSpPr>
-            <a:cxnSpLocks/>
-          </p:cNvCxnSpPr>
-          <p:nvPr/>
-        </p:nvCxnSpPr>
-        <p:spPr>
-          <a:xfrm flipV="1">
-            <a:off x="4072777" y="3714381"/>
-            <a:ext cx="490327" cy="701040"/>
-          </a:xfrm>
-          <a:prstGeom prst="straightConnector1">
-            <a:avLst/>
-          </a:prstGeom>
-          <a:ln>
-            <a:tailEnd type="triangle"/>
-          </a:ln>
-        </p:spPr>
-        <p:style>
-          <a:lnRef idx="3">
-            <a:schemeClr val="dk1"/>
-          </a:lnRef>
-          <a:fillRef idx="0">
-            <a:schemeClr val="dk1"/>
-          </a:fillRef>
-          <a:effectRef idx="2">
-            <a:schemeClr val="dk1"/>
-          </a:effectRef>
-          <a:fontRef idx="minor">
-            <a:schemeClr val="tx1"/>
-          </a:fontRef>
-        </p:style>
-      </p:cxnSp>
-      <p:cxnSp>
-        <p:nvCxnSpPr>
-          <p:cNvPr id="127" name="直接箭头连接符 126">
-            <a:extLst>
-              <a:ext uri="{FF2B5EF4-FFF2-40B4-BE49-F238E27FC236}">
-                <a16:creationId xmlns:a16="http://schemas.microsoft.com/office/drawing/2014/main" id="{A9240C4F-B925-AD58-23A2-7896CF4D76FE}"/>
-              </a:ext>
-            </a:extLst>
-          </p:cNvPr>
-          <p:cNvCxnSpPr>
-            <a:cxnSpLocks/>
-          </p:cNvCxnSpPr>
-          <p:nvPr/>
-        </p:nvCxnSpPr>
-        <p:spPr>
-          <a:xfrm>
-            <a:off x="4081526" y="4412429"/>
-            <a:ext cx="493308" cy="754286"/>
-          </a:xfrm>
-          <a:prstGeom prst="straightConnector1">
-            <a:avLst/>
-          </a:prstGeom>
-          <a:ln>
-            <a:tailEnd type="triangle"/>
-          </a:ln>
-        </p:spPr>
-        <p:style>
-          <a:lnRef idx="3">
-            <a:schemeClr val="dk1"/>
-          </a:lnRef>
-          <a:fillRef idx="0">
-            <a:schemeClr val="dk1"/>
-          </a:fillRef>
-          <a:effectRef idx="2">
-            <a:schemeClr val="dk1"/>
-          </a:effectRef>
-          <a:fontRef idx="minor">
-            <a:schemeClr val="tx1"/>
-          </a:fontRef>
-        </p:style>
-      </p:cxnSp>
-      <p:cxnSp>
-        <p:nvCxnSpPr>
-          <p:cNvPr id="131" name="直接箭头连接符 130">
-            <a:extLst>
-              <a:ext uri="{FF2B5EF4-FFF2-40B4-BE49-F238E27FC236}">
-                <a16:creationId xmlns:a16="http://schemas.microsoft.com/office/drawing/2014/main" id="{A5502732-0DC0-C692-6867-04371141EEF9}"/>
-              </a:ext>
-            </a:extLst>
-          </p:cNvPr>
-          <p:cNvCxnSpPr>
-            <a:cxnSpLocks/>
-          </p:cNvCxnSpPr>
-          <p:nvPr/>
-        </p:nvCxnSpPr>
-        <p:spPr>
-          <a:xfrm>
-            <a:off x="4072777" y="4412429"/>
-            <a:ext cx="515314" cy="0"/>
-          </a:xfrm>
-          <a:prstGeom prst="straightConnector1">
-            <a:avLst/>
-          </a:prstGeom>
-          <a:ln>
-            <a:tailEnd type="triangle"/>
-          </a:ln>
-        </p:spPr>
-        <p:style>
-          <a:lnRef idx="3">
-            <a:schemeClr val="dk1"/>
-          </a:lnRef>
-          <a:fillRef idx="0">
-            <a:schemeClr val="dk1"/>
-          </a:fillRef>
-          <a:effectRef idx="2">
-            <a:schemeClr val="dk1"/>
-          </a:effectRef>
-          <a:fontRef idx="minor">
-            <a:schemeClr val="tx1"/>
-          </a:fontRef>
-        </p:style>
-      </p:cxnSp>
-      <p:sp>
-        <p:nvSpPr>
-          <p:cNvPr id="135" name="流程图: 接点 134">
-            <a:extLst>
-              <a:ext uri="{FF2B5EF4-FFF2-40B4-BE49-F238E27FC236}">
-                <a16:creationId xmlns:a16="http://schemas.microsoft.com/office/drawing/2014/main" id="{431415CD-5C47-75A8-37EC-C7ABCE1D9293}"/>
-              </a:ext>
-            </a:extLst>
-          </p:cNvPr>
-          <p:cNvSpPr/>
-          <p:nvPr/>
-        </p:nvSpPr>
-        <p:spPr>
-          <a:xfrm>
-            <a:off x="4604086" y="3400443"/>
-            <a:ext cx="491479" cy="425192"/>
-          </a:xfrm>
-          <a:prstGeom prst="flowChartConnector">
-            <a:avLst/>
-          </a:prstGeom>
-          <a:solidFill>
-            <a:schemeClr val="bg1">
-              <a:lumMod val="95000"/>
-            </a:schemeClr>
-          </a:solidFill>
-        </p:spPr>
-        <p:style>
-          <a:lnRef idx="2">
-            <a:schemeClr val="dk1"/>
-          </a:lnRef>
-          <a:fillRef idx="1">
-            <a:schemeClr val="lt1"/>
-          </a:fillRef>
-          <a:effectRef idx="0">
-            <a:schemeClr val="dk1"/>
-          </a:effectRef>
-          <a:fontRef idx="minor">
-            <a:schemeClr val="dk1"/>
-          </a:fontRef>
-        </p:style>
-        <p:txBody>
-          <a:bodyPr rtlCol="0" anchor="ctr"/>
-          <a:lstStyle/>
-          <a:p>
-            <a:pPr algn="ctr"/>
-            <a:r>
-              <a:rPr lang="en-US" altLang="zh-CN" sz="1100" dirty="0">
-                <a:latin typeface="Arial" panose="020B0604020202020204" pitchFamily="34" charset="0"/>
-                <a:cs typeface="Arial" panose="020B0604020202020204" pitchFamily="34" charset="0"/>
-              </a:rPr>
-              <a:t>T3</a:t>
-            </a:r>
-            <a:endParaRPr lang="zh-CN" altLang="en-US" sz="1100" dirty="0">
-              <a:latin typeface="Arial" panose="020B0604020202020204" pitchFamily="34" charset="0"/>
-              <a:cs typeface="Arial" panose="020B0604020202020204" pitchFamily="34" charset="0"/>
-            </a:endParaRPr>
-          </a:p>
-        </p:txBody>
-      </p:sp>
-      <p:sp>
-        <p:nvSpPr>
-          <p:cNvPr id="136" name="流程图: 接点 135">
-            <a:extLst>
-              <a:ext uri="{FF2B5EF4-FFF2-40B4-BE49-F238E27FC236}">
-                <a16:creationId xmlns:a16="http://schemas.microsoft.com/office/drawing/2014/main" id="{AC6ACE1B-68FA-42A2-3D2A-E469BB0270C4}"/>
-              </a:ext>
-            </a:extLst>
-          </p:cNvPr>
-          <p:cNvSpPr/>
-          <p:nvPr/>
-        </p:nvSpPr>
-        <p:spPr>
-          <a:xfrm>
-            <a:off x="4604781" y="4184553"/>
-            <a:ext cx="491479" cy="425192"/>
-          </a:xfrm>
-          <a:prstGeom prst="flowChartConnector">
-            <a:avLst/>
-          </a:prstGeom>
-          <a:solidFill>
-            <a:schemeClr val="bg1">
-              <a:lumMod val="95000"/>
-            </a:schemeClr>
-          </a:solidFill>
-        </p:spPr>
-        <p:style>
-          <a:lnRef idx="2">
-            <a:schemeClr val="dk1"/>
-          </a:lnRef>
-          <a:fillRef idx="1">
-            <a:schemeClr val="lt1"/>
-          </a:fillRef>
-          <a:effectRef idx="0">
-            <a:schemeClr val="dk1"/>
-          </a:effectRef>
-          <a:fontRef idx="minor">
-            <a:schemeClr val="dk1"/>
-          </a:fontRef>
-        </p:style>
-        <p:txBody>
-          <a:bodyPr rtlCol="0" anchor="ctr"/>
-          <a:lstStyle/>
-          <a:p>
-            <a:pPr algn="ctr"/>
-            <a:r>
-              <a:rPr lang="en-US" altLang="zh-CN" sz="1100" dirty="0">
-                <a:latin typeface="Arial" panose="020B0604020202020204" pitchFamily="34" charset="0"/>
-                <a:cs typeface="Arial" panose="020B0604020202020204" pitchFamily="34" charset="0"/>
-              </a:rPr>
-              <a:t>T4</a:t>
-            </a:r>
-            <a:endParaRPr lang="zh-CN" altLang="en-US" sz="1100" dirty="0">
-              <a:latin typeface="Arial" panose="020B0604020202020204" pitchFamily="34" charset="0"/>
-              <a:cs typeface="Arial" panose="020B0604020202020204" pitchFamily="34" charset="0"/>
-            </a:endParaRPr>
-          </a:p>
-        </p:txBody>
-      </p:sp>
-      <p:sp>
-        <p:nvSpPr>
-          <p:cNvPr id="137" name="流程图: 接点 136">
-            <a:extLst>
-              <a:ext uri="{FF2B5EF4-FFF2-40B4-BE49-F238E27FC236}">
-                <a16:creationId xmlns:a16="http://schemas.microsoft.com/office/drawing/2014/main" id="{4909B607-A533-7C1A-1DC0-6DB31F5D04E4}"/>
-              </a:ext>
-            </a:extLst>
-          </p:cNvPr>
-          <p:cNvSpPr/>
-          <p:nvPr/>
-        </p:nvSpPr>
-        <p:spPr>
-          <a:xfrm>
-            <a:off x="4588091" y="5072894"/>
-            <a:ext cx="491479" cy="425192"/>
-          </a:xfrm>
-          <a:prstGeom prst="flowChartConnector">
-            <a:avLst/>
-          </a:prstGeom>
-          <a:solidFill>
-            <a:schemeClr val="bg1">
-              <a:lumMod val="95000"/>
-            </a:schemeClr>
-          </a:solidFill>
-        </p:spPr>
-        <p:style>
-          <a:lnRef idx="2">
-            <a:schemeClr val="dk1"/>
-          </a:lnRef>
-          <a:fillRef idx="1">
-            <a:schemeClr val="lt1"/>
-          </a:fillRef>
-          <a:effectRef idx="0">
-            <a:schemeClr val="dk1"/>
-          </a:effectRef>
-          <a:fontRef idx="minor">
-            <a:schemeClr val="dk1"/>
-          </a:fontRef>
-        </p:style>
-        <p:txBody>
-          <a:bodyPr rtlCol="0" anchor="ctr"/>
-          <a:lstStyle/>
-          <a:p>
-            <a:pPr algn="ctr"/>
-            <a:r>
-              <a:rPr lang="en-US" altLang="zh-CN" sz="1100" dirty="0">
-                <a:latin typeface="Arial" panose="020B0604020202020204" pitchFamily="34" charset="0"/>
-                <a:cs typeface="Arial" panose="020B0604020202020204" pitchFamily="34" charset="0"/>
-              </a:rPr>
-              <a:t>T5</a:t>
-            </a:r>
-            <a:endParaRPr lang="zh-CN" altLang="en-US" sz="1100" dirty="0">
-              <a:latin typeface="Arial" panose="020B0604020202020204" pitchFamily="34" charset="0"/>
-              <a:cs typeface="Arial" panose="020B0604020202020204" pitchFamily="34" charset="0"/>
-            </a:endParaRPr>
-          </a:p>
-        </p:txBody>
-      </p:sp>
-      <p:cxnSp>
-        <p:nvCxnSpPr>
-          <p:cNvPr id="140" name="直接箭头连接符 139">
-            <a:extLst>
-              <a:ext uri="{FF2B5EF4-FFF2-40B4-BE49-F238E27FC236}">
-                <a16:creationId xmlns:a16="http://schemas.microsoft.com/office/drawing/2014/main" id="{A5F447B2-3352-3A40-649E-A6BF5AF62F7A}"/>
-              </a:ext>
-            </a:extLst>
-          </p:cNvPr>
-          <p:cNvCxnSpPr>
-            <a:cxnSpLocks/>
-          </p:cNvCxnSpPr>
-          <p:nvPr/>
-        </p:nvCxnSpPr>
-        <p:spPr>
-          <a:xfrm flipV="1">
-            <a:off x="5172918" y="3661581"/>
-            <a:ext cx="580695" cy="5172"/>
-          </a:xfrm>
-          <a:prstGeom prst="straightConnector1">
-            <a:avLst/>
-          </a:prstGeom>
-          <a:ln>
-            <a:tailEnd type="triangle"/>
-          </a:ln>
-        </p:spPr>
-        <p:style>
-          <a:lnRef idx="3">
-            <a:schemeClr val="dk1"/>
-          </a:lnRef>
-          <a:fillRef idx="0">
-            <a:schemeClr val="dk1"/>
-          </a:fillRef>
-          <a:effectRef idx="2">
-            <a:schemeClr val="dk1"/>
-          </a:effectRef>
-          <a:fontRef idx="minor">
-            <a:schemeClr val="tx1"/>
-          </a:fontRef>
-        </p:style>
-      </p:cxnSp>
-      <p:cxnSp>
-        <p:nvCxnSpPr>
-          <p:cNvPr id="141" name="直接箭头连接符 140">
-            <a:extLst>
-              <a:ext uri="{FF2B5EF4-FFF2-40B4-BE49-F238E27FC236}">
-                <a16:creationId xmlns:a16="http://schemas.microsoft.com/office/drawing/2014/main" id="{E9927474-7D8D-67C9-D810-0A43D652736B}"/>
-              </a:ext>
-            </a:extLst>
-          </p:cNvPr>
-          <p:cNvCxnSpPr>
-            <a:cxnSpLocks/>
-          </p:cNvCxnSpPr>
-          <p:nvPr/>
-        </p:nvCxnSpPr>
-        <p:spPr>
-          <a:xfrm flipV="1">
-            <a:off x="5137937" y="4407257"/>
-            <a:ext cx="580695" cy="5172"/>
-          </a:xfrm>
-          <a:prstGeom prst="straightConnector1">
-            <a:avLst/>
-          </a:prstGeom>
-          <a:ln>
-            <a:tailEnd type="triangle"/>
-          </a:ln>
-        </p:spPr>
-        <p:style>
-          <a:lnRef idx="3">
-            <a:schemeClr val="dk1"/>
-          </a:lnRef>
-          <a:fillRef idx="0">
-            <a:schemeClr val="dk1"/>
-          </a:fillRef>
-          <a:effectRef idx="2">
-            <a:schemeClr val="dk1"/>
-          </a:effectRef>
-          <a:fontRef idx="minor">
-            <a:schemeClr val="tx1"/>
-          </a:fontRef>
-        </p:style>
-      </p:cxnSp>
-      <p:cxnSp>
-        <p:nvCxnSpPr>
-          <p:cNvPr id="142" name="直接箭头连接符 141">
-            <a:extLst>
-              <a:ext uri="{FF2B5EF4-FFF2-40B4-BE49-F238E27FC236}">
-                <a16:creationId xmlns:a16="http://schemas.microsoft.com/office/drawing/2014/main" id="{2317F88A-51EE-6CBD-DC9A-23DD70FEA3BF}"/>
-              </a:ext>
-            </a:extLst>
-          </p:cNvPr>
-          <p:cNvCxnSpPr>
-            <a:cxnSpLocks/>
-          </p:cNvCxnSpPr>
-          <p:nvPr/>
-        </p:nvCxnSpPr>
-        <p:spPr>
-          <a:xfrm flipV="1">
-            <a:off x="5139282" y="5258925"/>
-            <a:ext cx="580695" cy="5172"/>
-          </a:xfrm>
-          <a:prstGeom prst="straightConnector1">
-            <a:avLst/>
-          </a:prstGeom>
-          <a:ln>
-            <a:tailEnd type="triangle"/>
-          </a:ln>
-        </p:spPr>
-        <p:style>
-          <a:lnRef idx="3">
-            <a:schemeClr val="dk1"/>
-          </a:lnRef>
-          <a:fillRef idx="0">
-            <a:schemeClr val="dk1"/>
-          </a:fillRef>
-          <a:effectRef idx="2">
-            <a:schemeClr val="dk1"/>
-          </a:effectRef>
-          <a:fontRef idx="minor">
-            <a:schemeClr val="tx1"/>
-          </a:fontRef>
-        </p:style>
-      </p:cxnSp>
-      <p:sp>
-        <p:nvSpPr>
-          <p:cNvPr id="143" name="流程图: 资料带 142">
-            <a:extLst>
-              <a:ext uri="{FF2B5EF4-FFF2-40B4-BE49-F238E27FC236}">
-                <a16:creationId xmlns:a16="http://schemas.microsoft.com/office/drawing/2014/main" id="{3AF717B1-73D2-1433-5822-BF8AD28426BD}"/>
-              </a:ext>
-            </a:extLst>
-          </p:cNvPr>
-          <p:cNvSpPr/>
-          <p:nvPr/>
-        </p:nvSpPr>
-        <p:spPr>
-          <a:xfrm>
-            <a:off x="5896846" y="3324355"/>
-            <a:ext cx="1014566" cy="618956"/>
-          </a:xfrm>
-          <a:prstGeom prst="flowChartPunchedTape">
-            <a:avLst/>
-          </a:prstGeom>
-          <a:solidFill>
-            <a:srgbClr val="FFFFE0"/>
-          </a:solidFill>
-        </p:spPr>
-        <p:style>
-          <a:lnRef idx="2">
-            <a:schemeClr val="accent1">
-              <a:shade val="15000"/>
-            </a:schemeClr>
-          </a:lnRef>
-          <a:fillRef idx="1">
-            <a:schemeClr val="accent1"/>
-          </a:fillRef>
-          <a:effectRef idx="0">
-            <a:schemeClr val="accent1"/>
-          </a:effectRef>
-          <a:fontRef idx="minor">
-            <a:schemeClr val="lt1"/>
-          </a:fontRef>
-        </p:style>
-        <p:txBody>
-          <a:bodyPr rtlCol="0" anchor="ctr"/>
-          <a:lstStyle/>
-          <a:p>
-            <a:pPr algn="ctr"/>
-            <a:endParaRPr lang="zh-CN" altLang="en-US"/>
-          </a:p>
-        </p:txBody>
-      </p:sp>
-      <p:sp>
-        <p:nvSpPr>
-          <p:cNvPr id="144" name="流程图: 资料带 143">
-            <a:extLst>
-              <a:ext uri="{FF2B5EF4-FFF2-40B4-BE49-F238E27FC236}">
-                <a16:creationId xmlns:a16="http://schemas.microsoft.com/office/drawing/2014/main" id="{55C52A40-470C-F42A-E199-69913C091A35}"/>
-              </a:ext>
-            </a:extLst>
-          </p:cNvPr>
-          <p:cNvSpPr/>
-          <p:nvPr/>
-        </p:nvSpPr>
-        <p:spPr>
-          <a:xfrm>
-            <a:off x="6032469" y="3402151"/>
-            <a:ext cx="1014566" cy="618956"/>
-          </a:xfrm>
-          <a:prstGeom prst="flowChartPunchedTape">
-            <a:avLst/>
-          </a:prstGeom>
-          <a:solidFill>
-            <a:srgbClr val="FFFFE0"/>
-          </a:solidFill>
-        </p:spPr>
-        <p:style>
-          <a:lnRef idx="2">
-            <a:schemeClr val="accent1">
-              <a:shade val="15000"/>
-            </a:schemeClr>
-          </a:lnRef>
-          <a:fillRef idx="1">
-            <a:schemeClr val="accent1"/>
-          </a:fillRef>
-          <a:effectRef idx="0">
-            <a:schemeClr val="accent1"/>
-          </a:effectRef>
-          <a:fontRef idx="minor">
-            <a:schemeClr val="lt1"/>
-          </a:fontRef>
-        </p:style>
-        <p:txBody>
-          <a:bodyPr rtlCol="0" anchor="ctr"/>
-          <a:lstStyle/>
-          <a:p>
-            <a:pPr algn="ctr"/>
-            <a:endParaRPr lang="zh-CN" altLang="en-US"/>
-          </a:p>
-        </p:txBody>
-      </p:sp>
-      <p:sp>
-        <p:nvSpPr>
-          <p:cNvPr id="145" name="流程图: 资料带 144">
-            <a:extLst>
-              <a:ext uri="{FF2B5EF4-FFF2-40B4-BE49-F238E27FC236}">
-                <a16:creationId xmlns:a16="http://schemas.microsoft.com/office/drawing/2014/main" id="{ABAC8B7E-0628-85BA-8105-70F245602D43}"/>
-              </a:ext>
-            </a:extLst>
-          </p:cNvPr>
-          <p:cNvSpPr/>
-          <p:nvPr/>
-        </p:nvSpPr>
-        <p:spPr>
-          <a:xfrm>
-            <a:off x="6195557" y="3459423"/>
-            <a:ext cx="1014566" cy="618956"/>
-          </a:xfrm>
-          <a:prstGeom prst="flowChartPunchedTape">
-            <a:avLst/>
-          </a:prstGeom>
-          <a:solidFill>
-            <a:srgbClr val="FFFFE0"/>
-          </a:solidFill>
-        </p:spPr>
-        <p:style>
-          <a:lnRef idx="2">
-            <a:schemeClr val="accent1">
-              <a:shade val="15000"/>
-            </a:schemeClr>
-          </a:lnRef>
-          <a:fillRef idx="1">
-            <a:schemeClr val="accent1"/>
-          </a:fillRef>
-          <a:effectRef idx="0">
-            <a:schemeClr val="accent1"/>
-          </a:effectRef>
-          <a:fontRef idx="minor">
-            <a:schemeClr val="lt1"/>
-          </a:fontRef>
-        </p:style>
-        <p:txBody>
-          <a:bodyPr rtlCol="0" anchor="ctr"/>
-          <a:lstStyle/>
-          <a:p>
-            <a:pPr algn="ctr"/>
-            <a:r>
-              <a:rPr lang="en-US" altLang="zh-CN" sz="1200" b="1" dirty="0">
-                <a:solidFill>
-                  <a:schemeClr val="tx1"/>
-                </a:solidFill>
-                <a:latin typeface="Arial" panose="020B0604020202020204" pitchFamily="34" charset="0"/>
-                <a:cs typeface="Arial" panose="020B0604020202020204" pitchFamily="34" charset="0"/>
-              </a:rPr>
-              <a:t>Multi-factor From T3</a:t>
-            </a:r>
-          </a:p>
-        </p:txBody>
-      </p:sp>
-      <p:sp>
-        <p:nvSpPr>
-          <p:cNvPr id="146" name="流程图: 资料带 145">
-            <a:extLst>
-              <a:ext uri="{FF2B5EF4-FFF2-40B4-BE49-F238E27FC236}">
-                <a16:creationId xmlns:a16="http://schemas.microsoft.com/office/drawing/2014/main" id="{C2511ED0-EB36-EB19-23EA-F1E72EBE407D}"/>
-              </a:ext>
-            </a:extLst>
-          </p:cNvPr>
-          <p:cNvSpPr/>
-          <p:nvPr/>
-        </p:nvSpPr>
-        <p:spPr>
-          <a:xfrm>
-            <a:off x="5909360" y="4159891"/>
-            <a:ext cx="1014566" cy="618956"/>
-          </a:xfrm>
-          <a:prstGeom prst="flowChartPunchedTape">
-            <a:avLst/>
-          </a:prstGeom>
-          <a:solidFill>
-            <a:srgbClr val="FFFFE0"/>
-          </a:solidFill>
-        </p:spPr>
-        <p:style>
-          <a:lnRef idx="2">
-            <a:schemeClr val="accent1">
-              <a:shade val="15000"/>
-            </a:schemeClr>
-          </a:lnRef>
-          <a:fillRef idx="1">
-            <a:schemeClr val="accent1"/>
-          </a:fillRef>
-          <a:effectRef idx="0">
-            <a:schemeClr val="accent1"/>
-          </a:effectRef>
-          <a:fontRef idx="minor">
-            <a:schemeClr val="lt1"/>
-          </a:fontRef>
-        </p:style>
-        <p:txBody>
-          <a:bodyPr rtlCol="0" anchor="ctr"/>
-          <a:lstStyle/>
-          <a:p>
-            <a:pPr algn="ctr"/>
-            <a:endParaRPr lang="zh-CN" altLang="en-US"/>
-          </a:p>
-        </p:txBody>
-      </p:sp>
-      <p:sp>
-        <p:nvSpPr>
-          <p:cNvPr id="147" name="流程图: 资料带 146">
-            <a:extLst>
-              <a:ext uri="{FF2B5EF4-FFF2-40B4-BE49-F238E27FC236}">
-                <a16:creationId xmlns:a16="http://schemas.microsoft.com/office/drawing/2014/main" id="{4E71C63D-2B8A-2055-19F8-607A176BAD55}"/>
-              </a:ext>
-            </a:extLst>
-          </p:cNvPr>
-          <p:cNvSpPr/>
-          <p:nvPr/>
-        </p:nvSpPr>
-        <p:spPr>
-          <a:xfrm>
-            <a:off x="6044983" y="4237687"/>
-            <a:ext cx="1014566" cy="618956"/>
-          </a:xfrm>
-          <a:prstGeom prst="flowChartPunchedTape">
-            <a:avLst/>
-          </a:prstGeom>
-          <a:solidFill>
-            <a:srgbClr val="FFFFE0"/>
-          </a:solidFill>
-        </p:spPr>
-        <p:style>
-          <a:lnRef idx="2">
-            <a:schemeClr val="accent1">
-              <a:shade val="15000"/>
-            </a:schemeClr>
-          </a:lnRef>
-          <a:fillRef idx="1">
-            <a:schemeClr val="accent1"/>
-          </a:fillRef>
-          <a:effectRef idx="0">
-            <a:schemeClr val="accent1"/>
-          </a:effectRef>
-          <a:fontRef idx="minor">
-            <a:schemeClr val="lt1"/>
-          </a:fontRef>
-        </p:style>
-        <p:txBody>
-          <a:bodyPr rtlCol="0" anchor="ctr"/>
-          <a:lstStyle/>
-          <a:p>
-            <a:pPr algn="ctr"/>
-            <a:endParaRPr lang="zh-CN" altLang="en-US"/>
-          </a:p>
-        </p:txBody>
-      </p:sp>
-      <p:sp>
-        <p:nvSpPr>
-          <p:cNvPr id="148" name="流程图: 资料带 147">
-            <a:extLst>
-              <a:ext uri="{FF2B5EF4-FFF2-40B4-BE49-F238E27FC236}">
-                <a16:creationId xmlns:a16="http://schemas.microsoft.com/office/drawing/2014/main" id="{E888AAC8-2D49-42CA-9BAF-EA9F4F7ABDF8}"/>
-              </a:ext>
-            </a:extLst>
-          </p:cNvPr>
-          <p:cNvSpPr/>
-          <p:nvPr/>
-        </p:nvSpPr>
-        <p:spPr>
-          <a:xfrm>
-            <a:off x="6208071" y="4294959"/>
-            <a:ext cx="1014566" cy="618956"/>
-          </a:xfrm>
-          <a:prstGeom prst="flowChartPunchedTape">
-            <a:avLst/>
-          </a:prstGeom>
-          <a:solidFill>
-            <a:srgbClr val="FFFFE0"/>
-          </a:solidFill>
-        </p:spPr>
-        <p:style>
-          <a:lnRef idx="2">
-            <a:schemeClr val="accent1">
-              <a:shade val="15000"/>
-            </a:schemeClr>
-          </a:lnRef>
-          <a:fillRef idx="1">
-            <a:schemeClr val="accent1"/>
-          </a:fillRef>
-          <a:effectRef idx="0">
-            <a:schemeClr val="accent1"/>
-          </a:effectRef>
-          <a:fontRef idx="minor">
-            <a:schemeClr val="lt1"/>
-          </a:fontRef>
-        </p:style>
-        <p:txBody>
-          <a:bodyPr rtlCol="0" anchor="ctr"/>
-          <a:lstStyle/>
-          <a:p>
-            <a:pPr marL="0" marR="0" lvl="0" indent="0" algn="ctr" defTabSz="914400" rtl="0" eaLnBrk="1" fontAlgn="auto" latinLnBrk="0" hangingPunct="1">
-              <a:lnSpc>
-                <a:spcPct val="100000"/>
-              </a:lnSpc>
-              <a:spcBef>
-                <a:spcPts val="0"/>
-              </a:spcBef>
-              <a:spcAft>
-                <a:spcPts val="0"/>
-              </a:spcAft>
-              <a:buClrTx/>
-              <a:buSzTx/>
-              <a:buFontTx/>
-              <a:buNone/>
-              <a:tabLst/>
               <a:defRPr/>
             </a:pPr>
             <a:r>
@@ -11705,18 +10416,26 @@
               </a:rPr>
               <a:t>Multi-factor From T4</a:t>
             </a:r>
-          </a:p>
-        </p:txBody>
-      </p:sp>
-      <p:sp>
-        <p:nvSpPr>
-          <p:cNvPr id="149" name="文本框 148">
-            <a:extLst>
-              <a:ext uri="{FF2B5EF4-FFF2-40B4-BE49-F238E27FC236}">
-                <a16:creationId xmlns:a16="http://schemas.microsoft.com/office/drawing/2014/main" id="{CC0130B4-CEFC-83BC-3370-01FA83344CF3}"/>
-              </a:ext>
-            </a:extLst>
-          </p:cNvPr>
+            <a:endParaRPr kumimoji="0" lang="en-US" altLang="zh-CN" sz="1200" b="1" i="0" u="none" strike="noStrike" kern="1200" cap="none" spc="0" normalizeH="0" baseline="0" noProof="0" dirty="0">
+              <a:ln>
+                <a:noFill/>
+              </a:ln>
+              <a:solidFill>
+                <a:prstClr val="black"/>
+              </a:solidFill>
+              <a:effectLst/>
+              <a:uLnTx/>
+              <a:uFillTx/>
+              <a:latin typeface="Arial" panose="020B0604020202020204" pitchFamily="34" charset="0"/>
+              <a:ea typeface="微软雅黑" panose="020B0503020204020204" pitchFamily="34" charset="-122"/>
+              <a:cs typeface="Arial" panose="020B0604020202020204" pitchFamily="34" charset="0"/>
+            </a:endParaRPr>
+          </a:p>
+        </p:txBody>
+      </p:sp>
+      <p:sp>
+        <p:nvSpPr>
+          <p:cNvPr id="149" name="文本框 148"/>
           <p:cNvSpPr txBox="1"/>
           <p:nvPr/>
         </p:nvSpPr>
@@ -11752,13 +10471,7 @@
       </p:sp>
       <p:sp>
         <p:nvSpPr>
-          <p:cNvPr id="154" name="流程图: 资料带 153">
-            <a:extLst>
-              <a:ext uri="{FF2B5EF4-FFF2-40B4-BE49-F238E27FC236}">
-                <a16:creationId xmlns:a16="http://schemas.microsoft.com/office/drawing/2014/main" id="{0F965CC4-730E-1DE6-009C-348C447436EF}"/>
-              </a:ext>
-            </a:extLst>
-          </p:cNvPr>
+          <p:cNvPr id="154" name="流程图: 资料带 153"/>
           <p:cNvSpPr/>
           <p:nvPr/>
         </p:nvSpPr>
@@ -11801,13 +10514,7 @@
       </p:sp>
       <p:sp>
         <p:nvSpPr>
-          <p:cNvPr id="155" name="流程图: 资料带 154">
-            <a:extLst>
-              <a:ext uri="{FF2B5EF4-FFF2-40B4-BE49-F238E27FC236}">
-                <a16:creationId xmlns:a16="http://schemas.microsoft.com/office/drawing/2014/main" id="{50402E42-0ABB-A65C-5BAD-44FFF18C861E}"/>
-              </a:ext>
-            </a:extLst>
-          </p:cNvPr>
+          <p:cNvPr id="155" name="流程图: 资料带 154"/>
           <p:cNvSpPr/>
           <p:nvPr/>
         </p:nvSpPr>
@@ -11850,13 +10557,7 @@
       </p:sp>
       <p:sp>
         <p:nvSpPr>
-          <p:cNvPr id="156" name="流程图: 资料带 155">
-            <a:extLst>
-              <a:ext uri="{FF2B5EF4-FFF2-40B4-BE49-F238E27FC236}">
-                <a16:creationId xmlns:a16="http://schemas.microsoft.com/office/drawing/2014/main" id="{E6772D2E-3D8A-4213-0DE7-EC25935F0440}"/>
-              </a:ext>
-            </a:extLst>
-          </p:cNvPr>
+          <p:cNvPr id="156" name="流程图: 资料带 155"/>
           <p:cNvSpPr/>
           <p:nvPr/>
         </p:nvSpPr>
@@ -11906,7 +10607,6 @@
               <a:buSzTx/>
               <a:buFontTx/>
               <a:buNone/>
-              <a:tabLst/>
               <a:defRPr/>
             </a:pPr>
             <a:r>
@@ -11926,25 +10626,33 @@
               </a:rPr>
               <a:t>Multi-factor From T5</a:t>
             </a:r>
+            <a:endParaRPr kumimoji="0" lang="en-US" altLang="zh-CN" sz="1200" b="1" i="0" u="none" strike="noStrike" kern="1200" cap="none" spc="0" normalizeH="0" baseline="0" noProof="0" dirty="0">
+              <a:ln>
+                <a:noFill/>
+              </a:ln>
+              <a:solidFill>
+                <a:prstClr val="black"/>
+              </a:solidFill>
+              <a:effectLst/>
+              <a:uLnTx/>
+              <a:uFillTx/>
+              <a:latin typeface="Arial" panose="020B0604020202020204" pitchFamily="34" charset="0"/>
+              <a:ea typeface="微软雅黑" panose="020B0503020204020204" pitchFamily="34" charset="-122"/>
+              <a:cs typeface="Arial" panose="020B0604020202020204" pitchFamily="34" charset="0"/>
+            </a:endParaRPr>
           </a:p>
         </p:txBody>
       </p:sp>
       <p:pic>
         <p:nvPicPr>
-          <p:cNvPr id="157" name="图片 156">
-            <a:extLst>
-              <a:ext uri="{FF2B5EF4-FFF2-40B4-BE49-F238E27FC236}">
-                <a16:creationId xmlns:a16="http://schemas.microsoft.com/office/drawing/2014/main" id="{BB0F9EA8-4E23-D05E-3DF1-E06452AF2AE1}"/>
-              </a:ext>
-            </a:extLst>
-          </p:cNvPr>
+          <p:cNvPr id="157" name="图片 156"/>
           <p:cNvPicPr>
             <a:picLocks noChangeAspect="1"/>
           </p:cNvPicPr>
           <p:nvPr/>
         </p:nvPicPr>
         <p:blipFill>
-          <a:blip r:embed="rId10" cstate="print">
+          <a:blip r:embed="rId11" cstate="print">
             <a:extLst>
               <a:ext uri="{28A0092B-C50C-407E-A947-70E740481C1C}">
                 <a14:useLocalDpi xmlns:a14="http://schemas.microsoft.com/office/drawing/2010/main" val="0"/>
@@ -11967,13 +10675,7 @@
       </p:pic>
       <p:sp>
         <p:nvSpPr>
-          <p:cNvPr id="158" name="文本框 157">
-            <a:extLst>
-              <a:ext uri="{FF2B5EF4-FFF2-40B4-BE49-F238E27FC236}">
-                <a16:creationId xmlns:a16="http://schemas.microsoft.com/office/drawing/2014/main" id="{F1A145FF-447D-FEF0-065E-3ACBAF2DCD80}"/>
-              </a:ext>
-            </a:extLst>
-          </p:cNvPr>
+          <p:cNvPr id="158" name="文本框 157"/>
           <p:cNvSpPr txBox="1"/>
           <p:nvPr/>
         </p:nvSpPr>
@@ -12009,20 +10711,14 @@
       </p:sp>
       <p:pic>
         <p:nvPicPr>
-          <p:cNvPr id="159" name="图片 158">
-            <a:extLst>
-              <a:ext uri="{FF2B5EF4-FFF2-40B4-BE49-F238E27FC236}">
-                <a16:creationId xmlns:a16="http://schemas.microsoft.com/office/drawing/2014/main" id="{08571ED4-C791-70F4-F7AB-DF33DB0030A9}"/>
-              </a:ext>
-            </a:extLst>
-          </p:cNvPr>
+          <p:cNvPr id="159" name="图片 158"/>
           <p:cNvPicPr>
             <a:picLocks noChangeAspect="1"/>
           </p:cNvPicPr>
           <p:nvPr/>
         </p:nvPicPr>
         <p:blipFill>
-          <a:blip r:embed="rId10" cstate="print">
+          <a:blip r:embed="rId11" cstate="print">
             <a:extLst>
               <a:ext uri="{28A0092B-C50C-407E-A947-70E740481C1C}">
                 <a14:useLocalDpi xmlns:a14="http://schemas.microsoft.com/office/drawing/2010/main" val="0"/>
@@ -12045,13 +10741,7 @@
       </p:pic>
       <p:sp>
         <p:nvSpPr>
-          <p:cNvPr id="160" name="文本框 159">
-            <a:extLst>
-              <a:ext uri="{FF2B5EF4-FFF2-40B4-BE49-F238E27FC236}">
-                <a16:creationId xmlns:a16="http://schemas.microsoft.com/office/drawing/2014/main" id="{0A51566C-52C1-E1E4-9582-4FF616D67CFD}"/>
-              </a:ext>
-            </a:extLst>
-          </p:cNvPr>
+          <p:cNvPr id="160" name="文本框 159"/>
           <p:cNvSpPr txBox="1"/>
           <p:nvPr/>
         </p:nvSpPr>
@@ -12087,20 +10777,14 @@
       </p:sp>
       <p:pic>
         <p:nvPicPr>
-          <p:cNvPr id="161" name="图片 160">
-            <a:extLst>
-              <a:ext uri="{FF2B5EF4-FFF2-40B4-BE49-F238E27FC236}">
-                <a16:creationId xmlns:a16="http://schemas.microsoft.com/office/drawing/2014/main" id="{1B5FFE4B-AE29-21F3-A29A-16FAF2DB1F17}"/>
-              </a:ext>
-            </a:extLst>
-          </p:cNvPr>
+          <p:cNvPr id="161" name="图片 160"/>
           <p:cNvPicPr>
             <a:picLocks noChangeAspect="1"/>
           </p:cNvPicPr>
           <p:nvPr/>
         </p:nvPicPr>
         <p:blipFill>
-          <a:blip r:embed="rId10" cstate="print">
+          <a:blip r:embed="rId11" cstate="print">
             <a:extLst>
               <a:ext uri="{28A0092B-C50C-407E-A947-70E740481C1C}">
                 <a14:useLocalDpi xmlns:a14="http://schemas.microsoft.com/office/drawing/2010/main" val="0"/>
@@ -12123,13 +10807,7 @@
       </p:pic>
       <p:sp>
         <p:nvSpPr>
-          <p:cNvPr id="162" name="文本框 161">
-            <a:extLst>
-              <a:ext uri="{FF2B5EF4-FFF2-40B4-BE49-F238E27FC236}">
-                <a16:creationId xmlns:a16="http://schemas.microsoft.com/office/drawing/2014/main" id="{664F602F-BE80-3623-BA6A-76D773A0583A}"/>
-              </a:ext>
-            </a:extLst>
-          </p:cNvPr>
+          <p:cNvPr id="162" name="文本框 161"/>
           <p:cNvSpPr txBox="1"/>
           <p:nvPr/>
         </p:nvSpPr>
@@ -12165,13 +10843,7 @@
       </p:sp>
       <p:sp>
         <p:nvSpPr>
-          <p:cNvPr id="163" name="文本框 162">
-            <a:extLst>
-              <a:ext uri="{FF2B5EF4-FFF2-40B4-BE49-F238E27FC236}">
-                <a16:creationId xmlns:a16="http://schemas.microsoft.com/office/drawing/2014/main" id="{90D840AE-2049-BAF9-23A1-1A8BC2B8F693}"/>
-              </a:ext>
-            </a:extLst>
-          </p:cNvPr>
+          <p:cNvPr id="163" name="文本框 162"/>
           <p:cNvSpPr txBox="1"/>
           <p:nvPr/>
         </p:nvSpPr>
@@ -12208,15 +10880,8 @@
       </p:sp>
       <p:cxnSp>
         <p:nvCxnSpPr>
-          <p:cNvPr id="164" name="直接箭头连接符 163">
-            <a:extLst>
-              <a:ext uri="{FF2B5EF4-FFF2-40B4-BE49-F238E27FC236}">
-                <a16:creationId xmlns:a16="http://schemas.microsoft.com/office/drawing/2014/main" id="{5A76C453-6445-A0E2-F744-DFA2CC05148D}"/>
-              </a:ext>
-            </a:extLst>
-          </p:cNvPr>
+          <p:cNvPr id="164" name="直接箭头连接符 163"/>
           <p:cNvCxnSpPr>
-            <a:cxnSpLocks/>
             <a:stCxn id="103" idx="3"/>
           </p:cNvCxnSpPr>
           <p:nvPr/>
@@ -12250,22 +10915,15 @@
       </p:cxnSp>
       <p:cxnSp>
         <p:nvCxnSpPr>
-          <p:cNvPr id="167" name="直接箭头连接符 166">
-            <a:extLst>
-              <a:ext uri="{FF2B5EF4-FFF2-40B4-BE49-F238E27FC236}">
-                <a16:creationId xmlns:a16="http://schemas.microsoft.com/office/drawing/2014/main" id="{F716A0C4-9CBF-D2E3-693E-6789044F0C5A}"/>
-              </a:ext>
-            </a:extLst>
-          </p:cNvPr>
+          <p:cNvPr id="167" name="直接箭头连接符 166"/>
           <p:cNvCxnSpPr>
-            <a:cxnSpLocks/>
             <a:stCxn id="116" idx="3"/>
           </p:cNvCxnSpPr>
           <p:nvPr/>
         </p:nvCxnSpPr>
         <p:spPr>
           <a:xfrm>
-            <a:off x="7222637" y="2389794"/>
+            <a:off x="7222637" y="2414559"/>
             <a:ext cx="327917" cy="423506"/>
           </a:xfrm>
           <a:prstGeom prst="straightConnector1">
@@ -12292,16 +10950,8 @@
       </p:cxnSp>
       <p:cxnSp>
         <p:nvCxnSpPr>
-          <p:cNvPr id="171" name="直接箭头连接符 170">
-            <a:extLst>
-              <a:ext uri="{FF2B5EF4-FFF2-40B4-BE49-F238E27FC236}">
-                <a16:creationId xmlns:a16="http://schemas.microsoft.com/office/drawing/2014/main" id="{CD8BB8C4-A6E4-4C5B-9112-9F75814779A6}"/>
-              </a:ext>
-            </a:extLst>
-          </p:cNvPr>
-          <p:cNvCxnSpPr>
-            <a:cxnSpLocks/>
-          </p:cNvCxnSpPr>
+          <p:cNvPr id="171" name="直接箭头连接符 170"/>
+          <p:cNvCxnSpPr/>
           <p:nvPr/>
         </p:nvCxnSpPr>
         <p:spPr>
@@ -12333,15 +10983,8 @@
       </p:cxnSp>
       <p:cxnSp>
         <p:nvCxnSpPr>
-          <p:cNvPr id="173" name="直接箭头连接符 172">
-            <a:extLst>
-              <a:ext uri="{FF2B5EF4-FFF2-40B4-BE49-F238E27FC236}">
-                <a16:creationId xmlns:a16="http://schemas.microsoft.com/office/drawing/2014/main" id="{F93489F3-E369-8438-94AF-C692D32313A2}"/>
-              </a:ext>
-            </a:extLst>
-          </p:cNvPr>
+          <p:cNvPr id="173" name="直接箭头连接符 172"/>
           <p:cNvCxnSpPr>
-            <a:cxnSpLocks/>
             <a:stCxn id="148" idx="3"/>
           </p:cNvCxnSpPr>
           <p:nvPr/>
@@ -12375,15 +11018,8 @@
       </p:cxnSp>
       <p:cxnSp>
         <p:nvCxnSpPr>
-          <p:cNvPr id="181" name="直接箭头连接符 180">
-            <a:extLst>
-              <a:ext uri="{FF2B5EF4-FFF2-40B4-BE49-F238E27FC236}">
-                <a16:creationId xmlns:a16="http://schemas.microsoft.com/office/drawing/2014/main" id="{7C2DAB05-FAD7-E206-43AB-FC6D53B52CF2}"/>
-              </a:ext>
-            </a:extLst>
-          </p:cNvPr>
+          <p:cNvPr id="181" name="直接箭头连接符 180"/>
           <p:cNvCxnSpPr>
-            <a:cxnSpLocks/>
             <a:stCxn id="156" idx="3"/>
           </p:cNvCxnSpPr>
           <p:nvPr/>
@@ -12417,13 +11053,7 @@
       </p:cxnSp>
       <p:sp>
         <p:nvSpPr>
-          <p:cNvPr id="189" name="矩形 188">
-            <a:extLst>
-              <a:ext uri="{FF2B5EF4-FFF2-40B4-BE49-F238E27FC236}">
-                <a16:creationId xmlns:a16="http://schemas.microsoft.com/office/drawing/2014/main" id="{8C99053D-784F-9A85-09FA-EA5F05AF34B0}"/>
-              </a:ext>
-            </a:extLst>
-          </p:cNvPr>
+          <p:cNvPr id="189" name="矩形 188"/>
           <p:cNvSpPr/>
           <p:nvPr/>
         </p:nvSpPr>
@@ -12488,16 +11118,8 @@
       </p:sp>
       <p:cxnSp>
         <p:nvCxnSpPr>
-          <p:cNvPr id="195" name="直接连接符 194">
-            <a:extLst>
-              <a:ext uri="{FF2B5EF4-FFF2-40B4-BE49-F238E27FC236}">
-                <a16:creationId xmlns:a16="http://schemas.microsoft.com/office/drawing/2014/main" id="{856444CF-3284-98D0-4E71-C1D8ED50D72A}"/>
-              </a:ext>
-            </a:extLst>
-          </p:cNvPr>
-          <p:cNvCxnSpPr>
-            <a:cxnSpLocks/>
-          </p:cNvCxnSpPr>
+          <p:cNvPr id="195" name="直接连接符 194"/>
+          <p:cNvCxnSpPr/>
           <p:nvPr/>
         </p:nvCxnSpPr>
         <p:spPr>
@@ -12526,16 +11148,8 @@
       </p:cxnSp>
       <p:cxnSp>
         <p:nvCxnSpPr>
-          <p:cNvPr id="198" name="直接箭头连接符 197">
-            <a:extLst>
-              <a:ext uri="{FF2B5EF4-FFF2-40B4-BE49-F238E27FC236}">
-                <a16:creationId xmlns:a16="http://schemas.microsoft.com/office/drawing/2014/main" id="{76D1B23A-F014-8519-EF29-DD9A11D7A8A1}"/>
-              </a:ext>
-            </a:extLst>
-          </p:cNvPr>
-          <p:cNvCxnSpPr>
-            <a:cxnSpLocks/>
-          </p:cNvCxnSpPr>
+          <p:cNvPr id="198" name="直接箭头连接符 197"/>
+          <p:cNvCxnSpPr/>
           <p:nvPr/>
         </p:nvCxnSpPr>
         <p:spPr>
@@ -12567,16 +11181,8 @@
       </p:cxnSp>
       <p:cxnSp>
         <p:nvCxnSpPr>
-          <p:cNvPr id="202" name="直接箭头连接符 201">
-            <a:extLst>
-              <a:ext uri="{FF2B5EF4-FFF2-40B4-BE49-F238E27FC236}">
-                <a16:creationId xmlns:a16="http://schemas.microsoft.com/office/drawing/2014/main" id="{FA298FEC-3DA4-DC1B-9E12-F056F017996D}"/>
-              </a:ext>
-            </a:extLst>
-          </p:cNvPr>
-          <p:cNvCxnSpPr>
-            <a:cxnSpLocks/>
-          </p:cNvCxnSpPr>
+          <p:cNvPr id="202" name="直接箭头连接符 201"/>
+          <p:cNvCxnSpPr/>
           <p:nvPr/>
         </p:nvCxnSpPr>
         <p:spPr>
@@ -12608,16 +11214,8 @@
       </p:cxnSp>
       <p:cxnSp>
         <p:nvCxnSpPr>
-          <p:cNvPr id="206" name="直接箭头连接符 205">
-            <a:extLst>
-              <a:ext uri="{FF2B5EF4-FFF2-40B4-BE49-F238E27FC236}">
-                <a16:creationId xmlns:a16="http://schemas.microsoft.com/office/drawing/2014/main" id="{183B2FFD-A749-E568-C29D-945945D31DE1}"/>
-              </a:ext>
-            </a:extLst>
-          </p:cNvPr>
-          <p:cNvCxnSpPr>
-            <a:cxnSpLocks/>
-          </p:cNvCxnSpPr>
+          <p:cNvPr id="206" name="直接箭头连接符 205"/>
+          <p:cNvCxnSpPr/>
           <p:nvPr/>
         </p:nvCxnSpPr>
         <p:spPr>
@@ -12649,16 +11247,8 @@
       </p:cxnSp>
       <p:cxnSp>
         <p:nvCxnSpPr>
-          <p:cNvPr id="209" name="直接箭头连接符 208">
-            <a:extLst>
-              <a:ext uri="{FF2B5EF4-FFF2-40B4-BE49-F238E27FC236}">
-                <a16:creationId xmlns:a16="http://schemas.microsoft.com/office/drawing/2014/main" id="{C6394F84-A22D-88F6-F5AB-3852E0F664C3}"/>
-              </a:ext>
-            </a:extLst>
-          </p:cNvPr>
-          <p:cNvCxnSpPr>
-            <a:cxnSpLocks/>
-          </p:cNvCxnSpPr>
+          <p:cNvPr id="209" name="直接箭头连接符 208"/>
+          <p:cNvCxnSpPr/>
           <p:nvPr/>
         </p:nvCxnSpPr>
         <p:spPr>
@@ -12690,16 +11280,8 @@
       </p:cxnSp>
       <p:cxnSp>
         <p:nvCxnSpPr>
-          <p:cNvPr id="212" name="直接箭头连接符 211">
-            <a:extLst>
-              <a:ext uri="{FF2B5EF4-FFF2-40B4-BE49-F238E27FC236}">
-                <a16:creationId xmlns:a16="http://schemas.microsoft.com/office/drawing/2014/main" id="{EE8B3A85-49F1-37DD-32E0-37FF47D08D31}"/>
-              </a:ext>
-            </a:extLst>
-          </p:cNvPr>
-          <p:cNvCxnSpPr>
-            <a:cxnSpLocks/>
-          </p:cNvCxnSpPr>
+          <p:cNvPr id="212" name="直接箭头连接符 211"/>
+          <p:cNvCxnSpPr/>
           <p:nvPr/>
         </p:nvCxnSpPr>
         <p:spPr>
@@ -12731,20 +11313,14 @@
       </p:cxnSp>
       <p:pic>
         <p:nvPicPr>
-          <p:cNvPr id="221" name="图片 220">
-            <a:extLst>
-              <a:ext uri="{FF2B5EF4-FFF2-40B4-BE49-F238E27FC236}">
-                <a16:creationId xmlns:a16="http://schemas.microsoft.com/office/drawing/2014/main" id="{15D4F3E2-614C-9394-F60C-4863EB82EF09}"/>
-              </a:ext>
-            </a:extLst>
-          </p:cNvPr>
+          <p:cNvPr id="221" name="图片 220"/>
           <p:cNvPicPr>
             <a:picLocks noChangeAspect="1"/>
           </p:cNvPicPr>
           <p:nvPr/>
         </p:nvPicPr>
         <p:blipFill>
-          <a:blip r:embed="rId11"/>
+          <a:blip r:embed="rId12"/>
           <a:stretch>
             <a:fillRect/>
           </a:stretch>
@@ -12764,13 +11340,7 @@
       </p:pic>
       <p:sp>
         <p:nvSpPr>
-          <p:cNvPr id="222" name="矩形 221">
-            <a:extLst>
-              <a:ext uri="{FF2B5EF4-FFF2-40B4-BE49-F238E27FC236}">
-                <a16:creationId xmlns:a16="http://schemas.microsoft.com/office/drawing/2014/main" id="{23CA4479-9767-B8CB-7EF9-83422D42A60F}"/>
-              </a:ext>
-            </a:extLst>
-          </p:cNvPr>
+          <p:cNvPr id="222" name="矩形 221"/>
           <p:cNvSpPr/>
           <p:nvPr/>
         </p:nvSpPr>
@@ -12835,13 +11405,7 @@
       </p:sp>
       <p:sp>
         <p:nvSpPr>
-          <p:cNvPr id="223" name="矩形 222">
-            <a:extLst>
-              <a:ext uri="{FF2B5EF4-FFF2-40B4-BE49-F238E27FC236}">
-                <a16:creationId xmlns:a16="http://schemas.microsoft.com/office/drawing/2014/main" id="{AE73E578-4715-A3DE-23A2-25FDB17D5315}"/>
-              </a:ext>
-            </a:extLst>
-          </p:cNvPr>
+          <p:cNvPr id="223" name="矩形 222"/>
           <p:cNvSpPr/>
           <p:nvPr/>
         </p:nvSpPr>
@@ -12906,20 +11470,14 @@
       </p:sp>
       <p:pic>
         <p:nvPicPr>
-          <p:cNvPr id="224" name="图片 223">
-            <a:extLst>
-              <a:ext uri="{FF2B5EF4-FFF2-40B4-BE49-F238E27FC236}">
-                <a16:creationId xmlns:a16="http://schemas.microsoft.com/office/drawing/2014/main" id="{AEA5F5A8-B0C9-2ADA-8E64-3EF545EDA588}"/>
-              </a:ext>
-            </a:extLst>
-          </p:cNvPr>
+          <p:cNvPr id="224" name="图片 223"/>
           <p:cNvPicPr>
             <a:picLocks noChangeAspect="1"/>
           </p:cNvPicPr>
           <p:nvPr/>
         </p:nvPicPr>
         <p:blipFill>
-          <a:blip r:embed="rId11"/>
+          <a:blip r:embed="rId12"/>
           <a:stretch>
             <a:fillRect/>
           </a:stretch>
@@ -12939,20 +11497,14 @@
       </p:pic>
       <p:pic>
         <p:nvPicPr>
-          <p:cNvPr id="225" name="图片 224">
-            <a:extLst>
-              <a:ext uri="{FF2B5EF4-FFF2-40B4-BE49-F238E27FC236}">
-                <a16:creationId xmlns:a16="http://schemas.microsoft.com/office/drawing/2014/main" id="{D9813B8A-5E9E-5203-ECAF-944EDE2BFA64}"/>
-              </a:ext>
-            </a:extLst>
-          </p:cNvPr>
+          <p:cNvPr id="225" name="图片 224"/>
           <p:cNvPicPr>
             <a:picLocks noChangeAspect="1"/>
           </p:cNvPicPr>
           <p:nvPr/>
         </p:nvPicPr>
         <p:blipFill>
-          <a:blip r:embed="rId11"/>
+          <a:blip r:embed="rId12"/>
           <a:stretch>
             <a:fillRect/>
           </a:stretch>
@@ -12972,13 +11524,7 @@
       </p:pic>
       <p:sp>
         <p:nvSpPr>
-          <p:cNvPr id="226" name="矩形 225">
-            <a:extLst>
-              <a:ext uri="{FF2B5EF4-FFF2-40B4-BE49-F238E27FC236}">
-                <a16:creationId xmlns:a16="http://schemas.microsoft.com/office/drawing/2014/main" id="{E863C030-47B0-44D2-B606-E3FE95922744}"/>
-              </a:ext>
-            </a:extLst>
-          </p:cNvPr>
+          <p:cNvPr id="226" name="矩形 225"/>
           <p:cNvSpPr/>
           <p:nvPr/>
         </p:nvSpPr>
@@ -13043,20 +11589,14 @@
       </p:sp>
       <p:pic>
         <p:nvPicPr>
-          <p:cNvPr id="227" name="图片 226">
-            <a:extLst>
-              <a:ext uri="{FF2B5EF4-FFF2-40B4-BE49-F238E27FC236}">
-                <a16:creationId xmlns:a16="http://schemas.microsoft.com/office/drawing/2014/main" id="{5B7FE581-3CCA-5E46-91F5-1751069DE907}"/>
-              </a:ext>
-            </a:extLst>
-          </p:cNvPr>
+          <p:cNvPr id="227" name="图片 226"/>
           <p:cNvPicPr>
             <a:picLocks noChangeAspect="1"/>
           </p:cNvPicPr>
           <p:nvPr/>
         </p:nvPicPr>
         <p:blipFill>
-          <a:blip r:embed="rId11"/>
+          <a:blip r:embed="rId12"/>
           <a:stretch>
             <a:fillRect/>
           </a:stretch>
@@ -13076,13 +11616,7 @@
       </p:pic>
       <p:sp>
         <p:nvSpPr>
-          <p:cNvPr id="230" name="矩形 229">
-            <a:extLst>
-              <a:ext uri="{FF2B5EF4-FFF2-40B4-BE49-F238E27FC236}">
-                <a16:creationId xmlns:a16="http://schemas.microsoft.com/office/drawing/2014/main" id="{88A8A00F-8872-F8A3-EF52-D602C9944977}"/>
-              </a:ext>
-            </a:extLst>
-          </p:cNvPr>
+          <p:cNvPr id="230" name="矩形 229"/>
           <p:cNvSpPr/>
           <p:nvPr/>
         </p:nvSpPr>
@@ -13147,20 +11681,14 @@
       </p:sp>
       <p:pic>
         <p:nvPicPr>
-          <p:cNvPr id="231" name="图片 230">
-            <a:extLst>
-              <a:ext uri="{FF2B5EF4-FFF2-40B4-BE49-F238E27FC236}">
-                <a16:creationId xmlns:a16="http://schemas.microsoft.com/office/drawing/2014/main" id="{0FE48320-789E-2A89-C956-BB217C70F1ED}"/>
-              </a:ext>
-            </a:extLst>
-          </p:cNvPr>
+          <p:cNvPr id="231" name="图片 230"/>
           <p:cNvPicPr>
             <a:picLocks noChangeAspect="1"/>
           </p:cNvPicPr>
           <p:nvPr/>
         </p:nvPicPr>
         <p:blipFill>
-          <a:blip r:embed="rId11"/>
+          <a:blip r:embed="rId12"/>
           <a:stretch>
             <a:fillRect/>
           </a:stretch>
@@ -13180,13 +11708,7 @@
       </p:pic>
       <p:sp>
         <p:nvSpPr>
-          <p:cNvPr id="232" name="矩形 231">
-            <a:extLst>
-              <a:ext uri="{FF2B5EF4-FFF2-40B4-BE49-F238E27FC236}">
-                <a16:creationId xmlns:a16="http://schemas.microsoft.com/office/drawing/2014/main" id="{85307EB9-BC27-5B57-6BBB-28F33E8F2E88}"/>
-              </a:ext>
-            </a:extLst>
-          </p:cNvPr>
+          <p:cNvPr id="232" name="矩形 231"/>
           <p:cNvSpPr/>
           <p:nvPr/>
         </p:nvSpPr>
@@ -13251,16 +11773,8 @@
       </p:sp>
       <p:cxnSp>
         <p:nvCxnSpPr>
-          <p:cNvPr id="237" name="直接箭头连接符 236">
-            <a:extLst>
-              <a:ext uri="{FF2B5EF4-FFF2-40B4-BE49-F238E27FC236}">
-                <a16:creationId xmlns:a16="http://schemas.microsoft.com/office/drawing/2014/main" id="{FFF43214-A800-3827-5824-CC74D0EF3FAB}"/>
-              </a:ext>
-            </a:extLst>
-          </p:cNvPr>
-          <p:cNvCxnSpPr>
-            <a:cxnSpLocks/>
-          </p:cNvCxnSpPr>
+          <p:cNvPr id="237" name="直接箭头连接符 236"/>
+          <p:cNvCxnSpPr/>
           <p:nvPr/>
         </p:nvCxnSpPr>
         <p:spPr>
@@ -13292,23 +11806,17 @@
       </p:cxnSp>
       <p:pic>
         <p:nvPicPr>
-          <p:cNvPr id="4" name="图形 3" descr="条形图">
-            <a:extLst>
-              <a:ext uri="{FF2B5EF4-FFF2-40B4-BE49-F238E27FC236}">
-                <a16:creationId xmlns:a16="http://schemas.microsoft.com/office/drawing/2014/main" id="{B1EEA6AA-46AC-2888-7CFD-D9B547CE921A}"/>
-              </a:ext>
-            </a:extLst>
-          </p:cNvPr>
+          <p:cNvPr id="4" name="图形 3" descr="条形图"/>
           <p:cNvPicPr>
             <a:picLocks noChangeAspect="1"/>
           </p:cNvPicPr>
           <p:nvPr/>
         </p:nvPicPr>
         <p:blipFill>
-          <a:blip>
+          <a:blip r:embed="rId15">
             <a:extLst>
               <a:ext uri="{96DAC541-7B7A-43D3-8B79-37D633B846F1}">
-                <asvg:svgBlip xmlns:asvg="http://schemas.microsoft.com/office/drawing/2016/SVG/main" r:embed="rId13"/>
+                <asvg:svgBlip xmlns:asvg="http://schemas.microsoft.com/office/drawing/2016/SVG/main" r:embed="rId16"/>
               </a:ext>
             </a:extLst>
           </a:blip>
@@ -13328,13 +11836,7 @@
       </p:pic>
       <p:sp>
         <p:nvSpPr>
-          <p:cNvPr id="5" name="矩形 4">
-            <a:extLst>
-              <a:ext uri="{FF2B5EF4-FFF2-40B4-BE49-F238E27FC236}">
-                <a16:creationId xmlns:a16="http://schemas.microsoft.com/office/drawing/2014/main" id="{7F7521F1-7BCB-89CB-D687-89CDABB77317}"/>
-              </a:ext>
-            </a:extLst>
-          </p:cNvPr>
+          <p:cNvPr id="5" name="矩形 4"/>
           <p:cNvSpPr/>
           <p:nvPr/>
         </p:nvSpPr>
@@ -13437,23 +11939,17 @@
       </p:sp>
       <p:pic>
         <p:nvPicPr>
-          <p:cNvPr id="6" name="图形 5" descr="条形图">
-            <a:extLst>
-              <a:ext uri="{FF2B5EF4-FFF2-40B4-BE49-F238E27FC236}">
-                <a16:creationId xmlns:a16="http://schemas.microsoft.com/office/drawing/2014/main" id="{F4B329DD-F51F-81D6-23FF-78DCC6821DA6}"/>
-              </a:ext>
-            </a:extLst>
-          </p:cNvPr>
+          <p:cNvPr id="6" name="图形 5" descr="条形图"/>
           <p:cNvPicPr>
             <a:picLocks noChangeAspect="1"/>
           </p:cNvPicPr>
           <p:nvPr/>
         </p:nvPicPr>
         <p:blipFill>
-          <a:blip>
+          <a:blip r:embed="rId15">
             <a:extLst>
               <a:ext uri="{96DAC541-7B7A-43D3-8B79-37D633B846F1}">
-                <asvg:svgBlip xmlns:asvg="http://schemas.microsoft.com/office/drawing/2016/SVG/main" r:embed="rId13"/>
+                <asvg:svgBlip xmlns:asvg="http://schemas.microsoft.com/office/drawing/2016/SVG/main" r:embed="rId16"/>
               </a:ext>
             </a:extLst>
           </a:blip>
@@ -13473,16 +11969,8 @@
       </p:pic>
       <p:cxnSp>
         <p:nvCxnSpPr>
-          <p:cNvPr id="7" name="直接箭头连接符 6">
-            <a:extLst>
-              <a:ext uri="{FF2B5EF4-FFF2-40B4-BE49-F238E27FC236}">
-                <a16:creationId xmlns:a16="http://schemas.microsoft.com/office/drawing/2014/main" id="{827F1911-D395-FB65-E13D-4831800BAEAF}"/>
-              </a:ext>
-            </a:extLst>
-          </p:cNvPr>
-          <p:cNvCxnSpPr>
-            <a:cxnSpLocks/>
-          </p:cNvCxnSpPr>
+          <p:cNvPr id="7" name="直接箭头连接符 6"/>
+          <p:cNvCxnSpPr/>
           <p:nvPr/>
         </p:nvCxnSpPr>
         <p:spPr>
@@ -13514,16 +12002,8 @@
       </p:cxnSp>
       <p:cxnSp>
         <p:nvCxnSpPr>
-          <p:cNvPr id="10" name="直接箭头连接符 9">
-            <a:extLst>
-              <a:ext uri="{FF2B5EF4-FFF2-40B4-BE49-F238E27FC236}">
-                <a16:creationId xmlns:a16="http://schemas.microsoft.com/office/drawing/2014/main" id="{FE1A4542-D863-3785-35A6-B6BF9C90DDC8}"/>
-              </a:ext>
-            </a:extLst>
-          </p:cNvPr>
-          <p:cNvCxnSpPr>
-            <a:cxnSpLocks/>
-          </p:cNvCxnSpPr>
+          <p:cNvPr id="10" name="直接箭头连接符 9"/>
+          <p:cNvCxnSpPr/>
           <p:nvPr/>
         </p:nvCxnSpPr>
         <p:spPr>
@@ -13555,23 +12035,17 @@
       </p:cxnSp>
       <p:pic>
         <p:nvPicPr>
-          <p:cNvPr id="12" name="图形 11" descr="条形图">
-            <a:extLst>
-              <a:ext uri="{FF2B5EF4-FFF2-40B4-BE49-F238E27FC236}">
-                <a16:creationId xmlns:a16="http://schemas.microsoft.com/office/drawing/2014/main" id="{C0B5CED2-8E78-3D5A-6667-570D1D080236}"/>
-              </a:ext>
-            </a:extLst>
-          </p:cNvPr>
+          <p:cNvPr id="12" name="图形 11" descr="条形图"/>
           <p:cNvPicPr>
             <a:picLocks noChangeAspect="1"/>
           </p:cNvPicPr>
           <p:nvPr/>
         </p:nvPicPr>
         <p:blipFill>
-          <a:blip>
+          <a:blip r:embed="rId15">
             <a:extLst>
               <a:ext uri="{96DAC541-7B7A-43D3-8B79-37D633B846F1}">
-                <asvg:svgBlip xmlns:asvg="http://schemas.microsoft.com/office/drawing/2016/SVG/main" r:embed="rId13"/>
+                <asvg:svgBlip xmlns:asvg="http://schemas.microsoft.com/office/drawing/2016/SVG/main" r:embed="rId16"/>
               </a:ext>
             </a:extLst>
           </a:blip>
@@ -13591,16 +12065,8 @@
       </p:pic>
       <p:cxnSp>
         <p:nvCxnSpPr>
-          <p:cNvPr id="15" name="直接箭头连接符 14">
-            <a:extLst>
-              <a:ext uri="{FF2B5EF4-FFF2-40B4-BE49-F238E27FC236}">
-                <a16:creationId xmlns:a16="http://schemas.microsoft.com/office/drawing/2014/main" id="{68E9120E-E18E-A2D8-A738-6D7880DE6483}"/>
-              </a:ext>
-            </a:extLst>
-          </p:cNvPr>
-          <p:cNvCxnSpPr>
-            <a:cxnSpLocks/>
-          </p:cNvCxnSpPr>
+          <p:cNvPr id="15" name="直接箭头连接符 14"/>
+          <p:cNvCxnSpPr/>
           <p:nvPr/>
         </p:nvCxnSpPr>
         <p:spPr>
@@ -13632,23 +12098,17 @@
       </p:cxnSp>
       <p:pic>
         <p:nvPicPr>
-          <p:cNvPr id="16" name="图形 15" descr="条形图">
-            <a:extLst>
-              <a:ext uri="{FF2B5EF4-FFF2-40B4-BE49-F238E27FC236}">
-                <a16:creationId xmlns:a16="http://schemas.microsoft.com/office/drawing/2014/main" id="{9B3A60D7-FFFA-2F0B-3851-3CE2C599FC92}"/>
-              </a:ext>
-            </a:extLst>
-          </p:cNvPr>
+          <p:cNvPr id="16" name="图形 15" descr="条形图"/>
           <p:cNvPicPr>
             <a:picLocks noChangeAspect="1"/>
           </p:cNvPicPr>
           <p:nvPr/>
         </p:nvPicPr>
         <p:blipFill>
-          <a:blip>
+          <a:blip r:embed="rId15">
             <a:extLst>
               <a:ext uri="{96DAC541-7B7A-43D3-8B79-37D633B846F1}">
-                <asvg:svgBlip xmlns:asvg="http://schemas.microsoft.com/office/drawing/2016/SVG/main" r:embed="rId13"/>
+                <asvg:svgBlip xmlns:asvg="http://schemas.microsoft.com/office/drawing/2016/SVG/main" r:embed="rId16"/>
               </a:ext>
             </a:extLst>
           </a:blip>
@@ -13668,23 +12128,17 @@
       </p:pic>
       <p:pic>
         <p:nvPicPr>
-          <p:cNvPr id="18" name="图形 17" descr="条形图">
-            <a:extLst>
-              <a:ext uri="{FF2B5EF4-FFF2-40B4-BE49-F238E27FC236}">
-                <a16:creationId xmlns:a16="http://schemas.microsoft.com/office/drawing/2014/main" id="{D004C305-723D-58F2-9A2A-D500FB5FABA0}"/>
-              </a:ext>
-            </a:extLst>
-          </p:cNvPr>
+          <p:cNvPr id="18" name="图形 17" descr="条形图"/>
           <p:cNvPicPr>
             <a:picLocks noChangeAspect="1"/>
           </p:cNvPicPr>
           <p:nvPr/>
         </p:nvPicPr>
         <p:blipFill>
-          <a:blip>
+          <a:blip r:embed="rId15">
             <a:extLst>
               <a:ext uri="{96DAC541-7B7A-43D3-8B79-37D633B846F1}">
-                <asvg:svgBlip xmlns:asvg="http://schemas.microsoft.com/office/drawing/2016/SVG/main" r:embed="rId13"/>
+                <asvg:svgBlip xmlns:asvg="http://schemas.microsoft.com/office/drawing/2016/SVG/main" r:embed="rId16"/>
               </a:ext>
             </a:extLst>
           </a:blip>
@@ -13704,16 +12158,8 @@
       </p:pic>
       <p:cxnSp>
         <p:nvCxnSpPr>
-          <p:cNvPr id="19" name="直接箭头连接符 18">
-            <a:extLst>
-              <a:ext uri="{FF2B5EF4-FFF2-40B4-BE49-F238E27FC236}">
-                <a16:creationId xmlns:a16="http://schemas.microsoft.com/office/drawing/2014/main" id="{36F17168-36D5-1FE1-1181-96DD5611ED50}"/>
-              </a:ext>
-            </a:extLst>
-          </p:cNvPr>
-          <p:cNvCxnSpPr>
-            <a:cxnSpLocks/>
-          </p:cNvCxnSpPr>
+          <p:cNvPr id="19" name="直接箭头连接符 18"/>
+          <p:cNvCxnSpPr/>
           <p:nvPr/>
         </p:nvCxnSpPr>
         <p:spPr>
@@ -13745,13 +12191,7 @@
       </p:cxnSp>
       <p:sp>
         <p:nvSpPr>
-          <p:cNvPr id="21" name="右大括号 20">
-            <a:extLst>
-              <a:ext uri="{FF2B5EF4-FFF2-40B4-BE49-F238E27FC236}">
-                <a16:creationId xmlns:a16="http://schemas.microsoft.com/office/drawing/2014/main" id="{77B44B69-A151-DC02-4367-0A6DE7632B89}"/>
-              </a:ext>
-            </a:extLst>
-          </p:cNvPr>
+          <p:cNvPr id="21" name="右大括号 20"/>
           <p:cNvSpPr/>
           <p:nvPr/>
         </p:nvSpPr>
@@ -13789,20 +12229,14 @@
       </p:sp>
       <p:pic>
         <p:nvPicPr>
-          <p:cNvPr id="23" name="图片 22">
-            <a:extLst>
-              <a:ext uri="{FF2B5EF4-FFF2-40B4-BE49-F238E27FC236}">
-                <a16:creationId xmlns:a16="http://schemas.microsoft.com/office/drawing/2014/main" id="{90CAC86B-3B02-1E7A-4F5C-F7CE3C55BDA7}"/>
-              </a:ext>
-            </a:extLst>
-          </p:cNvPr>
+          <p:cNvPr id="23" name="图片 22"/>
           <p:cNvPicPr>
             <a:picLocks noChangeAspect="1"/>
           </p:cNvPicPr>
           <p:nvPr/>
         </p:nvPicPr>
         <p:blipFill>
-          <a:blip r:embed="rId11"/>
+          <a:blip r:embed="rId12"/>
           <a:stretch>
             <a:fillRect/>
           </a:stretch>
@@ -13822,13 +12256,7 @@
       </p:pic>
       <p:sp>
         <p:nvSpPr>
-          <p:cNvPr id="26" name="矩形 25">
-            <a:extLst>
-              <a:ext uri="{FF2B5EF4-FFF2-40B4-BE49-F238E27FC236}">
-                <a16:creationId xmlns:a16="http://schemas.microsoft.com/office/drawing/2014/main" id="{6C96D9E9-388D-D2CC-548D-0B5A6791BA35}"/>
-              </a:ext>
-            </a:extLst>
-          </p:cNvPr>
+          <p:cNvPr id="26" name="矩形 25"/>
           <p:cNvSpPr/>
           <p:nvPr/>
         </p:nvSpPr>
@@ -13893,13 +12321,7 @@
       </p:sp>
       <p:sp>
         <p:nvSpPr>
-          <p:cNvPr id="27" name="箭头: 下 26">
-            <a:extLst>
-              <a:ext uri="{FF2B5EF4-FFF2-40B4-BE49-F238E27FC236}">
-                <a16:creationId xmlns:a16="http://schemas.microsoft.com/office/drawing/2014/main" id="{99DCE301-DB3E-512B-FF66-F1507DBFFF7F}"/>
-              </a:ext>
-            </a:extLst>
-          </p:cNvPr>
+          <p:cNvPr id="27" name="箭头: 下 26"/>
           <p:cNvSpPr/>
           <p:nvPr/>
         </p:nvSpPr>
@@ -13937,51 +12359,9 @@
           </a:p>
         </p:txBody>
       </p:sp>
-      <p:pic>
-        <p:nvPicPr>
-          <p:cNvPr id="28" name="图形 27" descr="条形图">
-            <a:extLst>
-              <a:ext uri="{FF2B5EF4-FFF2-40B4-BE49-F238E27FC236}">
-                <a16:creationId xmlns:a16="http://schemas.microsoft.com/office/drawing/2014/main" id="{94E85308-1D87-103A-0155-9F9FCA95D40F}"/>
-              </a:ext>
-            </a:extLst>
-          </p:cNvPr>
-          <p:cNvPicPr>
-            <a:picLocks noChangeAspect="1"/>
-          </p:cNvPicPr>
-          <p:nvPr/>
-        </p:nvPicPr>
-        <p:blipFill>
-          <a:blip>
-            <a:extLst>
-              <a:ext uri="{96DAC541-7B7A-43D3-8B79-37D633B846F1}">
-                <asvg:svgBlip xmlns:asvg="http://schemas.microsoft.com/office/drawing/2016/SVG/main" r:embed="rId14"/>
-              </a:ext>
-            </a:extLst>
-          </a:blip>
-          <a:stretch>
-            <a:fillRect/>
-          </a:stretch>
-        </p:blipFill>
-        <p:spPr>
-          <a:xfrm>
-            <a:off x="10692438" y="4416690"/>
-            <a:ext cx="1275595" cy="1275595"/>
-          </a:xfrm>
-          <a:prstGeom prst="rect">
-            <a:avLst/>
-          </a:prstGeom>
-        </p:spPr>
-      </p:pic>
-      <p:sp>
-        <p:nvSpPr>
-          <p:cNvPr id="31" name="矩形 30">
-            <a:extLst>
-              <a:ext uri="{FF2B5EF4-FFF2-40B4-BE49-F238E27FC236}">
-                <a16:creationId xmlns:a16="http://schemas.microsoft.com/office/drawing/2014/main" id="{8BA8DC89-7F42-F078-417D-D5C35B46DAEE}"/>
-              </a:ext>
-            </a:extLst>
-          </p:cNvPr>
+      <p:sp>
+        <p:nvSpPr>
+          <p:cNvPr id="31" name="矩形 30"/>
           <p:cNvSpPr/>
           <p:nvPr/>
         </p:nvSpPr>
@@ -14034,6 +12414,13 @@
               </a:rPr>
               <a:t>Total Trust Score</a:t>
             </a:r>
+            <a:endParaRPr lang="en-US" altLang="zh-CN" sz="1200" b="1" dirty="0">
+              <a:solidFill>
+                <a:schemeClr val="tx1"/>
+              </a:solidFill>
+              <a:latin typeface="Arial" panose="020B0604020202020204" pitchFamily="34" charset="0"/>
+              <a:cs typeface="Arial" panose="020B0604020202020204" pitchFamily="34" charset="0"/>
+            </a:endParaRPr>
           </a:p>
           <a:p>
             <a:pPr algn="ctr"/>
@@ -14078,13 +12465,7 @@
       </p:sp>
       <p:sp>
         <p:nvSpPr>
-          <p:cNvPr id="36" name="矩形 35">
-            <a:extLst>
-              <a:ext uri="{FF2B5EF4-FFF2-40B4-BE49-F238E27FC236}">
-                <a16:creationId xmlns:a16="http://schemas.microsoft.com/office/drawing/2014/main" id="{1E3AC4D7-D098-20F8-CCD4-E51FFB950078}"/>
-              </a:ext>
-            </a:extLst>
-          </p:cNvPr>
+          <p:cNvPr id="36" name="矩形 35"/>
           <p:cNvSpPr/>
           <p:nvPr/>
         </p:nvSpPr>
@@ -14187,13 +12568,7 @@
       </p:sp>
       <p:sp>
         <p:nvSpPr>
-          <p:cNvPr id="38" name="矩形 37">
-            <a:extLst>
-              <a:ext uri="{FF2B5EF4-FFF2-40B4-BE49-F238E27FC236}">
-                <a16:creationId xmlns:a16="http://schemas.microsoft.com/office/drawing/2014/main" id="{0DA82B4B-3C22-FF38-7EFD-4B9283243D2E}"/>
-              </a:ext>
-            </a:extLst>
-          </p:cNvPr>
+          <p:cNvPr id="38" name="矩形 37"/>
           <p:cNvSpPr/>
           <p:nvPr/>
         </p:nvSpPr>
@@ -14296,13 +12671,7 @@
       </p:sp>
       <p:sp>
         <p:nvSpPr>
-          <p:cNvPr id="39" name="矩形 38">
-            <a:extLst>
-              <a:ext uri="{FF2B5EF4-FFF2-40B4-BE49-F238E27FC236}">
-                <a16:creationId xmlns:a16="http://schemas.microsoft.com/office/drawing/2014/main" id="{317FDFF1-6246-8B3B-0757-FCBE669E4538}"/>
-              </a:ext>
-            </a:extLst>
-          </p:cNvPr>
+          <p:cNvPr id="39" name="矩形 38"/>
           <p:cNvSpPr/>
           <p:nvPr/>
         </p:nvSpPr>
@@ -14405,13 +12774,7 @@
       </p:sp>
       <p:sp>
         <p:nvSpPr>
-          <p:cNvPr id="40" name="矩形 39">
-            <a:extLst>
-              <a:ext uri="{FF2B5EF4-FFF2-40B4-BE49-F238E27FC236}">
-                <a16:creationId xmlns:a16="http://schemas.microsoft.com/office/drawing/2014/main" id="{73769952-F07F-AAD4-2014-B8C0B3562A99}"/>
-              </a:ext>
-            </a:extLst>
-          </p:cNvPr>
+          <p:cNvPr id="40" name="矩形 39"/>
           <p:cNvSpPr/>
           <p:nvPr/>
         </p:nvSpPr>
@@ -14514,13 +12877,7 @@
       </p:sp>
       <p:sp>
         <p:nvSpPr>
-          <p:cNvPr id="58" name="箭头: 上弧形 57">
-            <a:extLst>
-              <a:ext uri="{FF2B5EF4-FFF2-40B4-BE49-F238E27FC236}">
-                <a16:creationId xmlns:a16="http://schemas.microsoft.com/office/drawing/2014/main" id="{3E875006-C994-45A1-E5EE-C516260184CA}"/>
-              </a:ext>
-            </a:extLst>
-          </p:cNvPr>
+          <p:cNvPr id="58" name="箭头: 上弧形 57"/>
           <p:cNvSpPr/>
           <p:nvPr/>
         </p:nvSpPr>
@@ -14571,13 +12928,7 @@
       </p:sp>
       <p:sp>
         <p:nvSpPr>
-          <p:cNvPr id="61" name="文本框 60">
-            <a:extLst>
-              <a:ext uri="{FF2B5EF4-FFF2-40B4-BE49-F238E27FC236}">
-                <a16:creationId xmlns:a16="http://schemas.microsoft.com/office/drawing/2014/main" id="{4E967DC4-6E15-2E8D-F2CD-420AE4F3ECB3}"/>
-              </a:ext>
-            </a:extLst>
-          </p:cNvPr>
+          <p:cNvPr id="61" name="文本框 60"/>
           <p:cNvSpPr txBox="1"/>
           <p:nvPr/>
         </p:nvSpPr>
@@ -14611,12 +12962,96 @@
           </a:p>
         </p:txBody>
       </p:sp>
+      <p:pic>
+        <p:nvPicPr>
+          <p:cNvPr id="28" name="图形 27" descr="条形图"/>
+          <p:cNvPicPr>
+            <a:picLocks noChangeAspect="1"/>
+          </p:cNvPicPr>
+          <p:nvPr/>
+        </p:nvPicPr>
+        <p:blipFill>
+          <a:blip r:embed="rId17">
+            <a:extLst>
+              <a:ext uri="{96DAC541-7B7A-43D3-8B79-37D633B846F1}">
+                <asvg:svgBlip xmlns:asvg="http://schemas.microsoft.com/office/drawing/2016/SVG/main" r:embed="rId18"/>
+              </a:ext>
+            </a:extLst>
+          </a:blip>
+          <a:stretch>
+            <a:fillRect/>
+          </a:stretch>
+        </p:blipFill>
+        <p:spPr>
+          <a:xfrm>
+            <a:off x="10692438" y="4416690"/>
+            <a:ext cx="1275595" cy="1275595"/>
+          </a:xfrm>
+          <a:prstGeom prst="rect">
+            <a:avLst/>
+          </a:prstGeom>
+        </p:spPr>
+      </p:pic>
+      <p:sp>
+        <p:nvSpPr>
+          <p:cNvPr id="2" name="流程图: 资料带 1"/>
+          <p:cNvSpPr/>
+          <p:nvPr/>
+        </p:nvSpPr>
+        <p:spPr>
+          <a:xfrm>
+            <a:off x="6198732" y="3460693"/>
+            <a:ext cx="1014566" cy="618956"/>
+          </a:xfrm>
+          <a:prstGeom prst="flowChartPunchedTape">
+            <a:avLst/>
+          </a:prstGeom>
+          <a:solidFill>
+            <a:srgbClr val="FFFFE0"/>
+          </a:solidFill>
+        </p:spPr>
+        <p:style>
+          <a:lnRef idx="2">
+            <a:schemeClr val="accent1">
+              <a:shade val="15000"/>
+            </a:schemeClr>
+          </a:lnRef>
+          <a:fillRef idx="1">
+            <a:schemeClr val="accent1"/>
+          </a:fillRef>
+          <a:effectRef idx="0">
+            <a:schemeClr val="accent1"/>
+          </a:effectRef>
+          <a:fontRef idx="minor">
+            <a:schemeClr val="lt1"/>
+          </a:fontRef>
+        </p:style>
+        <p:txBody>
+          <a:bodyPr rtlCol="0" anchor="ctr"/>
+          <a:lstStyle/>
+          <a:p>
+            <a:pPr algn="ctr"/>
+            <a:r>
+              <a:rPr lang="en-US" altLang="zh-CN" sz="1200" b="1" dirty="0">
+                <a:solidFill>
+                  <a:schemeClr val="tx1"/>
+                </a:solidFill>
+                <a:latin typeface="Arial" panose="020B0604020202020204" pitchFamily="34" charset="0"/>
+                <a:cs typeface="Arial" panose="020B0604020202020204" pitchFamily="34" charset="0"/>
+              </a:rPr>
+              <a:t>Multi-factor From T3</a:t>
+            </a:r>
+            <a:endParaRPr lang="en-US" altLang="zh-CN" sz="1200" b="1" dirty="0">
+              <a:solidFill>
+                <a:schemeClr val="tx1"/>
+              </a:solidFill>
+              <a:latin typeface="Arial" panose="020B0604020202020204" pitchFamily="34" charset="0"/>
+              <a:cs typeface="Arial" panose="020B0604020202020204" pitchFamily="34" charset="0"/>
+            </a:endParaRPr>
+          </a:p>
+        </p:txBody>
+      </p:sp>
     </p:spTree>
-    <p:extLst>
-      <p:ext uri="{BB962C8B-B14F-4D97-AF65-F5344CB8AC3E}">
-        <p14:creationId xmlns:p14="http://schemas.microsoft.com/office/powerpoint/2010/main" val="734129566"/>
-      </p:ext>
-    </p:extLst>
   </p:cSld>
   <p:clrMapOvr>
     <a:masterClrMapping/>
@@ -14642,11 +13077,6 @@
         </a:xfrm>
       </p:grpSpPr>
     </p:spTree>
-    <p:extLst>
-      <p:ext uri="{BB962C8B-B14F-4D97-AF65-F5344CB8AC3E}">
-        <p14:creationId xmlns:p14="http://schemas.microsoft.com/office/powerpoint/2010/main" val="3269487629"/>
-      </p:ext>
-    </p:extLst>
   </p:cSld>
   <p:clrMapOvr>
     <a:masterClrMapping/>
@@ -14905,8 +13335,6 @@
       </a:bgFillStyleLst>
     </a:fmtScheme>
   </a:themeElements>
-  <a:objectDefaults/>
-  <a:extraClrSchemeLst/>
   <a:extLst>
     <a:ext uri="{05A4C25C-085E-4340-85A3-A5531E510DB2}">
       <thm15:themeFamily xmlns:thm15="http://schemas.microsoft.com/office/thememl/2012/main" name="Office Theme" id="{62F939B6-93AF-4DB8-9C6B-D6C7DFDC589F}" vid="{4A3C46E8-61CC-4603-A589-7422A47A8E4A}"/>
